--- a/downloads/presentations/modules/lesson-07-advanced-model-validation-and-evaluation-for-public-health-ai.pptx
+++ b/downloads/presentations/modules/lesson-07-advanced-model-validation-and-evaluation-for-public-health-ai.pptx
@@ -25,9 +25,11 @@
     <p:sldId id="273" r:id="rId19"/>
     <p:sldId id="274" r:id="rId20"/>
     <p:sldId id="275" r:id="rId21"/>
+    <p:sldId id="276" r:id="rId22"/>
+    <p:sldId id="277" r:id="rId23"/>
   </p:sldIdLst>
   <p:notesMasterIdLst>
-    <p:notesMasterId r:id="rId22"/>
+    <p:notesMasterId r:id="rId24"/>
   </p:notesMasterIdLst>
   <p:sldSz cx="12192000" cy="6858000"/>
   <p:notesSz cx="6858000" cy="12192000"/>
@@ -610,10 +612,10 @@
           <a:p>
             <a:r>
               <a:rPr lang="en-US" dirty="0"/>
-              <a:t>Risks, Failure Modes, and Guardrails
-Misleading aggregate performance. Overall metrics may hide poor subgroup performance. Guardrails include subgroup testing and equity review.
-Metric mismatch. The selected metric may not match the public health consequence. Guardrails include metric selection tied to intended use and error consequences.
-Lack of external validation. Models may fail in new settings. Guardrails include local testing, limited pilots, and monitoring.</a:t>
+              <a:t>Technical Deep Dive
+Metric selection should start with the public health consequence. Sensitivity may be prioritized when missing a true event is dangerous. Specificity may be prioritized when false positives create substantial burden or unnecessary intervention. Precision and positive predictive value matter when staff act on positive flags. Calibration matters when scores are interpreted as probabilities.
+Confusion matrices are useful because they show true positives, false positives, true negatives, and false negatives. Public health teams should translate each cell into operational meaning. A false negative may mean a delayed investigation. A false positive may mean staff time diverted from other work. A true positive may mean earlier action. A true negative may mean confidence to continue routine processing.
+External validation is essential when a model will be used outside its development context. Testing on a new jurisdiction, time period, data source, or population can reveal performance problems that internal validation missed. When external validation is not possible before pilot testing, agencies should begin with limited deployment, close monitoring, and conservative use.</a:t>
             </a:r>
             <a:endParaRPr lang="en-US" dirty="0"/>
           </a:p>
@@ -701,8 +703,9 @@
           <a:p>
             <a:r>
               <a:rPr lang="en-US" dirty="0"/>
-              <a:t>Risks, Failure Modes, and Guardrails
-Workflow failure. A technically accurate model may be unusable or misused. Guardrails include usability testing, training, source visibility, and override documentation.</a:t>
+              <a:t>Technical Deep Dive
+Workflow validation examines whether the AI output is understandable, accessible, timely, actionable, and used as intended. A model can be statistically strong but operationally weak if staff do not trust it, cannot see supporting data, cannot override it, or receive alerts too late. Workflow validation should include usability testing, training, documentation, and feedback loops.
+Post-deployment validation should be planned before launch. Agencies should define monitoring indicators, review frequency, escalation triggers, and authority to pause use. Monitoring should include performance drift, subgroup changes, user override rates, incident reports, data feed changes, and public health outcomes where appropriate.</a:t>
             </a:r>
             <a:endParaRPr lang="en-US" dirty="0"/>
           </a:p>
@@ -790,9 +793,10 @@
           <a:p>
             <a:r>
               <a:rPr lang="en-US" dirty="0"/>
-              <a:t>Application to AI-Supported Workflows
-Advanced validation applies to predictive models, NLP tools, generative summaries, RAG outputs, and agentic workflows. For generative AI, validation may include factuality, completeness, source grounding, omissions, and harmful output review. For RAG, validation should test retrieval quality and citation accuracy. For agentic workflows, validation should include action safety, permission boundaries, and rollback procedures.
-The evaluation unit should be the AI-supported workflow, not the model alone. Public health agencies should ask whether the full process improves timeliness, quality, equity, safety, and staff experience without creating unacceptable risk.</a:t>
+              <a:t>Risks, Failure Modes, and Guardrails
+Misleading aggregate performance. Overall metrics may hide poor subgroup performance. Guardrails include subgroup testing and equity review.
+Metric mismatch. The selected metric may not match the public health consequence. Guardrails include metric selection tied to intended use and error consequences.
+Lack of external validation. Models may fail in new settings. Guardrails include local testing, limited pilots, and monitoring.</a:t>
             </a:r>
             <a:endParaRPr lang="en-US" dirty="0"/>
           </a:p>
@@ -880,10 +884,8 @@
           <a:p>
             <a:r>
               <a:rPr lang="en-US" dirty="0"/>
-              <a:t>Reflection Questions
-What decision or action will the AI output support?
-Which performance metrics match the consequences of error?
-Which subgroups, data sources, or settings require separate review?</a:t>
+              <a:t>Risks, Failure Modes, and Guardrails
+Workflow failure. A technically accurate model may be unusable or misused. Guardrails include usability testing, training, source visibility, and override documentation.</a:t>
             </a:r>
             <a:endParaRPr lang="en-US" dirty="0"/>
           </a:p>
@@ -971,9 +973,9 @@
           <a:p>
             <a:r>
               <a:rPr lang="en-US" dirty="0"/>
-              <a:t>Reflection Questions
-What would make performance unacceptable for this use case?
-How will the agency monitor performance after deployment?</a:t>
+              <a:t>Application to AI-Supported Workflows
+Advanced validation applies to predictive models, NLP tools, generative summaries, RAG outputs, and agentic workflows. For generative AI, validation may include factuality, completeness, source grounding, omissions, and harmful output review. For RAG, validation should test retrieval quality and citation accuracy. For agentic workflows, validation should include action safety, permission boundaries, and rollback procedures.
+The evaluation unit should be the AI-supported workflow, not the model alone. Public health agencies should ask whether the full process improves timeliness, quality, equity, safety, and staff experience without creating unacceptable risk.</a:t>
             </a:r>
             <a:endParaRPr lang="en-US" dirty="0"/>
           </a:p>
@@ -1061,9 +1063,10 @@
           <a:p>
             <a:r>
               <a:rPr lang="en-US" dirty="0"/>
-              <a:t>Practical Exercise
-Create an advanced validation plan for one AI-supported workflow. Include intended use, validation dataset, comparison standard, performance metrics, subgroup analysis, error review, workflow testing, user feedback, monitoring indicators, escalation triggers, and documentation requirements.
-The plan should clearly explain how validation results will be interpreted and who has authority to approve, limit, pause, or reject the AI use.</a:t>
+              <a:t>Reflection Questions
+What decision or action will the AI output support?
+Which performance metrics match the consequences of error?
+Which subgroups, data sources, or settings require separate review?</a:t>
             </a:r>
             <a:endParaRPr lang="en-US" dirty="0"/>
           </a:p>
@@ -1151,10 +1154,9 @@
           <a:p>
             <a:r>
               <a:rPr lang="en-US" dirty="0"/>
-              <a:t>Expected Artifact or Evidence
-Advanced validation plan
-Metric and error-consequence table
-Subgroup performance review plan</a:t>
+              <a:t>Reflection Questions
+What would make performance unacceptable for this use case?
+How will the agency monitor performance after deployment?</a:t>
             </a:r>
             <a:endParaRPr lang="en-US" dirty="0"/>
           </a:p>
@@ -1242,8 +1244,9 @@
           <a:p>
             <a:r>
               <a:rPr lang="en-US" dirty="0"/>
-              <a:t>Expected Artifact or Evidence
-Post-deployment monitoring schedule</a:t>
+              <a:t>Practical Exercise
+Create an advanced validation plan for one AI-supported workflow. Include intended use, validation dataset, comparison standard, performance metrics, subgroup analysis, error review, workflow testing, user feedback, monitoring indicators, escalation triggers, and documentation requirements.
+The plan should clearly explain how validation results will be interpreted and who has authority to approve, limit, pause, or reject the AI use.</a:t>
             </a:r>
             <a:endParaRPr lang="en-US" dirty="0"/>
           </a:p>
@@ -1331,11 +1334,10 @@
           <a:p>
             <a:r>
               <a:rPr lang="en-US" dirty="0"/>
-              <a:t>Expected Assignment
+              <a:t>Expected Artifact or Evidence
 Advanced validation plan
 Metric and error-consequence table
-Subgroup performance review plan
-Post-deployment monitoring schedule</a:t>
+Subgroup performance review plan</a:t>
             </a:r>
             <a:endParaRPr lang="en-US" dirty="0"/>
           </a:p>
@@ -1423,12 +1425,8 @@
           <a:p>
             <a:r>
               <a:rPr lang="en-US" dirty="0"/>
-              <a:t>Knowledge Check
-1. Why can overall accuracy be misleading?
-2. What is workflow validation?
-3. Which metric is especially important when missed true events could cause harm?
-4. What does external validation test?
-5. What should an advanced validation plan include?</a:t>
+              <a:t>Expected Artifact or Evidence
+Post-deployment monitoring schedule</a:t>
             </a:r>
             <a:endParaRPr lang="en-US" dirty="0"/>
           </a:p>
@@ -1608,11 +1606,11 @@
           <a:p>
             <a:r>
               <a:rPr lang="en-US" dirty="0"/>
-              <a:t>References and Resources
-NIST Artificial Intelligence Risk Management Framework: https://www.nist.gov/itl/ai-risk-management-framework
-NIST AI RMF Generative AI Profile: https://www.nist.gov/publications/artificial-intelligence-risk-management-framework-generative-artificial-intelligence
-CDC Evaluation Framework: https://www.cdc.gov/evaluation/
-WHO Guidance on Large Multi-Modal Models: https://www.who.int/publications/i/item/9789240084759</a:t>
+              <a:t>Expected Assignment
+Advanced validation plan
+Metric and error-consequence table
+Subgroup performance review plan
+Post-deployment monitoring schedule</a:t>
             </a:r>
             <a:endParaRPr lang="en-US" dirty="0"/>
           </a:p>
@@ -1636,6 +1634,191 @@
             <a:fld id="{F7021451-1387-4CA6-816F-3879F97B5CBC}" type="slidenum">
               <a:rPr lang="en-US"/>
               <a:t>20</a:t>
+            </a:fld>
+            <a:endParaRPr lang="en-US"/>
+          </a:p>
+        </p:txBody>
+      </p:sp>
+    </p:spTree>
+    <p:extLst>
+      <p:ext uri="{BB962C8B-B14F-4D97-AF65-F5344CB8AC3E}">
+        <p14:creationId xmlns:p14="http://schemas.microsoft.com/office/powerpoint/2010/main" val="1024086991"/>
+      </p:ext>
+    </p:extLst>
+  </p:cSld>
+  <p:clrMapOvr>
+    <a:masterClrMapping/>
+  </p:clrMapOvr>
+</p:notes>
+</file>
+
+<file path=ppt/notesSlides/notesSlide21.xml><?xml version="1.0" encoding="utf-8"?>
+<p:notes xmlns:a="http://schemas.openxmlformats.org/drawingml/2006/main" xmlns:r="http://schemas.openxmlformats.org/officeDocument/2006/relationships" xmlns:p="http://schemas.openxmlformats.org/presentationml/2006/main">
+  <p:cSld>
+    <p:spTree>
+      <p:nvGrpSpPr>
+        <p:cNvPr id="1" name=""/>
+        <p:cNvGrpSpPr/>
+        <p:nvPr/>
+      </p:nvGrpSpPr>
+      <p:grpSpPr>
+        <a:xfrm>
+          <a:off x="0" y="0"/>
+          <a:ext cx="0" cy="0"/>
+          <a:chOff x="0" y="0"/>
+          <a:chExt cx="0" cy="0"/>
+        </a:xfrm>
+      </p:grpSpPr>
+      <p:sp>
+        <p:nvSpPr>
+          <p:cNvPr id="2" name="Slide Image Placeholder 1"/>
+          <p:cNvSpPr>
+            <a:spLocks noGrp="1" noRot="1" noChangeAspect="1"/>
+          </p:cNvSpPr>
+          <p:nvPr>
+            <p:ph type="sldImg"/>
+          </p:nvPr>
+        </p:nvSpPr>
+        <p:spPr/>
+      </p:sp>
+      <p:sp>
+        <p:nvSpPr>
+          <p:cNvPr id="3" name="Notes Placeholder 2"/>
+          <p:cNvSpPr>
+            <a:spLocks noGrp="1"/>
+          </p:cNvSpPr>
+          <p:nvPr>
+            <p:ph type="body" idx="1"/>
+          </p:nvPr>
+        </p:nvSpPr>
+        <p:spPr/>
+        <p:txBody>
+          <a:bodyPr/>
+          <a:lstStyle/>
+          <a:p>
+            <a:r>
+              <a:rPr lang="en-US" dirty="0"/>
+              <a:t>Knowledge Check
+1. Why can overall accuracy be misleading?
+2. What is workflow validation?
+3. Which metric is especially important when missed true events could cause harm?
+4. What does external validation test?
+5. What should an advanced validation plan include?</a:t>
+            </a:r>
+            <a:endParaRPr lang="en-US" dirty="0"/>
+          </a:p>
+        </p:txBody>
+      </p:sp>
+      <p:sp>
+        <p:nvSpPr>
+          <p:cNvPr id="4" name="Slide Number Placeholder 3"/>
+          <p:cNvSpPr>
+            <a:spLocks noGrp="1"/>
+          </p:cNvSpPr>
+          <p:nvPr>
+            <p:ph type="sldNum" sz="quarter" idx="10"/>
+          </p:nvPr>
+        </p:nvSpPr>
+        <p:spPr/>
+        <p:txBody>
+          <a:bodyPr/>
+          <a:lstStyle/>
+          <a:p>
+            <a:fld id="{F7021451-1387-4CA6-816F-3879F97B5CBC}" type="slidenum">
+              <a:rPr lang="en-US"/>
+              <a:t>21</a:t>
+            </a:fld>
+            <a:endParaRPr lang="en-US"/>
+          </a:p>
+        </p:txBody>
+      </p:sp>
+    </p:spTree>
+    <p:extLst>
+      <p:ext uri="{BB962C8B-B14F-4D97-AF65-F5344CB8AC3E}">
+        <p14:creationId xmlns:p14="http://schemas.microsoft.com/office/powerpoint/2010/main" val="1024086991"/>
+      </p:ext>
+    </p:extLst>
+  </p:cSld>
+  <p:clrMapOvr>
+    <a:masterClrMapping/>
+  </p:clrMapOvr>
+</p:notes>
+</file>
+
+<file path=ppt/notesSlides/notesSlide22.xml><?xml version="1.0" encoding="utf-8"?>
+<p:notes xmlns:a="http://schemas.openxmlformats.org/drawingml/2006/main" xmlns:r="http://schemas.openxmlformats.org/officeDocument/2006/relationships" xmlns:p="http://schemas.openxmlformats.org/presentationml/2006/main">
+  <p:cSld>
+    <p:spTree>
+      <p:nvGrpSpPr>
+        <p:cNvPr id="1" name=""/>
+        <p:cNvGrpSpPr/>
+        <p:nvPr/>
+      </p:nvGrpSpPr>
+      <p:grpSpPr>
+        <a:xfrm>
+          <a:off x="0" y="0"/>
+          <a:ext cx="0" cy="0"/>
+          <a:chOff x="0" y="0"/>
+          <a:chExt cx="0" cy="0"/>
+        </a:xfrm>
+      </p:grpSpPr>
+      <p:sp>
+        <p:nvSpPr>
+          <p:cNvPr id="2" name="Slide Image Placeholder 1"/>
+          <p:cNvSpPr>
+            <a:spLocks noGrp="1" noRot="1" noChangeAspect="1"/>
+          </p:cNvSpPr>
+          <p:nvPr>
+            <p:ph type="sldImg"/>
+          </p:nvPr>
+        </p:nvSpPr>
+        <p:spPr/>
+      </p:sp>
+      <p:sp>
+        <p:nvSpPr>
+          <p:cNvPr id="3" name="Notes Placeholder 2"/>
+          <p:cNvSpPr>
+            <a:spLocks noGrp="1"/>
+          </p:cNvSpPr>
+          <p:nvPr>
+            <p:ph type="body" idx="1"/>
+          </p:nvPr>
+        </p:nvSpPr>
+        <p:spPr/>
+        <p:txBody>
+          <a:bodyPr/>
+          <a:lstStyle/>
+          <a:p>
+            <a:r>
+              <a:rPr lang="en-US" dirty="0"/>
+              <a:t>References and Resources
+NIST Artificial Intelligence Risk Management Framework: https://www.nist.gov/itl/ai-risk-management-framework
+NIST AI RMF Generative AI Profile: https://www.nist.gov/publications/artificial-intelligence-risk-management-framework-generative-artificial-intelligence
+CDC Evaluation Framework: https://www.cdc.gov/evaluation/
+WHO Guidance on Large Multi-Modal Models: https://www.who.int/publications/i/item/9789240084759</a:t>
+            </a:r>
+            <a:endParaRPr lang="en-US" dirty="0"/>
+          </a:p>
+        </p:txBody>
+      </p:sp>
+      <p:sp>
+        <p:nvSpPr>
+          <p:cNvPr id="4" name="Slide Number Placeholder 3"/>
+          <p:cNvSpPr>
+            <a:spLocks noGrp="1"/>
+          </p:cNvSpPr>
+          <p:nvPr>
+            <p:ph type="sldNum" sz="quarter" idx="10"/>
+          </p:nvPr>
+        </p:nvSpPr>
+        <p:spPr/>
+        <p:txBody>
+          <a:bodyPr/>
+          <a:lstStyle/>
+          <a:p>
+            <a:fld id="{F7021451-1387-4CA6-816F-3879F97B5CBC}" type="slidenum">
+              <a:rPr lang="en-US"/>
+              <a:t>22</a:t>
             </a:fld>
             <a:endParaRPr lang="en-US"/>
           </a:p>
@@ -1700,12 +1883,11 @@
           <a:p>
             <a:r>
               <a:rPr lang="en-US" dirty="0"/>
-              <a:t>Learning Objectives
-Describe the purpose of advanced model validation in public health AI.
-Interpret sensitivity, specificity, positive predictive value, negative predictive value, precision, recall, F1 score, calibration, and subgroup performance.
-Distinguish internal validation, external validation, and workflow validation.
-Identify when model performance is insufficient for the intended use.
-Design monitoring for drift, degradation, error patterns, and unintended consequences.</a:t>
+              <a:t>Related Playbook Plays
+Play 13: Monitor and Evaluate AI Systems - This lesson informs Play 13 by helping learners connect the lesson topic to monitor and evaluate ai systems work in the AI Playbook.
+Play 12: Execute Governance and Oversight - This lesson informs Play 12 by helping learners connect the lesson topic to execute governance and oversight work in the AI Playbook.
+Play 11: Build and Deploy AI Solutions - This lesson informs Play 11 by helping learners connect the lesson topic to build and deploy ai solutions work in the AI Playbook.
+Play 3: Establish AI Governance - This lesson informs Play 3 by helping learners connect the lesson topic to establish ai governance work in the AI Playbook sequence.</a:t>
             </a:r>
             <a:endParaRPr lang="en-US" dirty="0"/>
           </a:p>
@@ -1793,8 +1975,13 @@
           <a:p>
             <a:r>
               <a:rPr lang="en-US" dirty="0"/>
-              <a:t>Learning Objectives
-Produce an advanced validation plan for an AI-supported workflow.</a:t>
+              <a:t>Related Toolkit Resources
+Tool 44: Performance Monitoring Dashboard (Dashboard) - Use this tool to complete or strengthen the practical exercise for the module using fictional, de-identified, or generalized.
+Tool 45: Continuous Improvement Log (Log) - Use Continuous Improvement Log to translate this lesson into a documented public health AI planning, governance, implementation,.
+Tool 48: AI Evaluation &amp; Outcomes Reporting (Template) - Use this tool to complete or strengthen the practical exercise for the module using fictional, de-identified, or generalized.
+Tool 13: AI Use Case Intake, Risk Review, and System Inventory Template (Template) - Use AI Use Case Intake, Risk Review, and System Inventory Template to translate this lesson into a documented public health AI.
+Tool 16: Incident Response Checklist (Checklist) - Use Incident Response Checklist to translate this lesson into a documented public health AI planning, governance,.
+Tool 17: Compliance Audit Checklist (Checklist) - Use Compliance Audit Checklist to translate this lesson into a documented public health AI planning, governance, implementation,.</a:t>
             </a:r>
             <a:endParaRPr lang="en-US" dirty="0"/>
           </a:p>
@@ -1882,10 +2069,12 @@
           <a:p>
             <a:r>
               <a:rPr lang="en-US" dirty="0"/>
-              <a:t>Module Overview
-Model validation is the process of determining whether an AI tool performs adequately for its intended use, population, setting, data sources, and workflow. Basic validation asks whether the tool works at all. Advanced validation asks whether it works well enough, for whom, under what conditions, with what limitations, and with what monitoring requirements.
-This module extends foundational validation content by focusing on metrics, subgroup performance, calibration, external validation, workflow validation, error review, drift monitoring, and documentation. Public health agencies need this deeper level of validation when AI outputs may influence investigation, outreach, resource allocation, public communication, or operational prioritization.
-Learners will develop a validation plan that connects technical performance to public health consequences. The goal is to evaluate not only the model, but the full AI-supported workflow.</a:t>
+              <a:t>Learning Objectives
+Describe the purpose of advanced model validation in public health AI.
+Interpret sensitivity, specificity, positive predictive value, negative predictive value, precision, recall, F1 score, calibration, and subgroup performance.
+Distinguish internal validation, external validation, and workflow validation.
+Identify when model performance is insufficient for the intended use.
+Design monitoring for drift, degradation, error patterns, and unintended consequences.</a:t>
             </a:r>
             <a:endParaRPr lang="en-US" dirty="0"/>
           </a:p>
@@ -1973,10 +2162,8 @@
           <a:p>
             <a:r>
               <a:rPr lang="en-US" dirty="0"/>
-              <a:t>Why This Topic Matters for Public Health AI
-Validation matters because public health AI tools can appear credible even when they are not fit for operational use. A polished dashboard, confident generated text, or high overall accuracy score does not prove that the tool is safe, equitable, or useful. Public health staff need to evaluate performance in relation to the specific task and the consequences of error.
-Model performance is context-dependent. A tool that performs well in one health system or state may fail in another because of different data sources, coding practices, populations, workflows, or reporting laws. A tool that performs well during development may degrade when disease patterns change or new providers begin reporting. Validation must therefore include local or context-specific testing whenever possible.
-Advanced validation also requires attention to equity. Overall performance can hide poor performance for small populations, language groups, rural communities, people with unstable housing, or communities with limited healthcare access. Public health validation should examine subgroup performance and data representativeness before AI outputs influence priority setting or resource allocation.</a:t>
+              <a:t>Learning Objectives
+Produce an advanced validation plan for an AI-supported workflow.</a:t>
             </a:r>
             <a:endParaRPr lang="en-US" dirty="0"/>
           </a:p>
@@ -2064,9 +2251,10 @@
           <a:p>
             <a:r>
               <a:rPr lang="en-US" dirty="0"/>
-              <a:t>Public Health Example
-A public health agency may test a model that identifies incoming case reports likely to require expedited review. Overall accuracy may be high, but that number alone is not enough. Staff need to know whether the model misses rare but severe conditions, whether it performs differently across facilities, whether it over-flags reports from certain communities, and whether users understand how to act on the output.
-The agency should validate the model on recent local data, review errors with epidemiologists, test the workflow with actual users, and monitor override patterns after pilot deployment. If the model performs well technically but creates too many alerts for available staff, the workflow may still fail. Validation must include operational fit.</a:t>
+              <a:t>Module Overview
+Model validation is the process of determining whether an AI tool performs adequately for its intended use, population, setting, data sources, and workflow. Basic validation asks whether the tool works at all. Advanced validation asks whether it works well enough, for whom, under what conditions, with what limitations, and with what monitoring requirements.
+This module extends foundational validation content by focusing on metrics, subgroup performance, calibration, external validation, workflow validation, error review, drift monitoring, and documentation. Public health agencies need this deeper level of validation when AI outputs may influence investigation, outreach, resource allocation, public communication, or operational prioritization.
+Learners will develop a validation plan that connects technical performance to public health consequences. The goal is to evaluate not only the model, but the full AI-supported workflow.</a:t>
             </a:r>
             <a:endParaRPr lang="en-US" dirty="0"/>
           </a:p>
@@ -2154,10 +2342,10 @@
           <a:p>
             <a:r>
               <a:rPr lang="en-US" dirty="0"/>
-              <a:t>Technical Deep Dive
-Metric selection should start with the public health consequence. Sensitivity may be prioritized when missing a true event is dangerous. Specificity may be prioritized when false positives create substantial burden or unnecessary intervention. Precision and positive predictive value matter when staff act on positive flags. Calibration matters when scores are interpreted as probabilities.
-Confusion matrices are useful because they show true positives, false positives, true negatives, and false negatives. Public health teams should translate each cell into operational meaning. A false negative may mean a delayed investigation. A false positive may mean staff time diverted from other work. A true positive may mean earlier action. A true negative may mean confidence to continue routine processing.
-External validation is essential when a model will be used outside its development context. Testing on a new jurisdiction, time period, data source, or population can reveal performance problems that internal validation missed. When external validation is not possible before pilot testing, agencies should begin with limited deployment, close monitoring, and conservative use.</a:t>
+              <a:t>Why This Topic Matters for Public Health AI
+Validation matters because public health AI tools can appear credible even when they are not fit for operational use. A polished dashboard, confident generated text, or high overall accuracy score does not prove that the tool is safe, equitable, or useful. Public health staff need to evaluate performance in relation to the specific task and the consequences of error.
+Model performance is context-dependent. A tool that performs well in one health system or state may fail in another because of different data sources, coding practices, populations, workflows, or reporting laws. A tool that performs well during development may degrade when disease patterns change or new providers begin reporting. Validation must therefore include local or context-specific testing whenever possible.
+Advanced validation also requires attention to equity. Overall performance can hide poor performance for small populations, language groups, rural communities, people with unstable housing, or communities with limited healthcare access. Public health validation should examine subgroup performance and data representativeness before AI outputs influence priority setting or resource allocation.</a:t>
             </a:r>
             <a:endParaRPr lang="en-US" dirty="0"/>
           </a:p>
@@ -2245,9 +2433,9 @@
           <a:p>
             <a:r>
               <a:rPr lang="en-US" dirty="0"/>
-              <a:t>Technical Deep Dive
-Workflow validation examines whether the AI output is understandable, accessible, timely, actionable, and used as intended. A model can be statistically strong but operationally weak if staff do not trust it, cannot see supporting data, cannot override it, or receive alerts too late. Workflow validation should include usability testing, training, documentation, and feedback loops.
-Post-deployment validation should be planned before launch. Agencies should define monitoring indicators, review frequency, escalation triggers, and authority to pause use. Monitoring should include performance drift, subgroup changes, user override rates, incident reports, data feed changes, and public health outcomes where appropriate.</a:t>
+              <a:t>Public Health Example
+A public health agency may test a model that identifies incoming case reports likely to require expedited review. Overall accuracy may be high, but that number alone is not enough. Staff need to know whether the model misses rare but severe conditions, whether it performs differently across facilities, whether it over-flags reports from certain communities, and whether users understand how to act on the output.
+The agency should validate the model on recent local data, review errors with epidemiologists, test the workflow with actual users, and monitor override patterns after pilot deployment. If the model performs well technically but creates too many alerts for available staff, the workflow may still fail. Validation must include operational fit.</a:t>
             </a:r>
             <a:endParaRPr lang="en-US" dirty="0"/>
           </a:p>
@@ -2870,7 +3058,32 @@
       </p:sp>
       <p:sp>
         <p:nvSpPr>
-          <p:cNvPr id="3" name="Text 1"/>
+          <p:cNvPr id="3" name="Shape 1"/>
+          <p:cNvSpPr/>
+          <p:nvPr/>
+        </p:nvSpPr>
+        <p:spPr>
+          <a:xfrm>
+            <a:off x="0" y="164592"/>
+            <a:ext cx="146304" cy="6693408"/>
+          </a:xfrm>
+          <a:prstGeom prst="rect">
+            <a:avLst/>
+          </a:prstGeom>
+          <a:solidFill>
+            <a:srgbClr val="2F8A28"/>
+          </a:solidFill>
+          <a:ln w="12700">
+            <a:solidFill>
+              <a:srgbClr val="2F8A28"/>
+            </a:solidFill>
+            <a:prstDash val="solid"/>
+          </a:ln>
+        </p:spPr>
+      </p:sp>
+      <p:sp>
+        <p:nvSpPr>
+          <p:cNvPr id="4" name="Text 2"/>
           <p:cNvSpPr/>
           <p:nvPr/>
         </p:nvSpPr>
@@ -2909,7 +3122,7 @@
       </p:sp>
       <p:sp>
         <p:nvSpPr>
-          <p:cNvPr id="4" name="Text 2"/>
+          <p:cNvPr id="5" name="Text 3"/>
           <p:cNvSpPr/>
           <p:nvPr/>
         </p:nvSpPr>
@@ -2948,7 +3161,7 @@
       </p:sp>
       <p:sp>
         <p:nvSpPr>
-          <p:cNvPr id="5" name="Text 3"/>
+          <p:cNvPr id="6" name="Text 4"/>
           <p:cNvSpPr/>
           <p:nvPr/>
         </p:nvSpPr>
@@ -2987,13 +3200,77 @@
       </p:sp>
       <p:sp>
         <p:nvSpPr>
-          <p:cNvPr id="6" name="Text 4"/>
+          <p:cNvPr id="7" name="Shape 5"/>
           <p:cNvSpPr/>
           <p:nvPr/>
         </p:nvSpPr>
         <p:spPr>
           <a:xfrm>
             <a:off x="640080" y="658368"/>
+            <a:ext cx="420624" cy="420624"/>
+          </a:xfrm>
+          <a:prstGeom prst="ellipse">
+            <a:avLst/>
+          </a:prstGeom>
+          <a:solidFill>
+            <a:srgbClr val="0068B7"/>
+          </a:solidFill>
+          <a:ln w="12700">
+            <a:solidFill>
+              <a:srgbClr val="0068B7"/>
+            </a:solidFill>
+            <a:prstDash val="solid"/>
+          </a:ln>
+        </p:spPr>
+      </p:sp>
+      <p:sp>
+        <p:nvSpPr>
+          <p:cNvPr id="8" name="Text 6"/>
+          <p:cNvSpPr/>
+          <p:nvPr/>
+        </p:nvSpPr>
+        <p:spPr>
+          <a:xfrm>
+            <a:off x="640080" y="731520"/>
+            <a:ext cx="420624" cy="164592"/>
+          </a:xfrm>
+          <a:prstGeom prst="rect">
+            <a:avLst/>
+          </a:prstGeom>
+          <a:noFill/>
+          <a:ln/>
+        </p:spPr>
+        <p:txBody>
+          <a:bodyPr wrap="square" lIns="0" tIns="0" rIns="0" bIns="0" rtlCol="0" anchor="ctr"/>
+          <a:lstStyle/>
+          <a:p>
+            <a:pPr algn="ctr" indent="0" marL="0">
+              <a:buNone/>
+            </a:pPr>
+            <a:r>
+              <a:rPr lang="en-US" sz="1100" b="1" dirty="0">
+                <a:solidFill>
+                  <a:srgbClr val="FFFFFF"/>
+                </a:solidFill>
+                <a:latin typeface="Aptos" pitchFamily="34" charset="0"/>
+                <a:ea typeface="Aptos" pitchFamily="34" charset="-122"/>
+                <a:cs typeface="Aptos" pitchFamily="34" charset="-120"/>
+              </a:rPr>
+              <a:t>5</a:t>
+            </a:r>
+            <a:endParaRPr lang="en-US" sz="1100" dirty="0"/>
+          </a:p>
+        </p:txBody>
+      </p:sp>
+      <p:sp>
+        <p:nvSpPr>
+          <p:cNvPr id="9" name="Text 7"/>
+          <p:cNvSpPr/>
+          <p:nvPr/>
+        </p:nvSpPr>
+        <p:spPr>
+          <a:xfrm>
+            <a:off x="640080" y="621792"/>
             <a:ext cx="10881360" cy="566928"/>
           </a:xfrm>
           <a:prstGeom prst="rect">
@@ -3020,7 +3297,7 @@
                 <a:ea typeface="Aptos Display" pitchFamily="34" charset="-122"/>
                 <a:cs typeface="Aptos Display" pitchFamily="34" charset="-120"/>
               </a:rPr>
-              <a:t>Risks, Failure Modes, and Guardrails</a:t>
+              <a:t>Technical Deep Dive</a:t>
             </a:r>
             <a:endParaRPr lang="en-US" sz="2700" dirty="0"/>
           </a:p>
@@ -3028,32 +3305,178 @@
       </p:sp>
       <p:sp>
         <p:nvSpPr>
-          <p:cNvPr id="7" name="Text 5"/>
-          <p:cNvSpPr/>
-          <p:nvPr/>
-        </p:nvSpPr>
-        <p:spPr>
-          <a:xfrm>
-            <a:off x="822960" y="1325880"/>
-            <a:ext cx="10378440" cy="4800600"/>
-          </a:xfrm>
-          <a:prstGeom prst="rect">
-            <a:avLst/>
-          </a:prstGeom>
-          <a:noFill/>
-          <a:ln/>
-        </p:spPr>
-        <p:txBody>
-          <a:bodyPr wrap="square" lIns="1016" tIns="1016" rIns="1016" bIns="1016" rtlCol="0" anchor="t">
+          <p:cNvPr id="10" name="Text 8"/>
+          <p:cNvSpPr/>
+          <p:nvPr/>
+        </p:nvSpPr>
+        <p:spPr>
+          <a:xfrm>
+            <a:off x="868680" y="1417320"/>
+            <a:ext cx="6675120" cy="4434840"/>
+          </a:xfrm>
+          <a:prstGeom prst="rect">
+            <a:avLst/>
+          </a:prstGeom>
+          <a:noFill/>
+          <a:ln/>
+        </p:spPr>
+        <p:txBody>
+          <a:bodyPr wrap="square" lIns="635" tIns="635" rIns="635" bIns="635" rtlCol="0" anchor="t">
             <a:normAutofit/>
           </a:bodyPr>
           <a:lstStyle/>
           <a:p>
+            <a:r>
+              <a:rPr lang="en-US" sz="1700" dirty="0">
+                <a:solidFill>
+                  <a:srgbClr val="17364A"/>
+                </a:solidFill>
+                <a:latin typeface="Aptos" pitchFamily="34" charset="0"/>
+                <a:ea typeface="Aptos" pitchFamily="34" charset="-122"/>
+                <a:cs typeface="Aptos" pitchFamily="34" charset="-120"/>
+              </a:rPr>
+              <a:t>Metric selection should start with the public health consequence.</a:t>
+            </a:r>
+            <a:endParaRPr lang="en-US" sz="1700" dirty="0"/>
+          </a:p>
+          <a:p>
+            <a:r>
+              <a:rPr lang="en-US" sz="1700" dirty="0">
+                <a:solidFill>
+                  <a:srgbClr val="17364A"/>
+                </a:solidFill>
+                <a:latin typeface="Aptos" pitchFamily="34" charset="0"/>
+                <a:ea typeface="Aptos" pitchFamily="34" charset="-122"/>
+                <a:cs typeface="Aptos" pitchFamily="34" charset="-120"/>
+              </a:rPr>
+              <a:t>Sensitivity may be prioritized when missing a true event is dangerous.</a:t>
+            </a:r>
+            <a:endParaRPr lang="en-US" sz="1700" dirty="0"/>
+          </a:p>
+          <a:p>
+            <a:r>
+              <a:rPr lang="en-US" sz="1700" dirty="0">
+                <a:solidFill>
+                  <a:srgbClr val="17364A"/>
+                </a:solidFill>
+                <a:latin typeface="Aptos" pitchFamily="34" charset="0"/>
+                <a:ea typeface="Aptos" pitchFamily="34" charset="-122"/>
+                <a:cs typeface="Aptos" pitchFamily="34" charset="-120"/>
+              </a:rPr>
+              <a:t>Specificity may be prioritized when false positives create substantial burden or unnecessary intervention.</a:t>
+            </a:r>
+            <a:endParaRPr lang="en-US" sz="1700" dirty="0"/>
+          </a:p>
+          <a:p>
+            <a:r>
+              <a:rPr lang="en-US" sz="1700" dirty="0">
+                <a:solidFill>
+                  <a:srgbClr val="17364A"/>
+                </a:solidFill>
+                <a:latin typeface="Aptos" pitchFamily="34" charset="0"/>
+                <a:ea typeface="Aptos" pitchFamily="34" charset="-122"/>
+                <a:cs typeface="Aptos" pitchFamily="34" charset="-120"/>
+              </a:rPr>
+              <a:t>Precision and positive predictive value matter when staff act on positive flags.</a:t>
+            </a:r>
+            <a:endParaRPr lang="en-US" sz="1700" dirty="0"/>
+          </a:p>
+        </p:txBody>
+      </p:sp>
+      <p:sp>
+        <p:nvSpPr>
+          <p:cNvPr id="11" name="Shape 9"/>
+          <p:cNvSpPr/>
+          <p:nvPr/>
+        </p:nvSpPr>
+        <p:spPr>
+          <a:xfrm>
+            <a:off x="7909560" y="1417320"/>
+            <a:ext cx="3154680" cy="1828800"/>
+          </a:xfrm>
+          <a:prstGeom prst="roundRect">
+            <a:avLst>
+              <a:gd name="adj" fmla="val 6000"/>
+            </a:avLst>
+          </a:prstGeom>
+          <a:solidFill>
+            <a:srgbClr val="EEF8ED"/>
+          </a:solidFill>
+          <a:ln w="12700">
+            <a:solidFill>
+              <a:srgbClr val="B9D7E6"/>
+            </a:solidFill>
+            <a:prstDash val="solid"/>
+          </a:ln>
+        </p:spPr>
+      </p:sp>
+      <p:sp>
+        <p:nvSpPr>
+          <p:cNvPr id="12" name="Text 10"/>
+          <p:cNvSpPr/>
+          <p:nvPr/>
+        </p:nvSpPr>
+        <p:spPr>
+          <a:xfrm>
+            <a:off x="8074152" y="1563624"/>
+            <a:ext cx="2825496" cy="201168"/>
+          </a:xfrm>
+          <a:prstGeom prst="rect">
+            <a:avLst/>
+          </a:prstGeom>
+          <a:noFill/>
+          <a:ln/>
+        </p:spPr>
+        <p:txBody>
+          <a:bodyPr wrap="square" lIns="0" tIns="0" rIns="0" bIns="0" rtlCol="0" anchor="ctr"/>
+          <a:lstStyle/>
+          <a:p>
             <a:pPr indent="0" marL="0">
               <a:buNone/>
             </a:pPr>
             <a:r>
-              <a:rPr lang="en-US" sz="1420" dirty="0">
+              <a:rPr lang="en-US" sz="950" b="1" dirty="0">
+                <a:solidFill>
+                  <a:srgbClr val="0068B7"/>
+                </a:solidFill>
+                <a:latin typeface="Aptos" pitchFamily="34" charset="0"/>
+                <a:ea typeface="Aptos" pitchFamily="34" charset="-122"/>
+                <a:cs typeface="Aptos" pitchFamily="34" charset="-120"/>
+              </a:rPr>
+              <a:t>Key idea</a:t>
+            </a:r>
+            <a:endParaRPr lang="en-US" sz="950" dirty="0"/>
+          </a:p>
+        </p:txBody>
+      </p:sp>
+      <p:sp>
+        <p:nvSpPr>
+          <p:cNvPr id="13" name="Text 11"/>
+          <p:cNvSpPr/>
+          <p:nvPr/>
+        </p:nvSpPr>
+        <p:spPr>
+          <a:xfrm>
+            <a:off x="8074152" y="1856232"/>
+            <a:ext cx="2825496" cy="1261872"/>
+          </a:xfrm>
+          <a:prstGeom prst="rect">
+            <a:avLst/>
+          </a:prstGeom>
+          <a:noFill/>
+          <a:ln/>
+        </p:spPr>
+        <p:txBody>
+          <a:bodyPr wrap="square" lIns="0" tIns="0" rIns="0" bIns="0" rtlCol="0" anchor="t">
+            <a:normAutofit/>
+          </a:bodyPr>
+          <a:lstStyle/>
+          <a:p>
+            <a:pPr indent="0" marL="0">
+              <a:buNone/>
+            </a:pPr>
+            <a:r>
+              <a:rPr lang="en-US" sz="1250" dirty="0">
                 <a:solidFill>
                   <a:srgbClr val="17364A"/>
                 </a:solidFill>
@@ -3061,9 +3484,116 @@
                 <a:ea typeface="Aptos" pitchFamily="34" charset="-122"/>
                 <a:cs typeface="Aptos" pitchFamily="34" charset="-120"/>
               </a:rPr>
-              <a:t>Misleading aggregate performance. Overall metrics may hide poor subgroup performance. Guardrails include subgroup testing and equity review. Metric mismatch. The selected metric may not match the public health consequence. Guardrails include metric selection tied to intended use and error consequences. Lack of external validation. Models may fail in new settings. Guardrails include local testing, limited pilots, and monitoring.</a:t>
-            </a:r>
-            <a:endParaRPr lang="en-US" sz="1420" dirty="0"/>
+              <a:t>Metric selection should start with the public health consequence.</a:t>
+            </a:r>
+            <a:endParaRPr lang="en-US" sz="1250" dirty="0"/>
+          </a:p>
+        </p:txBody>
+      </p:sp>
+      <p:sp>
+        <p:nvSpPr>
+          <p:cNvPr id="14" name="Shape 12"/>
+          <p:cNvSpPr/>
+          <p:nvPr/>
+        </p:nvSpPr>
+        <p:spPr>
+          <a:xfrm>
+            <a:off x="7909560" y="3520440"/>
+            <a:ext cx="3154680" cy="1737360"/>
+          </a:xfrm>
+          <a:prstGeom prst="roundRect">
+            <a:avLst>
+              <a:gd name="adj" fmla="val 6316"/>
+            </a:avLst>
+          </a:prstGeom>
+          <a:solidFill>
+            <a:srgbClr val="EAF6F8"/>
+          </a:solidFill>
+          <a:ln w="12700">
+            <a:solidFill>
+              <a:srgbClr val="B9D7E6"/>
+            </a:solidFill>
+            <a:prstDash val="solid"/>
+          </a:ln>
+        </p:spPr>
+      </p:sp>
+      <p:sp>
+        <p:nvSpPr>
+          <p:cNvPr id="15" name="Text 13"/>
+          <p:cNvSpPr/>
+          <p:nvPr/>
+        </p:nvSpPr>
+        <p:spPr>
+          <a:xfrm>
+            <a:off x="8074152" y="3666744"/>
+            <a:ext cx="2825496" cy="201168"/>
+          </a:xfrm>
+          <a:prstGeom prst="rect">
+            <a:avLst/>
+          </a:prstGeom>
+          <a:noFill/>
+          <a:ln/>
+        </p:spPr>
+        <p:txBody>
+          <a:bodyPr wrap="square" lIns="0" tIns="0" rIns="0" bIns="0" rtlCol="0" anchor="ctr"/>
+          <a:lstStyle/>
+          <a:p>
+            <a:pPr indent="0" marL="0">
+              <a:buNone/>
+            </a:pPr>
+            <a:r>
+              <a:rPr lang="en-US" sz="950" b="1" dirty="0">
+                <a:solidFill>
+                  <a:srgbClr val="0068B7"/>
+                </a:solidFill>
+                <a:latin typeface="Aptos" pitchFamily="34" charset="0"/>
+                <a:ea typeface="Aptos" pitchFamily="34" charset="-122"/>
+                <a:cs typeface="Aptos" pitchFamily="34" charset="-120"/>
+              </a:rPr>
+              <a:t>Use this for</a:t>
+            </a:r>
+            <a:endParaRPr lang="en-US" sz="950" dirty="0"/>
+          </a:p>
+        </p:txBody>
+      </p:sp>
+      <p:sp>
+        <p:nvSpPr>
+          <p:cNvPr id="16" name="Text 14"/>
+          <p:cNvSpPr/>
+          <p:nvPr/>
+        </p:nvSpPr>
+        <p:spPr>
+          <a:xfrm>
+            <a:off x="8074152" y="3959352"/>
+            <a:ext cx="2825496" cy="1170432"/>
+          </a:xfrm>
+          <a:prstGeom prst="rect">
+            <a:avLst/>
+          </a:prstGeom>
+          <a:noFill/>
+          <a:ln/>
+        </p:spPr>
+        <p:txBody>
+          <a:bodyPr wrap="square" lIns="0" tIns="0" rIns="0" bIns="0" rtlCol="0" anchor="t">
+            <a:normAutofit/>
+          </a:bodyPr>
+          <a:lstStyle/>
+          <a:p>
+            <a:pPr indent="0" marL="0">
+              <a:buNone/>
+            </a:pPr>
+            <a:r>
+              <a:rPr lang="en-US" sz="1250" dirty="0">
+                <a:solidFill>
+                  <a:srgbClr val="17364A"/>
+                </a:solidFill>
+                <a:latin typeface="Aptos" pitchFamily="34" charset="0"/>
+                <a:ea typeface="Aptos" pitchFamily="34" charset="-122"/>
+                <a:cs typeface="Aptos" pitchFamily="34" charset="-120"/>
+              </a:rPr>
+              <a:t>Connect the concept to public health decisions, safeguards, documentation, or implementation work.</a:t>
+            </a:r>
+            <a:endParaRPr lang="en-US" sz="1250" dirty="0"/>
           </a:p>
         </p:txBody>
       </p:sp>
@@ -3126,7 +3656,32 @@
       </p:sp>
       <p:sp>
         <p:nvSpPr>
-          <p:cNvPr id="3" name="Text 1"/>
+          <p:cNvPr id="3" name="Shape 1"/>
+          <p:cNvSpPr/>
+          <p:nvPr/>
+        </p:nvSpPr>
+        <p:spPr>
+          <a:xfrm>
+            <a:off x="0" y="164592"/>
+            <a:ext cx="146304" cy="6693408"/>
+          </a:xfrm>
+          <a:prstGeom prst="rect">
+            <a:avLst/>
+          </a:prstGeom>
+          <a:solidFill>
+            <a:srgbClr val="2F8A28"/>
+          </a:solidFill>
+          <a:ln w="12700">
+            <a:solidFill>
+              <a:srgbClr val="2F8A28"/>
+            </a:solidFill>
+            <a:prstDash val="solid"/>
+          </a:ln>
+        </p:spPr>
+      </p:sp>
+      <p:sp>
+        <p:nvSpPr>
+          <p:cNvPr id="4" name="Text 2"/>
           <p:cNvSpPr/>
           <p:nvPr/>
         </p:nvSpPr>
@@ -3165,7 +3720,7 @@
       </p:sp>
       <p:sp>
         <p:nvSpPr>
-          <p:cNvPr id="4" name="Text 2"/>
+          <p:cNvPr id="5" name="Text 3"/>
           <p:cNvSpPr/>
           <p:nvPr/>
         </p:nvSpPr>
@@ -3204,7 +3759,7 @@
       </p:sp>
       <p:sp>
         <p:nvSpPr>
-          <p:cNvPr id="5" name="Text 3"/>
+          <p:cNvPr id="6" name="Text 4"/>
           <p:cNvSpPr/>
           <p:nvPr/>
         </p:nvSpPr>
@@ -3243,7 +3798,7 @@
       </p:sp>
       <p:sp>
         <p:nvSpPr>
-          <p:cNvPr id="6" name="Text 4"/>
+          <p:cNvPr id="7" name="Text 5"/>
           <p:cNvSpPr/>
           <p:nvPr/>
         </p:nvSpPr>
@@ -3276,7 +3831,7 @@
                 <a:ea typeface="Aptos Display" pitchFamily="34" charset="-122"/>
                 <a:cs typeface="Aptos Display" pitchFamily="34" charset="-120"/>
               </a:rPr>
-              <a:t>Risks, Failure Modes, and Guardrails Continued</a:t>
+              <a:t>Technical Deep Dive Continued</a:t>
             </a:r>
             <a:endParaRPr lang="en-US" sz="2700" dirty="0"/>
           </a:p>
@@ -3284,32 +3839,178 @@
       </p:sp>
       <p:sp>
         <p:nvSpPr>
-          <p:cNvPr id="7" name="Text 5"/>
-          <p:cNvSpPr/>
-          <p:nvPr/>
-        </p:nvSpPr>
-        <p:spPr>
-          <a:xfrm>
-            <a:off x="822960" y="1325880"/>
-            <a:ext cx="10378440" cy="4800600"/>
-          </a:xfrm>
-          <a:prstGeom prst="rect">
-            <a:avLst/>
-          </a:prstGeom>
-          <a:noFill/>
-          <a:ln/>
-        </p:spPr>
-        <p:txBody>
-          <a:bodyPr wrap="square" lIns="1016" tIns="1016" rIns="1016" bIns="1016" rtlCol="0" anchor="t">
+          <p:cNvPr id="8" name="Text 6"/>
+          <p:cNvSpPr/>
+          <p:nvPr/>
+        </p:nvSpPr>
+        <p:spPr>
+          <a:xfrm>
+            <a:off x="868680" y="1417320"/>
+            <a:ext cx="6675120" cy="4434840"/>
+          </a:xfrm>
+          <a:prstGeom prst="rect">
+            <a:avLst/>
+          </a:prstGeom>
+          <a:noFill/>
+          <a:ln/>
+        </p:spPr>
+        <p:txBody>
+          <a:bodyPr wrap="square" lIns="635" tIns="635" rIns="635" bIns="635" rtlCol="0" anchor="t">
             <a:normAutofit/>
           </a:bodyPr>
           <a:lstStyle/>
           <a:p>
+            <a:r>
+              <a:rPr lang="en-US" sz="1700" dirty="0">
+                <a:solidFill>
+                  <a:srgbClr val="17364A"/>
+                </a:solidFill>
+                <a:latin typeface="Aptos" pitchFamily="34" charset="0"/>
+                <a:ea typeface="Aptos" pitchFamily="34" charset="-122"/>
+                <a:cs typeface="Aptos" pitchFamily="34" charset="-120"/>
+              </a:rPr>
+              <a:t>Workflow validation examines whether the AI output is understandable, accessible, timely, actionable, and used as intended.</a:t>
+            </a:r>
+            <a:endParaRPr lang="en-US" sz="1700" dirty="0"/>
+          </a:p>
+          <a:p>
+            <a:r>
+              <a:rPr lang="en-US" sz="1700" dirty="0">
+                <a:solidFill>
+                  <a:srgbClr val="17364A"/>
+                </a:solidFill>
+                <a:latin typeface="Aptos" pitchFamily="34" charset="0"/>
+                <a:ea typeface="Aptos" pitchFamily="34" charset="-122"/>
+                <a:cs typeface="Aptos" pitchFamily="34" charset="-120"/>
+              </a:rPr>
+              <a:t>A model can be statistically strong but operationally weak if staff do not trust it, cannot see supporting data, cannot.</a:t>
+            </a:r>
+            <a:endParaRPr lang="en-US" sz="1700" dirty="0"/>
+          </a:p>
+          <a:p>
+            <a:r>
+              <a:rPr lang="en-US" sz="1700" dirty="0">
+                <a:solidFill>
+                  <a:srgbClr val="17364A"/>
+                </a:solidFill>
+                <a:latin typeface="Aptos" pitchFamily="34" charset="0"/>
+                <a:ea typeface="Aptos" pitchFamily="34" charset="-122"/>
+                <a:cs typeface="Aptos" pitchFamily="34" charset="-120"/>
+              </a:rPr>
+              <a:t>Workflow validation should include usability testing, training, documentation, and feedback loops.</a:t>
+            </a:r>
+            <a:endParaRPr lang="en-US" sz="1700" dirty="0"/>
+          </a:p>
+          <a:p>
+            <a:r>
+              <a:rPr lang="en-US" sz="1700" dirty="0">
+                <a:solidFill>
+                  <a:srgbClr val="17364A"/>
+                </a:solidFill>
+                <a:latin typeface="Aptos" pitchFamily="34" charset="0"/>
+                <a:ea typeface="Aptos" pitchFamily="34" charset="-122"/>
+                <a:cs typeface="Aptos" pitchFamily="34" charset="-120"/>
+              </a:rPr>
+              <a:t>Post-deployment validation should be planned before launch.</a:t>
+            </a:r>
+            <a:endParaRPr lang="en-US" sz="1700" dirty="0"/>
+          </a:p>
+        </p:txBody>
+      </p:sp>
+      <p:sp>
+        <p:nvSpPr>
+          <p:cNvPr id="9" name="Shape 7"/>
+          <p:cNvSpPr/>
+          <p:nvPr/>
+        </p:nvSpPr>
+        <p:spPr>
+          <a:xfrm>
+            <a:off x="7909560" y="1417320"/>
+            <a:ext cx="3154680" cy="1828800"/>
+          </a:xfrm>
+          <a:prstGeom prst="roundRect">
+            <a:avLst>
+              <a:gd name="adj" fmla="val 6000"/>
+            </a:avLst>
+          </a:prstGeom>
+          <a:solidFill>
+            <a:srgbClr val="EEF8ED"/>
+          </a:solidFill>
+          <a:ln w="12700">
+            <a:solidFill>
+              <a:srgbClr val="B9D7E6"/>
+            </a:solidFill>
+            <a:prstDash val="solid"/>
+          </a:ln>
+        </p:spPr>
+      </p:sp>
+      <p:sp>
+        <p:nvSpPr>
+          <p:cNvPr id="10" name="Text 8"/>
+          <p:cNvSpPr/>
+          <p:nvPr/>
+        </p:nvSpPr>
+        <p:spPr>
+          <a:xfrm>
+            <a:off x="8074152" y="1563624"/>
+            <a:ext cx="2825496" cy="201168"/>
+          </a:xfrm>
+          <a:prstGeom prst="rect">
+            <a:avLst/>
+          </a:prstGeom>
+          <a:noFill/>
+          <a:ln/>
+        </p:spPr>
+        <p:txBody>
+          <a:bodyPr wrap="square" lIns="0" tIns="0" rIns="0" bIns="0" rtlCol="0" anchor="ctr"/>
+          <a:lstStyle/>
+          <a:p>
             <a:pPr indent="0" marL="0">
               <a:buNone/>
             </a:pPr>
             <a:r>
-              <a:rPr lang="en-US" sz="1420" dirty="0">
+              <a:rPr lang="en-US" sz="950" b="1" dirty="0">
+                <a:solidFill>
+                  <a:srgbClr val="0068B7"/>
+                </a:solidFill>
+                <a:latin typeface="Aptos" pitchFamily="34" charset="0"/>
+                <a:ea typeface="Aptos" pitchFamily="34" charset="-122"/>
+                <a:cs typeface="Aptos" pitchFamily="34" charset="-120"/>
+              </a:rPr>
+              <a:t>Key idea</a:t>
+            </a:r>
+            <a:endParaRPr lang="en-US" sz="950" dirty="0"/>
+          </a:p>
+        </p:txBody>
+      </p:sp>
+      <p:sp>
+        <p:nvSpPr>
+          <p:cNvPr id="11" name="Text 9"/>
+          <p:cNvSpPr/>
+          <p:nvPr/>
+        </p:nvSpPr>
+        <p:spPr>
+          <a:xfrm>
+            <a:off x="8074152" y="1856232"/>
+            <a:ext cx="2825496" cy="1261872"/>
+          </a:xfrm>
+          <a:prstGeom prst="rect">
+            <a:avLst/>
+          </a:prstGeom>
+          <a:noFill/>
+          <a:ln/>
+        </p:spPr>
+        <p:txBody>
+          <a:bodyPr wrap="square" lIns="0" tIns="0" rIns="0" bIns="0" rtlCol="0" anchor="t">
+            <a:normAutofit/>
+          </a:bodyPr>
+          <a:lstStyle/>
+          <a:p>
+            <a:pPr indent="0" marL="0">
+              <a:buNone/>
+            </a:pPr>
+            <a:r>
+              <a:rPr lang="en-US" sz="1250" dirty="0">
                 <a:solidFill>
                   <a:srgbClr val="17364A"/>
                 </a:solidFill>
@@ -3317,9 +4018,116 @@
                 <a:ea typeface="Aptos" pitchFamily="34" charset="-122"/>
                 <a:cs typeface="Aptos" pitchFamily="34" charset="-120"/>
               </a:rPr>
-              <a:t>Workflow failure. A technically accurate model may be unusable or misused. Guardrails include usability testing, training, source visibility, and override documentation.</a:t>
-            </a:r>
-            <a:endParaRPr lang="en-US" sz="1420" dirty="0"/>
+              <a:t>Workflow validation examines whether the AI output is understandable, accessible, timely, actionable, and used as intended.</a:t>
+            </a:r>
+            <a:endParaRPr lang="en-US" sz="1250" dirty="0"/>
+          </a:p>
+        </p:txBody>
+      </p:sp>
+      <p:sp>
+        <p:nvSpPr>
+          <p:cNvPr id="12" name="Shape 10"/>
+          <p:cNvSpPr/>
+          <p:nvPr/>
+        </p:nvSpPr>
+        <p:spPr>
+          <a:xfrm>
+            <a:off x="7909560" y="3520440"/>
+            <a:ext cx="3154680" cy="1737360"/>
+          </a:xfrm>
+          <a:prstGeom prst="roundRect">
+            <a:avLst>
+              <a:gd name="adj" fmla="val 6316"/>
+            </a:avLst>
+          </a:prstGeom>
+          <a:solidFill>
+            <a:srgbClr val="EAF6F8"/>
+          </a:solidFill>
+          <a:ln w="12700">
+            <a:solidFill>
+              <a:srgbClr val="B9D7E6"/>
+            </a:solidFill>
+            <a:prstDash val="solid"/>
+          </a:ln>
+        </p:spPr>
+      </p:sp>
+      <p:sp>
+        <p:nvSpPr>
+          <p:cNvPr id="13" name="Text 11"/>
+          <p:cNvSpPr/>
+          <p:nvPr/>
+        </p:nvSpPr>
+        <p:spPr>
+          <a:xfrm>
+            <a:off x="8074152" y="3666744"/>
+            <a:ext cx="2825496" cy="201168"/>
+          </a:xfrm>
+          <a:prstGeom prst="rect">
+            <a:avLst/>
+          </a:prstGeom>
+          <a:noFill/>
+          <a:ln/>
+        </p:spPr>
+        <p:txBody>
+          <a:bodyPr wrap="square" lIns="0" tIns="0" rIns="0" bIns="0" rtlCol="0" anchor="ctr"/>
+          <a:lstStyle/>
+          <a:p>
+            <a:pPr indent="0" marL="0">
+              <a:buNone/>
+            </a:pPr>
+            <a:r>
+              <a:rPr lang="en-US" sz="950" b="1" dirty="0">
+                <a:solidFill>
+                  <a:srgbClr val="0068B7"/>
+                </a:solidFill>
+                <a:latin typeface="Aptos" pitchFamily="34" charset="0"/>
+                <a:ea typeface="Aptos" pitchFamily="34" charset="-122"/>
+                <a:cs typeface="Aptos" pitchFamily="34" charset="-120"/>
+              </a:rPr>
+              <a:t>Use this for</a:t>
+            </a:r>
+            <a:endParaRPr lang="en-US" sz="950" dirty="0"/>
+          </a:p>
+        </p:txBody>
+      </p:sp>
+      <p:sp>
+        <p:nvSpPr>
+          <p:cNvPr id="14" name="Text 12"/>
+          <p:cNvSpPr/>
+          <p:nvPr/>
+        </p:nvSpPr>
+        <p:spPr>
+          <a:xfrm>
+            <a:off x="8074152" y="3959352"/>
+            <a:ext cx="2825496" cy="1170432"/>
+          </a:xfrm>
+          <a:prstGeom prst="rect">
+            <a:avLst/>
+          </a:prstGeom>
+          <a:noFill/>
+          <a:ln/>
+        </p:spPr>
+        <p:txBody>
+          <a:bodyPr wrap="square" lIns="0" tIns="0" rIns="0" bIns="0" rtlCol="0" anchor="t">
+            <a:normAutofit/>
+          </a:bodyPr>
+          <a:lstStyle/>
+          <a:p>
+            <a:pPr indent="0" marL="0">
+              <a:buNone/>
+            </a:pPr>
+            <a:r>
+              <a:rPr lang="en-US" sz="1250" dirty="0">
+                <a:solidFill>
+                  <a:srgbClr val="17364A"/>
+                </a:solidFill>
+                <a:latin typeface="Aptos" pitchFamily="34" charset="0"/>
+                <a:ea typeface="Aptos" pitchFamily="34" charset="-122"/>
+                <a:cs typeface="Aptos" pitchFamily="34" charset="-120"/>
+              </a:rPr>
+              <a:t>Connect the concept to public health decisions, safeguards, documentation, or implementation work.</a:t>
+            </a:r>
+            <a:endParaRPr lang="en-US" sz="1250" dirty="0"/>
           </a:p>
         </p:txBody>
       </p:sp>
@@ -3382,7 +4190,32 @@
       </p:sp>
       <p:sp>
         <p:nvSpPr>
-          <p:cNvPr id="3" name="Text 1"/>
+          <p:cNvPr id="3" name="Shape 1"/>
+          <p:cNvSpPr/>
+          <p:nvPr/>
+        </p:nvSpPr>
+        <p:spPr>
+          <a:xfrm>
+            <a:off x="0" y="164592"/>
+            <a:ext cx="146304" cy="6693408"/>
+          </a:xfrm>
+          <a:prstGeom prst="rect">
+            <a:avLst/>
+          </a:prstGeom>
+          <a:solidFill>
+            <a:srgbClr val="2F8A28"/>
+          </a:solidFill>
+          <a:ln w="12700">
+            <a:solidFill>
+              <a:srgbClr val="2F8A28"/>
+            </a:solidFill>
+            <a:prstDash val="solid"/>
+          </a:ln>
+        </p:spPr>
+      </p:sp>
+      <p:sp>
+        <p:nvSpPr>
+          <p:cNvPr id="4" name="Text 2"/>
           <p:cNvSpPr/>
           <p:nvPr/>
         </p:nvSpPr>
@@ -3421,7 +4254,7 @@
       </p:sp>
       <p:sp>
         <p:nvSpPr>
-          <p:cNvPr id="4" name="Text 2"/>
+          <p:cNvPr id="5" name="Text 3"/>
           <p:cNvSpPr/>
           <p:nvPr/>
         </p:nvSpPr>
@@ -3460,7 +4293,7 @@
       </p:sp>
       <p:sp>
         <p:nvSpPr>
-          <p:cNvPr id="5" name="Text 3"/>
+          <p:cNvPr id="6" name="Text 4"/>
           <p:cNvSpPr/>
           <p:nvPr/>
         </p:nvSpPr>
@@ -3499,13 +4332,77 @@
       </p:sp>
       <p:sp>
         <p:nvSpPr>
-          <p:cNvPr id="6" name="Text 4"/>
+          <p:cNvPr id="7" name="Shape 5"/>
           <p:cNvSpPr/>
           <p:nvPr/>
         </p:nvSpPr>
         <p:spPr>
           <a:xfrm>
             <a:off x="640080" y="658368"/>
+            <a:ext cx="420624" cy="420624"/>
+          </a:xfrm>
+          <a:prstGeom prst="ellipse">
+            <a:avLst/>
+          </a:prstGeom>
+          <a:solidFill>
+            <a:srgbClr val="0068B7"/>
+          </a:solidFill>
+          <a:ln w="12700">
+            <a:solidFill>
+              <a:srgbClr val="0068B7"/>
+            </a:solidFill>
+            <a:prstDash val="solid"/>
+          </a:ln>
+        </p:spPr>
+      </p:sp>
+      <p:sp>
+        <p:nvSpPr>
+          <p:cNvPr id="8" name="Text 6"/>
+          <p:cNvSpPr/>
+          <p:nvPr/>
+        </p:nvSpPr>
+        <p:spPr>
+          <a:xfrm>
+            <a:off x="640080" y="731520"/>
+            <a:ext cx="420624" cy="164592"/>
+          </a:xfrm>
+          <a:prstGeom prst="rect">
+            <a:avLst/>
+          </a:prstGeom>
+          <a:noFill/>
+          <a:ln/>
+        </p:spPr>
+        <p:txBody>
+          <a:bodyPr wrap="square" lIns="0" tIns="0" rIns="0" bIns="0" rtlCol="0" anchor="ctr"/>
+          <a:lstStyle/>
+          <a:p>
+            <a:pPr algn="ctr" indent="0" marL="0">
+              <a:buNone/>
+            </a:pPr>
+            <a:r>
+              <a:rPr lang="en-US" sz="1100" b="1" dirty="0">
+                <a:solidFill>
+                  <a:srgbClr val="FFFFFF"/>
+                </a:solidFill>
+                <a:latin typeface="Aptos" pitchFamily="34" charset="0"/>
+                <a:ea typeface="Aptos" pitchFamily="34" charset="-122"/>
+                <a:cs typeface="Aptos" pitchFamily="34" charset="-120"/>
+              </a:rPr>
+              <a:t>6</a:t>
+            </a:r>
+            <a:endParaRPr lang="en-US" sz="1100" dirty="0"/>
+          </a:p>
+        </p:txBody>
+      </p:sp>
+      <p:sp>
+        <p:nvSpPr>
+          <p:cNvPr id="9" name="Text 7"/>
+          <p:cNvSpPr/>
+          <p:nvPr/>
+        </p:nvSpPr>
+        <p:spPr>
+          <a:xfrm>
+            <a:off x="640080" y="621792"/>
             <a:ext cx="10881360" cy="566928"/>
           </a:xfrm>
           <a:prstGeom prst="rect">
@@ -3532,7 +4429,7 @@
                 <a:ea typeface="Aptos Display" pitchFamily="34" charset="-122"/>
                 <a:cs typeface="Aptos Display" pitchFamily="34" charset="-120"/>
               </a:rPr>
-              <a:t>Application to AI-Supported Workflows</a:t>
+              <a:t>Risks, Failure Modes, and Guardrails</a:t>
             </a:r>
             <a:endParaRPr lang="en-US" sz="2700" dirty="0"/>
           </a:p>
@@ -3540,32 +4437,178 @@
       </p:sp>
       <p:sp>
         <p:nvSpPr>
-          <p:cNvPr id="7" name="Text 5"/>
-          <p:cNvSpPr/>
-          <p:nvPr/>
-        </p:nvSpPr>
-        <p:spPr>
-          <a:xfrm>
-            <a:off x="822960" y="1325880"/>
-            <a:ext cx="10378440" cy="4800600"/>
-          </a:xfrm>
-          <a:prstGeom prst="rect">
-            <a:avLst/>
-          </a:prstGeom>
-          <a:noFill/>
-          <a:ln/>
-        </p:spPr>
-        <p:txBody>
-          <a:bodyPr wrap="square" lIns="1016" tIns="1016" rIns="1016" bIns="1016" rtlCol="0" anchor="t">
+          <p:cNvPr id="10" name="Text 8"/>
+          <p:cNvSpPr/>
+          <p:nvPr/>
+        </p:nvSpPr>
+        <p:spPr>
+          <a:xfrm>
+            <a:off x="868680" y="1417320"/>
+            <a:ext cx="6675120" cy="4434840"/>
+          </a:xfrm>
+          <a:prstGeom prst="rect">
+            <a:avLst/>
+          </a:prstGeom>
+          <a:noFill/>
+          <a:ln/>
+        </p:spPr>
+        <p:txBody>
+          <a:bodyPr wrap="square" lIns="635" tIns="635" rIns="635" bIns="635" rtlCol="0" anchor="t">
             <a:normAutofit/>
           </a:bodyPr>
           <a:lstStyle/>
           <a:p>
+            <a:r>
+              <a:rPr lang="en-US" sz="1700" dirty="0">
+                <a:solidFill>
+                  <a:srgbClr val="17364A"/>
+                </a:solidFill>
+                <a:latin typeface="Aptos" pitchFamily="34" charset="0"/>
+                <a:ea typeface="Aptos" pitchFamily="34" charset="-122"/>
+                <a:cs typeface="Aptos" pitchFamily="34" charset="-120"/>
+              </a:rPr>
+              <a:t>Misleading aggregate performance.</a:t>
+            </a:r>
+            <a:endParaRPr lang="en-US" sz="1700" dirty="0"/>
+          </a:p>
+          <a:p>
+            <a:r>
+              <a:rPr lang="en-US" sz="1700" dirty="0">
+                <a:solidFill>
+                  <a:srgbClr val="17364A"/>
+                </a:solidFill>
+                <a:latin typeface="Aptos" pitchFamily="34" charset="0"/>
+                <a:ea typeface="Aptos" pitchFamily="34" charset="-122"/>
+                <a:cs typeface="Aptos" pitchFamily="34" charset="-120"/>
+              </a:rPr>
+              <a:t>Overall metrics may hide poor subgroup performance.</a:t>
+            </a:r>
+            <a:endParaRPr lang="en-US" sz="1700" dirty="0"/>
+          </a:p>
+          <a:p>
+            <a:r>
+              <a:rPr lang="en-US" sz="1700" dirty="0">
+                <a:solidFill>
+                  <a:srgbClr val="17364A"/>
+                </a:solidFill>
+                <a:latin typeface="Aptos" pitchFamily="34" charset="0"/>
+                <a:ea typeface="Aptos" pitchFamily="34" charset="-122"/>
+                <a:cs typeface="Aptos" pitchFamily="34" charset="-120"/>
+              </a:rPr>
+              <a:t>Guardrails include subgroup testing and equity review.</a:t>
+            </a:r>
+            <a:endParaRPr lang="en-US" sz="1700" dirty="0"/>
+          </a:p>
+          <a:p>
+            <a:r>
+              <a:rPr lang="en-US" sz="1700" dirty="0">
+                <a:solidFill>
+                  <a:srgbClr val="17364A"/>
+                </a:solidFill>
+                <a:latin typeface="Aptos" pitchFamily="34" charset="0"/>
+                <a:ea typeface="Aptos" pitchFamily="34" charset="-122"/>
+                <a:cs typeface="Aptos" pitchFamily="34" charset="-120"/>
+              </a:rPr>
+              <a:t>Metric mismatch.</a:t>
+            </a:r>
+            <a:endParaRPr lang="en-US" sz="1700" dirty="0"/>
+          </a:p>
+        </p:txBody>
+      </p:sp>
+      <p:sp>
+        <p:nvSpPr>
+          <p:cNvPr id="11" name="Shape 9"/>
+          <p:cNvSpPr/>
+          <p:nvPr/>
+        </p:nvSpPr>
+        <p:spPr>
+          <a:xfrm>
+            <a:off x="7909560" y="1417320"/>
+            <a:ext cx="3154680" cy="1828800"/>
+          </a:xfrm>
+          <a:prstGeom prst="roundRect">
+            <a:avLst>
+              <a:gd name="adj" fmla="val 6000"/>
+            </a:avLst>
+          </a:prstGeom>
+          <a:solidFill>
+            <a:srgbClr val="EEF8ED"/>
+          </a:solidFill>
+          <a:ln w="12700">
+            <a:solidFill>
+              <a:srgbClr val="B9D7E6"/>
+            </a:solidFill>
+            <a:prstDash val="solid"/>
+          </a:ln>
+        </p:spPr>
+      </p:sp>
+      <p:sp>
+        <p:nvSpPr>
+          <p:cNvPr id="12" name="Text 10"/>
+          <p:cNvSpPr/>
+          <p:nvPr/>
+        </p:nvSpPr>
+        <p:spPr>
+          <a:xfrm>
+            <a:off x="8074152" y="1563624"/>
+            <a:ext cx="2825496" cy="201168"/>
+          </a:xfrm>
+          <a:prstGeom prst="rect">
+            <a:avLst/>
+          </a:prstGeom>
+          <a:noFill/>
+          <a:ln/>
+        </p:spPr>
+        <p:txBody>
+          <a:bodyPr wrap="square" lIns="0" tIns="0" rIns="0" bIns="0" rtlCol="0" anchor="ctr"/>
+          <a:lstStyle/>
+          <a:p>
             <a:pPr indent="0" marL="0">
               <a:buNone/>
             </a:pPr>
             <a:r>
-              <a:rPr lang="en-US" sz="1420" dirty="0">
+              <a:rPr lang="en-US" sz="950" b="1" dirty="0">
+                <a:solidFill>
+                  <a:srgbClr val="0068B7"/>
+                </a:solidFill>
+                <a:latin typeface="Aptos" pitchFamily="34" charset="0"/>
+                <a:ea typeface="Aptos" pitchFamily="34" charset="-122"/>
+                <a:cs typeface="Aptos" pitchFamily="34" charset="-120"/>
+              </a:rPr>
+              <a:t>Key idea</a:t>
+            </a:r>
+            <a:endParaRPr lang="en-US" sz="950" dirty="0"/>
+          </a:p>
+        </p:txBody>
+      </p:sp>
+      <p:sp>
+        <p:nvSpPr>
+          <p:cNvPr id="13" name="Text 11"/>
+          <p:cNvSpPr/>
+          <p:nvPr/>
+        </p:nvSpPr>
+        <p:spPr>
+          <a:xfrm>
+            <a:off x="8074152" y="1856232"/>
+            <a:ext cx="2825496" cy="1261872"/>
+          </a:xfrm>
+          <a:prstGeom prst="rect">
+            <a:avLst/>
+          </a:prstGeom>
+          <a:noFill/>
+          <a:ln/>
+        </p:spPr>
+        <p:txBody>
+          <a:bodyPr wrap="square" lIns="0" tIns="0" rIns="0" bIns="0" rtlCol="0" anchor="t">
+            <a:normAutofit/>
+          </a:bodyPr>
+          <a:lstStyle/>
+          <a:p>
+            <a:pPr indent="0" marL="0">
+              <a:buNone/>
+            </a:pPr>
+            <a:r>
+              <a:rPr lang="en-US" sz="1250" dirty="0">
                 <a:solidFill>
                   <a:srgbClr val="17364A"/>
                 </a:solidFill>
@@ -3573,9 +4616,116 @@
                 <a:ea typeface="Aptos" pitchFamily="34" charset="-122"/>
                 <a:cs typeface="Aptos" pitchFamily="34" charset="-120"/>
               </a:rPr>
-              <a:t>Advanced validation applies to predictive models, NLP tools, generative summaries, RAG outputs, and agentic workflows. For generative AI, validation may include factuality, completeness, source grounding, omissions, and harmful output review. For RAG, validation should test retrieval quality and citation accuracy. For agentic workflows, validation should include action safety, permission boundaries, and rollback procedures. The evaluation unit should be the AI-supported workflow, not the model alone. Public health agencies should ask whether the full process improves timeliness, quality, equity, safety, and staff experience without creating unacceptable risk.</a:t>
-            </a:r>
-            <a:endParaRPr lang="en-US" sz="1420" dirty="0"/>
+              <a:t>Misleading aggregate performance.</a:t>
+            </a:r>
+            <a:endParaRPr lang="en-US" sz="1250" dirty="0"/>
+          </a:p>
+        </p:txBody>
+      </p:sp>
+      <p:sp>
+        <p:nvSpPr>
+          <p:cNvPr id="14" name="Shape 12"/>
+          <p:cNvSpPr/>
+          <p:nvPr/>
+        </p:nvSpPr>
+        <p:spPr>
+          <a:xfrm>
+            <a:off x="7909560" y="3520440"/>
+            <a:ext cx="3154680" cy="1737360"/>
+          </a:xfrm>
+          <a:prstGeom prst="roundRect">
+            <a:avLst>
+              <a:gd name="adj" fmla="val 6316"/>
+            </a:avLst>
+          </a:prstGeom>
+          <a:solidFill>
+            <a:srgbClr val="EAF6F8"/>
+          </a:solidFill>
+          <a:ln w="12700">
+            <a:solidFill>
+              <a:srgbClr val="B9D7E6"/>
+            </a:solidFill>
+            <a:prstDash val="solid"/>
+          </a:ln>
+        </p:spPr>
+      </p:sp>
+      <p:sp>
+        <p:nvSpPr>
+          <p:cNvPr id="15" name="Text 13"/>
+          <p:cNvSpPr/>
+          <p:nvPr/>
+        </p:nvSpPr>
+        <p:spPr>
+          <a:xfrm>
+            <a:off x="8074152" y="3666744"/>
+            <a:ext cx="2825496" cy="201168"/>
+          </a:xfrm>
+          <a:prstGeom prst="rect">
+            <a:avLst/>
+          </a:prstGeom>
+          <a:noFill/>
+          <a:ln/>
+        </p:spPr>
+        <p:txBody>
+          <a:bodyPr wrap="square" lIns="0" tIns="0" rIns="0" bIns="0" rtlCol="0" anchor="ctr"/>
+          <a:lstStyle/>
+          <a:p>
+            <a:pPr indent="0" marL="0">
+              <a:buNone/>
+            </a:pPr>
+            <a:r>
+              <a:rPr lang="en-US" sz="950" b="1" dirty="0">
+                <a:solidFill>
+                  <a:srgbClr val="0068B7"/>
+                </a:solidFill>
+                <a:latin typeface="Aptos" pitchFamily="34" charset="0"/>
+                <a:ea typeface="Aptos" pitchFamily="34" charset="-122"/>
+                <a:cs typeface="Aptos" pitchFamily="34" charset="-120"/>
+              </a:rPr>
+              <a:t>Use this for</a:t>
+            </a:r>
+            <a:endParaRPr lang="en-US" sz="950" dirty="0"/>
+          </a:p>
+        </p:txBody>
+      </p:sp>
+      <p:sp>
+        <p:nvSpPr>
+          <p:cNvPr id="16" name="Text 14"/>
+          <p:cNvSpPr/>
+          <p:nvPr/>
+        </p:nvSpPr>
+        <p:spPr>
+          <a:xfrm>
+            <a:off x="8074152" y="3959352"/>
+            <a:ext cx="2825496" cy="1170432"/>
+          </a:xfrm>
+          <a:prstGeom prst="rect">
+            <a:avLst/>
+          </a:prstGeom>
+          <a:noFill/>
+          <a:ln/>
+        </p:spPr>
+        <p:txBody>
+          <a:bodyPr wrap="square" lIns="0" tIns="0" rIns="0" bIns="0" rtlCol="0" anchor="t">
+            <a:normAutofit/>
+          </a:bodyPr>
+          <a:lstStyle/>
+          <a:p>
+            <a:pPr indent="0" marL="0">
+              <a:buNone/>
+            </a:pPr>
+            <a:r>
+              <a:rPr lang="en-US" sz="1250" dirty="0">
+                <a:solidFill>
+                  <a:srgbClr val="17364A"/>
+                </a:solidFill>
+                <a:latin typeface="Aptos" pitchFamily="34" charset="0"/>
+                <a:ea typeface="Aptos" pitchFamily="34" charset="-122"/>
+                <a:cs typeface="Aptos" pitchFamily="34" charset="-120"/>
+              </a:rPr>
+              <a:t>Connect the concept to public health decisions, safeguards, documentation, or implementation work.</a:t>
+            </a:r>
+            <a:endParaRPr lang="en-US" sz="1250" dirty="0"/>
           </a:p>
         </p:txBody>
       </p:sp>
@@ -3638,7 +4788,32 @@
       </p:sp>
       <p:sp>
         <p:nvSpPr>
-          <p:cNvPr id="3" name="Text 1"/>
+          <p:cNvPr id="3" name="Shape 1"/>
+          <p:cNvSpPr/>
+          <p:nvPr/>
+        </p:nvSpPr>
+        <p:spPr>
+          <a:xfrm>
+            <a:off x="0" y="164592"/>
+            <a:ext cx="146304" cy="6693408"/>
+          </a:xfrm>
+          <a:prstGeom prst="rect">
+            <a:avLst/>
+          </a:prstGeom>
+          <a:solidFill>
+            <a:srgbClr val="2F8A28"/>
+          </a:solidFill>
+          <a:ln w="12700">
+            <a:solidFill>
+              <a:srgbClr val="2F8A28"/>
+            </a:solidFill>
+            <a:prstDash val="solid"/>
+          </a:ln>
+        </p:spPr>
+      </p:sp>
+      <p:sp>
+        <p:nvSpPr>
+          <p:cNvPr id="4" name="Text 2"/>
           <p:cNvSpPr/>
           <p:nvPr/>
         </p:nvSpPr>
@@ -3677,7 +4852,7 @@
       </p:sp>
       <p:sp>
         <p:nvSpPr>
-          <p:cNvPr id="4" name="Text 2"/>
+          <p:cNvPr id="5" name="Text 3"/>
           <p:cNvSpPr/>
           <p:nvPr/>
         </p:nvSpPr>
@@ -3716,7 +4891,7 @@
       </p:sp>
       <p:sp>
         <p:nvSpPr>
-          <p:cNvPr id="5" name="Text 3"/>
+          <p:cNvPr id="6" name="Text 4"/>
           <p:cNvSpPr/>
           <p:nvPr/>
         </p:nvSpPr>
@@ -3755,7 +4930,7 @@
       </p:sp>
       <p:sp>
         <p:nvSpPr>
-          <p:cNvPr id="6" name="Text 4"/>
+          <p:cNvPr id="7" name="Text 5"/>
           <p:cNvSpPr/>
           <p:nvPr/>
         </p:nvSpPr>
@@ -3788,7 +4963,7 @@
                 <a:ea typeface="Aptos Display" pitchFamily="34" charset="-122"/>
                 <a:cs typeface="Aptos Display" pitchFamily="34" charset="-120"/>
               </a:rPr>
-              <a:t>Reflection Questions</a:t>
+              <a:t>Risks, Failure Modes, and Guardrails Continued</a:t>
             </a:r>
             <a:endParaRPr lang="en-US" sz="2700" dirty="0"/>
           </a:p>
@@ -3796,32 +4971,164 @@
       </p:sp>
       <p:sp>
         <p:nvSpPr>
-          <p:cNvPr id="7" name="Text 5"/>
-          <p:cNvSpPr/>
-          <p:nvPr/>
-        </p:nvSpPr>
-        <p:spPr>
-          <a:xfrm>
-            <a:off x="822960" y="1325880"/>
-            <a:ext cx="10378440" cy="4800600"/>
-          </a:xfrm>
-          <a:prstGeom prst="rect">
-            <a:avLst/>
-          </a:prstGeom>
-          <a:noFill/>
-          <a:ln/>
-        </p:spPr>
-        <p:txBody>
-          <a:bodyPr wrap="square" lIns="1016" tIns="1016" rIns="1016" bIns="1016" rtlCol="0" anchor="t">
+          <p:cNvPr id="8" name="Text 6"/>
+          <p:cNvSpPr/>
+          <p:nvPr/>
+        </p:nvSpPr>
+        <p:spPr>
+          <a:xfrm>
+            <a:off x="868680" y="1417320"/>
+            <a:ext cx="6675120" cy="4434840"/>
+          </a:xfrm>
+          <a:prstGeom prst="rect">
+            <a:avLst/>
+          </a:prstGeom>
+          <a:noFill/>
+          <a:ln/>
+        </p:spPr>
+        <p:txBody>
+          <a:bodyPr wrap="square" lIns="635" tIns="635" rIns="635" bIns="635" rtlCol="0" anchor="t">
             <a:normAutofit/>
           </a:bodyPr>
           <a:lstStyle/>
           <a:p>
+            <a:r>
+              <a:rPr lang="en-US" sz="1700" dirty="0">
+                <a:solidFill>
+                  <a:srgbClr val="17364A"/>
+                </a:solidFill>
+                <a:latin typeface="Aptos" pitchFamily="34" charset="0"/>
+                <a:ea typeface="Aptos" pitchFamily="34" charset="-122"/>
+                <a:cs typeface="Aptos" pitchFamily="34" charset="-120"/>
+              </a:rPr>
+              <a:t>Workflow failure.</a:t>
+            </a:r>
+            <a:endParaRPr lang="en-US" sz="1700" dirty="0"/>
+          </a:p>
+          <a:p>
+            <a:r>
+              <a:rPr lang="en-US" sz="1700" dirty="0">
+                <a:solidFill>
+                  <a:srgbClr val="17364A"/>
+                </a:solidFill>
+                <a:latin typeface="Aptos" pitchFamily="34" charset="0"/>
+                <a:ea typeface="Aptos" pitchFamily="34" charset="-122"/>
+                <a:cs typeface="Aptos" pitchFamily="34" charset="-120"/>
+              </a:rPr>
+              <a:t>A technically accurate model may be unusable or misused.</a:t>
+            </a:r>
+            <a:endParaRPr lang="en-US" sz="1700" dirty="0"/>
+          </a:p>
+          <a:p>
+            <a:r>
+              <a:rPr lang="en-US" sz="1700" dirty="0">
+                <a:solidFill>
+                  <a:srgbClr val="17364A"/>
+                </a:solidFill>
+                <a:latin typeface="Aptos" pitchFamily="34" charset="0"/>
+                <a:ea typeface="Aptos" pitchFamily="34" charset="-122"/>
+                <a:cs typeface="Aptos" pitchFamily="34" charset="-120"/>
+              </a:rPr>
+              <a:t>Guardrails include usability testing, training, source visibility, and override documentation.</a:t>
+            </a:r>
+            <a:endParaRPr lang="en-US" sz="1700" dirty="0"/>
+          </a:p>
+        </p:txBody>
+      </p:sp>
+      <p:sp>
+        <p:nvSpPr>
+          <p:cNvPr id="9" name="Shape 7"/>
+          <p:cNvSpPr/>
+          <p:nvPr/>
+        </p:nvSpPr>
+        <p:spPr>
+          <a:xfrm>
+            <a:off x="7909560" y="1417320"/>
+            <a:ext cx="3154680" cy="1828800"/>
+          </a:xfrm>
+          <a:prstGeom prst="roundRect">
+            <a:avLst>
+              <a:gd name="adj" fmla="val 6000"/>
+            </a:avLst>
+          </a:prstGeom>
+          <a:solidFill>
+            <a:srgbClr val="EEF8ED"/>
+          </a:solidFill>
+          <a:ln w="12700">
+            <a:solidFill>
+              <a:srgbClr val="B9D7E6"/>
+            </a:solidFill>
+            <a:prstDash val="solid"/>
+          </a:ln>
+        </p:spPr>
+      </p:sp>
+      <p:sp>
+        <p:nvSpPr>
+          <p:cNvPr id="10" name="Text 8"/>
+          <p:cNvSpPr/>
+          <p:nvPr/>
+        </p:nvSpPr>
+        <p:spPr>
+          <a:xfrm>
+            <a:off x="8074152" y="1563624"/>
+            <a:ext cx="2825496" cy="201168"/>
+          </a:xfrm>
+          <a:prstGeom prst="rect">
+            <a:avLst/>
+          </a:prstGeom>
+          <a:noFill/>
+          <a:ln/>
+        </p:spPr>
+        <p:txBody>
+          <a:bodyPr wrap="square" lIns="0" tIns="0" rIns="0" bIns="0" rtlCol="0" anchor="ctr"/>
+          <a:lstStyle/>
+          <a:p>
             <a:pPr indent="0" marL="0">
               <a:buNone/>
             </a:pPr>
             <a:r>
-              <a:rPr lang="en-US" sz="1420" dirty="0">
+              <a:rPr lang="en-US" sz="950" b="1" dirty="0">
+                <a:solidFill>
+                  <a:srgbClr val="0068B7"/>
+                </a:solidFill>
+                <a:latin typeface="Aptos" pitchFamily="34" charset="0"/>
+                <a:ea typeface="Aptos" pitchFamily="34" charset="-122"/>
+                <a:cs typeface="Aptos" pitchFamily="34" charset="-120"/>
+              </a:rPr>
+              <a:t>Key idea</a:t>
+            </a:r>
+            <a:endParaRPr lang="en-US" sz="950" dirty="0"/>
+          </a:p>
+        </p:txBody>
+      </p:sp>
+      <p:sp>
+        <p:nvSpPr>
+          <p:cNvPr id="11" name="Text 9"/>
+          <p:cNvSpPr/>
+          <p:nvPr/>
+        </p:nvSpPr>
+        <p:spPr>
+          <a:xfrm>
+            <a:off x="8074152" y="1856232"/>
+            <a:ext cx="2825496" cy="1261872"/>
+          </a:xfrm>
+          <a:prstGeom prst="rect">
+            <a:avLst/>
+          </a:prstGeom>
+          <a:noFill/>
+          <a:ln/>
+        </p:spPr>
+        <p:txBody>
+          <a:bodyPr wrap="square" lIns="0" tIns="0" rIns="0" bIns="0" rtlCol="0" anchor="t">
+            <a:normAutofit/>
+          </a:bodyPr>
+          <a:lstStyle/>
+          <a:p>
+            <a:pPr indent="0" marL="0">
+              <a:buNone/>
+            </a:pPr>
+            <a:r>
+              <a:rPr lang="en-US" sz="1250" dirty="0">
                 <a:solidFill>
                   <a:srgbClr val="17364A"/>
                 </a:solidFill>
@@ -3829,9 +5136,116 @@
                 <a:ea typeface="Aptos" pitchFamily="34" charset="-122"/>
                 <a:cs typeface="Aptos" pitchFamily="34" charset="-120"/>
               </a:rPr>
-              <a:t>What decision or action will the AI output support? Which performance metrics match the consequences of error? Which subgroups, data sources, or settings require separate review?</a:t>
-            </a:r>
-            <a:endParaRPr lang="en-US" sz="1420" dirty="0"/>
+              <a:t>Workflow failure.</a:t>
+            </a:r>
+            <a:endParaRPr lang="en-US" sz="1250" dirty="0"/>
+          </a:p>
+        </p:txBody>
+      </p:sp>
+      <p:sp>
+        <p:nvSpPr>
+          <p:cNvPr id="12" name="Shape 10"/>
+          <p:cNvSpPr/>
+          <p:nvPr/>
+        </p:nvSpPr>
+        <p:spPr>
+          <a:xfrm>
+            <a:off x="7909560" y="3520440"/>
+            <a:ext cx="3154680" cy="1737360"/>
+          </a:xfrm>
+          <a:prstGeom prst="roundRect">
+            <a:avLst>
+              <a:gd name="adj" fmla="val 6316"/>
+            </a:avLst>
+          </a:prstGeom>
+          <a:solidFill>
+            <a:srgbClr val="EAF6F8"/>
+          </a:solidFill>
+          <a:ln w="12700">
+            <a:solidFill>
+              <a:srgbClr val="B9D7E6"/>
+            </a:solidFill>
+            <a:prstDash val="solid"/>
+          </a:ln>
+        </p:spPr>
+      </p:sp>
+      <p:sp>
+        <p:nvSpPr>
+          <p:cNvPr id="13" name="Text 11"/>
+          <p:cNvSpPr/>
+          <p:nvPr/>
+        </p:nvSpPr>
+        <p:spPr>
+          <a:xfrm>
+            <a:off x="8074152" y="3666744"/>
+            <a:ext cx="2825496" cy="201168"/>
+          </a:xfrm>
+          <a:prstGeom prst="rect">
+            <a:avLst/>
+          </a:prstGeom>
+          <a:noFill/>
+          <a:ln/>
+        </p:spPr>
+        <p:txBody>
+          <a:bodyPr wrap="square" lIns="0" tIns="0" rIns="0" bIns="0" rtlCol="0" anchor="ctr"/>
+          <a:lstStyle/>
+          <a:p>
+            <a:pPr indent="0" marL="0">
+              <a:buNone/>
+            </a:pPr>
+            <a:r>
+              <a:rPr lang="en-US" sz="950" b="1" dirty="0">
+                <a:solidFill>
+                  <a:srgbClr val="0068B7"/>
+                </a:solidFill>
+                <a:latin typeface="Aptos" pitchFamily="34" charset="0"/>
+                <a:ea typeface="Aptos" pitchFamily="34" charset="-122"/>
+                <a:cs typeface="Aptos" pitchFamily="34" charset="-120"/>
+              </a:rPr>
+              <a:t>Use this for</a:t>
+            </a:r>
+            <a:endParaRPr lang="en-US" sz="950" dirty="0"/>
+          </a:p>
+        </p:txBody>
+      </p:sp>
+      <p:sp>
+        <p:nvSpPr>
+          <p:cNvPr id="14" name="Text 12"/>
+          <p:cNvSpPr/>
+          <p:nvPr/>
+        </p:nvSpPr>
+        <p:spPr>
+          <a:xfrm>
+            <a:off x="8074152" y="3959352"/>
+            <a:ext cx="2825496" cy="1170432"/>
+          </a:xfrm>
+          <a:prstGeom prst="rect">
+            <a:avLst/>
+          </a:prstGeom>
+          <a:noFill/>
+          <a:ln/>
+        </p:spPr>
+        <p:txBody>
+          <a:bodyPr wrap="square" lIns="0" tIns="0" rIns="0" bIns="0" rtlCol="0" anchor="t">
+            <a:normAutofit/>
+          </a:bodyPr>
+          <a:lstStyle/>
+          <a:p>
+            <a:pPr indent="0" marL="0">
+              <a:buNone/>
+            </a:pPr>
+            <a:r>
+              <a:rPr lang="en-US" sz="1250" dirty="0">
+                <a:solidFill>
+                  <a:srgbClr val="17364A"/>
+                </a:solidFill>
+                <a:latin typeface="Aptos" pitchFamily="34" charset="0"/>
+                <a:ea typeface="Aptos" pitchFamily="34" charset="-122"/>
+                <a:cs typeface="Aptos" pitchFamily="34" charset="-120"/>
+              </a:rPr>
+              <a:t>Connect the concept to public health decisions, safeguards, documentation, or implementation work.</a:t>
+            </a:r>
+            <a:endParaRPr lang="en-US" sz="1250" dirty="0"/>
           </a:p>
         </p:txBody>
       </p:sp>
@@ -3894,7 +5308,32 @@
       </p:sp>
       <p:sp>
         <p:nvSpPr>
-          <p:cNvPr id="3" name="Text 1"/>
+          <p:cNvPr id="3" name="Shape 1"/>
+          <p:cNvSpPr/>
+          <p:nvPr/>
+        </p:nvSpPr>
+        <p:spPr>
+          <a:xfrm>
+            <a:off x="0" y="164592"/>
+            <a:ext cx="146304" cy="6693408"/>
+          </a:xfrm>
+          <a:prstGeom prst="rect">
+            <a:avLst/>
+          </a:prstGeom>
+          <a:solidFill>
+            <a:srgbClr val="2F8A28"/>
+          </a:solidFill>
+          <a:ln w="12700">
+            <a:solidFill>
+              <a:srgbClr val="2F8A28"/>
+            </a:solidFill>
+            <a:prstDash val="solid"/>
+          </a:ln>
+        </p:spPr>
+      </p:sp>
+      <p:sp>
+        <p:nvSpPr>
+          <p:cNvPr id="4" name="Text 2"/>
           <p:cNvSpPr/>
           <p:nvPr/>
         </p:nvSpPr>
@@ -3933,7 +5372,7 @@
       </p:sp>
       <p:sp>
         <p:nvSpPr>
-          <p:cNvPr id="4" name="Text 2"/>
+          <p:cNvPr id="5" name="Text 3"/>
           <p:cNvSpPr/>
           <p:nvPr/>
         </p:nvSpPr>
@@ -3972,7 +5411,7 @@
       </p:sp>
       <p:sp>
         <p:nvSpPr>
-          <p:cNvPr id="5" name="Text 3"/>
+          <p:cNvPr id="6" name="Text 4"/>
           <p:cNvSpPr/>
           <p:nvPr/>
         </p:nvSpPr>
@@ -4011,13 +5450,77 @@
       </p:sp>
       <p:sp>
         <p:nvSpPr>
-          <p:cNvPr id="6" name="Text 4"/>
+          <p:cNvPr id="7" name="Shape 5"/>
           <p:cNvSpPr/>
           <p:nvPr/>
         </p:nvSpPr>
         <p:spPr>
           <a:xfrm>
             <a:off x="640080" y="658368"/>
+            <a:ext cx="420624" cy="420624"/>
+          </a:xfrm>
+          <a:prstGeom prst="ellipse">
+            <a:avLst/>
+          </a:prstGeom>
+          <a:solidFill>
+            <a:srgbClr val="0068B7"/>
+          </a:solidFill>
+          <a:ln w="12700">
+            <a:solidFill>
+              <a:srgbClr val="0068B7"/>
+            </a:solidFill>
+            <a:prstDash val="solid"/>
+          </a:ln>
+        </p:spPr>
+      </p:sp>
+      <p:sp>
+        <p:nvSpPr>
+          <p:cNvPr id="8" name="Text 6"/>
+          <p:cNvSpPr/>
+          <p:nvPr/>
+        </p:nvSpPr>
+        <p:spPr>
+          <a:xfrm>
+            <a:off x="640080" y="731520"/>
+            <a:ext cx="420624" cy="164592"/>
+          </a:xfrm>
+          <a:prstGeom prst="rect">
+            <a:avLst/>
+          </a:prstGeom>
+          <a:noFill/>
+          <a:ln/>
+        </p:spPr>
+        <p:txBody>
+          <a:bodyPr wrap="square" lIns="0" tIns="0" rIns="0" bIns="0" rtlCol="0" anchor="ctr"/>
+          <a:lstStyle/>
+          <a:p>
+            <a:pPr algn="ctr" indent="0" marL="0">
+              <a:buNone/>
+            </a:pPr>
+            <a:r>
+              <a:rPr lang="en-US" sz="1100" b="1" dirty="0">
+                <a:solidFill>
+                  <a:srgbClr val="FFFFFF"/>
+                </a:solidFill>
+                <a:latin typeface="Aptos" pitchFamily="34" charset="0"/>
+                <a:ea typeface="Aptos" pitchFamily="34" charset="-122"/>
+                <a:cs typeface="Aptos" pitchFamily="34" charset="-120"/>
+              </a:rPr>
+              <a:t>7</a:t>
+            </a:r>
+            <a:endParaRPr lang="en-US" sz="1100" dirty="0"/>
+          </a:p>
+        </p:txBody>
+      </p:sp>
+      <p:sp>
+        <p:nvSpPr>
+          <p:cNvPr id="9" name="Text 7"/>
+          <p:cNvSpPr/>
+          <p:nvPr/>
+        </p:nvSpPr>
+        <p:spPr>
+          <a:xfrm>
+            <a:off x="640080" y="621792"/>
             <a:ext cx="10881360" cy="566928"/>
           </a:xfrm>
           <a:prstGeom prst="rect">
@@ -4044,7 +5547,7 @@
                 <a:ea typeface="Aptos Display" pitchFamily="34" charset="-122"/>
                 <a:cs typeface="Aptos Display" pitchFamily="34" charset="-120"/>
               </a:rPr>
-              <a:t>Reflection Questions Continued</a:t>
+              <a:t>Application to AI-Supported Workflows</a:t>
             </a:r>
             <a:endParaRPr lang="en-US" sz="2700" dirty="0"/>
           </a:p>
@@ -4052,32 +5555,178 @@
       </p:sp>
       <p:sp>
         <p:nvSpPr>
-          <p:cNvPr id="7" name="Text 5"/>
-          <p:cNvSpPr/>
-          <p:nvPr/>
-        </p:nvSpPr>
-        <p:spPr>
-          <a:xfrm>
-            <a:off x="822960" y="1325880"/>
-            <a:ext cx="10378440" cy="4800600"/>
-          </a:xfrm>
-          <a:prstGeom prst="rect">
-            <a:avLst/>
-          </a:prstGeom>
-          <a:noFill/>
-          <a:ln/>
-        </p:spPr>
-        <p:txBody>
-          <a:bodyPr wrap="square" lIns="1016" tIns="1016" rIns="1016" bIns="1016" rtlCol="0" anchor="t">
+          <p:cNvPr id="10" name="Text 8"/>
+          <p:cNvSpPr/>
+          <p:nvPr/>
+        </p:nvSpPr>
+        <p:spPr>
+          <a:xfrm>
+            <a:off x="868680" y="1417320"/>
+            <a:ext cx="6675120" cy="4434840"/>
+          </a:xfrm>
+          <a:prstGeom prst="rect">
+            <a:avLst/>
+          </a:prstGeom>
+          <a:noFill/>
+          <a:ln/>
+        </p:spPr>
+        <p:txBody>
+          <a:bodyPr wrap="square" lIns="635" tIns="635" rIns="635" bIns="635" rtlCol="0" anchor="t">
             <a:normAutofit/>
           </a:bodyPr>
           <a:lstStyle/>
           <a:p>
+            <a:r>
+              <a:rPr lang="en-US" sz="1700" dirty="0">
+                <a:solidFill>
+                  <a:srgbClr val="17364A"/>
+                </a:solidFill>
+                <a:latin typeface="Aptos" pitchFamily="34" charset="0"/>
+                <a:ea typeface="Aptos" pitchFamily="34" charset="-122"/>
+                <a:cs typeface="Aptos" pitchFamily="34" charset="-120"/>
+              </a:rPr>
+              <a:t>Advanced validation applies to predictive models, NLP tools, generative summaries, RAG outputs, and agentic workflows.</a:t>
+            </a:r>
+            <a:endParaRPr lang="en-US" sz="1700" dirty="0"/>
+          </a:p>
+          <a:p>
+            <a:r>
+              <a:rPr lang="en-US" sz="1700" dirty="0">
+                <a:solidFill>
+                  <a:srgbClr val="17364A"/>
+                </a:solidFill>
+                <a:latin typeface="Aptos" pitchFamily="34" charset="0"/>
+                <a:ea typeface="Aptos" pitchFamily="34" charset="-122"/>
+                <a:cs typeface="Aptos" pitchFamily="34" charset="-120"/>
+              </a:rPr>
+              <a:t>For generative AI, validation may include factuality, completeness, source grounding, omissions, and harmful output review.</a:t>
+            </a:r>
+            <a:endParaRPr lang="en-US" sz="1700" dirty="0"/>
+          </a:p>
+          <a:p>
+            <a:r>
+              <a:rPr lang="en-US" sz="1700" dirty="0">
+                <a:solidFill>
+                  <a:srgbClr val="17364A"/>
+                </a:solidFill>
+                <a:latin typeface="Aptos" pitchFamily="34" charset="0"/>
+                <a:ea typeface="Aptos" pitchFamily="34" charset="-122"/>
+                <a:cs typeface="Aptos" pitchFamily="34" charset="-120"/>
+              </a:rPr>
+              <a:t>For RAG, validation should test retrieval quality and citation accuracy.</a:t>
+            </a:r>
+            <a:endParaRPr lang="en-US" sz="1700" dirty="0"/>
+          </a:p>
+          <a:p>
+            <a:r>
+              <a:rPr lang="en-US" sz="1700" dirty="0">
+                <a:solidFill>
+                  <a:srgbClr val="17364A"/>
+                </a:solidFill>
+                <a:latin typeface="Aptos" pitchFamily="34" charset="0"/>
+                <a:ea typeface="Aptos" pitchFamily="34" charset="-122"/>
+                <a:cs typeface="Aptos" pitchFamily="34" charset="-120"/>
+              </a:rPr>
+              <a:t>For agentic workflows, validation should include action safety, permission boundaries, and rollback procedures.</a:t>
+            </a:r>
+            <a:endParaRPr lang="en-US" sz="1700" dirty="0"/>
+          </a:p>
+        </p:txBody>
+      </p:sp>
+      <p:sp>
+        <p:nvSpPr>
+          <p:cNvPr id="11" name="Shape 9"/>
+          <p:cNvSpPr/>
+          <p:nvPr/>
+        </p:nvSpPr>
+        <p:spPr>
+          <a:xfrm>
+            <a:off x="7909560" y="1417320"/>
+            <a:ext cx="3154680" cy="1828800"/>
+          </a:xfrm>
+          <a:prstGeom prst="roundRect">
+            <a:avLst>
+              <a:gd name="adj" fmla="val 6000"/>
+            </a:avLst>
+          </a:prstGeom>
+          <a:solidFill>
+            <a:srgbClr val="EEF8ED"/>
+          </a:solidFill>
+          <a:ln w="12700">
+            <a:solidFill>
+              <a:srgbClr val="B9D7E6"/>
+            </a:solidFill>
+            <a:prstDash val="solid"/>
+          </a:ln>
+        </p:spPr>
+      </p:sp>
+      <p:sp>
+        <p:nvSpPr>
+          <p:cNvPr id="12" name="Text 10"/>
+          <p:cNvSpPr/>
+          <p:nvPr/>
+        </p:nvSpPr>
+        <p:spPr>
+          <a:xfrm>
+            <a:off x="8074152" y="1563624"/>
+            <a:ext cx="2825496" cy="201168"/>
+          </a:xfrm>
+          <a:prstGeom prst="rect">
+            <a:avLst/>
+          </a:prstGeom>
+          <a:noFill/>
+          <a:ln/>
+        </p:spPr>
+        <p:txBody>
+          <a:bodyPr wrap="square" lIns="0" tIns="0" rIns="0" bIns="0" rtlCol="0" anchor="ctr"/>
+          <a:lstStyle/>
+          <a:p>
             <a:pPr indent="0" marL="0">
               <a:buNone/>
             </a:pPr>
             <a:r>
-              <a:rPr lang="en-US" sz="1420" dirty="0">
+              <a:rPr lang="en-US" sz="950" b="1" dirty="0">
+                <a:solidFill>
+                  <a:srgbClr val="0068B7"/>
+                </a:solidFill>
+                <a:latin typeface="Aptos" pitchFamily="34" charset="0"/>
+                <a:ea typeface="Aptos" pitchFamily="34" charset="-122"/>
+                <a:cs typeface="Aptos" pitchFamily="34" charset="-120"/>
+              </a:rPr>
+              <a:t>Key idea</a:t>
+            </a:r>
+            <a:endParaRPr lang="en-US" sz="950" dirty="0"/>
+          </a:p>
+        </p:txBody>
+      </p:sp>
+      <p:sp>
+        <p:nvSpPr>
+          <p:cNvPr id="13" name="Text 11"/>
+          <p:cNvSpPr/>
+          <p:nvPr/>
+        </p:nvSpPr>
+        <p:spPr>
+          <a:xfrm>
+            <a:off x="8074152" y="1856232"/>
+            <a:ext cx="2825496" cy="1261872"/>
+          </a:xfrm>
+          <a:prstGeom prst="rect">
+            <a:avLst/>
+          </a:prstGeom>
+          <a:noFill/>
+          <a:ln/>
+        </p:spPr>
+        <p:txBody>
+          <a:bodyPr wrap="square" lIns="0" tIns="0" rIns="0" bIns="0" rtlCol="0" anchor="t">
+            <a:normAutofit/>
+          </a:bodyPr>
+          <a:lstStyle/>
+          <a:p>
+            <a:pPr indent="0" marL="0">
+              <a:buNone/>
+            </a:pPr>
+            <a:r>
+              <a:rPr lang="en-US" sz="1250" dirty="0">
                 <a:solidFill>
                   <a:srgbClr val="17364A"/>
                 </a:solidFill>
@@ -4085,9 +5734,116 @@
                 <a:ea typeface="Aptos" pitchFamily="34" charset="-122"/>
                 <a:cs typeface="Aptos" pitchFamily="34" charset="-120"/>
               </a:rPr>
-              <a:t>What would make performance unacceptable for this use case? How will the agency monitor performance after deployment?</a:t>
-            </a:r>
-            <a:endParaRPr lang="en-US" sz="1420" dirty="0"/>
+              <a:t>Advanced validation applies to predictive models, NLP tools, generative summaries, RAG outputs, and agentic workflows.</a:t>
+            </a:r>
+            <a:endParaRPr lang="en-US" sz="1250" dirty="0"/>
+          </a:p>
+        </p:txBody>
+      </p:sp>
+      <p:sp>
+        <p:nvSpPr>
+          <p:cNvPr id="14" name="Shape 12"/>
+          <p:cNvSpPr/>
+          <p:nvPr/>
+        </p:nvSpPr>
+        <p:spPr>
+          <a:xfrm>
+            <a:off x="7909560" y="3520440"/>
+            <a:ext cx="3154680" cy="1737360"/>
+          </a:xfrm>
+          <a:prstGeom prst="roundRect">
+            <a:avLst>
+              <a:gd name="adj" fmla="val 6316"/>
+            </a:avLst>
+          </a:prstGeom>
+          <a:solidFill>
+            <a:srgbClr val="EAF6F8"/>
+          </a:solidFill>
+          <a:ln w="12700">
+            <a:solidFill>
+              <a:srgbClr val="B9D7E6"/>
+            </a:solidFill>
+            <a:prstDash val="solid"/>
+          </a:ln>
+        </p:spPr>
+      </p:sp>
+      <p:sp>
+        <p:nvSpPr>
+          <p:cNvPr id="15" name="Text 13"/>
+          <p:cNvSpPr/>
+          <p:nvPr/>
+        </p:nvSpPr>
+        <p:spPr>
+          <a:xfrm>
+            <a:off x="8074152" y="3666744"/>
+            <a:ext cx="2825496" cy="201168"/>
+          </a:xfrm>
+          <a:prstGeom prst="rect">
+            <a:avLst/>
+          </a:prstGeom>
+          <a:noFill/>
+          <a:ln/>
+        </p:spPr>
+        <p:txBody>
+          <a:bodyPr wrap="square" lIns="0" tIns="0" rIns="0" bIns="0" rtlCol="0" anchor="ctr"/>
+          <a:lstStyle/>
+          <a:p>
+            <a:pPr indent="0" marL="0">
+              <a:buNone/>
+            </a:pPr>
+            <a:r>
+              <a:rPr lang="en-US" sz="950" b="1" dirty="0">
+                <a:solidFill>
+                  <a:srgbClr val="0068B7"/>
+                </a:solidFill>
+                <a:latin typeface="Aptos" pitchFamily="34" charset="0"/>
+                <a:ea typeface="Aptos" pitchFamily="34" charset="-122"/>
+                <a:cs typeface="Aptos" pitchFamily="34" charset="-120"/>
+              </a:rPr>
+              <a:t>Use this for</a:t>
+            </a:r>
+            <a:endParaRPr lang="en-US" sz="950" dirty="0"/>
+          </a:p>
+        </p:txBody>
+      </p:sp>
+      <p:sp>
+        <p:nvSpPr>
+          <p:cNvPr id="16" name="Text 14"/>
+          <p:cNvSpPr/>
+          <p:nvPr/>
+        </p:nvSpPr>
+        <p:spPr>
+          <a:xfrm>
+            <a:off x="8074152" y="3959352"/>
+            <a:ext cx="2825496" cy="1170432"/>
+          </a:xfrm>
+          <a:prstGeom prst="rect">
+            <a:avLst/>
+          </a:prstGeom>
+          <a:noFill/>
+          <a:ln/>
+        </p:spPr>
+        <p:txBody>
+          <a:bodyPr wrap="square" lIns="0" tIns="0" rIns="0" bIns="0" rtlCol="0" anchor="t">
+            <a:normAutofit/>
+          </a:bodyPr>
+          <a:lstStyle/>
+          <a:p>
+            <a:pPr indent="0" marL="0">
+              <a:buNone/>
+            </a:pPr>
+            <a:r>
+              <a:rPr lang="en-US" sz="1250" dirty="0">
+                <a:solidFill>
+                  <a:srgbClr val="17364A"/>
+                </a:solidFill>
+                <a:latin typeface="Aptos" pitchFamily="34" charset="0"/>
+                <a:ea typeface="Aptos" pitchFamily="34" charset="-122"/>
+                <a:cs typeface="Aptos" pitchFamily="34" charset="-120"/>
+              </a:rPr>
+              <a:t>Connect the concept to public health decisions, safeguards, documentation, or implementation work.</a:t>
+            </a:r>
+            <a:endParaRPr lang="en-US" sz="1250" dirty="0"/>
           </a:p>
         </p:txBody>
       </p:sp>
@@ -4150,7 +5906,32 @@
       </p:sp>
       <p:sp>
         <p:nvSpPr>
-          <p:cNvPr id="3" name="Text 1"/>
+          <p:cNvPr id="3" name="Shape 1"/>
+          <p:cNvSpPr/>
+          <p:nvPr/>
+        </p:nvSpPr>
+        <p:spPr>
+          <a:xfrm>
+            <a:off x="0" y="164592"/>
+            <a:ext cx="146304" cy="6693408"/>
+          </a:xfrm>
+          <a:prstGeom prst="rect">
+            <a:avLst/>
+          </a:prstGeom>
+          <a:solidFill>
+            <a:srgbClr val="2F8A28"/>
+          </a:solidFill>
+          <a:ln w="12700">
+            <a:solidFill>
+              <a:srgbClr val="2F8A28"/>
+            </a:solidFill>
+            <a:prstDash val="solid"/>
+          </a:ln>
+        </p:spPr>
+      </p:sp>
+      <p:sp>
+        <p:nvSpPr>
+          <p:cNvPr id="4" name="Text 2"/>
           <p:cNvSpPr/>
           <p:nvPr/>
         </p:nvSpPr>
@@ -4189,7 +5970,7 @@
       </p:sp>
       <p:sp>
         <p:nvSpPr>
-          <p:cNvPr id="4" name="Text 2"/>
+          <p:cNvPr id="5" name="Text 3"/>
           <p:cNvSpPr/>
           <p:nvPr/>
         </p:nvSpPr>
@@ -4228,7 +6009,7 @@
       </p:sp>
       <p:sp>
         <p:nvSpPr>
-          <p:cNvPr id="5" name="Text 3"/>
+          <p:cNvPr id="6" name="Text 4"/>
           <p:cNvSpPr/>
           <p:nvPr/>
         </p:nvSpPr>
@@ -4267,13 +6048,77 @@
       </p:sp>
       <p:sp>
         <p:nvSpPr>
-          <p:cNvPr id="6" name="Text 4"/>
+          <p:cNvPr id="7" name="Shape 5"/>
           <p:cNvSpPr/>
           <p:nvPr/>
         </p:nvSpPr>
         <p:spPr>
           <a:xfrm>
             <a:off x="640080" y="658368"/>
+            <a:ext cx="420624" cy="420624"/>
+          </a:xfrm>
+          <a:prstGeom prst="ellipse">
+            <a:avLst/>
+          </a:prstGeom>
+          <a:solidFill>
+            <a:srgbClr val="0068B7"/>
+          </a:solidFill>
+          <a:ln w="12700">
+            <a:solidFill>
+              <a:srgbClr val="0068B7"/>
+            </a:solidFill>
+            <a:prstDash val="solid"/>
+          </a:ln>
+        </p:spPr>
+      </p:sp>
+      <p:sp>
+        <p:nvSpPr>
+          <p:cNvPr id="8" name="Text 6"/>
+          <p:cNvSpPr/>
+          <p:nvPr/>
+        </p:nvSpPr>
+        <p:spPr>
+          <a:xfrm>
+            <a:off x="640080" y="731520"/>
+            <a:ext cx="420624" cy="164592"/>
+          </a:xfrm>
+          <a:prstGeom prst="rect">
+            <a:avLst/>
+          </a:prstGeom>
+          <a:noFill/>
+          <a:ln/>
+        </p:spPr>
+        <p:txBody>
+          <a:bodyPr wrap="square" lIns="0" tIns="0" rIns="0" bIns="0" rtlCol="0" anchor="ctr"/>
+          <a:lstStyle/>
+          <a:p>
+            <a:pPr algn="ctr" indent="0" marL="0">
+              <a:buNone/>
+            </a:pPr>
+            <a:r>
+              <a:rPr lang="en-US" sz="1100" b="1" dirty="0">
+                <a:solidFill>
+                  <a:srgbClr val="FFFFFF"/>
+                </a:solidFill>
+                <a:latin typeface="Aptos" pitchFamily="34" charset="0"/>
+                <a:ea typeface="Aptos" pitchFamily="34" charset="-122"/>
+                <a:cs typeface="Aptos" pitchFamily="34" charset="-120"/>
+              </a:rPr>
+              <a:t>8</a:t>
+            </a:r>
+            <a:endParaRPr lang="en-US" sz="1100" dirty="0"/>
+          </a:p>
+        </p:txBody>
+      </p:sp>
+      <p:sp>
+        <p:nvSpPr>
+          <p:cNvPr id="9" name="Text 7"/>
+          <p:cNvSpPr/>
+          <p:nvPr/>
+        </p:nvSpPr>
+        <p:spPr>
+          <a:xfrm>
+            <a:off x="640080" y="621792"/>
             <a:ext cx="10881360" cy="566928"/>
           </a:xfrm>
           <a:prstGeom prst="rect">
@@ -4300,7 +6145,7 @@
                 <a:ea typeface="Aptos Display" pitchFamily="34" charset="-122"/>
                 <a:cs typeface="Aptos Display" pitchFamily="34" charset="-120"/>
               </a:rPr>
-              <a:t>Practical Exercise</a:t>
+              <a:t>Reflection Questions</a:t>
             </a:r>
             <a:endParaRPr lang="en-US" sz="2700" dirty="0"/>
           </a:p>
@@ -4308,32 +6153,164 @@
       </p:sp>
       <p:sp>
         <p:nvSpPr>
-          <p:cNvPr id="7" name="Text 5"/>
-          <p:cNvSpPr/>
-          <p:nvPr/>
-        </p:nvSpPr>
-        <p:spPr>
-          <a:xfrm>
-            <a:off x="822960" y="1325880"/>
-            <a:ext cx="10378440" cy="4800600"/>
-          </a:xfrm>
-          <a:prstGeom prst="rect">
-            <a:avLst/>
-          </a:prstGeom>
-          <a:noFill/>
-          <a:ln/>
-        </p:spPr>
-        <p:txBody>
-          <a:bodyPr wrap="square" lIns="1016" tIns="1016" rIns="1016" bIns="1016" rtlCol="0" anchor="t">
+          <p:cNvPr id="10" name="Text 8"/>
+          <p:cNvSpPr/>
+          <p:nvPr/>
+        </p:nvSpPr>
+        <p:spPr>
+          <a:xfrm>
+            <a:off x="868680" y="1417320"/>
+            <a:ext cx="6675120" cy="4434840"/>
+          </a:xfrm>
+          <a:prstGeom prst="rect">
+            <a:avLst/>
+          </a:prstGeom>
+          <a:noFill/>
+          <a:ln/>
+        </p:spPr>
+        <p:txBody>
+          <a:bodyPr wrap="square" lIns="635" tIns="635" rIns="635" bIns="635" rtlCol="0" anchor="t">
             <a:normAutofit/>
           </a:bodyPr>
           <a:lstStyle/>
           <a:p>
+            <a:r>
+              <a:rPr lang="en-US" sz="1700" dirty="0">
+                <a:solidFill>
+                  <a:srgbClr val="17364A"/>
+                </a:solidFill>
+                <a:latin typeface="Aptos" pitchFamily="34" charset="0"/>
+                <a:ea typeface="Aptos" pitchFamily="34" charset="-122"/>
+                <a:cs typeface="Aptos" pitchFamily="34" charset="-120"/>
+              </a:rPr>
+              <a:t>What decision or action will the AI output support?</a:t>
+            </a:r>
+            <a:endParaRPr lang="en-US" sz="1700" dirty="0"/>
+          </a:p>
+          <a:p>
+            <a:r>
+              <a:rPr lang="en-US" sz="1700" dirty="0">
+                <a:solidFill>
+                  <a:srgbClr val="17364A"/>
+                </a:solidFill>
+                <a:latin typeface="Aptos" pitchFamily="34" charset="0"/>
+                <a:ea typeface="Aptos" pitchFamily="34" charset="-122"/>
+                <a:cs typeface="Aptos" pitchFamily="34" charset="-120"/>
+              </a:rPr>
+              <a:t>Which performance metrics match the consequences of error?</a:t>
+            </a:r>
+            <a:endParaRPr lang="en-US" sz="1700" dirty="0"/>
+          </a:p>
+          <a:p>
+            <a:r>
+              <a:rPr lang="en-US" sz="1700" dirty="0">
+                <a:solidFill>
+                  <a:srgbClr val="17364A"/>
+                </a:solidFill>
+                <a:latin typeface="Aptos" pitchFamily="34" charset="0"/>
+                <a:ea typeface="Aptos" pitchFamily="34" charset="-122"/>
+                <a:cs typeface="Aptos" pitchFamily="34" charset="-120"/>
+              </a:rPr>
+              <a:t>Which subgroups, data sources, or settings require separate review?</a:t>
+            </a:r>
+            <a:endParaRPr lang="en-US" sz="1700" dirty="0"/>
+          </a:p>
+        </p:txBody>
+      </p:sp>
+      <p:sp>
+        <p:nvSpPr>
+          <p:cNvPr id="11" name="Shape 9"/>
+          <p:cNvSpPr/>
+          <p:nvPr/>
+        </p:nvSpPr>
+        <p:spPr>
+          <a:xfrm>
+            <a:off x="7909560" y="1417320"/>
+            <a:ext cx="3154680" cy="1828800"/>
+          </a:xfrm>
+          <a:prstGeom prst="roundRect">
+            <a:avLst>
+              <a:gd name="adj" fmla="val 6000"/>
+            </a:avLst>
+          </a:prstGeom>
+          <a:solidFill>
+            <a:srgbClr val="EEF8ED"/>
+          </a:solidFill>
+          <a:ln w="12700">
+            <a:solidFill>
+              <a:srgbClr val="B9D7E6"/>
+            </a:solidFill>
+            <a:prstDash val="solid"/>
+          </a:ln>
+        </p:spPr>
+      </p:sp>
+      <p:sp>
+        <p:nvSpPr>
+          <p:cNvPr id="12" name="Text 10"/>
+          <p:cNvSpPr/>
+          <p:nvPr/>
+        </p:nvSpPr>
+        <p:spPr>
+          <a:xfrm>
+            <a:off x="8074152" y="1563624"/>
+            <a:ext cx="2825496" cy="201168"/>
+          </a:xfrm>
+          <a:prstGeom prst="rect">
+            <a:avLst/>
+          </a:prstGeom>
+          <a:noFill/>
+          <a:ln/>
+        </p:spPr>
+        <p:txBody>
+          <a:bodyPr wrap="square" lIns="0" tIns="0" rIns="0" bIns="0" rtlCol="0" anchor="ctr"/>
+          <a:lstStyle/>
+          <a:p>
             <a:pPr indent="0" marL="0">
               <a:buNone/>
             </a:pPr>
             <a:r>
-              <a:rPr lang="en-US" sz="1420" dirty="0">
+              <a:rPr lang="en-US" sz="950" b="1" dirty="0">
+                <a:solidFill>
+                  <a:srgbClr val="0068B7"/>
+                </a:solidFill>
+                <a:latin typeface="Aptos" pitchFamily="34" charset="0"/>
+                <a:ea typeface="Aptos" pitchFamily="34" charset="-122"/>
+                <a:cs typeface="Aptos" pitchFamily="34" charset="-120"/>
+              </a:rPr>
+              <a:t>Key idea</a:t>
+            </a:r>
+            <a:endParaRPr lang="en-US" sz="950" dirty="0"/>
+          </a:p>
+        </p:txBody>
+      </p:sp>
+      <p:sp>
+        <p:nvSpPr>
+          <p:cNvPr id="13" name="Text 11"/>
+          <p:cNvSpPr/>
+          <p:nvPr/>
+        </p:nvSpPr>
+        <p:spPr>
+          <a:xfrm>
+            <a:off x="8074152" y="1856232"/>
+            <a:ext cx="2825496" cy="1261872"/>
+          </a:xfrm>
+          <a:prstGeom prst="rect">
+            <a:avLst/>
+          </a:prstGeom>
+          <a:noFill/>
+          <a:ln/>
+        </p:spPr>
+        <p:txBody>
+          <a:bodyPr wrap="square" lIns="0" tIns="0" rIns="0" bIns="0" rtlCol="0" anchor="t">
+            <a:normAutofit/>
+          </a:bodyPr>
+          <a:lstStyle/>
+          <a:p>
+            <a:pPr indent="0" marL="0">
+              <a:buNone/>
+            </a:pPr>
+            <a:r>
+              <a:rPr lang="en-US" sz="1250" dirty="0">
                 <a:solidFill>
                   <a:srgbClr val="17364A"/>
                 </a:solidFill>
@@ -4341,9 +6318,116 @@
                 <a:ea typeface="Aptos" pitchFamily="34" charset="-122"/>
                 <a:cs typeface="Aptos" pitchFamily="34" charset="-120"/>
               </a:rPr>
-              <a:t>Create an advanced validation plan for one AI-supported workflow. Include intended use, validation dataset, comparison standard, performance metrics, subgroup analysis, error review, workflow testing, user feedback, monitoring indicators, escalation triggers, and documentation requirements. The plan should clearly explain how validation results will be interpreted and who has authority to approve, limit, pause, or reject the AI use.</a:t>
-            </a:r>
-            <a:endParaRPr lang="en-US" sz="1420" dirty="0"/>
+              <a:t>What decision or action will the AI output support?</a:t>
+            </a:r>
+            <a:endParaRPr lang="en-US" sz="1250" dirty="0"/>
+          </a:p>
+        </p:txBody>
+      </p:sp>
+      <p:sp>
+        <p:nvSpPr>
+          <p:cNvPr id="14" name="Shape 12"/>
+          <p:cNvSpPr/>
+          <p:nvPr/>
+        </p:nvSpPr>
+        <p:spPr>
+          <a:xfrm>
+            <a:off x="7909560" y="3520440"/>
+            <a:ext cx="3154680" cy="1737360"/>
+          </a:xfrm>
+          <a:prstGeom prst="roundRect">
+            <a:avLst>
+              <a:gd name="adj" fmla="val 6316"/>
+            </a:avLst>
+          </a:prstGeom>
+          <a:solidFill>
+            <a:srgbClr val="EAF6F8"/>
+          </a:solidFill>
+          <a:ln w="12700">
+            <a:solidFill>
+              <a:srgbClr val="B9D7E6"/>
+            </a:solidFill>
+            <a:prstDash val="solid"/>
+          </a:ln>
+        </p:spPr>
+      </p:sp>
+      <p:sp>
+        <p:nvSpPr>
+          <p:cNvPr id="15" name="Text 13"/>
+          <p:cNvSpPr/>
+          <p:nvPr/>
+        </p:nvSpPr>
+        <p:spPr>
+          <a:xfrm>
+            <a:off x="8074152" y="3666744"/>
+            <a:ext cx="2825496" cy="201168"/>
+          </a:xfrm>
+          <a:prstGeom prst="rect">
+            <a:avLst/>
+          </a:prstGeom>
+          <a:noFill/>
+          <a:ln/>
+        </p:spPr>
+        <p:txBody>
+          <a:bodyPr wrap="square" lIns="0" tIns="0" rIns="0" bIns="0" rtlCol="0" anchor="ctr"/>
+          <a:lstStyle/>
+          <a:p>
+            <a:pPr indent="0" marL="0">
+              <a:buNone/>
+            </a:pPr>
+            <a:r>
+              <a:rPr lang="en-US" sz="950" b="1" dirty="0">
+                <a:solidFill>
+                  <a:srgbClr val="0068B7"/>
+                </a:solidFill>
+                <a:latin typeface="Aptos" pitchFamily="34" charset="0"/>
+                <a:ea typeface="Aptos" pitchFamily="34" charset="-122"/>
+                <a:cs typeface="Aptos" pitchFamily="34" charset="-120"/>
+              </a:rPr>
+              <a:t>Use this for</a:t>
+            </a:r>
+            <a:endParaRPr lang="en-US" sz="950" dirty="0"/>
+          </a:p>
+        </p:txBody>
+      </p:sp>
+      <p:sp>
+        <p:nvSpPr>
+          <p:cNvPr id="16" name="Text 14"/>
+          <p:cNvSpPr/>
+          <p:nvPr/>
+        </p:nvSpPr>
+        <p:spPr>
+          <a:xfrm>
+            <a:off x="8074152" y="3959352"/>
+            <a:ext cx="2825496" cy="1170432"/>
+          </a:xfrm>
+          <a:prstGeom prst="rect">
+            <a:avLst/>
+          </a:prstGeom>
+          <a:noFill/>
+          <a:ln/>
+        </p:spPr>
+        <p:txBody>
+          <a:bodyPr wrap="square" lIns="0" tIns="0" rIns="0" bIns="0" rtlCol="0" anchor="t">
+            <a:normAutofit/>
+          </a:bodyPr>
+          <a:lstStyle/>
+          <a:p>
+            <a:pPr indent="0" marL="0">
+              <a:buNone/>
+            </a:pPr>
+            <a:r>
+              <a:rPr lang="en-US" sz="1250" dirty="0">
+                <a:solidFill>
+                  <a:srgbClr val="17364A"/>
+                </a:solidFill>
+                <a:latin typeface="Aptos" pitchFamily="34" charset="0"/>
+                <a:ea typeface="Aptos" pitchFamily="34" charset="-122"/>
+                <a:cs typeface="Aptos" pitchFamily="34" charset="-120"/>
+              </a:rPr>
+              <a:t>Connect the concept to public health decisions, safeguards, documentation, or implementation work.</a:t>
+            </a:r>
+            <a:endParaRPr lang="en-US" sz="1250" dirty="0"/>
           </a:p>
         </p:txBody>
       </p:sp>
@@ -4406,7 +6490,32 @@
       </p:sp>
       <p:sp>
         <p:nvSpPr>
-          <p:cNvPr id="3" name="Text 1"/>
+          <p:cNvPr id="3" name="Shape 1"/>
+          <p:cNvSpPr/>
+          <p:nvPr/>
+        </p:nvSpPr>
+        <p:spPr>
+          <a:xfrm>
+            <a:off x="0" y="164592"/>
+            <a:ext cx="146304" cy="6693408"/>
+          </a:xfrm>
+          <a:prstGeom prst="rect">
+            <a:avLst/>
+          </a:prstGeom>
+          <a:solidFill>
+            <a:srgbClr val="2F8A28"/>
+          </a:solidFill>
+          <a:ln w="12700">
+            <a:solidFill>
+              <a:srgbClr val="2F8A28"/>
+            </a:solidFill>
+            <a:prstDash val="solid"/>
+          </a:ln>
+        </p:spPr>
+      </p:sp>
+      <p:sp>
+        <p:nvSpPr>
+          <p:cNvPr id="4" name="Text 2"/>
           <p:cNvSpPr/>
           <p:nvPr/>
         </p:nvSpPr>
@@ -4445,7 +6554,7 @@
       </p:sp>
       <p:sp>
         <p:nvSpPr>
-          <p:cNvPr id="4" name="Text 2"/>
+          <p:cNvPr id="5" name="Text 3"/>
           <p:cNvSpPr/>
           <p:nvPr/>
         </p:nvSpPr>
@@ -4484,7 +6593,7 @@
       </p:sp>
       <p:sp>
         <p:nvSpPr>
-          <p:cNvPr id="5" name="Text 3"/>
+          <p:cNvPr id="6" name="Text 4"/>
           <p:cNvSpPr/>
           <p:nvPr/>
         </p:nvSpPr>
@@ -4523,7 +6632,7 @@
       </p:sp>
       <p:sp>
         <p:nvSpPr>
-          <p:cNvPr id="6" name="Text 4"/>
+          <p:cNvPr id="7" name="Text 5"/>
           <p:cNvSpPr/>
           <p:nvPr/>
         </p:nvSpPr>
@@ -4556,7 +6665,7 @@
                 <a:ea typeface="Aptos Display" pitchFamily="34" charset="-122"/>
                 <a:cs typeface="Aptos Display" pitchFamily="34" charset="-120"/>
               </a:rPr>
-              <a:t>Expected Artifact or Evidence</a:t>
+              <a:t>Reflection Questions Continued</a:t>
             </a:r>
             <a:endParaRPr lang="en-US" sz="2700" dirty="0"/>
           </a:p>
@@ -4564,32 +6673,150 @@
       </p:sp>
       <p:sp>
         <p:nvSpPr>
-          <p:cNvPr id="7" name="Text 5"/>
-          <p:cNvSpPr/>
-          <p:nvPr/>
-        </p:nvSpPr>
-        <p:spPr>
-          <a:xfrm>
-            <a:off x="822960" y="1325880"/>
-            <a:ext cx="10378440" cy="4800600"/>
-          </a:xfrm>
-          <a:prstGeom prst="rect">
-            <a:avLst/>
-          </a:prstGeom>
-          <a:noFill/>
-          <a:ln/>
-        </p:spPr>
-        <p:txBody>
-          <a:bodyPr wrap="square" lIns="1016" tIns="1016" rIns="1016" bIns="1016" rtlCol="0" anchor="t">
+          <p:cNvPr id="8" name="Text 6"/>
+          <p:cNvSpPr/>
+          <p:nvPr/>
+        </p:nvSpPr>
+        <p:spPr>
+          <a:xfrm>
+            <a:off x="868680" y="1417320"/>
+            <a:ext cx="6675120" cy="4434840"/>
+          </a:xfrm>
+          <a:prstGeom prst="rect">
+            <a:avLst/>
+          </a:prstGeom>
+          <a:noFill/>
+          <a:ln/>
+        </p:spPr>
+        <p:txBody>
+          <a:bodyPr wrap="square" lIns="635" tIns="635" rIns="635" bIns="635" rtlCol="0" anchor="t">
             <a:normAutofit/>
           </a:bodyPr>
           <a:lstStyle/>
           <a:p>
+            <a:r>
+              <a:rPr lang="en-US" sz="1700" dirty="0">
+                <a:solidFill>
+                  <a:srgbClr val="17364A"/>
+                </a:solidFill>
+                <a:latin typeface="Aptos" pitchFamily="34" charset="0"/>
+                <a:ea typeface="Aptos" pitchFamily="34" charset="-122"/>
+                <a:cs typeface="Aptos" pitchFamily="34" charset="-120"/>
+              </a:rPr>
+              <a:t>What would make performance unacceptable for this use case?</a:t>
+            </a:r>
+            <a:endParaRPr lang="en-US" sz="1700" dirty="0"/>
+          </a:p>
+          <a:p>
+            <a:r>
+              <a:rPr lang="en-US" sz="1700" dirty="0">
+                <a:solidFill>
+                  <a:srgbClr val="17364A"/>
+                </a:solidFill>
+                <a:latin typeface="Aptos" pitchFamily="34" charset="0"/>
+                <a:ea typeface="Aptos" pitchFamily="34" charset="-122"/>
+                <a:cs typeface="Aptos" pitchFamily="34" charset="-120"/>
+              </a:rPr>
+              <a:t>How will the agency monitor performance after deployment?</a:t>
+            </a:r>
+            <a:endParaRPr lang="en-US" sz="1700" dirty="0"/>
+          </a:p>
+        </p:txBody>
+      </p:sp>
+      <p:sp>
+        <p:nvSpPr>
+          <p:cNvPr id="9" name="Shape 7"/>
+          <p:cNvSpPr/>
+          <p:nvPr/>
+        </p:nvSpPr>
+        <p:spPr>
+          <a:xfrm>
+            <a:off x="7909560" y="1417320"/>
+            <a:ext cx="3154680" cy="1828800"/>
+          </a:xfrm>
+          <a:prstGeom prst="roundRect">
+            <a:avLst>
+              <a:gd name="adj" fmla="val 6000"/>
+            </a:avLst>
+          </a:prstGeom>
+          <a:solidFill>
+            <a:srgbClr val="EEF8ED"/>
+          </a:solidFill>
+          <a:ln w="12700">
+            <a:solidFill>
+              <a:srgbClr val="B9D7E6"/>
+            </a:solidFill>
+            <a:prstDash val="solid"/>
+          </a:ln>
+        </p:spPr>
+      </p:sp>
+      <p:sp>
+        <p:nvSpPr>
+          <p:cNvPr id="10" name="Text 8"/>
+          <p:cNvSpPr/>
+          <p:nvPr/>
+        </p:nvSpPr>
+        <p:spPr>
+          <a:xfrm>
+            <a:off x="8074152" y="1563624"/>
+            <a:ext cx="2825496" cy="201168"/>
+          </a:xfrm>
+          <a:prstGeom prst="rect">
+            <a:avLst/>
+          </a:prstGeom>
+          <a:noFill/>
+          <a:ln/>
+        </p:spPr>
+        <p:txBody>
+          <a:bodyPr wrap="square" lIns="0" tIns="0" rIns="0" bIns="0" rtlCol="0" anchor="ctr"/>
+          <a:lstStyle/>
+          <a:p>
             <a:pPr indent="0" marL="0">
               <a:buNone/>
             </a:pPr>
             <a:r>
-              <a:rPr lang="en-US" sz="1420" dirty="0">
+              <a:rPr lang="en-US" sz="950" b="1" dirty="0">
+                <a:solidFill>
+                  <a:srgbClr val="0068B7"/>
+                </a:solidFill>
+                <a:latin typeface="Aptos" pitchFamily="34" charset="0"/>
+                <a:ea typeface="Aptos" pitchFamily="34" charset="-122"/>
+                <a:cs typeface="Aptos" pitchFamily="34" charset="-120"/>
+              </a:rPr>
+              <a:t>Key idea</a:t>
+            </a:r>
+            <a:endParaRPr lang="en-US" sz="950" dirty="0"/>
+          </a:p>
+        </p:txBody>
+      </p:sp>
+      <p:sp>
+        <p:nvSpPr>
+          <p:cNvPr id="11" name="Text 9"/>
+          <p:cNvSpPr/>
+          <p:nvPr/>
+        </p:nvSpPr>
+        <p:spPr>
+          <a:xfrm>
+            <a:off x="8074152" y="1856232"/>
+            <a:ext cx="2825496" cy="1261872"/>
+          </a:xfrm>
+          <a:prstGeom prst="rect">
+            <a:avLst/>
+          </a:prstGeom>
+          <a:noFill/>
+          <a:ln/>
+        </p:spPr>
+        <p:txBody>
+          <a:bodyPr wrap="square" lIns="0" tIns="0" rIns="0" bIns="0" rtlCol="0" anchor="t">
+            <a:normAutofit/>
+          </a:bodyPr>
+          <a:lstStyle/>
+          <a:p>
+            <a:pPr indent="0" marL="0">
+              <a:buNone/>
+            </a:pPr>
+            <a:r>
+              <a:rPr lang="en-US" sz="1250" dirty="0">
                 <a:solidFill>
                   <a:srgbClr val="17364A"/>
                 </a:solidFill>
@@ -4597,9 +6824,116 @@
                 <a:ea typeface="Aptos" pitchFamily="34" charset="-122"/>
                 <a:cs typeface="Aptos" pitchFamily="34" charset="-120"/>
               </a:rPr>
-              <a:t>Advanced validation plan Metric and error-consequence table Subgroup performance review plan</a:t>
-            </a:r>
-            <a:endParaRPr lang="en-US" sz="1420" dirty="0"/>
+              <a:t>What would make performance unacceptable for this use case?</a:t>
+            </a:r>
+            <a:endParaRPr lang="en-US" sz="1250" dirty="0"/>
+          </a:p>
+        </p:txBody>
+      </p:sp>
+      <p:sp>
+        <p:nvSpPr>
+          <p:cNvPr id="12" name="Shape 10"/>
+          <p:cNvSpPr/>
+          <p:nvPr/>
+        </p:nvSpPr>
+        <p:spPr>
+          <a:xfrm>
+            <a:off x="7909560" y="3520440"/>
+            <a:ext cx="3154680" cy="1737360"/>
+          </a:xfrm>
+          <a:prstGeom prst="roundRect">
+            <a:avLst>
+              <a:gd name="adj" fmla="val 6316"/>
+            </a:avLst>
+          </a:prstGeom>
+          <a:solidFill>
+            <a:srgbClr val="EAF6F8"/>
+          </a:solidFill>
+          <a:ln w="12700">
+            <a:solidFill>
+              <a:srgbClr val="B9D7E6"/>
+            </a:solidFill>
+            <a:prstDash val="solid"/>
+          </a:ln>
+        </p:spPr>
+      </p:sp>
+      <p:sp>
+        <p:nvSpPr>
+          <p:cNvPr id="13" name="Text 11"/>
+          <p:cNvSpPr/>
+          <p:nvPr/>
+        </p:nvSpPr>
+        <p:spPr>
+          <a:xfrm>
+            <a:off x="8074152" y="3666744"/>
+            <a:ext cx="2825496" cy="201168"/>
+          </a:xfrm>
+          <a:prstGeom prst="rect">
+            <a:avLst/>
+          </a:prstGeom>
+          <a:noFill/>
+          <a:ln/>
+        </p:spPr>
+        <p:txBody>
+          <a:bodyPr wrap="square" lIns="0" tIns="0" rIns="0" bIns="0" rtlCol="0" anchor="ctr"/>
+          <a:lstStyle/>
+          <a:p>
+            <a:pPr indent="0" marL="0">
+              <a:buNone/>
+            </a:pPr>
+            <a:r>
+              <a:rPr lang="en-US" sz="950" b="1" dirty="0">
+                <a:solidFill>
+                  <a:srgbClr val="0068B7"/>
+                </a:solidFill>
+                <a:latin typeface="Aptos" pitchFamily="34" charset="0"/>
+                <a:ea typeface="Aptos" pitchFamily="34" charset="-122"/>
+                <a:cs typeface="Aptos" pitchFamily="34" charset="-120"/>
+              </a:rPr>
+              <a:t>Use this for</a:t>
+            </a:r>
+            <a:endParaRPr lang="en-US" sz="950" dirty="0"/>
+          </a:p>
+        </p:txBody>
+      </p:sp>
+      <p:sp>
+        <p:nvSpPr>
+          <p:cNvPr id="14" name="Text 12"/>
+          <p:cNvSpPr/>
+          <p:nvPr/>
+        </p:nvSpPr>
+        <p:spPr>
+          <a:xfrm>
+            <a:off x="8074152" y="3959352"/>
+            <a:ext cx="2825496" cy="1170432"/>
+          </a:xfrm>
+          <a:prstGeom prst="rect">
+            <a:avLst/>
+          </a:prstGeom>
+          <a:noFill/>
+          <a:ln/>
+        </p:spPr>
+        <p:txBody>
+          <a:bodyPr wrap="square" lIns="0" tIns="0" rIns="0" bIns="0" rtlCol="0" anchor="t">
+            <a:normAutofit/>
+          </a:bodyPr>
+          <a:lstStyle/>
+          <a:p>
+            <a:pPr indent="0" marL="0">
+              <a:buNone/>
+            </a:pPr>
+            <a:r>
+              <a:rPr lang="en-US" sz="1250" dirty="0">
+                <a:solidFill>
+                  <a:srgbClr val="17364A"/>
+                </a:solidFill>
+                <a:latin typeface="Aptos" pitchFamily="34" charset="0"/>
+                <a:ea typeface="Aptos" pitchFamily="34" charset="-122"/>
+                <a:cs typeface="Aptos" pitchFamily="34" charset="-120"/>
+              </a:rPr>
+              <a:t>Connect the concept to public health decisions, safeguards, documentation, or implementation work.</a:t>
+            </a:r>
+            <a:endParaRPr lang="en-US" sz="1250" dirty="0"/>
           </a:p>
         </p:txBody>
       </p:sp>
@@ -4662,7 +6996,32 @@
       </p:sp>
       <p:sp>
         <p:nvSpPr>
-          <p:cNvPr id="3" name="Text 1"/>
+          <p:cNvPr id="3" name="Shape 1"/>
+          <p:cNvSpPr/>
+          <p:nvPr/>
+        </p:nvSpPr>
+        <p:spPr>
+          <a:xfrm>
+            <a:off x="0" y="164592"/>
+            <a:ext cx="146304" cy="6693408"/>
+          </a:xfrm>
+          <a:prstGeom prst="rect">
+            <a:avLst/>
+          </a:prstGeom>
+          <a:solidFill>
+            <a:srgbClr val="2F8A28"/>
+          </a:solidFill>
+          <a:ln w="12700">
+            <a:solidFill>
+              <a:srgbClr val="2F8A28"/>
+            </a:solidFill>
+            <a:prstDash val="solid"/>
+          </a:ln>
+        </p:spPr>
+      </p:sp>
+      <p:sp>
+        <p:nvSpPr>
+          <p:cNvPr id="4" name="Text 2"/>
           <p:cNvSpPr/>
           <p:nvPr/>
         </p:nvSpPr>
@@ -4701,7 +7060,7 @@
       </p:sp>
       <p:sp>
         <p:nvSpPr>
-          <p:cNvPr id="4" name="Text 2"/>
+          <p:cNvPr id="5" name="Text 3"/>
           <p:cNvSpPr/>
           <p:nvPr/>
         </p:nvSpPr>
@@ -4740,7 +7099,7 @@
       </p:sp>
       <p:sp>
         <p:nvSpPr>
-          <p:cNvPr id="5" name="Text 3"/>
+          <p:cNvPr id="6" name="Text 4"/>
           <p:cNvSpPr/>
           <p:nvPr/>
         </p:nvSpPr>
@@ -4779,13 +7138,77 @@
       </p:sp>
       <p:sp>
         <p:nvSpPr>
-          <p:cNvPr id="6" name="Text 4"/>
+          <p:cNvPr id="7" name="Shape 5"/>
           <p:cNvSpPr/>
           <p:nvPr/>
         </p:nvSpPr>
         <p:spPr>
           <a:xfrm>
             <a:off x="640080" y="658368"/>
+            <a:ext cx="420624" cy="420624"/>
+          </a:xfrm>
+          <a:prstGeom prst="ellipse">
+            <a:avLst/>
+          </a:prstGeom>
+          <a:solidFill>
+            <a:srgbClr val="0068B7"/>
+          </a:solidFill>
+          <a:ln w="12700">
+            <a:solidFill>
+              <a:srgbClr val="0068B7"/>
+            </a:solidFill>
+            <a:prstDash val="solid"/>
+          </a:ln>
+        </p:spPr>
+      </p:sp>
+      <p:sp>
+        <p:nvSpPr>
+          <p:cNvPr id="8" name="Text 6"/>
+          <p:cNvSpPr/>
+          <p:nvPr/>
+        </p:nvSpPr>
+        <p:spPr>
+          <a:xfrm>
+            <a:off x="640080" y="731520"/>
+            <a:ext cx="420624" cy="164592"/>
+          </a:xfrm>
+          <a:prstGeom prst="rect">
+            <a:avLst/>
+          </a:prstGeom>
+          <a:noFill/>
+          <a:ln/>
+        </p:spPr>
+        <p:txBody>
+          <a:bodyPr wrap="square" lIns="0" tIns="0" rIns="0" bIns="0" rtlCol="0" anchor="ctr"/>
+          <a:lstStyle/>
+          <a:p>
+            <a:pPr algn="ctr" indent="0" marL="0">
+              <a:buNone/>
+            </a:pPr>
+            <a:r>
+              <a:rPr lang="en-US" sz="1100" b="1" dirty="0">
+                <a:solidFill>
+                  <a:srgbClr val="FFFFFF"/>
+                </a:solidFill>
+                <a:latin typeface="Aptos" pitchFamily="34" charset="0"/>
+                <a:ea typeface="Aptos" pitchFamily="34" charset="-122"/>
+                <a:cs typeface="Aptos" pitchFamily="34" charset="-120"/>
+              </a:rPr>
+              <a:t>9</a:t>
+            </a:r>
+            <a:endParaRPr lang="en-US" sz="1100" dirty="0"/>
+          </a:p>
+        </p:txBody>
+      </p:sp>
+      <p:sp>
+        <p:nvSpPr>
+          <p:cNvPr id="9" name="Text 7"/>
+          <p:cNvSpPr/>
+          <p:nvPr/>
+        </p:nvSpPr>
+        <p:spPr>
+          <a:xfrm>
+            <a:off x="640080" y="621792"/>
             <a:ext cx="10881360" cy="566928"/>
           </a:xfrm>
           <a:prstGeom prst="rect">
@@ -4812,7 +7235,7 @@
                 <a:ea typeface="Aptos Display" pitchFamily="34" charset="-122"/>
                 <a:cs typeface="Aptos Display" pitchFamily="34" charset="-120"/>
               </a:rPr>
-              <a:t>Expected Artifact or Evidence Continued</a:t>
+              <a:t>Practical Exercise</a:t>
             </a:r>
             <a:endParaRPr lang="en-US" sz="2700" dirty="0"/>
           </a:p>
@@ -4820,32 +7243,164 @@
       </p:sp>
       <p:sp>
         <p:nvSpPr>
-          <p:cNvPr id="7" name="Text 5"/>
-          <p:cNvSpPr/>
-          <p:nvPr/>
-        </p:nvSpPr>
-        <p:spPr>
-          <a:xfrm>
-            <a:off x="822960" y="1325880"/>
-            <a:ext cx="10378440" cy="4800600"/>
-          </a:xfrm>
-          <a:prstGeom prst="rect">
-            <a:avLst/>
-          </a:prstGeom>
-          <a:noFill/>
-          <a:ln/>
-        </p:spPr>
-        <p:txBody>
-          <a:bodyPr wrap="square" lIns="1016" tIns="1016" rIns="1016" bIns="1016" rtlCol="0" anchor="t">
+          <p:cNvPr id="10" name="Text 8"/>
+          <p:cNvSpPr/>
+          <p:nvPr/>
+        </p:nvSpPr>
+        <p:spPr>
+          <a:xfrm>
+            <a:off x="868680" y="1417320"/>
+            <a:ext cx="6675120" cy="4434840"/>
+          </a:xfrm>
+          <a:prstGeom prst="rect">
+            <a:avLst/>
+          </a:prstGeom>
+          <a:noFill/>
+          <a:ln/>
+        </p:spPr>
+        <p:txBody>
+          <a:bodyPr wrap="square" lIns="635" tIns="635" rIns="635" bIns="635" rtlCol="0" anchor="t">
             <a:normAutofit/>
           </a:bodyPr>
           <a:lstStyle/>
           <a:p>
+            <a:r>
+              <a:rPr lang="en-US" sz="1700" dirty="0">
+                <a:solidFill>
+                  <a:srgbClr val="17364A"/>
+                </a:solidFill>
+                <a:latin typeface="Aptos" pitchFamily="34" charset="0"/>
+                <a:ea typeface="Aptos" pitchFamily="34" charset="-122"/>
+                <a:cs typeface="Aptos" pitchFamily="34" charset="-120"/>
+              </a:rPr>
+              <a:t>Create an advanced validation plan for one AI-supported workflow.</a:t>
+            </a:r>
+            <a:endParaRPr lang="en-US" sz="1700" dirty="0"/>
+          </a:p>
+          <a:p>
+            <a:r>
+              <a:rPr lang="en-US" sz="1700" dirty="0">
+                <a:solidFill>
+                  <a:srgbClr val="17364A"/>
+                </a:solidFill>
+                <a:latin typeface="Aptos" pitchFamily="34" charset="0"/>
+                <a:ea typeface="Aptos" pitchFamily="34" charset="-122"/>
+                <a:cs typeface="Aptos" pitchFamily="34" charset="-120"/>
+              </a:rPr>
+              <a:t>Include intended use, validation dataset, comparison standard, performance metrics, subgroup analysis, error review,.</a:t>
+            </a:r>
+            <a:endParaRPr lang="en-US" sz="1700" dirty="0"/>
+          </a:p>
+          <a:p>
+            <a:r>
+              <a:rPr lang="en-US" sz="1700" dirty="0">
+                <a:solidFill>
+                  <a:srgbClr val="17364A"/>
+                </a:solidFill>
+                <a:latin typeface="Aptos" pitchFamily="34" charset="0"/>
+                <a:ea typeface="Aptos" pitchFamily="34" charset="-122"/>
+                <a:cs typeface="Aptos" pitchFamily="34" charset="-120"/>
+              </a:rPr>
+              <a:t>The plan should clearly explain how validation results will be interpreted and who has authority to approve, limit, pause,.</a:t>
+            </a:r>
+            <a:endParaRPr lang="en-US" sz="1700" dirty="0"/>
+          </a:p>
+        </p:txBody>
+      </p:sp>
+      <p:sp>
+        <p:nvSpPr>
+          <p:cNvPr id="11" name="Shape 9"/>
+          <p:cNvSpPr/>
+          <p:nvPr/>
+        </p:nvSpPr>
+        <p:spPr>
+          <a:xfrm>
+            <a:off x="7909560" y="1417320"/>
+            <a:ext cx="3154680" cy="1828800"/>
+          </a:xfrm>
+          <a:prstGeom prst="roundRect">
+            <a:avLst>
+              <a:gd name="adj" fmla="val 6000"/>
+            </a:avLst>
+          </a:prstGeom>
+          <a:solidFill>
+            <a:srgbClr val="EEF8ED"/>
+          </a:solidFill>
+          <a:ln w="12700">
+            <a:solidFill>
+              <a:srgbClr val="B9D7E6"/>
+            </a:solidFill>
+            <a:prstDash val="solid"/>
+          </a:ln>
+        </p:spPr>
+      </p:sp>
+      <p:sp>
+        <p:nvSpPr>
+          <p:cNvPr id="12" name="Text 10"/>
+          <p:cNvSpPr/>
+          <p:nvPr/>
+        </p:nvSpPr>
+        <p:spPr>
+          <a:xfrm>
+            <a:off x="8074152" y="1563624"/>
+            <a:ext cx="2825496" cy="201168"/>
+          </a:xfrm>
+          <a:prstGeom prst="rect">
+            <a:avLst/>
+          </a:prstGeom>
+          <a:noFill/>
+          <a:ln/>
+        </p:spPr>
+        <p:txBody>
+          <a:bodyPr wrap="square" lIns="0" tIns="0" rIns="0" bIns="0" rtlCol="0" anchor="ctr"/>
+          <a:lstStyle/>
+          <a:p>
             <a:pPr indent="0" marL="0">
               <a:buNone/>
             </a:pPr>
             <a:r>
-              <a:rPr lang="en-US" sz="1420" dirty="0">
+              <a:rPr lang="en-US" sz="950" b="1" dirty="0">
+                <a:solidFill>
+                  <a:srgbClr val="0068B7"/>
+                </a:solidFill>
+                <a:latin typeface="Aptos" pitchFamily="34" charset="0"/>
+                <a:ea typeface="Aptos" pitchFamily="34" charset="-122"/>
+                <a:cs typeface="Aptos" pitchFamily="34" charset="-120"/>
+              </a:rPr>
+              <a:t>Key idea</a:t>
+            </a:r>
+            <a:endParaRPr lang="en-US" sz="950" dirty="0"/>
+          </a:p>
+        </p:txBody>
+      </p:sp>
+      <p:sp>
+        <p:nvSpPr>
+          <p:cNvPr id="13" name="Text 11"/>
+          <p:cNvSpPr/>
+          <p:nvPr/>
+        </p:nvSpPr>
+        <p:spPr>
+          <a:xfrm>
+            <a:off x="8074152" y="1856232"/>
+            <a:ext cx="2825496" cy="1261872"/>
+          </a:xfrm>
+          <a:prstGeom prst="rect">
+            <a:avLst/>
+          </a:prstGeom>
+          <a:noFill/>
+          <a:ln/>
+        </p:spPr>
+        <p:txBody>
+          <a:bodyPr wrap="square" lIns="0" tIns="0" rIns="0" bIns="0" rtlCol="0" anchor="t">
+            <a:normAutofit/>
+          </a:bodyPr>
+          <a:lstStyle/>
+          <a:p>
+            <a:pPr indent="0" marL="0">
+              <a:buNone/>
+            </a:pPr>
+            <a:r>
+              <a:rPr lang="en-US" sz="1250" dirty="0">
                 <a:solidFill>
                   <a:srgbClr val="17364A"/>
                 </a:solidFill>
@@ -4853,9 +7408,116 @@
                 <a:ea typeface="Aptos" pitchFamily="34" charset="-122"/>
                 <a:cs typeface="Aptos" pitchFamily="34" charset="-120"/>
               </a:rPr>
-              <a:t>Post-deployment monitoring schedule</a:t>
-            </a:r>
-            <a:endParaRPr lang="en-US" sz="1420" dirty="0"/>
+              <a:t>Create an advanced validation plan for one AI-supported workflow.</a:t>
+            </a:r>
+            <a:endParaRPr lang="en-US" sz="1250" dirty="0"/>
+          </a:p>
+        </p:txBody>
+      </p:sp>
+      <p:sp>
+        <p:nvSpPr>
+          <p:cNvPr id="14" name="Shape 12"/>
+          <p:cNvSpPr/>
+          <p:nvPr/>
+        </p:nvSpPr>
+        <p:spPr>
+          <a:xfrm>
+            <a:off x="7909560" y="3520440"/>
+            <a:ext cx="3154680" cy="1737360"/>
+          </a:xfrm>
+          <a:prstGeom prst="roundRect">
+            <a:avLst>
+              <a:gd name="adj" fmla="val 6316"/>
+            </a:avLst>
+          </a:prstGeom>
+          <a:solidFill>
+            <a:srgbClr val="EAF6F8"/>
+          </a:solidFill>
+          <a:ln w="12700">
+            <a:solidFill>
+              <a:srgbClr val="B9D7E6"/>
+            </a:solidFill>
+            <a:prstDash val="solid"/>
+          </a:ln>
+        </p:spPr>
+      </p:sp>
+      <p:sp>
+        <p:nvSpPr>
+          <p:cNvPr id="15" name="Text 13"/>
+          <p:cNvSpPr/>
+          <p:nvPr/>
+        </p:nvSpPr>
+        <p:spPr>
+          <a:xfrm>
+            <a:off x="8074152" y="3666744"/>
+            <a:ext cx="2825496" cy="201168"/>
+          </a:xfrm>
+          <a:prstGeom prst="rect">
+            <a:avLst/>
+          </a:prstGeom>
+          <a:noFill/>
+          <a:ln/>
+        </p:spPr>
+        <p:txBody>
+          <a:bodyPr wrap="square" lIns="0" tIns="0" rIns="0" bIns="0" rtlCol="0" anchor="ctr"/>
+          <a:lstStyle/>
+          <a:p>
+            <a:pPr indent="0" marL="0">
+              <a:buNone/>
+            </a:pPr>
+            <a:r>
+              <a:rPr lang="en-US" sz="950" b="1" dirty="0">
+                <a:solidFill>
+                  <a:srgbClr val="0068B7"/>
+                </a:solidFill>
+                <a:latin typeface="Aptos" pitchFamily="34" charset="0"/>
+                <a:ea typeface="Aptos" pitchFamily="34" charset="-122"/>
+                <a:cs typeface="Aptos" pitchFamily="34" charset="-120"/>
+              </a:rPr>
+              <a:t>Use this for</a:t>
+            </a:r>
+            <a:endParaRPr lang="en-US" sz="950" dirty="0"/>
+          </a:p>
+        </p:txBody>
+      </p:sp>
+      <p:sp>
+        <p:nvSpPr>
+          <p:cNvPr id="16" name="Text 14"/>
+          <p:cNvSpPr/>
+          <p:nvPr/>
+        </p:nvSpPr>
+        <p:spPr>
+          <a:xfrm>
+            <a:off x="8074152" y="3959352"/>
+            <a:ext cx="2825496" cy="1170432"/>
+          </a:xfrm>
+          <a:prstGeom prst="rect">
+            <a:avLst/>
+          </a:prstGeom>
+          <a:noFill/>
+          <a:ln/>
+        </p:spPr>
+        <p:txBody>
+          <a:bodyPr wrap="square" lIns="0" tIns="0" rIns="0" bIns="0" rtlCol="0" anchor="t">
+            <a:normAutofit/>
+          </a:bodyPr>
+          <a:lstStyle/>
+          <a:p>
+            <a:pPr indent="0" marL="0">
+              <a:buNone/>
+            </a:pPr>
+            <a:r>
+              <a:rPr lang="en-US" sz="1250" dirty="0">
+                <a:solidFill>
+                  <a:srgbClr val="17364A"/>
+                </a:solidFill>
+                <a:latin typeface="Aptos" pitchFamily="34" charset="0"/>
+                <a:ea typeface="Aptos" pitchFamily="34" charset="-122"/>
+                <a:cs typeface="Aptos" pitchFamily="34" charset="-120"/>
+              </a:rPr>
+              <a:t>Connect the concept to public health decisions, safeguards, documentation, or implementation work.</a:t>
+            </a:r>
+            <a:endParaRPr lang="en-US" sz="1250" dirty="0"/>
           </a:p>
         </p:txBody>
       </p:sp>
@@ -4918,7 +7580,32 @@
       </p:sp>
       <p:sp>
         <p:nvSpPr>
-          <p:cNvPr id="3" name="Text 1"/>
+          <p:cNvPr id="3" name="Shape 1"/>
+          <p:cNvSpPr/>
+          <p:nvPr/>
+        </p:nvSpPr>
+        <p:spPr>
+          <a:xfrm>
+            <a:off x="0" y="164592"/>
+            <a:ext cx="146304" cy="6693408"/>
+          </a:xfrm>
+          <a:prstGeom prst="rect">
+            <a:avLst/>
+          </a:prstGeom>
+          <a:solidFill>
+            <a:srgbClr val="2F8A28"/>
+          </a:solidFill>
+          <a:ln w="12700">
+            <a:solidFill>
+              <a:srgbClr val="2F8A28"/>
+            </a:solidFill>
+            <a:prstDash val="solid"/>
+          </a:ln>
+        </p:spPr>
+      </p:sp>
+      <p:sp>
+        <p:nvSpPr>
+          <p:cNvPr id="4" name="Text 2"/>
           <p:cNvSpPr/>
           <p:nvPr/>
         </p:nvSpPr>
@@ -4957,7 +7644,7 @@
       </p:sp>
       <p:sp>
         <p:nvSpPr>
-          <p:cNvPr id="4" name="Text 2"/>
+          <p:cNvPr id="5" name="Text 3"/>
           <p:cNvSpPr/>
           <p:nvPr/>
         </p:nvSpPr>
@@ -4996,7 +7683,7 @@
       </p:sp>
       <p:sp>
         <p:nvSpPr>
-          <p:cNvPr id="5" name="Text 3"/>
+          <p:cNvPr id="6" name="Text 4"/>
           <p:cNvSpPr/>
           <p:nvPr/>
         </p:nvSpPr>
@@ -5035,13 +7722,77 @@
       </p:sp>
       <p:sp>
         <p:nvSpPr>
-          <p:cNvPr id="6" name="Text 4"/>
+          <p:cNvPr id="7" name="Shape 5"/>
           <p:cNvSpPr/>
           <p:nvPr/>
         </p:nvSpPr>
         <p:spPr>
           <a:xfrm>
             <a:off x="640080" y="658368"/>
+            <a:ext cx="420624" cy="420624"/>
+          </a:xfrm>
+          <a:prstGeom prst="ellipse">
+            <a:avLst/>
+          </a:prstGeom>
+          <a:solidFill>
+            <a:srgbClr val="0068B7"/>
+          </a:solidFill>
+          <a:ln w="12700">
+            <a:solidFill>
+              <a:srgbClr val="0068B7"/>
+            </a:solidFill>
+            <a:prstDash val="solid"/>
+          </a:ln>
+        </p:spPr>
+      </p:sp>
+      <p:sp>
+        <p:nvSpPr>
+          <p:cNvPr id="8" name="Text 6"/>
+          <p:cNvSpPr/>
+          <p:nvPr/>
+        </p:nvSpPr>
+        <p:spPr>
+          <a:xfrm>
+            <a:off x="640080" y="731520"/>
+            <a:ext cx="420624" cy="164592"/>
+          </a:xfrm>
+          <a:prstGeom prst="rect">
+            <a:avLst/>
+          </a:prstGeom>
+          <a:noFill/>
+          <a:ln/>
+        </p:spPr>
+        <p:txBody>
+          <a:bodyPr wrap="square" lIns="0" tIns="0" rIns="0" bIns="0" rtlCol="0" anchor="ctr"/>
+          <a:lstStyle/>
+          <a:p>
+            <a:pPr algn="ctr" indent="0" marL="0">
+              <a:buNone/>
+            </a:pPr>
+            <a:r>
+              <a:rPr lang="en-US" sz="1100" b="1" dirty="0">
+                <a:solidFill>
+                  <a:srgbClr val="FFFFFF"/>
+                </a:solidFill>
+                <a:latin typeface="Aptos" pitchFamily="34" charset="0"/>
+                <a:ea typeface="Aptos" pitchFamily="34" charset="-122"/>
+                <a:cs typeface="Aptos" pitchFamily="34" charset="-120"/>
+              </a:rPr>
+              <a:t>10</a:t>
+            </a:r>
+            <a:endParaRPr lang="en-US" sz="1100" dirty="0"/>
+          </a:p>
+        </p:txBody>
+      </p:sp>
+      <p:sp>
+        <p:nvSpPr>
+          <p:cNvPr id="9" name="Text 7"/>
+          <p:cNvSpPr/>
+          <p:nvPr/>
+        </p:nvSpPr>
+        <p:spPr>
+          <a:xfrm>
+            <a:off x="640080" y="621792"/>
             <a:ext cx="10881360" cy="566928"/>
           </a:xfrm>
           <a:prstGeom prst="rect">
@@ -5068,7 +7819,7 @@
                 <a:ea typeface="Aptos Display" pitchFamily="34" charset="-122"/>
                 <a:cs typeface="Aptos Display" pitchFamily="34" charset="-120"/>
               </a:rPr>
-              <a:t>Expected Assignment</a:t>
+              <a:t>Expected Artifact or Evidence</a:t>
             </a:r>
             <a:endParaRPr lang="en-US" sz="2700" dirty="0"/>
           </a:p>
@@ -5076,14 +7827,14 @@
       </p:sp>
       <p:sp>
         <p:nvSpPr>
-          <p:cNvPr id="7" name="Text 5"/>
-          <p:cNvSpPr/>
-          <p:nvPr/>
-        </p:nvSpPr>
-        <p:spPr>
-          <a:xfrm>
-            <a:off x="822960" y="1325880"/>
-            <a:ext cx="10378440" cy="4800600"/>
+          <p:cNvPr id="10" name="Text 8"/>
+          <p:cNvSpPr/>
+          <p:nvPr/>
+        </p:nvSpPr>
+        <p:spPr>
+          <a:xfrm>
+            <a:off x="868680" y="1417320"/>
+            <a:ext cx="6675120" cy="4434840"/>
           </a:xfrm>
           <a:prstGeom prst="rect">
             <a:avLst/>
@@ -5098,7 +7849,7 @@
           <a:lstStyle/>
           <a:p>
             <a:r>
-              <a:rPr lang="en-US" sz="1450" dirty="0">
+              <a:rPr lang="en-US" sz="1700" dirty="0">
                 <a:solidFill>
                   <a:srgbClr val="17364A"/>
                 </a:solidFill>
@@ -5108,11 +7859,11 @@
               </a:rPr>
               <a:t>Advanced validation plan</a:t>
             </a:r>
-            <a:endParaRPr lang="en-US" sz="1450" dirty="0"/>
-          </a:p>
-          <a:p>
-            <a:r>
-              <a:rPr lang="en-US" sz="1450" dirty="0">
+            <a:endParaRPr lang="en-US" sz="1700" dirty="0"/>
+          </a:p>
+          <a:p>
+            <a:r>
+              <a:rPr lang="en-US" sz="1700" dirty="0">
                 <a:solidFill>
                   <a:srgbClr val="17364A"/>
                 </a:solidFill>
@@ -5122,11 +7873,11 @@
               </a:rPr>
               <a:t>Metric and error-consequence table</a:t>
             </a:r>
-            <a:endParaRPr lang="en-US" sz="1450" dirty="0"/>
-          </a:p>
-          <a:p>
-            <a:r>
-              <a:rPr lang="en-US" sz="1450" dirty="0">
+            <a:endParaRPr lang="en-US" sz="1700" dirty="0"/>
+          </a:p>
+          <a:p>
+            <a:r>
+              <a:rPr lang="en-US" sz="1700" dirty="0">
                 <a:solidFill>
                   <a:srgbClr val="17364A"/>
                 </a:solidFill>
@@ -5136,11 +7887,104 @@
               </a:rPr>
               <a:t>Subgroup performance review plan</a:t>
             </a:r>
-            <a:endParaRPr lang="en-US" sz="1450" dirty="0"/>
-          </a:p>
-          <a:p>
-            <a:r>
-              <a:rPr lang="en-US" sz="1450" dirty="0">
+            <a:endParaRPr lang="en-US" sz="1700" dirty="0"/>
+          </a:p>
+        </p:txBody>
+      </p:sp>
+      <p:sp>
+        <p:nvSpPr>
+          <p:cNvPr id="11" name="Shape 9"/>
+          <p:cNvSpPr/>
+          <p:nvPr/>
+        </p:nvSpPr>
+        <p:spPr>
+          <a:xfrm>
+            <a:off x="7909560" y="1417320"/>
+            <a:ext cx="3154680" cy="1828800"/>
+          </a:xfrm>
+          <a:prstGeom prst="roundRect">
+            <a:avLst>
+              <a:gd name="adj" fmla="val 6000"/>
+            </a:avLst>
+          </a:prstGeom>
+          <a:solidFill>
+            <a:srgbClr val="EEF8ED"/>
+          </a:solidFill>
+          <a:ln w="12700">
+            <a:solidFill>
+              <a:srgbClr val="B9D7E6"/>
+            </a:solidFill>
+            <a:prstDash val="solid"/>
+          </a:ln>
+        </p:spPr>
+      </p:sp>
+      <p:sp>
+        <p:nvSpPr>
+          <p:cNvPr id="12" name="Text 10"/>
+          <p:cNvSpPr/>
+          <p:nvPr/>
+        </p:nvSpPr>
+        <p:spPr>
+          <a:xfrm>
+            <a:off x="8074152" y="1563624"/>
+            <a:ext cx="2825496" cy="201168"/>
+          </a:xfrm>
+          <a:prstGeom prst="rect">
+            <a:avLst/>
+          </a:prstGeom>
+          <a:noFill/>
+          <a:ln/>
+        </p:spPr>
+        <p:txBody>
+          <a:bodyPr wrap="square" lIns="0" tIns="0" rIns="0" bIns="0" rtlCol="0" anchor="ctr"/>
+          <a:lstStyle/>
+          <a:p>
+            <a:pPr indent="0" marL="0">
+              <a:buNone/>
+            </a:pPr>
+            <a:r>
+              <a:rPr lang="en-US" sz="950" b="1" dirty="0">
+                <a:solidFill>
+                  <a:srgbClr val="0068B7"/>
+                </a:solidFill>
+                <a:latin typeface="Aptos" pitchFamily="34" charset="0"/>
+                <a:ea typeface="Aptos" pitchFamily="34" charset="-122"/>
+                <a:cs typeface="Aptos" pitchFamily="34" charset="-120"/>
+              </a:rPr>
+              <a:t>Key idea</a:t>
+            </a:r>
+            <a:endParaRPr lang="en-US" sz="950" dirty="0"/>
+          </a:p>
+        </p:txBody>
+      </p:sp>
+      <p:sp>
+        <p:nvSpPr>
+          <p:cNvPr id="13" name="Text 11"/>
+          <p:cNvSpPr/>
+          <p:nvPr/>
+        </p:nvSpPr>
+        <p:spPr>
+          <a:xfrm>
+            <a:off x="8074152" y="1856232"/>
+            <a:ext cx="2825496" cy="1261872"/>
+          </a:xfrm>
+          <a:prstGeom prst="rect">
+            <a:avLst/>
+          </a:prstGeom>
+          <a:noFill/>
+          <a:ln/>
+        </p:spPr>
+        <p:txBody>
+          <a:bodyPr wrap="square" lIns="0" tIns="0" rIns="0" bIns="0" rtlCol="0" anchor="t">
+            <a:normAutofit/>
+          </a:bodyPr>
+          <a:lstStyle/>
+          <a:p>
+            <a:pPr indent="0" marL="0">
+              <a:buNone/>
+            </a:pPr>
+            <a:r>
+              <a:rPr lang="en-US" sz="1250" dirty="0">
                 <a:solidFill>
                   <a:srgbClr val="17364A"/>
                 </a:solidFill>
@@ -5148,9 +7992,116 @@
                 <a:ea typeface="Aptos" pitchFamily="34" charset="-122"/>
                 <a:cs typeface="Aptos" pitchFamily="34" charset="-120"/>
               </a:rPr>
-              <a:t>Post-deployment monitoring schedule</a:t>
-            </a:r>
-            <a:endParaRPr lang="en-US" sz="1450" dirty="0"/>
+              <a:t>Advanced validation plan</a:t>
+            </a:r>
+            <a:endParaRPr lang="en-US" sz="1250" dirty="0"/>
+          </a:p>
+        </p:txBody>
+      </p:sp>
+      <p:sp>
+        <p:nvSpPr>
+          <p:cNvPr id="14" name="Shape 12"/>
+          <p:cNvSpPr/>
+          <p:nvPr/>
+        </p:nvSpPr>
+        <p:spPr>
+          <a:xfrm>
+            <a:off x="7909560" y="3520440"/>
+            <a:ext cx="3154680" cy="1737360"/>
+          </a:xfrm>
+          <a:prstGeom prst="roundRect">
+            <a:avLst>
+              <a:gd name="adj" fmla="val 6316"/>
+            </a:avLst>
+          </a:prstGeom>
+          <a:solidFill>
+            <a:srgbClr val="EAF6F8"/>
+          </a:solidFill>
+          <a:ln w="12700">
+            <a:solidFill>
+              <a:srgbClr val="B9D7E6"/>
+            </a:solidFill>
+            <a:prstDash val="solid"/>
+          </a:ln>
+        </p:spPr>
+      </p:sp>
+      <p:sp>
+        <p:nvSpPr>
+          <p:cNvPr id="15" name="Text 13"/>
+          <p:cNvSpPr/>
+          <p:nvPr/>
+        </p:nvSpPr>
+        <p:spPr>
+          <a:xfrm>
+            <a:off x="8074152" y="3666744"/>
+            <a:ext cx="2825496" cy="201168"/>
+          </a:xfrm>
+          <a:prstGeom prst="rect">
+            <a:avLst/>
+          </a:prstGeom>
+          <a:noFill/>
+          <a:ln/>
+        </p:spPr>
+        <p:txBody>
+          <a:bodyPr wrap="square" lIns="0" tIns="0" rIns="0" bIns="0" rtlCol="0" anchor="ctr"/>
+          <a:lstStyle/>
+          <a:p>
+            <a:pPr indent="0" marL="0">
+              <a:buNone/>
+            </a:pPr>
+            <a:r>
+              <a:rPr lang="en-US" sz="950" b="1" dirty="0">
+                <a:solidFill>
+                  <a:srgbClr val="0068B7"/>
+                </a:solidFill>
+                <a:latin typeface="Aptos" pitchFamily="34" charset="0"/>
+                <a:ea typeface="Aptos" pitchFamily="34" charset="-122"/>
+                <a:cs typeface="Aptos" pitchFamily="34" charset="-120"/>
+              </a:rPr>
+              <a:t>Use this for</a:t>
+            </a:r>
+            <a:endParaRPr lang="en-US" sz="950" dirty="0"/>
+          </a:p>
+        </p:txBody>
+      </p:sp>
+      <p:sp>
+        <p:nvSpPr>
+          <p:cNvPr id="16" name="Text 14"/>
+          <p:cNvSpPr/>
+          <p:nvPr/>
+        </p:nvSpPr>
+        <p:spPr>
+          <a:xfrm>
+            <a:off x="8074152" y="3959352"/>
+            <a:ext cx="2825496" cy="1170432"/>
+          </a:xfrm>
+          <a:prstGeom prst="rect">
+            <a:avLst/>
+          </a:prstGeom>
+          <a:noFill/>
+          <a:ln/>
+        </p:spPr>
+        <p:txBody>
+          <a:bodyPr wrap="square" lIns="0" tIns="0" rIns="0" bIns="0" rtlCol="0" anchor="t">
+            <a:normAutofit/>
+          </a:bodyPr>
+          <a:lstStyle/>
+          <a:p>
+            <a:pPr indent="0" marL="0">
+              <a:buNone/>
+            </a:pPr>
+            <a:r>
+              <a:rPr lang="en-US" sz="1250" dirty="0">
+                <a:solidFill>
+                  <a:srgbClr val="17364A"/>
+                </a:solidFill>
+                <a:latin typeface="Aptos" pitchFamily="34" charset="0"/>
+                <a:ea typeface="Aptos" pitchFamily="34" charset="-122"/>
+                <a:cs typeface="Aptos" pitchFamily="34" charset="-120"/>
+              </a:rPr>
+              <a:t>Connect the concept to public health decisions, safeguards, documentation, or implementation work.</a:t>
+            </a:r>
+            <a:endParaRPr lang="en-US" sz="1250" dirty="0"/>
           </a:p>
         </p:txBody>
       </p:sp>
@@ -5213,7 +8164,32 @@
       </p:sp>
       <p:sp>
         <p:nvSpPr>
-          <p:cNvPr id="3" name="Text 1"/>
+          <p:cNvPr id="3" name="Shape 1"/>
+          <p:cNvSpPr/>
+          <p:nvPr/>
+        </p:nvSpPr>
+        <p:spPr>
+          <a:xfrm>
+            <a:off x="0" y="164592"/>
+            <a:ext cx="146304" cy="6693408"/>
+          </a:xfrm>
+          <a:prstGeom prst="rect">
+            <a:avLst/>
+          </a:prstGeom>
+          <a:solidFill>
+            <a:srgbClr val="2F8A28"/>
+          </a:solidFill>
+          <a:ln w="12700">
+            <a:solidFill>
+              <a:srgbClr val="2F8A28"/>
+            </a:solidFill>
+            <a:prstDash val="solid"/>
+          </a:ln>
+        </p:spPr>
+      </p:sp>
+      <p:sp>
+        <p:nvSpPr>
+          <p:cNvPr id="4" name="Text 2"/>
           <p:cNvSpPr/>
           <p:nvPr/>
         </p:nvSpPr>
@@ -5252,7 +8228,7 @@
       </p:sp>
       <p:sp>
         <p:nvSpPr>
-          <p:cNvPr id="4" name="Text 2"/>
+          <p:cNvPr id="5" name="Text 3"/>
           <p:cNvSpPr/>
           <p:nvPr/>
         </p:nvSpPr>
@@ -5291,7 +8267,7 @@
       </p:sp>
       <p:sp>
         <p:nvSpPr>
-          <p:cNvPr id="5" name="Text 3"/>
+          <p:cNvPr id="6" name="Text 4"/>
           <p:cNvSpPr/>
           <p:nvPr/>
         </p:nvSpPr>
@@ -5330,7 +8306,7 @@
       </p:sp>
       <p:sp>
         <p:nvSpPr>
-          <p:cNvPr id="6" name="Text 4"/>
+          <p:cNvPr id="7" name="Text 5"/>
           <p:cNvSpPr/>
           <p:nvPr/>
         </p:nvSpPr>
@@ -5363,7 +8339,7 @@
                 <a:ea typeface="Aptos Display" pitchFamily="34" charset="-122"/>
                 <a:cs typeface="Aptos Display" pitchFamily="34" charset="-120"/>
               </a:rPr>
-              <a:t>Knowledge Check</a:t>
+              <a:t>Expected Artifact or Evidence Continued</a:t>
             </a:r>
             <a:endParaRPr lang="en-US" sz="2700" dirty="0"/>
           </a:p>
@@ -5371,14 +8347,14 @@
       </p:sp>
       <p:sp>
         <p:nvSpPr>
-          <p:cNvPr id="7" name="Text 5"/>
-          <p:cNvSpPr/>
-          <p:nvPr/>
-        </p:nvSpPr>
-        <p:spPr>
-          <a:xfrm>
-            <a:off x="822960" y="1325880"/>
-            <a:ext cx="10378440" cy="4800600"/>
+          <p:cNvPr id="8" name="Text 6"/>
+          <p:cNvSpPr/>
+          <p:nvPr/>
+        </p:nvSpPr>
+        <p:spPr>
+          <a:xfrm>
+            <a:off x="868680" y="1417320"/>
+            <a:ext cx="6675120" cy="4434840"/>
           </a:xfrm>
           <a:prstGeom prst="rect">
             <a:avLst/>
@@ -5393,7 +8369,7 @@
           <a:lstStyle/>
           <a:p>
             <a:r>
-              <a:rPr lang="en-US" sz="1450" dirty="0">
+              <a:rPr lang="en-US" sz="1700" dirty="0">
                 <a:solidFill>
                   <a:srgbClr val="17364A"/>
                 </a:solidFill>
@@ -5401,13 +8377,106 @@
                 <a:ea typeface="Aptos" pitchFamily="34" charset="-122"/>
                 <a:cs typeface="Aptos" pitchFamily="34" charset="-120"/>
               </a:rPr>
-              <a:t>1. Why can overall accuracy be misleading?</a:t>
-            </a:r>
-            <a:endParaRPr lang="en-US" sz="1450" dirty="0"/>
-          </a:p>
-          <a:p>
-            <a:r>
-              <a:rPr lang="en-US" sz="1450" dirty="0">
+              <a:t>Post-deployment monitoring schedule</a:t>
+            </a:r>
+            <a:endParaRPr lang="en-US" sz="1700" dirty="0"/>
+          </a:p>
+        </p:txBody>
+      </p:sp>
+      <p:sp>
+        <p:nvSpPr>
+          <p:cNvPr id="9" name="Shape 7"/>
+          <p:cNvSpPr/>
+          <p:nvPr/>
+        </p:nvSpPr>
+        <p:spPr>
+          <a:xfrm>
+            <a:off x="7909560" y="1417320"/>
+            <a:ext cx="3154680" cy="1828800"/>
+          </a:xfrm>
+          <a:prstGeom prst="roundRect">
+            <a:avLst>
+              <a:gd name="adj" fmla="val 6000"/>
+            </a:avLst>
+          </a:prstGeom>
+          <a:solidFill>
+            <a:srgbClr val="EEF8ED"/>
+          </a:solidFill>
+          <a:ln w="12700">
+            <a:solidFill>
+              <a:srgbClr val="B9D7E6"/>
+            </a:solidFill>
+            <a:prstDash val="solid"/>
+          </a:ln>
+        </p:spPr>
+      </p:sp>
+      <p:sp>
+        <p:nvSpPr>
+          <p:cNvPr id="10" name="Text 8"/>
+          <p:cNvSpPr/>
+          <p:nvPr/>
+        </p:nvSpPr>
+        <p:spPr>
+          <a:xfrm>
+            <a:off x="8074152" y="1563624"/>
+            <a:ext cx="2825496" cy="201168"/>
+          </a:xfrm>
+          <a:prstGeom prst="rect">
+            <a:avLst/>
+          </a:prstGeom>
+          <a:noFill/>
+          <a:ln/>
+        </p:spPr>
+        <p:txBody>
+          <a:bodyPr wrap="square" lIns="0" tIns="0" rIns="0" bIns="0" rtlCol="0" anchor="ctr"/>
+          <a:lstStyle/>
+          <a:p>
+            <a:pPr indent="0" marL="0">
+              <a:buNone/>
+            </a:pPr>
+            <a:r>
+              <a:rPr lang="en-US" sz="950" b="1" dirty="0">
+                <a:solidFill>
+                  <a:srgbClr val="0068B7"/>
+                </a:solidFill>
+                <a:latin typeface="Aptos" pitchFamily="34" charset="0"/>
+                <a:ea typeface="Aptos" pitchFamily="34" charset="-122"/>
+                <a:cs typeface="Aptos" pitchFamily="34" charset="-120"/>
+              </a:rPr>
+              <a:t>Key idea</a:t>
+            </a:r>
+            <a:endParaRPr lang="en-US" sz="950" dirty="0"/>
+          </a:p>
+        </p:txBody>
+      </p:sp>
+      <p:sp>
+        <p:nvSpPr>
+          <p:cNvPr id="11" name="Text 9"/>
+          <p:cNvSpPr/>
+          <p:nvPr/>
+        </p:nvSpPr>
+        <p:spPr>
+          <a:xfrm>
+            <a:off x="8074152" y="1856232"/>
+            <a:ext cx="2825496" cy="1261872"/>
+          </a:xfrm>
+          <a:prstGeom prst="rect">
+            <a:avLst/>
+          </a:prstGeom>
+          <a:noFill/>
+          <a:ln/>
+        </p:spPr>
+        <p:txBody>
+          <a:bodyPr wrap="square" lIns="0" tIns="0" rIns="0" bIns="0" rtlCol="0" anchor="t">
+            <a:normAutofit/>
+          </a:bodyPr>
+          <a:lstStyle/>
+          <a:p>
+            <a:pPr indent="0" marL="0">
+              <a:buNone/>
+            </a:pPr>
+            <a:r>
+              <a:rPr lang="en-US" sz="1250" dirty="0">
                 <a:solidFill>
                   <a:srgbClr val="17364A"/>
                 </a:solidFill>
@@ -5415,13 +8484,106 @@
                 <a:ea typeface="Aptos" pitchFamily="34" charset="-122"/>
                 <a:cs typeface="Aptos" pitchFamily="34" charset="-120"/>
               </a:rPr>
-              <a:t>2. What is workflow validation?</a:t>
-            </a:r>
-            <a:endParaRPr lang="en-US" sz="1450" dirty="0"/>
-          </a:p>
-          <a:p>
-            <a:r>
-              <a:rPr lang="en-US" sz="1450" dirty="0">
+              <a:t>Post-deployment monitoring schedule</a:t>
+            </a:r>
+            <a:endParaRPr lang="en-US" sz="1250" dirty="0"/>
+          </a:p>
+        </p:txBody>
+      </p:sp>
+      <p:sp>
+        <p:nvSpPr>
+          <p:cNvPr id="12" name="Shape 10"/>
+          <p:cNvSpPr/>
+          <p:nvPr/>
+        </p:nvSpPr>
+        <p:spPr>
+          <a:xfrm>
+            <a:off x="7909560" y="3520440"/>
+            <a:ext cx="3154680" cy="1737360"/>
+          </a:xfrm>
+          <a:prstGeom prst="roundRect">
+            <a:avLst>
+              <a:gd name="adj" fmla="val 6316"/>
+            </a:avLst>
+          </a:prstGeom>
+          <a:solidFill>
+            <a:srgbClr val="EAF6F8"/>
+          </a:solidFill>
+          <a:ln w="12700">
+            <a:solidFill>
+              <a:srgbClr val="B9D7E6"/>
+            </a:solidFill>
+            <a:prstDash val="solid"/>
+          </a:ln>
+        </p:spPr>
+      </p:sp>
+      <p:sp>
+        <p:nvSpPr>
+          <p:cNvPr id="13" name="Text 11"/>
+          <p:cNvSpPr/>
+          <p:nvPr/>
+        </p:nvSpPr>
+        <p:spPr>
+          <a:xfrm>
+            <a:off x="8074152" y="3666744"/>
+            <a:ext cx="2825496" cy="201168"/>
+          </a:xfrm>
+          <a:prstGeom prst="rect">
+            <a:avLst/>
+          </a:prstGeom>
+          <a:noFill/>
+          <a:ln/>
+        </p:spPr>
+        <p:txBody>
+          <a:bodyPr wrap="square" lIns="0" tIns="0" rIns="0" bIns="0" rtlCol="0" anchor="ctr"/>
+          <a:lstStyle/>
+          <a:p>
+            <a:pPr indent="0" marL="0">
+              <a:buNone/>
+            </a:pPr>
+            <a:r>
+              <a:rPr lang="en-US" sz="950" b="1" dirty="0">
+                <a:solidFill>
+                  <a:srgbClr val="0068B7"/>
+                </a:solidFill>
+                <a:latin typeface="Aptos" pitchFamily="34" charset="0"/>
+                <a:ea typeface="Aptos" pitchFamily="34" charset="-122"/>
+                <a:cs typeface="Aptos" pitchFamily="34" charset="-120"/>
+              </a:rPr>
+              <a:t>Use this for</a:t>
+            </a:r>
+            <a:endParaRPr lang="en-US" sz="950" dirty="0"/>
+          </a:p>
+        </p:txBody>
+      </p:sp>
+      <p:sp>
+        <p:nvSpPr>
+          <p:cNvPr id="14" name="Text 12"/>
+          <p:cNvSpPr/>
+          <p:nvPr/>
+        </p:nvSpPr>
+        <p:spPr>
+          <a:xfrm>
+            <a:off x="8074152" y="3959352"/>
+            <a:ext cx="2825496" cy="1170432"/>
+          </a:xfrm>
+          <a:prstGeom prst="rect">
+            <a:avLst/>
+          </a:prstGeom>
+          <a:noFill/>
+          <a:ln/>
+        </p:spPr>
+        <p:txBody>
+          <a:bodyPr wrap="square" lIns="0" tIns="0" rIns="0" bIns="0" rtlCol="0" anchor="t">
+            <a:normAutofit/>
+          </a:bodyPr>
+          <a:lstStyle/>
+          <a:p>
+            <a:pPr indent="0" marL="0">
+              <a:buNone/>
+            </a:pPr>
+            <a:r>
+              <a:rPr lang="en-US" sz="1250" dirty="0">
                 <a:solidFill>
                   <a:srgbClr val="17364A"/>
                 </a:solidFill>
@@ -5429,37 +8591,9 @@
                 <a:ea typeface="Aptos" pitchFamily="34" charset="-122"/>
                 <a:cs typeface="Aptos" pitchFamily="34" charset="-120"/>
               </a:rPr>
-              <a:t>3. Which metric is especially important when missed true events could cause harm?</a:t>
-            </a:r>
-            <a:endParaRPr lang="en-US" sz="1450" dirty="0"/>
-          </a:p>
-          <a:p>
-            <a:r>
-              <a:rPr lang="en-US" sz="1450" dirty="0">
-                <a:solidFill>
-                  <a:srgbClr val="17364A"/>
-                </a:solidFill>
-                <a:latin typeface="Aptos" pitchFamily="34" charset="0"/>
-                <a:ea typeface="Aptos" pitchFamily="34" charset="-122"/>
-                <a:cs typeface="Aptos" pitchFamily="34" charset="-120"/>
-              </a:rPr>
-              <a:t>4. What does external validation test?</a:t>
-            </a:r>
-            <a:endParaRPr lang="en-US" sz="1450" dirty="0"/>
-          </a:p>
-          <a:p>
-            <a:r>
-              <a:rPr lang="en-US" sz="1450" dirty="0">
-                <a:solidFill>
-                  <a:srgbClr val="17364A"/>
-                </a:solidFill>
-                <a:latin typeface="Aptos" pitchFamily="34" charset="0"/>
-                <a:ea typeface="Aptos" pitchFamily="34" charset="-122"/>
-                <a:cs typeface="Aptos" pitchFamily="34" charset="-120"/>
-              </a:rPr>
-              <a:t>5. What should an advanced validation plan include?</a:t>
-            </a:r>
-            <a:endParaRPr lang="en-US" sz="1450" dirty="0"/>
+              <a:t>Connect the concept to public health decisions, safeguards, documentation, or implementation work.</a:t>
+            </a:r>
+            <a:endParaRPr lang="en-US" sz="1250" dirty="0"/>
           </a:p>
         </p:txBody>
       </p:sp>
@@ -5522,7 +8656,32 @@
       </p:sp>
       <p:sp>
         <p:nvSpPr>
-          <p:cNvPr id="3" name="Text 1"/>
+          <p:cNvPr id="3" name="Shape 1"/>
+          <p:cNvSpPr/>
+          <p:nvPr/>
+        </p:nvSpPr>
+        <p:spPr>
+          <a:xfrm>
+            <a:off x="0" y="164592"/>
+            <a:ext cx="146304" cy="6693408"/>
+          </a:xfrm>
+          <a:prstGeom prst="rect">
+            <a:avLst/>
+          </a:prstGeom>
+          <a:solidFill>
+            <a:srgbClr val="2F8A28"/>
+          </a:solidFill>
+          <a:ln w="12700">
+            <a:solidFill>
+              <a:srgbClr val="2F8A28"/>
+            </a:solidFill>
+            <a:prstDash val="solid"/>
+          </a:ln>
+        </p:spPr>
+      </p:sp>
+      <p:sp>
+        <p:nvSpPr>
+          <p:cNvPr id="4" name="Text 2"/>
           <p:cNvSpPr/>
           <p:nvPr/>
         </p:nvSpPr>
@@ -5561,7 +8720,7 @@
       </p:sp>
       <p:sp>
         <p:nvSpPr>
-          <p:cNvPr id="4" name="Text 2"/>
+          <p:cNvPr id="5" name="Text 3"/>
           <p:cNvSpPr/>
           <p:nvPr/>
         </p:nvSpPr>
@@ -5600,7 +8759,7 @@
       </p:sp>
       <p:sp>
         <p:nvSpPr>
-          <p:cNvPr id="5" name="Text 3"/>
+          <p:cNvPr id="6" name="Text 4"/>
           <p:cNvSpPr/>
           <p:nvPr/>
         </p:nvSpPr>
@@ -5639,7 +8798,7 @@
       </p:sp>
       <p:sp>
         <p:nvSpPr>
-          <p:cNvPr id="6" name="Text 4"/>
+          <p:cNvPr id="7" name="Text 5"/>
           <p:cNvSpPr/>
           <p:nvPr/>
         </p:nvSpPr>
@@ -5672,7 +8831,7 @@
                 <a:ea typeface="Aptos Display" pitchFamily="34" charset="-122"/>
                 <a:cs typeface="Aptos Display" pitchFamily="34" charset="-120"/>
               </a:rPr>
-              <a:t>Module Context</a:t>
+              <a:t>What this module helps you do</a:t>
             </a:r>
             <a:endParaRPr lang="en-US" sz="2700" dirty="0"/>
           </a:p>
@@ -5680,14 +8839,14 @@
       </p:sp>
       <p:sp>
         <p:nvSpPr>
-          <p:cNvPr id="7" name="Text 5"/>
-          <p:cNvSpPr/>
-          <p:nvPr/>
-        </p:nvSpPr>
-        <p:spPr>
-          <a:xfrm>
-            <a:off x="822960" y="1325880"/>
-            <a:ext cx="10378440" cy="1371600"/>
+          <p:cNvPr id="8" name="Text 6"/>
+          <p:cNvSpPr/>
+          <p:nvPr/>
+        </p:nvSpPr>
+        <p:spPr>
+          <a:xfrm>
+            <a:off x="868680" y="1417320"/>
+            <a:ext cx="6675120" cy="3291840"/>
           </a:xfrm>
           <a:prstGeom prst="rect">
             <a:avLst/>
@@ -5702,7 +8861,7 @@
           <a:lstStyle/>
           <a:p>
             <a:r>
-              <a:rPr lang="en-US" sz="1600" dirty="0">
+              <a:rPr lang="en-US" sz="1700" dirty="0">
                 <a:solidFill>
                   <a:srgbClr val="17364A"/>
                 </a:solidFill>
@@ -5710,13 +8869,13 @@
                 <a:ea typeface="Aptos" pitchFamily="34" charset="-122"/>
                 <a:cs typeface="Aptos" pitchFamily="34" charset="-120"/>
               </a:rPr>
-              <a:t>Level: intermediate/practitioner</a:t>
-            </a:r>
-            <a:endParaRPr lang="en-US" sz="1600" dirty="0"/>
-          </a:p>
-          <a:p>
-            <a:r>
-              <a:rPr lang="en-US" sz="1600" dirty="0">
+              <a:t>Model validation is the process of determining whether an AI tool performs adequately for its intended use, population, setting, data sources, and.</a:t>
+            </a:r>
+            <a:endParaRPr lang="en-US" sz="1700" dirty="0"/>
+          </a:p>
+          <a:p>
+            <a:r>
+              <a:rPr lang="en-US" sz="1700" dirty="0">
                 <a:solidFill>
                   <a:srgbClr val="17364A"/>
                 </a:solidFill>
@@ -5724,13 +8883,13 @@
                 <a:ea typeface="Aptos" pitchFamily="34" charset="-122"/>
                 <a:cs typeface="Aptos" pitchFamily="34" charset="-120"/>
               </a:rPr>
-              <a:t>Primary track: Analytics and Modeling Track</a:t>
-            </a:r>
-            <a:endParaRPr lang="en-US" sz="1600" dirty="0"/>
-          </a:p>
-          <a:p>
-            <a:r>
-              <a:rPr lang="en-US" sz="1600" dirty="0">
+              <a:t>Basic validation asks whether the tool works at all.</a:t>
+            </a:r>
+            <a:endParaRPr lang="en-US" sz="1700" dirty="0"/>
+          </a:p>
+          <a:p>
+            <a:r>
+              <a:rPr lang="en-US" sz="1700" dirty="0">
                 <a:solidFill>
                   <a:srgbClr val="17364A"/>
                 </a:solidFill>
@@ -5738,31 +8897,111 @@
                 <a:ea typeface="Aptos" pitchFamily="34" charset="-122"/>
                 <a:cs typeface="Aptos" pitchFamily="34" charset="-120"/>
               </a:rPr>
-              <a:t>Appears in tracks: analytics-modeling</a:t>
-            </a:r>
-            <a:endParaRPr lang="en-US" sz="1600" dirty="0"/>
-          </a:p>
-        </p:txBody>
-      </p:sp>
-      <p:sp>
-        <p:nvSpPr>
-          <p:cNvPr id="8" name="Text 6"/>
-          <p:cNvSpPr/>
-          <p:nvPr/>
-        </p:nvSpPr>
-        <p:spPr>
-          <a:xfrm>
-            <a:off x="822960" y="2743200"/>
-            <a:ext cx="10378440" cy="2834640"/>
-          </a:xfrm>
-          <a:prstGeom prst="rect">
-            <a:avLst/>
-          </a:prstGeom>
-          <a:noFill/>
-          <a:ln/>
-        </p:spPr>
-        <p:txBody>
-          <a:bodyPr wrap="square" lIns="1016" tIns="1016" rIns="1016" bIns="1016" rtlCol="0" anchor="t">
+              <a:t>Advanced validation asks whether it works well enough, for whom, under what conditions, with what limitations, and with what monitoring requirements.</a:t>
+            </a:r>
+            <a:endParaRPr lang="en-US" sz="1700" dirty="0"/>
+          </a:p>
+          <a:p>
+            <a:r>
+              <a:rPr lang="en-US" sz="1700" dirty="0">
+                <a:solidFill>
+                  <a:srgbClr val="17364A"/>
+                </a:solidFill>
+                <a:latin typeface="Aptos" pitchFamily="34" charset="0"/>
+                <a:ea typeface="Aptos" pitchFamily="34" charset="-122"/>
+                <a:cs typeface="Aptos" pitchFamily="34" charset="-120"/>
+              </a:rPr>
+              <a:t>This module extends foundational validation content by focusing on metrics, subgroup performance, calibration, external validation, workflow.</a:t>
+            </a:r>
+            <a:endParaRPr lang="en-US" sz="1700" dirty="0"/>
+          </a:p>
+        </p:txBody>
+      </p:sp>
+      <p:sp>
+        <p:nvSpPr>
+          <p:cNvPr id="9" name="Shape 7"/>
+          <p:cNvSpPr/>
+          <p:nvPr/>
+        </p:nvSpPr>
+        <p:spPr>
+          <a:xfrm>
+            <a:off x="7909560" y="1417320"/>
+            <a:ext cx="3154680" cy="1920240"/>
+          </a:xfrm>
+          <a:prstGeom prst="roundRect">
+            <a:avLst>
+              <a:gd name="adj" fmla="val 5714"/>
+            </a:avLst>
+          </a:prstGeom>
+          <a:solidFill>
+            <a:srgbClr val="EAF6F8"/>
+          </a:solidFill>
+          <a:ln w="12700">
+            <a:solidFill>
+              <a:srgbClr val="B9D7E6"/>
+            </a:solidFill>
+            <a:prstDash val="solid"/>
+          </a:ln>
+        </p:spPr>
+      </p:sp>
+      <p:sp>
+        <p:nvSpPr>
+          <p:cNvPr id="10" name="Text 8"/>
+          <p:cNvSpPr/>
+          <p:nvPr/>
+        </p:nvSpPr>
+        <p:spPr>
+          <a:xfrm>
+            <a:off x="8074152" y="1563624"/>
+            <a:ext cx="2825496" cy="201168"/>
+          </a:xfrm>
+          <a:prstGeom prst="rect">
+            <a:avLst/>
+          </a:prstGeom>
+          <a:noFill/>
+          <a:ln/>
+        </p:spPr>
+        <p:txBody>
+          <a:bodyPr wrap="square" lIns="0" tIns="0" rIns="0" bIns="0" rtlCol="0" anchor="ctr"/>
+          <a:lstStyle/>
+          <a:p>
+            <a:pPr indent="0" marL="0">
+              <a:buNone/>
+            </a:pPr>
+            <a:r>
+              <a:rPr lang="en-US" sz="950" b="1" dirty="0">
+                <a:solidFill>
+                  <a:srgbClr val="0068B7"/>
+                </a:solidFill>
+                <a:latin typeface="Aptos" pitchFamily="34" charset="0"/>
+                <a:ea typeface="Aptos" pitchFamily="34" charset="-122"/>
+                <a:cs typeface="Aptos" pitchFamily="34" charset="-120"/>
+              </a:rPr>
+              <a:t>Module details</a:t>
+            </a:r>
+            <a:endParaRPr lang="en-US" sz="950" dirty="0"/>
+          </a:p>
+        </p:txBody>
+      </p:sp>
+      <p:sp>
+        <p:nvSpPr>
+          <p:cNvPr id="11" name="Text 9"/>
+          <p:cNvSpPr/>
+          <p:nvPr/>
+        </p:nvSpPr>
+        <p:spPr>
+          <a:xfrm>
+            <a:off x="8074152" y="1856232"/>
+            <a:ext cx="2825496" cy="1353312"/>
+          </a:xfrm>
+          <a:prstGeom prst="rect">
+            <a:avLst/>
+          </a:prstGeom>
+          <a:noFill/>
+          <a:ln/>
+        </p:spPr>
+        <p:txBody>
+          <a:bodyPr wrap="square" lIns="0" tIns="0" rIns="0" bIns="0" rtlCol="0" anchor="t">
             <a:normAutofit/>
           </a:bodyPr>
           <a:lstStyle/>
@@ -5771,7 +9010,7 @@
               <a:buNone/>
             </a:pPr>
             <a:r>
-              <a:rPr lang="en-US" sz="1400" dirty="0">
+              <a:rPr lang="en-US" sz="1250" dirty="0">
                 <a:solidFill>
                   <a:srgbClr val="17364A"/>
                 </a:solidFill>
@@ -5779,9 +9018,150 @@
                 <a:ea typeface="Aptos" pitchFamily="34" charset="-122"/>
                 <a:cs typeface="Aptos" pitchFamily="34" charset="-120"/>
               </a:rPr>
-              <a:t>Model validation is the process of determining whether an AI tool performs adequately for its intended use, population, setting, data sources, and workflow. Basic validation asks whether the tool works at all. Advanced validation asks whether it works well enough, for whom, under what conditions, with what limitations, and with what monitoring requirements. This module extends foundational validation content by focusing on metrics, subgroup performance, calibration, external validation, workflow validation, error review, drift monitoring, and documentation. Public health agencies need this deeper level of validation when AI outputs may influence investigation, outreach, resource allocation, public communication, or operational prioritization. Learners will develop a validation plan that connects technical performance to public health consequences. The goal is to evaluate not only the model, but the full AI-supported workflow.</a:t>
-            </a:r>
-            <a:endParaRPr lang="en-US" sz="1400" dirty="0"/>
+              <a:t>Level: intermediate/practitioner</a:t>
+            </a:r>
+            <a:endParaRPr lang="en-US" sz="1250" dirty="0"/>
+          </a:p>
+          <a:p>
+            <a:pPr indent="0" marL="0">
+              <a:buNone/>
+            </a:pPr>
+            <a:r>
+              <a:rPr lang="en-US" sz="1250" dirty="0">
+                <a:solidFill>
+                  <a:srgbClr val="17364A"/>
+                </a:solidFill>
+                <a:latin typeface="Aptos" pitchFamily="34" charset="0"/>
+                <a:ea typeface="Aptos" pitchFamily="34" charset="-122"/>
+                <a:cs typeface="Aptos" pitchFamily="34" charset="-120"/>
+              </a:rPr>
+              <a:t>Primary track: Analytics and Modeling Track</a:t>
+            </a:r>
+            <a:endParaRPr lang="en-US" sz="1250" dirty="0"/>
+          </a:p>
+          <a:p>
+            <a:pPr indent="0" marL="0">
+              <a:buNone/>
+            </a:pPr>
+            <a:r>
+              <a:rPr lang="en-US" sz="1250" dirty="0">
+                <a:solidFill>
+                  <a:srgbClr val="17364A"/>
+                </a:solidFill>
+                <a:latin typeface="Aptos" pitchFamily="34" charset="0"/>
+                <a:ea typeface="Aptos" pitchFamily="34" charset="-122"/>
+                <a:cs typeface="Aptos" pitchFamily="34" charset="-120"/>
+              </a:rPr>
+              <a:t>Appears in tracks: analytics-modeling</a:t>
+            </a:r>
+            <a:endParaRPr lang="en-US" sz="1250" dirty="0"/>
+          </a:p>
+        </p:txBody>
+      </p:sp>
+      <p:sp>
+        <p:nvSpPr>
+          <p:cNvPr id="12" name="Shape 10"/>
+          <p:cNvSpPr/>
+          <p:nvPr/>
+        </p:nvSpPr>
+        <p:spPr>
+          <a:xfrm>
+            <a:off x="7909560" y="3611880"/>
+            <a:ext cx="3154680" cy="1783080"/>
+          </a:xfrm>
+          <a:prstGeom prst="roundRect">
+            <a:avLst>
+              <a:gd name="adj" fmla="val 6154"/>
+            </a:avLst>
+          </a:prstGeom>
+          <a:solidFill>
+            <a:srgbClr val="EEF8ED"/>
+          </a:solidFill>
+          <a:ln w="12700">
+            <a:solidFill>
+              <a:srgbClr val="B9D7E6"/>
+            </a:solidFill>
+            <a:prstDash val="solid"/>
+          </a:ln>
+        </p:spPr>
+      </p:sp>
+      <p:sp>
+        <p:nvSpPr>
+          <p:cNvPr id="13" name="Text 11"/>
+          <p:cNvSpPr/>
+          <p:nvPr/>
+        </p:nvSpPr>
+        <p:spPr>
+          <a:xfrm>
+            <a:off x="8074152" y="3758184"/>
+            <a:ext cx="2825496" cy="201168"/>
+          </a:xfrm>
+          <a:prstGeom prst="rect">
+            <a:avLst/>
+          </a:prstGeom>
+          <a:noFill/>
+          <a:ln/>
+        </p:spPr>
+        <p:txBody>
+          <a:bodyPr wrap="square" lIns="0" tIns="0" rIns="0" bIns="0" rtlCol="0" anchor="ctr"/>
+          <a:lstStyle/>
+          <a:p>
+            <a:pPr indent="0" marL="0">
+              <a:buNone/>
+            </a:pPr>
+            <a:r>
+              <a:rPr lang="en-US" sz="950" b="1" dirty="0">
+                <a:solidFill>
+                  <a:srgbClr val="0068B7"/>
+                </a:solidFill>
+                <a:latin typeface="Aptos" pitchFamily="34" charset="0"/>
+                <a:ea typeface="Aptos" pitchFamily="34" charset="-122"/>
+                <a:cs typeface="Aptos" pitchFamily="34" charset="-120"/>
+              </a:rPr>
+              <a:t>Learning approach</a:t>
+            </a:r>
+            <a:endParaRPr lang="en-US" sz="950" dirty="0"/>
+          </a:p>
+        </p:txBody>
+      </p:sp>
+      <p:sp>
+        <p:nvSpPr>
+          <p:cNvPr id="14" name="Text 12"/>
+          <p:cNvSpPr/>
+          <p:nvPr/>
+        </p:nvSpPr>
+        <p:spPr>
+          <a:xfrm>
+            <a:off x="8074152" y="4050792"/>
+            <a:ext cx="2825496" cy="1216152"/>
+          </a:xfrm>
+          <a:prstGeom prst="rect">
+            <a:avLst/>
+          </a:prstGeom>
+          <a:noFill/>
+          <a:ln/>
+        </p:spPr>
+        <p:txBody>
+          <a:bodyPr wrap="square" lIns="0" tIns="0" rIns="0" bIns="0" rtlCol="0" anchor="t">
+            <a:normAutofit/>
+          </a:bodyPr>
+          <a:lstStyle/>
+          <a:p>
+            <a:pPr indent="0" marL="0">
+              <a:buNone/>
+            </a:pPr>
+            <a:r>
+              <a:rPr lang="en-US" sz="1250" dirty="0">
+                <a:solidFill>
+                  <a:srgbClr val="17364A"/>
+                </a:solidFill>
+                <a:latin typeface="Aptos" pitchFamily="34" charset="0"/>
+                <a:ea typeface="Aptos" pitchFamily="34" charset="-122"/>
+                <a:cs typeface="Aptos" pitchFamily="34" charset="-120"/>
+              </a:rPr>
+              <a:t>Review the core ideas, complete the practical exercise, check your understanding, and use the related plays and tools to apply the lesson.</a:t>
+            </a:r>
+            <a:endParaRPr lang="en-US" sz="1250" dirty="0"/>
           </a:p>
         </p:txBody>
       </p:sp>
@@ -5844,7 +9224,32 @@
       </p:sp>
       <p:sp>
         <p:nvSpPr>
-          <p:cNvPr id="3" name="Text 1"/>
+          <p:cNvPr id="3" name="Shape 1"/>
+          <p:cNvSpPr/>
+          <p:nvPr/>
+        </p:nvSpPr>
+        <p:spPr>
+          <a:xfrm>
+            <a:off x="0" y="164592"/>
+            <a:ext cx="146304" cy="6693408"/>
+          </a:xfrm>
+          <a:prstGeom prst="rect">
+            <a:avLst/>
+          </a:prstGeom>
+          <a:solidFill>
+            <a:srgbClr val="2F8A28"/>
+          </a:solidFill>
+          <a:ln w="12700">
+            <a:solidFill>
+              <a:srgbClr val="2F8A28"/>
+            </a:solidFill>
+            <a:prstDash val="solid"/>
+          </a:ln>
+        </p:spPr>
+      </p:sp>
+      <p:sp>
+        <p:nvSpPr>
+          <p:cNvPr id="4" name="Text 2"/>
           <p:cNvSpPr/>
           <p:nvPr/>
         </p:nvSpPr>
@@ -5883,7 +9288,7 @@
       </p:sp>
       <p:sp>
         <p:nvSpPr>
-          <p:cNvPr id="4" name="Text 2"/>
+          <p:cNvPr id="5" name="Text 3"/>
           <p:cNvSpPr/>
           <p:nvPr/>
         </p:nvSpPr>
@@ -5922,7 +9327,7 @@
       </p:sp>
       <p:sp>
         <p:nvSpPr>
-          <p:cNvPr id="5" name="Text 3"/>
+          <p:cNvPr id="6" name="Text 4"/>
           <p:cNvSpPr/>
           <p:nvPr/>
         </p:nvSpPr>
@@ -5961,13 +9366,77 @@
       </p:sp>
       <p:sp>
         <p:nvSpPr>
-          <p:cNvPr id="6" name="Text 4"/>
+          <p:cNvPr id="7" name="Shape 5"/>
           <p:cNvSpPr/>
           <p:nvPr/>
         </p:nvSpPr>
         <p:spPr>
           <a:xfrm>
             <a:off x="640080" y="658368"/>
+            <a:ext cx="420624" cy="420624"/>
+          </a:xfrm>
+          <a:prstGeom prst="ellipse">
+            <a:avLst/>
+          </a:prstGeom>
+          <a:solidFill>
+            <a:srgbClr val="0068B7"/>
+          </a:solidFill>
+          <a:ln w="12700">
+            <a:solidFill>
+              <a:srgbClr val="0068B7"/>
+            </a:solidFill>
+            <a:prstDash val="solid"/>
+          </a:ln>
+        </p:spPr>
+      </p:sp>
+      <p:sp>
+        <p:nvSpPr>
+          <p:cNvPr id="8" name="Text 6"/>
+          <p:cNvSpPr/>
+          <p:nvPr/>
+        </p:nvSpPr>
+        <p:spPr>
+          <a:xfrm>
+            <a:off x="640080" y="731520"/>
+            <a:ext cx="420624" cy="164592"/>
+          </a:xfrm>
+          <a:prstGeom prst="rect">
+            <a:avLst/>
+          </a:prstGeom>
+          <a:noFill/>
+          <a:ln/>
+        </p:spPr>
+        <p:txBody>
+          <a:bodyPr wrap="square" lIns="0" tIns="0" rIns="0" bIns="0" rtlCol="0" anchor="ctr"/>
+          <a:lstStyle/>
+          <a:p>
+            <a:pPr algn="ctr" indent="0" marL="0">
+              <a:buNone/>
+            </a:pPr>
+            <a:r>
+              <a:rPr lang="en-US" sz="1100" b="1" dirty="0">
+                <a:solidFill>
+                  <a:srgbClr val="FFFFFF"/>
+                </a:solidFill>
+                <a:latin typeface="Aptos" pitchFamily="34" charset="0"/>
+                <a:ea typeface="Aptos" pitchFamily="34" charset="-122"/>
+                <a:cs typeface="Aptos" pitchFamily="34" charset="-120"/>
+              </a:rPr>
+              <a:t>11</a:t>
+            </a:r>
+            <a:endParaRPr lang="en-US" sz="1100" dirty="0"/>
+          </a:p>
+        </p:txBody>
+      </p:sp>
+      <p:sp>
+        <p:nvSpPr>
+          <p:cNvPr id="9" name="Text 7"/>
+          <p:cNvSpPr/>
+          <p:nvPr/>
+        </p:nvSpPr>
+        <p:spPr>
+          <a:xfrm>
+            <a:off x="640080" y="621792"/>
             <a:ext cx="10881360" cy="566928"/>
           </a:xfrm>
           <a:prstGeom prst="rect">
@@ -5994,7 +9463,7 @@
                 <a:ea typeface="Aptos Display" pitchFamily="34" charset="-122"/>
                 <a:cs typeface="Aptos Display" pitchFamily="34" charset="-120"/>
               </a:rPr>
-              <a:t>References and Resources</a:t>
+              <a:t>Expected Assignment</a:t>
             </a:r>
             <a:endParaRPr lang="en-US" sz="2700" dirty="0"/>
           </a:p>
@@ -6002,14 +9471,14 @@
       </p:sp>
       <p:sp>
         <p:nvSpPr>
-          <p:cNvPr id="7" name="Text 5"/>
-          <p:cNvSpPr/>
-          <p:nvPr/>
-        </p:nvSpPr>
-        <p:spPr>
-          <a:xfrm>
-            <a:off x="822960" y="1325880"/>
-            <a:ext cx="10378440" cy="4800600"/>
+          <p:cNvPr id="10" name="Text 8"/>
+          <p:cNvSpPr/>
+          <p:nvPr/>
+        </p:nvSpPr>
+        <p:spPr>
+          <a:xfrm>
+            <a:off x="868680" y="1417320"/>
+            <a:ext cx="6675120" cy="4434840"/>
           </a:xfrm>
           <a:prstGeom prst="rect">
             <a:avLst/>
@@ -6024,7 +9493,7 @@
           <a:lstStyle/>
           <a:p>
             <a:r>
-              <a:rPr lang="en-US" sz="1450" dirty="0">
+              <a:rPr lang="en-US" sz="1700" dirty="0">
                 <a:solidFill>
                   <a:srgbClr val="17364A"/>
                 </a:solidFill>
@@ -6032,13 +9501,1209 @@
                 <a:ea typeface="Aptos" pitchFamily="34" charset="-122"/>
                 <a:cs typeface="Aptos" pitchFamily="34" charset="-120"/>
               </a:rPr>
+              <a:t>Advanced validation plan</a:t>
+            </a:r>
+            <a:endParaRPr lang="en-US" sz="1700" dirty="0"/>
+          </a:p>
+          <a:p>
+            <a:r>
+              <a:rPr lang="en-US" sz="1700" dirty="0">
+                <a:solidFill>
+                  <a:srgbClr val="17364A"/>
+                </a:solidFill>
+                <a:latin typeface="Aptos" pitchFamily="34" charset="0"/>
+                <a:ea typeface="Aptos" pitchFamily="34" charset="-122"/>
+                <a:cs typeface="Aptos" pitchFamily="34" charset="-120"/>
+              </a:rPr>
+              <a:t>Metric and error-consequence table</a:t>
+            </a:r>
+            <a:endParaRPr lang="en-US" sz="1700" dirty="0"/>
+          </a:p>
+          <a:p>
+            <a:r>
+              <a:rPr lang="en-US" sz="1700" dirty="0">
+                <a:solidFill>
+                  <a:srgbClr val="17364A"/>
+                </a:solidFill>
+                <a:latin typeface="Aptos" pitchFamily="34" charset="0"/>
+                <a:ea typeface="Aptos" pitchFamily="34" charset="-122"/>
+                <a:cs typeface="Aptos" pitchFamily="34" charset="-120"/>
+              </a:rPr>
+              <a:t>Subgroup performance review plan</a:t>
+            </a:r>
+            <a:endParaRPr lang="en-US" sz="1700" dirty="0"/>
+          </a:p>
+          <a:p>
+            <a:r>
+              <a:rPr lang="en-US" sz="1700" dirty="0">
+                <a:solidFill>
+                  <a:srgbClr val="17364A"/>
+                </a:solidFill>
+                <a:latin typeface="Aptos" pitchFamily="34" charset="0"/>
+                <a:ea typeface="Aptos" pitchFamily="34" charset="-122"/>
+                <a:cs typeface="Aptos" pitchFamily="34" charset="-120"/>
+              </a:rPr>
+              <a:t>Post-deployment monitoring schedule</a:t>
+            </a:r>
+            <a:endParaRPr lang="en-US" sz="1700" dirty="0"/>
+          </a:p>
+        </p:txBody>
+      </p:sp>
+      <p:sp>
+        <p:nvSpPr>
+          <p:cNvPr id="11" name="Shape 9"/>
+          <p:cNvSpPr/>
+          <p:nvPr/>
+        </p:nvSpPr>
+        <p:spPr>
+          <a:xfrm>
+            <a:off x="7909560" y="1417320"/>
+            <a:ext cx="3154680" cy="1828800"/>
+          </a:xfrm>
+          <a:prstGeom prst="roundRect">
+            <a:avLst>
+              <a:gd name="adj" fmla="val 6000"/>
+            </a:avLst>
+          </a:prstGeom>
+          <a:solidFill>
+            <a:srgbClr val="EEF8ED"/>
+          </a:solidFill>
+          <a:ln w="12700">
+            <a:solidFill>
+              <a:srgbClr val="B9D7E6"/>
+            </a:solidFill>
+            <a:prstDash val="solid"/>
+          </a:ln>
+        </p:spPr>
+      </p:sp>
+      <p:sp>
+        <p:nvSpPr>
+          <p:cNvPr id="12" name="Text 10"/>
+          <p:cNvSpPr/>
+          <p:nvPr/>
+        </p:nvSpPr>
+        <p:spPr>
+          <a:xfrm>
+            <a:off x="8074152" y="1563624"/>
+            <a:ext cx="2825496" cy="201168"/>
+          </a:xfrm>
+          <a:prstGeom prst="rect">
+            <a:avLst/>
+          </a:prstGeom>
+          <a:noFill/>
+          <a:ln/>
+        </p:spPr>
+        <p:txBody>
+          <a:bodyPr wrap="square" lIns="0" tIns="0" rIns="0" bIns="0" rtlCol="0" anchor="ctr"/>
+          <a:lstStyle/>
+          <a:p>
+            <a:pPr indent="0" marL="0">
+              <a:buNone/>
+            </a:pPr>
+            <a:r>
+              <a:rPr lang="en-US" sz="950" b="1" dirty="0">
+                <a:solidFill>
+                  <a:srgbClr val="0068B7"/>
+                </a:solidFill>
+                <a:latin typeface="Aptos" pitchFamily="34" charset="0"/>
+                <a:ea typeface="Aptos" pitchFamily="34" charset="-122"/>
+                <a:cs typeface="Aptos" pitchFamily="34" charset="-120"/>
+              </a:rPr>
+              <a:t>Key idea</a:t>
+            </a:r>
+            <a:endParaRPr lang="en-US" sz="950" dirty="0"/>
+          </a:p>
+        </p:txBody>
+      </p:sp>
+      <p:sp>
+        <p:nvSpPr>
+          <p:cNvPr id="13" name="Text 11"/>
+          <p:cNvSpPr/>
+          <p:nvPr/>
+        </p:nvSpPr>
+        <p:spPr>
+          <a:xfrm>
+            <a:off x="8074152" y="1856232"/>
+            <a:ext cx="2825496" cy="1261872"/>
+          </a:xfrm>
+          <a:prstGeom prst="rect">
+            <a:avLst/>
+          </a:prstGeom>
+          <a:noFill/>
+          <a:ln/>
+        </p:spPr>
+        <p:txBody>
+          <a:bodyPr wrap="square" lIns="0" tIns="0" rIns="0" bIns="0" rtlCol="0" anchor="t">
+            <a:normAutofit/>
+          </a:bodyPr>
+          <a:lstStyle/>
+          <a:p>
+            <a:pPr indent="0" marL="0">
+              <a:buNone/>
+            </a:pPr>
+            <a:r>
+              <a:rPr lang="en-US" sz="1250" dirty="0">
+                <a:solidFill>
+                  <a:srgbClr val="17364A"/>
+                </a:solidFill>
+                <a:latin typeface="Aptos" pitchFamily="34" charset="0"/>
+                <a:ea typeface="Aptos" pitchFamily="34" charset="-122"/>
+                <a:cs typeface="Aptos" pitchFamily="34" charset="-120"/>
+              </a:rPr>
+              <a:t>Advanced validation plan</a:t>
+            </a:r>
+            <a:endParaRPr lang="en-US" sz="1250" dirty="0"/>
+          </a:p>
+        </p:txBody>
+      </p:sp>
+      <p:sp>
+        <p:nvSpPr>
+          <p:cNvPr id="14" name="Shape 12"/>
+          <p:cNvSpPr/>
+          <p:nvPr/>
+        </p:nvSpPr>
+        <p:spPr>
+          <a:xfrm>
+            <a:off x="7909560" y="3520440"/>
+            <a:ext cx="3154680" cy="1737360"/>
+          </a:xfrm>
+          <a:prstGeom prst="roundRect">
+            <a:avLst>
+              <a:gd name="adj" fmla="val 6316"/>
+            </a:avLst>
+          </a:prstGeom>
+          <a:solidFill>
+            <a:srgbClr val="EAF6F8"/>
+          </a:solidFill>
+          <a:ln w="12700">
+            <a:solidFill>
+              <a:srgbClr val="B9D7E6"/>
+            </a:solidFill>
+            <a:prstDash val="solid"/>
+          </a:ln>
+        </p:spPr>
+      </p:sp>
+      <p:sp>
+        <p:nvSpPr>
+          <p:cNvPr id="15" name="Text 13"/>
+          <p:cNvSpPr/>
+          <p:nvPr/>
+        </p:nvSpPr>
+        <p:spPr>
+          <a:xfrm>
+            <a:off x="8074152" y="3666744"/>
+            <a:ext cx="2825496" cy="201168"/>
+          </a:xfrm>
+          <a:prstGeom prst="rect">
+            <a:avLst/>
+          </a:prstGeom>
+          <a:noFill/>
+          <a:ln/>
+        </p:spPr>
+        <p:txBody>
+          <a:bodyPr wrap="square" lIns="0" tIns="0" rIns="0" bIns="0" rtlCol="0" anchor="ctr"/>
+          <a:lstStyle/>
+          <a:p>
+            <a:pPr indent="0" marL="0">
+              <a:buNone/>
+            </a:pPr>
+            <a:r>
+              <a:rPr lang="en-US" sz="950" b="1" dirty="0">
+                <a:solidFill>
+                  <a:srgbClr val="0068B7"/>
+                </a:solidFill>
+                <a:latin typeface="Aptos" pitchFamily="34" charset="0"/>
+                <a:ea typeface="Aptos" pitchFamily="34" charset="-122"/>
+                <a:cs typeface="Aptos" pitchFamily="34" charset="-120"/>
+              </a:rPr>
+              <a:t>Use this for</a:t>
+            </a:r>
+            <a:endParaRPr lang="en-US" sz="950" dirty="0"/>
+          </a:p>
+        </p:txBody>
+      </p:sp>
+      <p:sp>
+        <p:nvSpPr>
+          <p:cNvPr id="16" name="Text 14"/>
+          <p:cNvSpPr/>
+          <p:nvPr/>
+        </p:nvSpPr>
+        <p:spPr>
+          <a:xfrm>
+            <a:off x="8074152" y="3959352"/>
+            <a:ext cx="2825496" cy="1170432"/>
+          </a:xfrm>
+          <a:prstGeom prst="rect">
+            <a:avLst/>
+          </a:prstGeom>
+          <a:noFill/>
+          <a:ln/>
+        </p:spPr>
+        <p:txBody>
+          <a:bodyPr wrap="square" lIns="0" tIns="0" rIns="0" bIns="0" rtlCol="0" anchor="t">
+            <a:normAutofit/>
+          </a:bodyPr>
+          <a:lstStyle/>
+          <a:p>
+            <a:pPr indent="0" marL="0">
+              <a:buNone/>
+            </a:pPr>
+            <a:r>
+              <a:rPr lang="en-US" sz="1250" dirty="0">
+                <a:solidFill>
+                  <a:srgbClr val="17364A"/>
+                </a:solidFill>
+                <a:latin typeface="Aptos" pitchFamily="34" charset="0"/>
+                <a:ea typeface="Aptos" pitchFamily="34" charset="-122"/>
+                <a:cs typeface="Aptos" pitchFamily="34" charset="-120"/>
+              </a:rPr>
+              <a:t>Connect the concept to public health decisions, safeguards, documentation, or implementation work.</a:t>
+            </a:r>
+            <a:endParaRPr lang="en-US" sz="1250" dirty="0"/>
+          </a:p>
+        </p:txBody>
+      </p:sp>
+    </p:spTree>
+  </p:cSld>
+  <p:clrMapOvr>
+    <a:masterClrMapping/>
+  </p:clrMapOvr>
+</p:sld>
+</file>
+
+<file path=ppt/slides/slide21.xml><?xml version="1.0" encoding="utf-8"?>
+<p:sld xmlns:a="http://schemas.openxmlformats.org/drawingml/2006/main" xmlns:r="http://schemas.openxmlformats.org/officeDocument/2006/relationships" xmlns:p="http://schemas.openxmlformats.org/presentationml/2006/main">
+  <p:cSld name="Slide 21">
+    <p:bg>
+      <p:bgPr>
+        <a:solidFill>
+          <a:srgbClr val="F7FBFD"/>
+        </a:solidFill>
+      </p:bgPr>
+    </p:bg>
+    <p:spTree>
+      <p:nvGrpSpPr>
+        <p:cNvPr id="1" name=""/>
+        <p:cNvGrpSpPr/>
+        <p:nvPr/>
+      </p:nvGrpSpPr>
+      <p:grpSpPr>
+        <a:xfrm>
+          <a:off x="0" y="0"/>
+          <a:ext cx="0" cy="0"/>
+          <a:chOff x="0" y="0"/>
+          <a:chExt cx="0" cy="0"/>
+        </a:xfrm>
+      </p:grpSpPr>
+      <p:sp>
+        <p:nvSpPr>
+          <p:cNvPr id="2" name="Shape 0"/>
+          <p:cNvSpPr/>
+          <p:nvPr/>
+        </p:nvSpPr>
+        <p:spPr>
+          <a:xfrm>
+            <a:off x="0" y="0"/>
+            <a:ext cx="12191695" cy="164592"/>
+          </a:xfrm>
+          <a:prstGeom prst="rect">
+            <a:avLst/>
+          </a:prstGeom>
+          <a:solidFill>
+            <a:srgbClr val="0068B7"/>
+          </a:solidFill>
+          <a:ln w="12700">
+            <a:solidFill>
+              <a:srgbClr val="0068B7"/>
+            </a:solidFill>
+            <a:prstDash val="solid"/>
+          </a:ln>
+        </p:spPr>
+      </p:sp>
+      <p:sp>
+        <p:nvSpPr>
+          <p:cNvPr id="3" name="Shape 1"/>
+          <p:cNvSpPr/>
+          <p:nvPr/>
+        </p:nvSpPr>
+        <p:spPr>
+          <a:xfrm>
+            <a:off x="0" y="164592"/>
+            <a:ext cx="146304" cy="6693408"/>
+          </a:xfrm>
+          <a:prstGeom prst="rect">
+            <a:avLst/>
+          </a:prstGeom>
+          <a:solidFill>
+            <a:srgbClr val="2F8A28"/>
+          </a:solidFill>
+          <a:ln w="12700">
+            <a:solidFill>
+              <a:srgbClr val="2F8A28"/>
+            </a:solidFill>
+            <a:prstDash val="solid"/>
+          </a:ln>
+        </p:spPr>
+      </p:sp>
+      <p:sp>
+        <p:nvSpPr>
+          <p:cNvPr id="4" name="Text 2"/>
+          <p:cNvSpPr/>
+          <p:nvPr/>
+        </p:nvSpPr>
+        <p:spPr>
+          <a:xfrm>
+            <a:off x="502920" y="292608"/>
+            <a:ext cx="10149840" cy="256032"/>
+          </a:xfrm>
+          <a:prstGeom prst="rect">
+            <a:avLst/>
+          </a:prstGeom>
+          <a:noFill/>
+          <a:ln/>
+        </p:spPr>
+        <p:txBody>
+          <a:bodyPr wrap="square" lIns="0" tIns="0" rIns="0" bIns="0" rtlCol="0" anchor="ctr"/>
+          <a:lstStyle/>
+          <a:p>
+            <a:pPr indent="0" marL="0">
+              <a:buNone/>
+            </a:pPr>
+            <a:r>
+              <a:rPr lang="en-US" sz="900" b="1" dirty="0">
+                <a:solidFill>
+                  <a:srgbClr val="5F7181"/>
+                </a:solidFill>
+                <a:latin typeface="Aptos" pitchFamily="34" charset="0"/>
+                <a:ea typeface="Aptos" pitchFamily="34" charset="-122"/>
+                <a:cs typeface="Aptos" pitchFamily="34" charset="-120"/>
+              </a:rPr>
+              <a:t>Advanced Model Validation and Evaluation for Public Health AI</a:t>
+            </a:r>
+            <a:endParaRPr lang="en-US" sz="900" dirty="0"/>
+          </a:p>
+        </p:txBody>
+      </p:sp>
+      <p:sp>
+        <p:nvSpPr>
+          <p:cNvPr id="5" name="Text 3"/>
+          <p:cNvSpPr/>
+          <p:nvPr/>
+        </p:nvSpPr>
+        <p:spPr>
+          <a:xfrm>
+            <a:off x="502920" y="6537960"/>
+            <a:ext cx="7772400" cy="201168"/>
+          </a:xfrm>
+          <a:prstGeom prst="rect">
+            <a:avLst/>
+          </a:prstGeom>
+          <a:noFill/>
+          <a:ln/>
+        </p:spPr>
+        <p:txBody>
+          <a:bodyPr wrap="square" lIns="0" tIns="0" rIns="0" bIns="0" rtlCol="0" anchor="ctr"/>
+          <a:lstStyle/>
+          <a:p>
+            <a:pPr indent="0" marL="0">
+              <a:buNone/>
+            </a:pPr>
+            <a:r>
+              <a:rPr lang="en-US" sz="800" dirty="0">
+                <a:solidFill>
+                  <a:srgbClr val="5F7181"/>
+                </a:solidFill>
+                <a:latin typeface="Aptos" pitchFamily="34" charset="0"/>
+                <a:ea typeface="Aptos" pitchFamily="34" charset="-122"/>
+                <a:cs typeface="Aptos" pitchFamily="34" charset="-120"/>
+              </a:rPr>
+              <a:t>AI Playbook and Toolkit for Public Health Departments</a:t>
+            </a:r>
+            <a:endParaRPr lang="en-US" sz="800" dirty="0"/>
+          </a:p>
+        </p:txBody>
+      </p:sp>
+      <p:sp>
+        <p:nvSpPr>
+          <p:cNvPr id="6" name="Text 4"/>
+          <p:cNvSpPr/>
+          <p:nvPr/>
+        </p:nvSpPr>
+        <p:spPr>
+          <a:xfrm>
+            <a:off x="9966960" y="6537960"/>
+            <a:ext cx="1645920" cy="201168"/>
+          </a:xfrm>
+          <a:prstGeom prst="rect">
+            <a:avLst/>
+          </a:prstGeom>
+          <a:noFill/>
+          <a:ln/>
+        </p:spPr>
+        <p:txBody>
+          <a:bodyPr wrap="square" lIns="0" tIns="0" rIns="0" bIns="0" rtlCol="0" anchor="ctr"/>
+          <a:lstStyle/>
+          <a:p>
+            <a:pPr algn="r" indent="0" marL="0">
+              <a:buNone/>
+            </a:pPr>
+            <a:r>
+              <a:rPr lang="en-US" sz="800" dirty="0">
+                <a:solidFill>
+                  <a:srgbClr val="5F7181"/>
+                </a:solidFill>
+                <a:latin typeface="Aptos" pitchFamily="34" charset="0"/>
+                <a:ea typeface="Aptos" pitchFamily="34" charset="-122"/>
+                <a:cs typeface="Aptos" pitchFamily="34" charset="-120"/>
+              </a:rPr>
+              <a:t>© Paula Soper</a:t>
+            </a:r>
+            <a:endParaRPr lang="en-US" sz="800" dirty="0"/>
+          </a:p>
+        </p:txBody>
+      </p:sp>
+      <p:sp>
+        <p:nvSpPr>
+          <p:cNvPr id="7" name="Shape 5"/>
+          <p:cNvSpPr/>
+          <p:nvPr/>
+        </p:nvSpPr>
+        <p:spPr>
+          <a:xfrm>
+            <a:off x="640080" y="658368"/>
+            <a:ext cx="420624" cy="420624"/>
+          </a:xfrm>
+          <a:prstGeom prst="ellipse">
+            <a:avLst/>
+          </a:prstGeom>
+          <a:solidFill>
+            <a:srgbClr val="0068B7"/>
+          </a:solidFill>
+          <a:ln w="12700">
+            <a:solidFill>
+              <a:srgbClr val="0068B7"/>
+            </a:solidFill>
+            <a:prstDash val="solid"/>
+          </a:ln>
+        </p:spPr>
+      </p:sp>
+      <p:sp>
+        <p:nvSpPr>
+          <p:cNvPr id="8" name="Text 6"/>
+          <p:cNvSpPr/>
+          <p:nvPr/>
+        </p:nvSpPr>
+        <p:spPr>
+          <a:xfrm>
+            <a:off x="640080" y="731520"/>
+            <a:ext cx="420624" cy="164592"/>
+          </a:xfrm>
+          <a:prstGeom prst="rect">
+            <a:avLst/>
+          </a:prstGeom>
+          <a:noFill/>
+          <a:ln/>
+        </p:spPr>
+        <p:txBody>
+          <a:bodyPr wrap="square" lIns="0" tIns="0" rIns="0" bIns="0" rtlCol="0" anchor="ctr"/>
+          <a:lstStyle/>
+          <a:p>
+            <a:pPr algn="ctr" indent="0" marL="0">
+              <a:buNone/>
+            </a:pPr>
+            <a:r>
+              <a:rPr lang="en-US" sz="1100" b="1" dirty="0">
+                <a:solidFill>
+                  <a:srgbClr val="FFFFFF"/>
+                </a:solidFill>
+                <a:latin typeface="Aptos" pitchFamily="34" charset="0"/>
+                <a:ea typeface="Aptos" pitchFamily="34" charset="-122"/>
+                <a:cs typeface="Aptos" pitchFamily="34" charset="-120"/>
+              </a:rPr>
+              <a:t>12</a:t>
+            </a:r>
+            <a:endParaRPr lang="en-US" sz="1100" dirty="0"/>
+          </a:p>
+        </p:txBody>
+      </p:sp>
+      <p:sp>
+        <p:nvSpPr>
+          <p:cNvPr id="9" name="Text 7"/>
+          <p:cNvSpPr/>
+          <p:nvPr/>
+        </p:nvSpPr>
+        <p:spPr>
+          <a:xfrm>
+            <a:off x="640080" y="621792"/>
+            <a:ext cx="10881360" cy="566928"/>
+          </a:xfrm>
+          <a:prstGeom prst="rect">
+            <a:avLst/>
+          </a:prstGeom>
+          <a:noFill/>
+          <a:ln/>
+        </p:spPr>
+        <p:txBody>
+          <a:bodyPr wrap="square" lIns="0" tIns="0" rIns="0" bIns="0" rtlCol="0" anchor="ctr">
+            <a:normAutofit/>
+          </a:bodyPr>
+          <a:lstStyle/>
+          <a:p>
+            <a:pPr indent="0" marL="0">
+              <a:buNone/>
+            </a:pPr>
+            <a:r>
+              <a:rPr lang="en-US" sz="2700" b="1" dirty="0">
+                <a:solidFill>
+                  <a:srgbClr val="003A63"/>
+                </a:solidFill>
+                <a:latin typeface="Aptos Display" pitchFamily="34" charset="0"/>
+                <a:ea typeface="Aptos Display" pitchFamily="34" charset="-122"/>
+                <a:cs typeface="Aptos Display" pitchFamily="34" charset="-120"/>
+              </a:rPr>
+              <a:t>Knowledge Check</a:t>
+            </a:r>
+            <a:endParaRPr lang="en-US" sz="2700" dirty="0"/>
+          </a:p>
+        </p:txBody>
+      </p:sp>
+      <p:sp>
+        <p:nvSpPr>
+          <p:cNvPr id="10" name="Text 8"/>
+          <p:cNvSpPr/>
+          <p:nvPr/>
+        </p:nvSpPr>
+        <p:spPr>
+          <a:xfrm>
+            <a:off x="868680" y="1417320"/>
+            <a:ext cx="6675120" cy="4434840"/>
+          </a:xfrm>
+          <a:prstGeom prst="rect">
+            <a:avLst/>
+          </a:prstGeom>
+          <a:noFill/>
+          <a:ln/>
+        </p:spPr>
+        <p:txBody>
+          <a:bodyPr wrap="square" lIns="635" tIns="635" rIns="635" bIns="635" rtlCol="0" anchor="t">
+            <a:normAutofit/>
+          </a:bodyPr>
+          <a:lstStyle/>
+          <a:p>
+            <a:r>
+              <a:rPr lang="en-US" sz="1700" dirty="0">
+                <a:solidFill>
+                  <a:srgbClr val="17364A"/>
+                </a:solidFill>
+                <a:latin typeface="Aptos" pitchFamily="34" charset="0"/>
+                <a:ea typeface="Aptos" pitchFamily="34" charset="-122"/>
+                <a:cs typeface="Aptos" pitchFamily="34" charset="-120"/>
+              </a:rPr>
+              <a:t>1. Why can overall accuracy be misleading?</a:t>
+            </a:r>
+            <a:endParaRPr lang="en-US" sz="1700" dirty="0"/>
+          </a:p>
+          <a:p>
+            <a:r>
+              <a:rPr lang="en-US" sz="1700" dirty="0">
+                <a:solidFill>
+                  <a:srgbClr val="17364A"/>
+                </a:solidFill>
+                <a:latin typeface="Aptos" pitchFamily="34" charset="0"/>
+                <a:ea typeface="Aptos" pitchFamily="34" charset="-122"/>
+                <a:cs typeface="Aptos" pitchFamily="34" charset="-120"/>
+              </a:rPr>
+              <a:t>2. What is workflow validation?</a:t>
+            </a:r>
+            <a:endParaRPr lang="en-US" sz="1700" dirty="0"/>
+          </a:p>
+          <a:p>
+            <a:r>
+              <a:rPr lang="en-US" sz="1700" dirty="0">
+                <a:solidFill>
+                  <a:srgbClr val="17364A"/>
+                </a:solidFill>
+                <a:latin typeface="Aptos" pitchFamily="34" charset="0"/>
+                <a:ea typeface="Aptos" pitchFamily="34" charset="-122"/>
+                <a:cs typeface="Aptos" pitchFamily="34" charset="-120"/>
+              </a:rPr>
+              <a:t>3. Which metric is especially important when missed true events could cause harm?</a:t>
+            </a:r>
+            <a:endParaRPr lang="en-US" sz="1700" dirty="0"/>
+          </a:p>
+          <a:p>
+            <a:r>
+              <a:rPr lang="en-US" sz="1700" dirty="0">
+                <a:solidFill>
+                  <a:srgbClr val="17364A"/>
+                </a:solidFill>
+                <a:latin typeface="Aptos" pitchFamily="34" charset="0"/>
+                <a:ea typeface="Aptos" pitchFamily="34" charset="-122"/>
+                <a:cs typeface="Aptos" pitchFamily="34" charset="-120"/>
+              </a:rPr>
+              <a:t>4. What does external validation test?</a:t>
+            </a:r>
+            <a:endParaRPr lang="en-US" sz="1700" dirty="0"/>
+          </a:p>
+        </p:txBody>
+      </p:sp>
+      <p:sp>
+        <p:nvSpPr>
+          <p:cNvPr id="11" name="Shape 9"/>
+          <p:cNvSpPr/>
+          <p:nvPr/>
+        </p:nvSpPr>
+        <p:spPr>
+          <a:xfrm>
+            <a:off x="7909560" y="1417320"/>
+            <a:ext cx="3154680" cy="1828800"/>
+          </a:xfrm>
+          <a:prstGeom prst="roundRect">
+            <a:avLst>
+              <a:gd name="adj" fmla="val 6000"/>
+            </a:avLst>
+          </a:prstGeom>
+          <a:solidFill>
+            <a:srgbClr val="EEF8ED"/>
+          </a:solidFill>
+          <a:ln w="12700">
+            <a:solidFill>
+              <a:srgbClr val="B9D7E6"/>
+            </a:solidFill>
+            <a:prstDash val="solid"/>
+          </a:ln>
+        </p:spPr>
+      </p:sp>
+      <p:sp>
+        <p:nvSpPr>
+          <p:cNvPr id="12" name="Text 10"/>
+          <p:cNvSpPr/>
+          <p:nvPr/>
+        </p:nvSpPr>
+        <p:spPr>
+          <a:xfrm>
+            <a:off x="8074152" y="1563624"/>
+            <a:ext cx="2825496" cy="201168"/>
+          </a:xfrm>
+          <a:prstGeom prst="rect">
+            <a:avLst/>
+          </a:prstGeom>
+          <a:noFill/>
+          <a:ln/>
+        </p:spPr>
+        <p:txBody>
+          <a:bodyPr wrap="square" lIns="0" tIns="0" rIns="0" bIns="0" rtlCol="0" anchor="ctr"/>
+          <a:lstStyle/>
+          <a:p>
+            <a:pPr indent="0" marL="0">
+              <a:buNone/>
+            </a:pPr>
+            <a:r>
+              <a:rPr lang="en-US" sz="950" b="1" dirty="0">
+                <a:solidFill>
+                  <a:srgbClr val="0068B7"/>
+                </a:solidFill>
+                <a:latin typeface="Aptos" pitchFamily="34" charset="0"/>
+                <a:ea typeface="Aptos" pitchFamily="34" charset="-122"/>
+                <a:cs typeface="Aptos" pitchFamily="34" charset="-120"/>
+              </a:rPr>
+              <a:t>Key idea</a:t>
+            </a:r>
+            <a:endParaRPr lang="en-US" sz="950" dirty="0"/>
+          </a:p>
+        </p:txBody>
+      </p:sp>
+      <p:sp>
+        <p:nvSpPr>
+          <p:cNvPr id="13" name="Text 11"/>
+          <p:cNvSpPr/>
+          <p:nvPr/>
+        </p:nvSpPr>
+        <p:spPr>
+          <a:xfrm>
+            <a:off x="8074152" y="1856232"/>
+            <a:ext cx="2825496" cy="1261872"/>
+          </a:xfrm>
+          <a:prstGeom prst="rect">
+            <a:avLst/>
+          </a:prstGeom>
+          <a:noFill/>
+          <a:ln/>
+        </p:spPr>
+        <p:txBody>
+          <a:bodyPr wrap="square" lIns="0" tIns="0" rIns="0" bIns="0" rtlCol="0" anchor="t">
+            <a:normAutofit/>
+          </a:bodyPr>
+          <a:lstStyle/>
+          <a:p>
+            <a:pPr indent="0" marL="0">
+              <a:buNone/>
+            </a:pPr>
+            <a:r>
+              <a:rPr lang="en-US" sz="1250" dirty="0">
+                <a:solidFill>
+                  <a:srgbClr val="17364A"/>
+                </a:solidFill>
+                <a:latin typeface="Aptos" pitchFamily="34" charset="0"/>
+                <a:ea typeface="Aptos" pitchFamily="34" charset="-122"/>
+                <a:cs typeface="Aptos" pitchFamily="34" charset="-120"/>
+              </a:rPr>
+              <a:t>1. Why can overall accuracy be misleading?</a:t>
+            </a:r>
+            <a:endParaRPr lang="en-US" sz="1250" dirty="0"/>
+          </a:p>
+        </p:txBody>
+      </p:sp>
+      <p:sp>
+        <p:nvSpPr>
+          <p:cNvPr id="14" name="Shape 12"/>
+          <p:cNvSpPr/>
+          <p:nvPr/>
+        </p:nvSpPr>
+        <p:spPr>
+          <a:xfrm>
+            <a:off x="7909560" y="3520440"/>
+            <a:ext cx="3154680" cy="1737360"/>
+          </a:xfrm>
+          <a:prstGeom prst="roundRect">
+            <a:avLst>
+              <a:gd name="adj" fmla="val 6316"/>
+            </a:avLst>
+          </a:prstGeom>
+          <a:solidFill>
+            <a:srgbClr val="EAF6F8"/>
+          </a:solidFill>
+          <a:ln w="12700">
+            <a:solidFill>
+              <a:srgbClr val="B9D7E6"/>
+            </a:solidFill>
+            <a:prstDash val="solid"/>
+          </a:ln>
+        </p:spPr>
+      </p:sp>
+      <p:sp>
+        <p:nvSpPr>
+          <p:cNvPr id="15" name="Text 13"/>
+          <p:cNvSpPr/>
+          <p:nvPr/>
+        </p:nvSpPr>
+        <p:spPr>
+          <a:xfrm>
+            <a:off x="8074152" y="3666744"/>
+            <a:ext cx="2825496" cy="201168"/>
+          </a:xfrm>
+          <a:prstGeom prst="rect">
+            <a:avLst/>
+          </a:prstGeom>
+          <a:noFill/>
+          <a:ln/>
+        </p:spPr>
+        <p:txBody>
+          <a:bodyPr wrap="square" lIns="0" tIns="0" rIns="0" bIns="0" rtlCol="0" anchor="ctr"/>
+          <a:lstStyle/>
+          <a:p>
+            <a:pPr indent="0" marL="0">
+              <a:buNone/>
+            </a:pPr>
+            <a:r>
+              <a:rPr lang="en-US" sz="950" b="1" dirty="0">
+                <a:solidFill>
+                  <a:srgbClr val="0068B7"/>
+                </a:solidFill>
+                <a:latin typeface="Aptos" pitchFamily="34" charset="0"/>
+                <a:ea typeface="Aptos" pitchFamily="34" charset="-122"/>
+                <a:cs typeface="Aptos" pitchFamily="34" charset="-120"/>
+              </a:rPr>
+              <a:t>Use this for</a:t>
+            </a:r>
+            <a:endParaRPr lang="en-US" sz="950" dirty="0"/>
+          </a:p>
+        </p:txBody>
+      </p:sp>
+      <p:sp>
+        <p:nvSpPr>
+          <p:cNvPr id="16" name="Text 14"/>
+          <p:cNvSpPr/>
+          <p:nvPr/>
+        </p:nvSpPr>
+        <p:spPr>
+          <a:xfrm>
+            <a:off x="8074152" y="3959352"/>
+            <a:ext cx="2825496" cy="1170432"/>
+          </a:xfrm>
+          <a:prstGeom prst="rect">
+            <a:avLst/>
+          </a:prstGeom>
+          <a:noFill/>
+          <a:ln/>
+        </p:spPr>
+        <p:txBody>
+          <a:bodyPr wrap="square" lIns="0" tIns="0" rIns="0" bIns="0" rtlCol="0" anchor="t">
+            <a:normAutofit/>
+          </a:bodyPr>
+          <a:lstStyle/>
+          <a:p>
+            <a:pPr indent="0" marL="0">
+              <a:buNone/>
+            </a:pPr>
+            <a:r>
+              <a:rPr lang="en-US" sz="1250" dirty="0">
+                <a:solidFill>
+                  <a:srgbClr val="17364A"/>
+                </a:solidFill>
+                <a:latin typeface="Aptos" pitchFamily="34" charset="0"/>
+                <a:ea typeface="Aptos" pitchFamily="34" charset="-122"/>
+                <a:cs typeface="Aptos" pitchFamily="34" charset="-120"/>
+              </a:rPr>
+              <a:t>Connect the concept to public health decisions, safeguards, documentation, or implementation work.</a:t>
+            </a:r>
+            <a:endParaRPr lang="en-US" sz="1250" dirty="0"/>
+          </a:p>
+        </p:txBody>
+      </p:sp>
+    </p:spTree>
+  </p:cSld>
+  <p:clrMapOvr>
+    <a:masterClrMapping/>
+  </p:clrMapOvr>
+</p:sld>
+</file>
+
+<file path=ppt/slides/slide22.xml><?xml version="1.0" encoding="utf-8"?>
+<p:sld xmlns:a="http://schemas.openxmlformats.org/drawingml/2006/main" xmlns:r="http://schemas.openxmlformats.org/officeDocument/2006/relationships" xmlns:p="http://schemas.openxmlformats.org/presentationml/2006/main">
+  <p:cSld name="Slide 22">
+    <p:bg>
+      <p:bgPr>
+        <a:solidFill>
+          <a:srgbClr val="F7FBFD"/>
+        </a:solidFill>
+      </p:bgPr>
+    </p:bg>
+    <p:spTree>
+      <p:nvGrpSpPr>
+        <p:cNvPr id="1" name=""/>
+        <p:cNvGrpSpPr/>
+        <p:nvPr/>
+      </p:nvGrpSpPr>
+      <p:grpSpPr>
+        <a:xfrm>
+          <a:off x="0" y="0"/>
+          <a:ext cx="0" cy="0"/>
+          <a:chOff x="0" y="0"/>
+          <a:chExt cx="0" cy="0"/>
+        </a:xfrm>
+      </p:grpSpPr>
+      <p:sp>
+        <p:nvSpPr>
+          <p:cNvPr id="2" name="Shape 0"/>
+          <p:cNvSpPr/>
+          <p:nvPr/>
+        </p:nvSpPr>
+        <p:spPr>
+          <a:xfrm>
+            <a:off x="0" y="0"/>
+            <a:ext cx="12191695" cy="164592"/>
+          </a:xfrm>
+          <a:prstGeom prst="rect">
+            <a:avLst/>
+          </a:prstGeom>
+          <a:solidFill>
+            <a:srgbClr val="0068B7"/>
+          </a:solidFill>
+          <a:ln w="12700">
+            <a:solidFill>
+              <a:srgbClr val="0068B7"/>
+            </a:solidFill>
+            <a:prstDash val="solid"/>
+          </a:ln>
+        </p:spPr>
+      </p:sp>
+      <p:sp>
+        <p:nvSpPr>
+          <p:cNvPr id="3" name="Shape 1"/>
+          <p:cNvSpPr/>
+          <p:nvPr/>
+        </p:nvSpPr>
+        <p:spPr>
+          <a:xfrm>
+            <a:off x="0" y="164592"/>
+            <a:ext cx="146304" cy="6693408"/>
+          </a:xfrm>
+          <a:prstGeom prst="rect">
+            <a:avLst/>
+          </a:prstGeom>
+          <a:solidFill>
+            <a:srgbClr val="2F8A28"/>
+          </a:solidFill>
+          <a:ln w="12700">
+            <a:solidFill>
+              <a:srgbClr val="2F8A28"/>
+            </a:solidFill>
+            <a:prstDash val="solid"/>
+          </a:ln>
+        </p:spPr>
+      </p:sp>
+      <p:sp>
+        <p:nvSpPr>
+          <p:cNvPr id="4" name="Text 2"/>
+          <p:cNvSpPr/>
+          <p:nvPr/>
+        </p:nvSpPr>
+        <p:spPr>
+          <a:xfrm>
+            <a:off x="502920" y="292608"/>
+            <a:ext cx="10149840" cy="256032"/>
+          </a:xfrm>
+          <a:prstGeom prst="rect">
+            <a:avLst/>
+          </a:prstGeom>
+          <a:noFill/>
+          <a:ln/>
+        </p:spPr>
+        <p:txBody>
+          <a:bodyPr wrap="square" lIns="0" tIns="0" rIns="0" bIns="0" rtlCol="0" anchor="ctr"/>
+          <a:lstStyle/>
+          <a:p>
+            <a:pPr indent="0" marL="0">
+              <a:buNone/>
+            </a:pPr>
+            <a:r>
+              <a:rPr lang="en-US" sz="900" b="1" dirty="0">
+                <a:solidFill>
+                  <a:srgbClr val="5F7181"/>
+                </a:solidFill>
+                <a:latin typeface="Aptos" pitchFamily="34" charset="0"/>
+                <a:ea typeface="Aptos" pitchFamily="34" charset="-122"/>
+                <a:cs typeface="Aptos" pitchFamily="34" charset="-120"/>
+              </a:rPr>
+              <a:t>Advanced Model Validation and Evaluation for Public Health AI</a:t>
+            </a:r>
+            <a:endParaRPr lang="en-US" sz="900" dirty="0"/>
+          </a:p>
+        </p:txBody>
+      </p:sp>
+      <p:sp>
+        <p:nvSpPr>
+          <p:cNvPr id="5" name="Text 3"/>
+          <p:cNvSpPr/>
+          <p:nvPr/>
+        </p:nvSpPr>
+        <p:spPr>
+          <a:xfrm>
+            <a:off x="502920" y="6537960"/>
+            <a:ext cx="7772400" cy="201168"/>
+          </a:xfrm>
+          <a:prstGeom prst="rect">
+            <a:avLst/>
+          </a:prstGeom>
+          <a:noFill/>
+          <a:ln/>
+        </p:spPr>
+        <p:txBody>
+          <a:bodyPr wrap="square" lIns="0" tIns="0" rIns="0" bIns="0" rtlCol="0" anchor="ctr"/>
+          <a:lstStyle/>
+          <a:p>
+            <a:pPr indent="0" marL="0">
+              <a:buNone/>
+            </a:pPr>
+            <a:r>
+              <a:rPr lang="en-US" sz="800" dirty="0">
+                <a:solidFill>
+                  <a:srgbClr val="5F7181"/>
+                </a:solidFill>
+                <a:latin typeface="Aptos" pitchFamily="34" charset="0"/>
+                <a:ea typeface="Aptos" pitchFamily="34" charset="-122"/>
+                <a:cs typeface="Aptos" pitchFamily="34" charset="-120"/>
+              </a:rPr>
+              <a:t>AI Playbook and Toolkit for Public Health Departments</a:t>
+            </a:r>
+            <a:endParaRPr lang="en-US" sz="800" dirty="0"/>
+          </a:p>
+        </p:txBody>
+      </p:sp>
+      <p:sp>
+        <p:nvSpPr>
+          <p:cNvPr id="6" name="Text 4"/>
+          <p:cNvSpPr/>
+          <p:nvPr/>
+        </p:nvSpPr>
+        <p:spPr>
+          <a:xfrm>
+            <a:off x="9966960" y="6537960"/>
+            <a:ext cx="1645920" cy="201168"/>
+          </a:xfrm>
+          <a:prstGeom prst="rect">
+            <a:avLst/>
+          </a:prstGeom>
+          <a:noFill/>
+          <a:ln/>
+        </p:spPr>
+        <p:txBody>
+          <a:bodyPr wrap="square" lIns="0" tIns="0" rIns="0" bIns="0" rtlCol="0" anchor="ctr"/>
+          <a:lstStyle/>
+          <a:p>
+            <a:pPr algn="r" indent="0" marL="0">
+              <a:buNone/>
+            </a:pPr>
+            <a:r>
+              <a:rPr lang="en-US" sz="800" dirty="0">
+                <a:solidFill>
+                  <a:srgbClr val="5F7181"/>
+                </a:solidFill>
+                <a:latin typeface="Aptos" pitchFamily="34" charset="0"/>
+                <a:ea typeface="Aptos" pitchFamily="34" charset="-122"/>
+                <a:cs typeface="Aptos" pitchFamily="34" charset="-120"/>
+              </a:rPr>
+              <a:t>© Paula Soper</a:t>
+            </a:r>
+            <a:endParaRPr lang="en-US" sz="800" dirty="0"/>
+          </a:p>
+        </p:txBody>
+      </p:sp>
+      <p:sp>
+        <p:nvSpPr>
+          <p:cNvPr id="7" name="Shape 5"/>
+          <p:cNvSpPr/>
+          <p:nvPr/>
+        </p:nvSpPr>
+        <p:spPr>
+          <a:xfrm>
+            <a:off x="640080" y="658368"/>
+            <a:ext cx="420624" cy="420624"/>
+          </a:xfrm>
+          <a:prstGeom prst="ellipse">
+            <a:avLst/>
+          </a:prstGeom>
+          <a:solidFill>
+            <a:srgbClr val="0068B7"/>
+          </a:solidFill>
+          <a:ln w="12700">
+            <a:solidFill>
+              <a:srgbClr val="0068B7"/>
+            </a:solidFill>
+            <a:prstDash val="solid"/>
+          </a:ln>
+        </p:spPr>
+      </p:sp>
+      <p:sp>
+        <p:nvSpPr>
+          <p:cNvPr id="8" name="Text 6"/>
+          <p:cNvSpPr/>
+          <p:nvPr/>
+        </p:nvSpPr>
+        <p:spPr>
+          <a:xfrm>
+            <a:off x="640080" y="731520"/>
+            <a:ext cx="420624" cy="164592"/>
+          </a:xfrm>
+          <a:prstGeom prst="rect">
+            <a:avLst/>
+          </a:prstGeom>
+          <a:noFill/>
+          <a:ln/>
+        </p:spPr>
+        <p:txBody>
+          <a:bodyPr wrap="square" lIns="0" tIns="0" rIns="0" bIns="0" rtlCol="0" anchor="ctr"/>
+          <a:lstStyle/>
+          <a:p>
+            <a:pPr algn="ctr" indent="0" marL="0">
+              <a:buNone/>
+            </a:pPr>
+            <a:r>
+              <a:rPr lang="en-US" sz="1100" b="1" dirty="0">
+                <a:solidFill>
+                  <a:srgbClr val="FFFFFF"/>
+                </a:solidFill>
+                <a:latin typeface="Aptos" pitchFamily="34" charset="0"/>
+                <a:ea typeface="Aptos" pitchFamily="34" charset="-122"/>
+                <a:cs typeface="Aptos" pitchFamily="34" charset="-120"/>
+              </a:rPr>
+              <a:t>13</a:t>
+            </a:r>
+            <a:endParaRPr lang="en-US" sz="1100" dirty="0"/>
+          </a:p>
+        </p:txBody>
+      </p:sp>
+      <p:sp>
+        <p:nvSpPr>
+          <p:cNvPr id="9" name="Text 7"/>
+          <p:cNvSpPr/>
+          <p:nvPr/>
+        </p:nvSpPr>
+        <p:spPr>
+          <a:xfrm>
+            <a:off x="640080" y="621792"/>
+            <a:ext cx="10881360" cy="566928"/>
+          </a:xfrm>
+          <a:prstGeom prst="rect">
+            <a:avLst/>
+          </a:prstGeom>
+          <a:noFill/>
+          <a:ln/>
+        </p:spPr>
+        <p:txBody>
+          <a:bodyPr wrap="square" lIns="0" tIns="0" rIns="0" bIns="0" rtlCol="0" anchor="ctr">
+            <a:normAutofit/>
+          </a:bodyPr>
+          <a:lstStyle/>
+          <a:p>
+            <a:pPr indent="0" marL="0">
+              <a:buNone/>
+            </a:pPr>
+            <a:r>
+              <a:rPr lang="en-US" sz="2700" b="1" dirty="0">
+                <a:solidFill>
+                  <a:srgbClr val="003A63"/>
+                </a:solidFill>
+                <a:latin typeface="Aptos Display" pitchFamily="34" charset="0"/>
+                <a:ea typeface="Aptos Display" pitchFamily="34" charset="-122"/>
+                <a:cs typeface="Aptos Display" pitchFamily="34" charset="-120"/>
+              </a:rPr>
+              <a:t>References and Resources</a:t>
+            </a:r>
+            <a:endParaRPr lang="en-US" sz="2700" dirty="0"/>
+          </a:p>
+        </p:txBody>
+      </p:sp>
+      <p:sp>
+        <p:nvSpPr>
+          <p:cNvPr id="10" name="Text 8"/>
+          <p:cNvSpPr/>
+          <p:nvPr/>
+        </p:nvSpPr>
+        <p:spPr>
+          <a:xfrm>
+            <a:off x="868680" y="1417320"/>
+            <a:ext cx="6675120" cy="4434840"/>
+          </a:xfrm>
+          <a:prstGeom prst="rect">
+            <a:avLst/>
+          </a:prstGeom>
+          <a:noFill/>
+          <a:ln/>
+        </p:spPr>
+        <p:txBody>
+          <a:bodyPr wrap="square" lIns="635" tIns="635" rIns="635" bIns="635" rtlCol="0" anchor="t">
+            <a:normAutofit/>
+          </a:bodyPr>
+          <a:lstStyle/>
+          <a:p>
+            <a:r>
+              <a:rPr lang="en-US" sz="1700" dirty="0">
+                <a:solidFill>
+                  <a:srgbClr val="17364A"/>
+                </a:solidFill>
+                <a:latin typeface="Aptos" pitchFamily="34" charset="0"/>
+                <a:ea typeface="Aptos" pitchFamily="34" charset="-122"/>
+                <a:cs typeface="Aptos" pitchFamily="34" charset="-120"/>
+              </a:rPr>
               <a:t>NIST Artificial Intelligence Risk Management Framework: https://www.nist.gov/itl/ai-risk-management-framework</a:t>
             </a:r>
-            <a:endParaRPr lang="en-US" sz="1450" dirty="0"/>
-          </a:p>
-          <a:p>
-            <a:r>
-              <a:rPr lang="en-US" sz="1450" dirty="0">
+            <a:endParaRPr lang="en-US" sz="1700" dirty="0"/>
+          </a:p>
+          <a:p>
+            <a:r>
+              <a:rPr lang="en-US" sz="1700" dirty="0">
                 <a:solidFill>
                   <a:srgbClr val="17364A"/>
                 </a:solidFill>
@@ -6046,13 +10711,13 @@
                 <a:ea typeface="Aptos" pitchFamily="34" charset="-122"/>
                 <a:cs typeface="Aptos" pitchFamily="34" charset="-120"/>
               </a:rPr>
-              <a:t>NIST AI RMF Generative AI Profile: https://www.nist.gov/publications/artificial-intelligence-risk-management-framework-generative-artificial-intelligence</a:t>
-            </a:r>
-            <a:endParaRPr lang="en-US" sz="1450" dirty="0"/>
-          </a:p>
-          <a:p>
-            <a:r>
-              <a:rPr lang="en-US" sz="1450" dirty="0">
+              <a:t>NIST AI RMF Generative AI Profile:.</a:t>
+            </a:r>
+            <a:endParaRPr lang="en-US" sz="1700" dirty="0"/>
+          </a:p>
+          <a:p>
+            <a:r>
+              <a:rPr lang="en-US" sz="1700" dirty="0">
                 <a:solidFill>
                   <a:srgbClr val="17364A"/>
                 </a:solidFill>
@@ -6062,11 +10727,11 @@
               </a:rPr>
               <a:t>CDC Evaluation Framework: https://www.cdc.gov/evaluation/</a:t>
             </a:r>
-            <a:endParaRPr lang="en-US" sz="1450" dirty="0"/>
-          </a:p>
-          <a:p>
-            <a:r>
-              <a:rPr lang="en-US" sz="1450" dirty="0">
+            <a:endParaRPr lang="en-US" sz="1700" dirty="0"/>
+          </a:p>
+          <a:p>
+            <a:r>
+              <a:rPr lang="en-US" sz="1700" dirty="0">
                 <a:solidFill>
                   <a:srgbClr val="17364A"/>
                 </a:solidFill>
@@ -6076,7 +10741,221 @@
               </a:rPr>
               <a:t>WHO Guidance on Large Multi-Modal Models: https://www.who.int/publications/i/item/9789240084759</a:t>
             </a:r>
-            <a:endParaRPr lang="en-US" sz="1450" dirty="0"/>
+            <a:endParaRPr lang="en-US" sz="1700" dirty="0"/>
+          </a:p>
+        </p:txBody>
+      </p:sp>
+      <p:sp>
+        <p:nvSpPr>
+          <p:cNvPr id="11" name="Shape 9"/>
+          <p:cNvSpPr/>
+          <p:nvPr/>
+        </p:nvSpPr>
+        <p:spPr>
+          <a:xfrm>
+            <a:off x="7909560" y="1417320"/>
+            <a:ext cx="3154680" cy="1828800"/>
+          </a:xfrm>
+          <a:prstGeom prst="roundRect">
+            <a:avLst>
+              <a:gd name="adj" fmla="val 6000"/>
+            </a:avLst>
+          </a:prstGeom>
+          <a:solidFill>
+            <a:srgbClr val="EEF8ED"/>
+          </a:solidFill>
+          <a:ln w="12700">
+            <a:solidFill>
+              <a:srgbClr val="B9D7E6"/>
+            </a:solidFill>
+            <a:prstDash val="solid"/>
+          </a:ln>
+        </p:spPr>
+      </p:sp>
+      <p:sp>
+        <p:nvSpPr>
+          <p:cNvPr id="12" name="Text 10"/>
+          <p:cNvSpPr/>
+          <p:nvPr/>
+        </p:nvSpPr>
+        <p:spPr>
+          <a:xfrm>
+            <a:off x="8074152" y="1563624"/>
+            <a:ext cx="2825496" cy="201168"/>
+          </a:xfrm>
+          <a:prstGeom prst="rect">
+            <a:avLst/>
+          </a:prstGeom>
+          <a:noFill/>
+          <a:ln/>
+        </p:spPr>
+        <p:txBody>
+          <a:bodyPr wrap="square" lIns="0" tIns="0" rIns="0" bIns="0" rtlCol="0" anchor="ctr"/>
+          <a:lstStyle/>
+          <a:p>
+            <a:pPr indent="0" marL="0">
+              <a:buNone/>
+            </a:pPr>
+            <a:r>
+              <a:rPr lang="en-US" sz="950" b="1" dirty="0">
+                <a:solidFill>
+                  <a:srgbClr val="0068B7"/>
+                </a:solidFill>
+                <a:latin typeface="Aptos" pitchFamily="34" charset="0"/>
+                <a:ea typeface="Aptos" pitchFamily="34" charset="-122"/>
+                <a:cs typeface="Aptos" pitchFamily="34" charset="-120"/>
+              </a:rPr>
+              <a:t>Key idea</a:t>
+            </a:r>
+            <a:endParaRPr lang="en-US" sz="950" dirty="0"/>
+          </a:p>
+        </p:txBody>
+      </p:sp>
+      <p:sp>
+        <p:nvSpPr>
+          <p:cNvPr id="13" name="Text 11"/>
+          <p:cNvSpPr/>
+          <p:nvPr/>
+        </p:nvSpPr>
+        <p:spPr>
+          <a:xfrm>
+            <a:off x="8074152" y="1856232"/>
+            <a:ext cx="2825496" cy="1261872"/>
+          </a:xfrm>
+          <a:prstGeom prst="rect">
+            <a:avLst/>
+          </a:prstGeom>
+          <a:noFill/>
+          <a:ln/>
+        </p:spPr>
+        <p:txBody>
+          <a:bodyPr wrap="square" lIns="0" tIns="0" rIns="0" bIns="0" rtlCol="0" anchor="t">
+            <a:normAutofit/>
+          </a:bodyPr>
+          <a:lstStyle/>
+          <a:p>
+            <a:pPr indent="0" marL="0">
+              <a:buNone/>
+            </a:pPr>
+            <a:r>
+              <a:rPr lang="en-US" sz="1250" dirty="0">
+                <a:solidFill>
+                  <a:srgbClr val="17364A"/>
+                </a:solidFill>
+                <a:latin typeface="Aptos" pitchFamily="34" charset="0"/>
+                <a:ea typeface="Aptos" pitchFamily="34" charset="-122"/>
+                <a:cs typeface="Aptos" pitchFamily="34" charset="-120"/>
+              </a:rPr>
+              <a:t>NIST Artificial Intelligence Risk Management Framework: https://www.nist.gov/itl/ai-risk-management-framework</a:t>
+            </a:r>
+            <a:endParaRPr lang="en-US" sz="1250" dirty="0"/>
+          </a:p>
+        </p:txBody>
+      </p:sp>
+      <p:sp>
+        <p:nvSpPr>
+          <p:cNvPr id="14" name="Shape 12"/>
+          <p:cNvSpPr/>
+          <p:nvPr/>
+        </p:nvSpPr>
+        <p:spPr>
+          <a:xfrm>
+            <a:off x="7909560" y="3520440"/>
+            <a:ext cx="3154680" cy="1737360"/>
+          </a:xfrm>
+          <a:prstGeom prst="roundRect">
+            <a:avLst>
+              <a:gd name="adj" fmla="val 6316"/>
+            </a:avLst>
+          </a:prstGeom>
+          <a:solidFill>
+            <a:srgbClr val="EAF6F8"/>
+          </a:solidFill>
+          <a:ln w="12700">
+            <a:solidFill>
+              <a:srgbClr val="B9D7E6"/>
+            </a:solidFill>
+            <a:prstDash val="solid"/>
+          </a:ln>
+        </p:spPr>
+      </p:sp>
+      <p:sp>
+        <p:nvSpPr>
+          <p:cNvPr id="15" name="Text 13"/>
+          <p:cNvSpPr/>
+          <p:nvPr/>
+        </p:nvSpPr>
+        <p:spPr>
+          <a:xfrm>
+            <a:off x="8074152" y="3666744"/>
+            <a:ext cx="2825496" cy="201168"/>
+          </a:xfrm>
+          <a:prstGeom prst="rect">
+            <a:avLst/>
+          </a:prstGeom>
+          <a:noFill/>
+          <a:ln/>
+        </p:spPr>
+        <p:txBody>
+          <a:bodyPr wrap="square" lIns="0" tIns="0" rIns="0" bIns="0" rtlCol="0" anchor="ctr"/>
+          <a:lstStyle/>
+          <a:p>
+            <a:pPr indent="0" marL="0">
+              <a:buNone/>
+            </a:pPr>
+            <a:r>
+              <a:rPr lang="en-US" sz="950" b="1" dirty="0">
+                <a:solidFill>
+                  <a:srgbClr val="0068B7"/>
+                </a:solidFill>
+                <a:latin typeface="Aptos" pitchFamily="34" charset="0"/>
+                <a:ea typeface="Aptos" pitchFamily="34" charset="-122"/>
+                <a:cs typeface="Aptos" pitchFamily="34" charset="-120"/>
+              </a:rPr>
+              <a:t>Use this for</a:t>
+            </a:r>
+            <a:endParaRPr lang="en-US" sz="950" dirty="0"/>
+          </a:p>
+        </p:txBody>
+      </p:sp>
+      <p:sp>
+        <p:nvSpPr>
+          <p:cNvPr id="16" name="Text 14"/>
+          <p:cNvSpPr/>
+          <p:nvPr/>
+        </p:nvSpPr>
+        <p:spPr>
+          <a:xfrm>
+            <a:off x="8074152" y="3959352"/>
+            <a:ext cx="2825496" cy="1170432"/>
+          </a:xfrm>
+          <a:prstGeom prst="rect">
+            <a:avLst/>
+          </a:prstGeom>
+          <a:noFill/>
+          <a:ln/>
+        </p:spPr>
+        <p:txBody>
+          <a:bodyPr wrap="square" lIns="0" tIns="0" rIns="0" bIns="0" rtlCol="0" anchor="t">
+            <a:normAutofit/>
+          </a:bodyPr>
+          <a:lstStyle/>
+          <a:p>
+            <a:pPr indent="0" marL="0">
+              <a:buNone/>
+            </a:pPr>
+            <a:r>
+              <a:rPr lang="en-US" sz="1250" dirty="0">
+                <a:solidFill>
+                  <a:srgbClr val="17364A"/>
+                </a:solidFill>
+                <a:latin typeface="Aptos" pitchFamily="34" charset="0"/>
+                <a:ea typeface="Aptos" pitchFamily="34" charset="-122"/>
+                <a:cs typeface="Aptos" pitchFamily="34" charset="-120"/>
+              </a:rPr>
+              <a:t>Connect the concept to public health decisions, safeguards, documentation, or implementation work.</a:t>
+            </a:r>
+            <a:endParaRPr lang="en-US" sz="1250" dirty="0"/>
           </a:p>
         </p:txBody>
       </p:sp>
@@ -6139,7 +11018,32 @@
       </p:sp>
       <p:sp>
         <p:nvSpPr>
-          <p:cNvPr id="3" name="Text 1"/>
+          <p:cNvPr id="3" name="Shape 1"/>
+          <p:cNvSpPr/>
+          <p:nvPr/>
+        </p:nvSpPr>
+        <p:spPr>
+          <a:xfrm>
+            <a:off x="0" y="164592"/>
+            <a:ext cx="146304" cy="6693408"/>
+          </a:xfrm>
+          <a:prstGeom prst="rect">
+            <a:avLst/>
+          </a:prstGeom>
+          <a:solidFill>
+            <a:srgbClr val="2F8A28"/>
+          </a:solidFill>
+          <a:ln w="12700">
+            <a:solidFill>
+              <a:srgbClr val="2F8A28"/>
+            </a:solidFill>
+            <a:prstDash val="solid"/>
+          </a:ln>
+        </p:spPr>
+      </p:sp>
+      <p:sp>
+        <p:nvSpPr>
+          <p:cNvPr id="4" name="Text 2"/>
           <p:cNvSpPr/>
           <p:nvPr/>
         </p:nvSpPr>
@@ -6178,7 +11082,7 @@
       </p:sp>
       <p:sp>
         <p:nvSpPr>
-          <p:cNvPr id="4" name="Text 2"/>
+          <p:cNvPr id="5" name="Text 3"/>
           <p:cNvSpPr/>
           <p:nvPr/>
         </p:nvSpPr>
@@ -6217,7 +11121,7 @@
       </p:sp>
       <p:sp>
         <p:nvSpPr>
-          <p:cNvPr id="5" name="Text 3"/>
+          <p:cNvPr id="6" name="Text 4"/>
           <p:cNvSpPr/>
           <p:nvPr/>
         </p:nvSpPr>
@@ -6256,7 +11160,7 @@
       </p:sp>
       <p:sp>
         <p:nvSpPr>
-          <p:cNvPr id="6" name="Text 4"/>
+          <p:cNvPr id="7" name="Text 5"/>
           <p:cNvSpPr/>
           <p:nvPr/>
         </p:nvSpPr>
@@ -6289,7 +11193,7 @@
                 <a:ea typeface="Aptos Display" pitchFamily="34" charset="-122"/>
                 <a:cs typeface="Aptos Display" pitchFamily="34" charset="-120"/>
               </a:rPr>
-              <a:t>Learning Objectives</a:t>
+              <a:t>How this module connects to the playbook</a:t>
             </a:r>
             <a:endParaRPr lang="en-US" sz="2700" dirty="0"/>
           </a:p>
@@ -6297,14 +11201,14 @@
       </p:sp>
       <p:sp>
         <p:nvSpPr>
-          <p:cNvPr id="7" name="Text 5"/>
-          <p:cNvSpPr/>
-          <p:nvPr/>
-        </p:nvSpPr>
-        <p:spPr>
-          <a:xfrm>
-            <a:off x="822960" y="1325880"/>
-            <a:ext cx="10378440" cy="4800600"/>
+          <p:cNvPr id="8" name="Text 6"/>
+          <p:cNvSpPr/>
+          <p:nvPr/>
+        </p:nvSpPr>
+        <p:spPr>
+          <a:xfrm>
+            <a:off x="868680" y="1417320"/>
+            <a:ext cx="6903720" cy="4480560"/>
           </a:xfrm>
           <a:prstGeom prst="rect">
             <a:avLst/>
@@ -6319,7 +11223,7 @@
           <a:lstStyle/>
           <a:p>
             <a:r>
-              <a:rPr lang="en-US" sz="1450" dirty="0">
+              <a:rPr lang="en-US" sz="1540" dirty="0">
                 <a:solidFill>
                   <a:srgbClr val="17364A"/>
                 </a:solidFill>
@@ -6327,13 +11231,13 @@
                 <a:ea typeface="Aptos" pitchFamily="34" charset="-122"/>
                 <a:cs typeface="Aptos" pitchFamily="34" charset="-120"/>
               </a:rPr>
-              <a:t>Describe the purpose of advanced model validation in public health AI.</a:t>
-            </a:r>
-            <a:endParaRPr lang="en-US" sz="1450" dirty="0"/>
-          </a:p>
-          <a:p>
-            <a:r>
-              <a:rPr lang="en-US" sz="1450" dirty="0">
+              <a:t>Play 13: Monitor and Evaluate AI Systems - This lesson informs Play 13 by helping learners connect the lesson topic to monitor and.</a:t>
+            </a:r>
+            <a:endParaRPr lang="en-US" sz="1540" dirty="0"/>
+          </a:p>
+          <a:p>
+            <a:r>
+              <a:rPr lang="en-US" sz="1540" dirty="0">
                 <a:solidFill>
                   <a:srgbClr val="17364A"/>
                 </a:solidFill>
@@ -6341,13 +11245,13 @@
                 <a:ea typeface="Aptos" pitchFamily="34" charset="-122"/>
                 <a:cs typeface="Aptos" pitchFamily="34" charset="-120"/>
               </a:rPr>
-              <a:t>Interpret sensitivity, specificity, positive predictive value, negative predictive value, precision, recall, F1 score, calibration, and subgroup performance.</a:t>
-            </a:r>
-            <a:endParaRPr lang="en-US" sz="1450" dirty="0"/>
-          </a:p>
-          <a:p>
-            <a:r>
-              <a:rPr lang="en-US" sz="1450" dirty="0">
+              <a:t>Play 12: Execute Governance and Oversight - This lesson informs Play 12 by helping learners connect the lesson topic to execute.</a:t>
+            </a:r>
+            <a:endParaRPr lang="en-US" sz="1540" dirty="0"/>
+          </a:p>
+          <a:p>
+            <a:r>
+              <a:rPr lang="en-US" sz="1540" dirty="0">
                 <a:solidFill>
                   <a:srgbClr val="17364A"/>
                 </a:solidFill>
@@ -6355,13 +11259,13 @@
                 <a:ea typeface="Aptos" pitchFamily="34" charset="-122"/>
                 <a:cs typeface="Aptos" pitchFamily="34" charset="-120"/>
               </a:rPr>
-              <a:t>Distinguish internal validation, external validation, and workflow validation.</a:t>
-            </a:r>
-            <a:endParaRPr lang="en-US" sz="1450" dirty="0"/>
-          </a:p>
-          <a:p>
-            <a:r>
-              <a:rPr lang="en-US" sz="1450" dirty="0">
+              <a:t>Play 11: Build and Deploy AI Solutions - This lesson informs Play 11 by helping learners connect the lesson topic to build and deploy.</a:t>
+            </a:r>
+            <a:endParaRPr lang="en-US" sz="1540" dirty="0"/>
+          </a:p>
+          <a:p>
+            <a:r>
+              <a:rPr lang="en-US" sz="1540" dirty="0">
                 <a:solidFill>
                   <a:srgbClr val="17364A"/>
                 </a:solidFill>
@@ -6369,13 +11273,106 @@
                 <a:ea typeface="Aptos" pitchFamily="34" charset="-122"/>
                 <a:cs typeface="Aptos" pitchFamily="34" charset="-120"/>
               </a:rPr>
-              <a:t>Identify when model performance is insufficient for the intended use.</a:t>
-            </a:r>
-            <a:endParaRPr lang="en-US" sz="1450" dirty="0"/>
-          </a:p>
-          <a:p>
-            <a:r>
-              <a:rPr lang="en-US" sz="1450" dirty="0">
+              <a:t>Play 3: Establish AI Governance - This lesson informs Play 3 by helping learners connect the lesson topic to establish ai governance.</a:t>
+            </a:r>
+            <a:endParaRPr lang="en-US" sz="1540" dirty="0"/>
+          </a:p>
+        </p:txBody>
+      </p:sp>
+      <p:sp>
+        <p:nvSpPr>
+          <p:cNvPr id="9" name="Shape 7"/>
+          <p:cNvSpPr/>
+          <p:nvPr/>
+        </p:nvSpPr>
+        <p:spPr>
+          <a:xfrm>
+            <a:off x="8046720" y="1417320"/>
+            <a:ext cx="3063240" cy="2103120"/>
+          </a:xfrm>
+          <a:prstGeom prst="roundRect">
+            <a:avLst>
+              <a:gd name="adj" fmla="val 5217"/>
+            </a:avLst>
+          </a:prstGeom>
+          <a:solidFill>
+            <a:srgbClr val="EEF8ED"/>
+          </a:solidFill>
+          <a:ln w="12700">
+            <a:solidFill>
+              <a:srgbClr val="B9D7E6"/>
+            </a:solidFill>
+            <a:prstDash val="solid"/>
+          </a:ln>
+        </p:spPr>
+      </p:sp>
+      <p:sp>
+        <p:nvSpPr>
+          <p:cNvPr id="10" name="Text 8"/>
+          <p:cNvSpPr/>
+          <p:nvPr/>
+        </p:nvSpPr>
+        <p:spPr>
+          <a:xfrm>
+            <a:off x="8211312" y="1563624"/>
+            <a:ext cx="2734056" cy="201168"/>
+          </a:xfrm>
+          <a:prstGeom prst="rect">
+            <a:avLst/>
+          </a:prstGeom>
+          <a:noFill/>
+          <a:ln/>
+        </p:spPr>
+        <p:txBody>
+          <a:bodyPr wrap="square" lIns="0" tIns="0" rIns="0" bIns="0" rtlCol="0" anchor="ctr"/>
+          <a:lstStyle/>
+          <a:p>
+            <a:pPr indent="0" marL="0">
+              <a:buNone/>
+            </a:pPr>
+            <a:r>
+              <a:rPr lang="en-US" sz="950" b="1" dirty="0">
+                <a:solidFill>
+                  <a:srgbClr val="0068B7"/>
+                </a:solidFill>
+                <a:latin typeface="Aptos" pitchFamily="34" charset="0"/>
+                <a:ea typeface="Aptos" pitchFamily="34" charset="-122"/>
+                <a:cs typeface="Aptos" pitchFamily="34" charset="-120"/>
+              </a:rPr>
+              <a:t>Apply the lesson</a:t>
+            </a:r>
+            <a:endParaRPr lang="en-US" sz="950" dirty="0"/>
+          </a:p>
+        </p:txBody>
+      </p:sp>
+      <p:sp>
+        <p:nvSpPr>
+          <p:cNvPr id="11" name="Text 9"/>
+          <p:cNvSpPr/>
+          <p:nvPr/>
+        </p:nvSpPr>
+        <p:spPr>
+          <a:xfrm>
+            <a:off x="8211312" y="1856232"/>
+            <a:ext cx="2734056" cy="1536192"/>
+          </a:xfrm>
+          <a:prstGeom prst="rect">
+            <a:avLst/>
+          </a:prstGeom>
+          <a:noFill/>
+          <a:ln/>
+        </p:spPr>
+        <p:txBody>
+          <a:bodyPr wrap="square" lIns="0" tIns="0" rIns="0" bIns="0" rtlCol="0" anchor="t">
+            <a:normAutofit/>
+          </a:bodyPr>
+          <a:lstStyle/>
+          <a:p>
+            <a:pPr indent="0" marL="0">
+              <a:buNone/>
+            </a:pPr>
+            <a:r>
+              <a:rPr lang="en-US" sz="1250" dirty="0">
                 <a:solidFill>
                   <a:srgbClr val="17364A"/>
                 </a:solidFill>
@@ -6383,9 +11380,116 @@
                 <a:ea typeface="Aptos" pitchFamily="34" charset="-122"/>
                 <a:cs typeface="Aptos" pitchFamily="34" charset="-120"/>
               </a:rPr>
-              <a:t>Design monitoring for drift, degradation, error patterns, and unintended consequences.</a:t>
-            </a:r>
-            <a:endParaRPr lang="en-US" sz="1450" dirty="0"/>
+              <a:t>Use the related plays to identify decisions, participants, timing, approvals, and documentation needed for responsible implementation.</a:t>
+            </a:r>
+            <a:endParaRPr lang="en-US" sz="1250" dirty="0"/>
+          </a:p>
+        </p:txBody>
+      </p:sp>
+      <p:sp>
+        <p:nvSpPr>
+          <p:cNvPr id="12" name="Shape 10"/>
+          <p:cNvSpPr/>
+          <p:nvPr/>
+        </p:nvSpPr>
+        <p:spPr>
+          <a:xfrm>
+            <a:off x="8046720" y="3794760"/>
+            <a:ext cx="3063240" cy="1508760"/>
+          </a:xfrm>
+          <a:prstGeom prst="roundRect">
+            <a:avLst>
+              <a:gd name="adj" fmla="val 7273"/>
+            </a:avLst>
+          </a:prstGeom>
+          <a:solidFill>
+            <a:srgbClr val="FFF4D9"/>
+          </a:solidFill>
+          <a:ln w="12700">
+            <a:solidFill>
+              <a:srgbClr val="B9D7E6"/>
+            </a:solidFill>
+            <a:prstDash val="solid"/>
+          </a:ln>
+        </p:spPr>
+      </p:sp>
+      <p:sp>
+        <p:nvSpPr>
+          <p:cNvPr id="13" name="Text 11"/>
+          <p:cNvSpPr/>
+          <p:nvPr/>
+        </p:nvSpPr>
+        <p:spPr>
+          <a:xfrm>
+            <a:off x="8211312" y="3941064"/>
+            <a:ext cx="2734056" cy="201168"/>
+          </a:xfrm>
+          <a:prstGeom prst="rect">
+            <a:avLst/>
+          </a:prstGeom>
+          <a:noFill/>
+          <a:ln/>
+        </p:spPr>
+        <p:txBody>
+          <a:bodyPr wrap="square" lIns="0" tIns="0" rIns="0" bIns="0" rtlCol="0" anchor="ctr"/>
+          <a:lstStyle/>
+          <a:p>
+            <a:pPr indent="0" marL="0">
+              <a:buNone/>
+            </a:pPr>
+            <a:r>
+              <a:rPr lang="en-US" sz="950" b="1" dirty="0">
+                <a:solidFill>
+                  <a:srgbClr val="0068B7"/>
+                </a:solidFill>
+                <a:latin typeface="Aptos" pitchFamily="34" charset="0"/>
+                <a:ea typeface="Aptos" pitchFamily="34" charset="-122"/>
+                <a:cs typeface="Aptos" pitchFamily="34" charset="-120"/>
+              </a:rPr>
+              <a:t>Keep in mind</a:t>
+            </a:r>
+            <a:endParaRPr lang="en-US" sz="950" dirty="0"/>
+          </a:p>
+        </p:txBody>
+      </p:sp>
+      <p:sp>
+        <p:nvSpPr>
+          <p:cNvPr id="14" name="Text 12"/>
+          <p:cNvSpPr/>
+          <p:nvPr/>
+        </p:nvSpPr>
+        <p:spPr>
+          <a:xfrm>
+            <a:off x="8211312" y="4233672"/>
+            <a:ext cx="2734056" cy="941832"/>
+          </a:xfrm>
+          <a:prstGeom prst="rect">
+            <a:avLst/>
+          </a:prstGeom>
+          <a:noFill/>
+          <a:ln/>
+        </p:spPr>
+        <p:txBody>
+          <a:bodyPr wrap="square" lIns="0" tIns="0" rIns="0" bIns="0" rtlCol="0" anchor="t">
+            <a:normAutofit/>
+          </a:bodyPr>
+          <a:lstStyle/>
+          <a:p>
+            <a:pPr indent="0" marL="0">
+              <a:buNone/>
+            </a:pPr>
+            <a:r>
+              <a:rPr lang="en-US" sz="1250" dirty="0">
+                <a:solidFill>
+                  <a:srgbClr val="17364A"/>
+                </a:solidFill>
+                <a:latin typeface="Aptos" pitchFamily="34" charset="0"/>
+                <a:ea typeface="Aptos" pitchFamily="34" charset="-122"/>
+                <a:cs typeface="Aptos" pitchFamily="34" charset="-120"/>
+              </a:rPr>
+              <a:t>The playbook connection helps turn training into agency work, not just individual knowledge.</a:t>
+            </a:r>
+            <a:endParaRPr lang="en-US" sz="1250" dirty="0"/>
           </a:p>
         </p:txBody>
       </p:sp>
@@ -6448,7 +11552,32 @@
       </p:sp>
       <p:sp>
         <p:nvSpPr>
-          <p:cNvPr id="3" name="Text 1"/>
+          <p:cNvPr id="3" name="Shape 1"/>
+          <p:cNvSpPr/>
+          <p:nvPr/>
+        </p:nvSpPr>
+        <p:spPr>
+          <a:xfrm>
+            <a:off x="0" y="164592"/>
+            <a:ext cx="146304" cy="6693408"/>
+          </a:xfrm>
+          <a:prstGeom prst="rect">
+            <a:avLst/>
+          </a:prstGeom>
+          <a:solidFill>
+            <a:srgbClr val="2F8A28"/>
+          </a:solidFill>
+          <a:ln w="12700">
+            <a:solidFill>
+              <a:srgbClr val="2F8A28"/>
+            </a:solidFill>
+            <a:prstDash val="solid"/>
+          </a:ln>
+        </p:spPr>
+      </p:sp>
+      <p:sp>
+        <p:nvSpPr>
+          <p:cNvPr id="4" name="Text 2"/>
           <p:cNvSpPr/>
           <p:nvPr/>
         </p:nvSpPr>
@@ -6487,7 +11616,7 @@
       </p:sp>
       <p:sp>
         <p:nvSpPr>
-          <p:cNvPr id="4" name="Text 2"/>
+          <p:cNvPr id="5" name="Text 3"/>
           <p:cNvSpPr/>
           <p:nvPr/>
         </p:nvSpPr>
@@ -6526,7 +11655,7 @@
       </p:sp>
       <p:sp>
         <p:nvSpPr>
-          <p:cNvPr id="5" name="Text 3"/>
+          <p:cNvPr id="6" name="Text 4"/>
           <p:cNvSpPr/>
           <p:nvPr/>
         </p:nvSpPr>
@@ -6565,7 +11694,7 @@
       </p:sp>
       <p:sp>
         <p:nvSpPr>
-          <p:cNvPr id="6" name="Text 4"/>
+          <p:cNvPr id="7" name="Text 5"/>
           <p:cNvSpPr/>
           <p:nvPr/>
         </p:nvSpPr>
@@ -6598,7 +11727,7 @@
                 <a:ea typeface="Aptos Display" pitchFamily="34" charset="-122"/>
                 <a:cs typeface="Aptos Display" pitchFamily="34" charset="-120"/>
               </a:rPr>
-              <a:t>Learning Objectives Continued</a:t>
+              <a:t>Related toolkit resources</a:t>
             </a:r>
             <a:endParaRPr lang="en-US" sz="2700" dirty="0"/>
           </a:p>
@@ -6606,14 +11735,14 @@
       </p:sp>
       <p:sp>
         <p:nvSpPr>
-          <p:cNvPr id="7" name="Text 5"/>
-          <p:cNvSpPr/>
-          <p:nvPr/>
-        </p:nvSpPr>
-        <p:spPr>
-          <a:xfrm>
-            <a:off x="822960" y="1325880"/>
-            <a:ext cx="10378440" cy="4800600"/>
+          <p:cNvPr id="8" name="Text 6"/>
+          <p:cNvSpPr/>
+          <p:nvPr/>
+        </p:nvSpPr>
+        <p:spPr>
+          <a:xfrm>
+            <a:off x="868680" y="1417320"/>
+            <a:ext cx="6903720" cy="4480560"/>
           </a:xfrm>
           <a:prstGeom prst="rect">
             <a:avLst/>
@@ -6628,7 +11757,7 @@
           <a:lstStyle/>
           <a:p>
             <a:r>
-              <a:rPr lang="en-US" sz="1450" dirty="0">
+              <a:rPr lang="en-US" sz="1460" dirty="0">
                 <a:solidFill>
                   <a:srgbClr val="17364A"/>
                 </a:solidFill>
@@ -6636,9 +11765,279 @@
                 <a:ea typeface="Aptos" pitchFamily="34" charset="-122"/>
                 <a:cs typeface="Aptos" pitchFamily="34" charset="-120"/>
               </a:rPr>
-              <a:t>Produce an advanced validation plan for an AI-supported workflow.</a:t>
-            </a:r>
-            <a:endParaRPr lang="en-US" sz="1450" dirty="0"/>
+              <a:t>Tool 44: Performance Monitoring Dashboard (Dashboard) - Use this tool to complete or strengthen the practical exercise for the module.</a:t>
+            </a:r>
+            <a:endParaRPr lang="en-US" sz="1460" dirty="0"/>
+          </a:p>
+          <a:p>
+            <a:r>
+              <a:rPr lang="en-US" sz="1460" dirty="0">
+                <a:solidFill>
+                  <a:srgbClr val="17364A"/>
+                </a:solidFill>
+                <a:latin typeface="Aptos" pitchFamily="34" charset="0"/>
+                <a:ea typeface="Aptos" pitchFamily="34" charset="-122"/>
+                <a:cs typeface="Aptos" pitchFamily="34" charset="-120"/>
+              </a:rPr>
+              <a:t>Tool 45: Continuous Improvement Log (Log) - Use Continuous Improvement Log to translate this lesson into a documented public health.</a:t>
+            </a:r>
+            <a:endParaRPr lang="en-US" sz="1460" dirty="0"/>
+          </a:p>
+          <a:p>
+            <a:r>
+              <a:rPr lang="en-US" sz="1460" dirty="0">
+                <a:solidFill>
+                  <a:srgbClr val="17364A"/>
+                </a:solidFill>
+                <a:latin typeface="Aptos" pitchFamily="34" charset="0"/>
+                <a:ea typeface="Aptos" pitchFamily="34" charset="-122"/>
+                <a:cs typeface="Aptos" pitchFamily="34" charset="-120"/>
+              </a:rPr>
+              <a:t>Tool 48: AI Evaluation &amp; Outcomes Reporting (Template) - Use this tool to complete or strengthen the practical exercise for the.</a:t>
+            </a:r>
+            <a:endParaRPr lang="en-US" sz="1460" dirty="0"/>
+          </a:p>
+          <a:p>
+            <a:r>
+              <a:rPr lang="en-US" sz="1460" dirty="0">
+                <a:solidFill>
+                  <a:srgbClr val="17364A"/>
+                </a:solidFill>
+                <a:latin typeface="Aptos" pitchFamily="34" charset="0"/>
+                <a:ea typeface="Aptos" pitchFamily="34" charset="-122"/>
+                <a:cs typeface="Aptos" pitchFamily="34" charset="-120"/>
+              </a:rPr>
+              <a:t>Tool 13: AI Use Case Intake, Risk Review, and System Inventory Template (Template) - Use AI Use Case Intake, Risk Review, and System.</a:t>
+            </a:r>
+            <a:endParaRPr lang="en-US" sz="1460" dirty="0"/>
+          </a:p>
+          <a:p>
+            <a:r>
+              <a:rPr lang="en-US" sz="1460" dirty="0">
+                <a:solidFill>
+                  <a:srgbClr val="17364A"/>
+                </a:solidFill>
+                <a:latin typeface="Aptos" pitchFamily="34" charset="0"/>
+                <a:ea typeface="Aptos" pitchFamily="34" charset="-122"/>
+                <a:cs typeface="Aptos" pitchFamily="34" charset="-120"/>
+              </a:rPr>
+              <a:t>Tool 16: Incident Response Checklist (Checklist) - Use Incident Response Checklist to translate this lesson into a documented public.</a:t>
+            </a:r>
+            <a:endParaRPr lang="en-US" sz="1460" dirty="0"/>
+          </a:p>
+        </p:txBody>
+      </p:sp>
+      <p:sp>
+        <p:nvSpPr>
+          <p:cNvPr id="9" name="Shape 7"/>
+          <p:cNvSpPr/>
+          <p:nvPr/>
+        </p:nvSpPr>
+        <p:spPr>
+          <a:xfrm>
+            <a:off x="8046720" y="1417320"/>
+            <a:ext cx="3063240" cy="2103120"/>
+          </a:xfrm>
+          <a:prstGeom prst="roundRect">
+            <a:avLst>
+              <a:gd name="adj" fmla="val 5217"/>
+            </a:avLst>
+          </a:prstGeom>
+          <a:solidFill>
+            <a:srgbClr val="EAF6F8"/>
+          </a:solidFill>
+          <a:ln w="12700">
+            <a:solidFill>
+              <a:srgbClr val="B9D7E6"/>
+            </a:solidFill>
+            <a:prstDash val="solid"/>
+          </a:ln>
+        </p:spPr>
+      </p:sp>
+      <p:sp>
+        <p:nvSpPr>
+          <p:cNvPr id="10" name="Text 8"/>
+          <p:cNvSpPr/>
+          <p:nvPr/>
+        </p:nvSpPr>
+        <p:spPr>
+          <a:xfrm>
+            <a:off x="8211312" y="1563624"/>
+            <a:ext cx="2734056" cy="201168"/>
+          </a:xfrm>
+          <a:prstGeom prst="rect">
+            <a:avLst/>
+          </a:prstGeom>
+          <a:noFill/>
+          <a:ln/>
+        </p:spPr>
+        <p:txBody>
+          <a:bodyPr wrap="square" lIns="0" tIns="0" rIns="0" bIns="0" rtlCol="0" anchor="ctr"/>
+          <a:lstStyle/>
+          <a:p>
+            <a:pPr indent="0" marL="0">
+              <a:buNone/>
+            </a:pPr>
+            <a:r>
+              <a:rPr lang="en-US" sz="950" b="1" dirty="0">
+                <a:solidFill>
+                  <a:srgbClr val="0068B7"/>
+                </a:solidFill>
+                <a:latin typeface="Aptos" pitchFamily="34" charset="0"/>
+                <a:ea typeface="Aptos" pitchFamily="34" charset="-122"/>
+                <a:cs typeface="Aptos" pitchFamily="34" charset="-120"/>
+              </a:rPr>
+              <a:t>Use the tools</a:t>
+            </a:r>
+            <a:endParaRPr lang="en-US" sz="950" dirty="0"/>
+          </a:p>
+        </p:txBody>
+      </p:sp>
+      <p:sp>
+        <p:nvSpPr>
+          <p:cNvPr id="11" name="Text 9"/>
+          <p:cNvSpPr/>
+          <p:nvPr/>
+        </p:nvSpPr>
+        <p:spPr>
+          <a:xfrm>
+            <a:off x="8211312" y="1856232"/>
+            <a:ext cx="2734056" cy="1536192"/>
+          </a:xfrm>
+          <a:prstGeom prst="rect">
+            <a:avLst/>
+          </a:prstGeom>
+          <a:noFill/>
+          <a:ln/>
+        </p:spPr>
+        <p:txBody>
+          <a:bodyPr wrap="square" lIns="0" tIns="0" rIns="0" bIns="0" rtlCol="0" anchor="t">
+            <a:normAutofit/>
+          </a:bodyPr>
+          <a:lstStyle/>
+          <a:p>
+            <a:pPr indent="0" marL="0">
+              <a:buNone/>
+            </a:pPr>
+            <a:r>
+              <a:rPr lang="en-US" sz="1250" dirty="0">
+                <a:solidFill>
+                  <a:srgbClr val="17364A"/>
+                </a:solidFill>
+                <a:latin typeface="Aptos" pitchFamily="34" charset="0"/>
+                <a:ea typeface="Aptos" pitchFamily="34" charset="-122"/>
+                <a:cs typeface="Aptos" pitchFamily="34" charset="-120"/>
+              </a:rPr>
+              <a:t>Use linked tools when your department needs a structured worksheet, template, checklist, review process, or documentation artifact.</a:t>
+            </a:r>
+            <a:endParaRPr lang="en-US" sz="1250" dirty="0"/>
+          </a:p>
+        </p:txBody>
+      </p:sp>
+      <p:sp>
+        <p:nvSpPr>
+          <p:cNvPr id="12" name="Shape 10"/>
+          <p:cNvSpPr/>
+          <p:nvPr/>
+        </p:nvSpPr>
+        <p:spPr>
+          <a:xfrm>
+            <a:off x="8046720" y="3794760"/>
+            <a:ext cx="3063240" cy="1508760"/>
+          </a:xfrm>
+          <a:prstGeom prst="roundRect">
+            <a:avLst>
+              <a:gd name="adj" fmla="val 7273"/>
+            </a:avLst>
+          </a:prstGeom>
+          <a:solidFill>
+            <a:srgbClr val="EEF8ED"/>
+          </a:solidFill>
+          <a:ln w="12700">
+            <a:solidFill>
+              <a:srgbClr val="B9D7E6"/>
+            </a:solidFill>
+            <a:prstDash val="solid"/>
+          </a:ln>
+        </p:spPr>
+      </p:sp>
+      <p:sp>
+        <p:nvSpPr>
+          <p:cNvPr id="13" name="Text 11"/>
+          <p:cNvSpPr/>
+          <p:nvPr/>
+        </p:nvSpPr>
+        <p:spPr>
+          <a:xfrm>
+            <a:off x="8211312" y="3941064"/>
+            <a:ext cx="2734056" cy="201168"/>
+          </a:xfrm>
+          <a:prstGeom prst="rect">
+            <a:avLst/>
+          </a:prstGeom>
+          <a:noFill/>
+          <a:ln/>
+        </p:spPr>
+        <p:txBody>
+          <a:bodyPr wrap="square" lIns="0" tIns="0" rIns="0" bIns="0" rtlCol="0" anchor="ctr"/>
+          <a:lstStyle/>
+          <a:p>
+            <a:pPr indent="0" marL="0">
+              <a:buNone/>
+            </a:pPr>
+            <a:r>
+              <a:rPr lang="en-US" sz="950" b="1" dirty="0">
+                <a:solidFill>
+                  <a:srgbClr val="0068B7"/>
+                </a:solidFill>
+                <a:latin typeface="Aptos" pitchFamily="34" charset="0"/>
+                <a:ea typeface="Aptos" pitchFamily="34" charset="-122"/>
+                <a:cs typeface="Aptos" pitchFamily="34" charset="-120"/>
+              </a:rPr>
+              <a:t>Avoid duplication</a:t>
+            </a:r>
+            <a:endParaRPr lang="en-US" sz="950" dirty="0"/>
+          </a:p>
+        </p:txBody>
+      </p:sp>
+      <p:sp>
+        <p:nvSpPr>
+          <p:cNvPr id="14" name="Text 12"/>
+          <p:cNvSpPr/>
+          <p:nvPr/>
+        </p:nvSpPr>
+        <p:spPr>
+          <a:xfrm>
+            <a:off x="8211312" y="4233672"/>
+            <a:ext cx="2734056" cy="941832"/>
+          </a:xfrm>
+          <a:prstGeom prst="rect">
+            <a:avLst/>
+          </a:prstGeom>
+          <a:noFill/>
+          <a:ln/>
+        </p:spPr>
+        <p:txBody>
+          <a:bodyPr wrap="square" lIns="0" tIns="0" rIns="0" bIns="0" rtlCol="0" anchor="t">
+            <a:normAutofit/>
+          </a:bodyPr>
+          <a:lstStyle/>
+          <a:p>
+            <a:pPr indent="0" marL="0">
+              <a:buNone/>
+            </a:pPr>
+            <a:r>
+              <a:rPr lang="en-US" sz="1250" dirty="0">
+                <a:solidFill>
+                  <a:srgbClr val="17364A"/>
+                </a:solidFill>
+                <a:latin typeface="Aptos" pitchFamily="34" charset="0"/>
+                <a:ea typeface="Aptos" pitchFamily="34" charset="-122"/>
+                <a:cs typeface="Aptos" pitchFamily="34" charset="-120"/>
+              </a:rPr>
+              <a:t>If your department already has a strong equivalent tool, adapt or use the existing process instead of recreating it.</a:t>
+            </a:r>
+            <a:endParaRPr lang="en-US" sz="1250" dirty="0"/>
           </a:p>
         </p:txBody>
       </p:sp>
@@ -6701,7 +12100,32 @@
       </p:sp>
       <p:sp>
         <p:nvSpPr>
-          <p:cNvPr id="3" name="Text 1"/>
+          <p:cNvPr id="3" name="Shape 1"/>
+          <p:cNvSpPr/>
+          <p:nvPr/>
+        </p:nvSpPr>
+        <p:spPr>
+          <a:xfrm>
+            <a:off x="0" y="164592"/>
+            <a:ext cx="146304" cy="6693408"/>
+          </a:xfrm>
+          <a:prstGeom prst="rect">
+            <a:avLst/>
+          </a:prstGeom>
+          <a:solidFill>
+            <a:srgbClr val="2F8A28"/>
+          </a:solidFill>
+          <a:ln w="12700">
+            <a:solidFill>
+              <a:srgbClr val="2F8A28"/>
+            </a:solidFill>
+            <a:prstDash val="solid"/>
+          </a:ln>
+        </p:spPr>
+      </p:sp>
+      <p:sp>
+        <p:nvSpPr>
+          <p:cNvPr id="4" name="Text 2"/>
           <p:cNvSpPr/>
           <p:nvPr/>
         </p:nvSpPr>
@@ -6740,7 +12164,7 @@
       </p:sp>
       <p:sp>
         <p:nvSpPr>
-          <p:cNvPr id="4" name="Text 2"/>
+          <p:cNvPr id="5" name="Text 3"/>
           <p:cNvSpPr/>
           <p:nvPr/>
         </p:nvSpPr>
@@ -6779,7 +12203,7 @@
       </p:sp>
       <p:sp>
         <p:nvSpPr>
-          <p:cNvPr id="5" name="Text 3"/>
+          <p:cNvPr id="6" name="Text 4"/>
           <p:cNvSpPr/>
           <p:nvPr/>
         </p:nvSpPr>
@@ -6818,13 +12242,77 @@
       </p:sp>
       <p:sp>
         <p:nvSpPr>
-          <p:cNvPr id="6" name="Text 4"/>
+          <p:cNvPr id="7" name="Shape 5"/>
           <p:cNvSpPr/>
           <p:nvPr/>
         </p:nvSpPr>
         <p:spPr>
           <a:xfrm>
             <a:off x="640080" y="658368"/>
+            <a:ext cx="420624" cy="420624"/>
+          </a:xfrm>
+          <a:prstGeom prst="ellipse">
+            <a:avLst/>
+          </a:prstGeom>
+          <a:solidFill>
+            <a:srgbClr val="0068B7"/>
+          </a:solidFill>
+          <a:ln w="12700">
+            <a:solidFill>
+              <a:srgbClr val="0068B7"/>
+            </a:solidFill>
+            <a:prstDash val="solid"/>
+          </a:ln>
+        </p:spPr>
+      </p:sp>
+      <p:sp>
+        <p:nvSpPr>
+          <p:cNvPr id="8" name="Text 6"/>
+          <p:cNvSpPr/>
+          <p:nvPr/>
+        </p:nvSpPr>
+        <p:spPr>
+          <a:xfrm>
+            <a:off x="640080" y="731520"/>
+            <a:ext cx="420624" cy="164592"/>
+          </a:xfrm>
+          <a:prstGeom prst="rect">
+            <a:avLst/>
+          </a:prstGeom>
+          <a:noFill/>
+          <a:ln/>
+        </p:spPr>
+        <p:txBody>
+          <a:bodyPr wrap="square" lIns="0" tIns="0" rIns="0" bIns="0" rtlCol="0" anchor="ctr"/>
+          <a:lstStyle/>
+          <a:p>
+            <a:pPr algn="ctr" indent="0" marL="0">
+              <a:buNone/>
+            </a:pPr>
+            <a:r>
+              <a:rPr lang="en-US" sz="1100" b="1" dirty="0">
+                <a:solidFill>
+                  <a:srgbClr val="FFFFFF"/>
+                </a:solidFill>
+                <a:latin typeface="Aptos" pitchFamily="34" charset="0"/>
+                <a:ea typeface="Aptos" pitchFamily="34" charset="-122"/>
+                <a:cs typeface="Aptos" pitchFamily="34" charset="-120"/>
+              </a:rPr>
+              <a:t>1</a:t>
+            </a:r>
+            <a:endParaRPr lang="en-US" sz="1100" dirty="0"/>
+          </a:p>
+        </p:txBody>
+      </p:sp>
+      <p:sp>
+        <p:nvSpPr>
+          <p:cNvPr id="9" name="Text 7"/>
+          <p:cNvSpPr/>
+          <p:nvPr/>
+        </p:nvSpPr>
+        <p:spPr>
+          <a:xfrm>
+            <a:off x="640080" y="621792"/>
             <a:ext cx="10881360" cy="566928"/>
           </a:xfrm>
           <a:prstGeom prst="rect">
@@ -6851,7 +12339,7 @@
                 <a:ea typeface="Aptos Display" pitchFamily="34" charset="-122"/>
                 <a:cs typeface="Aptos Display" pitchFamily="34" charset="-120"/>
               </a:rPr>
-              <a:t>Module Overview</a:t>
+              <a:t>Learning Objectives</a:t>
             </a:r>
             <a:endParaRPr lang="en-US" sz="2700" dirty="0"/>
           </a:p>
@@ -6859,32 +12347,178 @@
       </p:sp>
       <p:sp>
         <p:nvSpPr>
-          <p:cNvPr id="7" name="Text 5"/>
-          <p:cNvSpPr/>
-          <p:nvPr/>
-        </p:nvSpPr>
-        <p:spPr>
-          <a:xfrm>
-            <a:off x="822960" y="1325880"/>
-            <a:ext cx="10378440" cy="4800600"/>
-          </a:xfrm>
-          <a:prstGeom prst="rect">
-            <a:avLst/>
-          </a:prstGeom>
-          <a:noFill/>
-          <a:ln/>
-        </p:spPr>
-        <p:txBody>
-          <a:bodyPr wrap="square" lIns="1016" tIns="1016" rIns="1016" bIns="1016" rtlCol="0" anchor="t">
+          <p:cNvPr id="10" name="Text 8"/>
+          <p:cNvSpPr/>
+          <p:nvPr/>
+        </p:nvSpPr>
+        <p:spPr>
+          <a:xfrm>
+            <a:off x="868680" y="1417320"/>
+            <a:ext cx="6675120" cy="4434840"/>
+          </a:xfrm>
+          <a:prstGeom prst="rect">
+            <a:avLst/>
+          </a:prstGeom>
+          <a:noFill/>
+          <a:ln/>
+        </p:spPr>
+        <p:txBody>
+          <a:bodyPr wrap="square" lIns="635" tIns="635" rIns="635" bIns="635" rtlCol="0" anchor="t">
             <a:normAutofit/>
           </a:bodyPr>
           <a:lstStyle/>
           <a:p>
+            <a:r>
+              <a:rPr lang="en-US" sz="1700" dirty="0">
+                <a:solidFill>
+                  <a:srgbClr val="17364A"/>
+                </a:solidFill>
+                <a:latin typeface="Aptos" pitchFamily="34" charset="0"/>
+                <a:ea typeface="Aptos" pitchFamily="34" charset="-122"/>
+                <a:cs typeface="Aptos" pitchFamily="34" charset="-120"/>
+              </a:rPr>
+              <a:t>Describe the purpose of advanced model validation in public health AI.</a:t>
+            </a:r>
+            <a:endParaRPr lang="en-US" sz="1700" dirty="0"/>
+          </a:p>
+          <a:p>
+            <a:r>
+              <a:rPr lang="en-US" sz="1700" dirty="0">
+                <a:solidFill>
+                  <a:srgbClr val="17364A"/>
+                </a:solidFill>
+                <a:latin typeface="Aptos" pitchFamily="34" charset="0"/>
+                <a:ea typeface="Aptos" pitchFamily="34" charset="-122"/>
+                <a:cs typeface="Aptos" pitchFamily="34" charset="-120"/>
+              </a:rPr>
+              <a:t>Interpret sensitivity, specificity, positive predictive value, negative predictive value, precision, recall, F1 score,.</a:t>
+            </a:r>
+            <a:endParaRPr lang="en-US" sz="1700" dirty="0"/>
+          </a:p>
+          <a:p>
+            <a:r>
+              <a:rPr lang="en-US" sz="1700" dirty="0">
+                <a:solidFill>
+                  <a:srgbClr val="17364A"/>
+                </a:solidFill>
+                <a:latin typeface="Aptos" pitchFamily="34" charset="0"/>
+                <a:ea typeface="Aptos" pitchFamily="34" charset="-122"/>
+                <a:cs typeface="Aptos" pitchFamily="34" charset="-120"/>
+              </a:rPr>
+              <a:t>Distinguish internal validation, external validation, and workflow validation.</a:t>
+            </a:r>
+            <a:endParaRPr lang="en-US" sz="1700" dirty="0"/>
+          </a:p>
+          <a:p>
+            <a:r>
+              <a:rPr lang="en-US" sz="1700" dirty="0">
+                <a:solidFill>
+                  <a:srgbClr val="17364A"/>
+                </a:solidFill>
+                <a:latin typeface="Aptos" pitchFamily="34" charset="0"/>
+                <a:ea typeface="Aptos" pitchFamily="34" charset="-122"/>
+                <a:cs typeface="Aptos" pitchFamily="34" charset="-120"/>
+              </a:rPr>
+              <a:t>Identify when model performance is insufficient for the intended use.</a:t>
+            </a:r>
+            <a:endParaRPr lang="en-US" sz="1700" dirty="0"/>
+          </a:p>
+        </p:txBody>
+      </p:sp>
+      <p:sp>
+        <p:nvSpPr>
+          <p:cNvPr id="11" name="Shape 9"/>
+          <p:cNvSpPr/>
+          <p:nvPr/>
+        </p:nvSpPr>
+        <p:spPr>
+          <a:xfrm>
+            <a:off x="7909560" y="1417320"/>
+            <a:ext cx="3154680" cy="1828800"/>
+          </a:xfrm>
+          <a:prstGeom prst="roundRect">
+            <a:avLst>
+              <a:gd name="adj" fmla="val 6000"/>
+            </a:avLst>
+          </a:prstGeom>
+          <a:solidFill>
+            <a:srgbClr val="EEF8ED"/>
+          </a:solidFill>
+          <a:ln w="12700">
+            <a:solidFill>
+              <a:srgbClr val="B9D7E6"/>
+            </a:solidFill>
+            <a:prstDash val="solid"/>
+          </a:ln>
+        </p:spPr>
+      </p:sp>
+      <p:sp>
+        <p:nvSpPr>
+          <p:cNvPr id="12" name="Text 10"/>
+          <p:cNvSpPr/>
+          <p:nvPr/>
+        </p:nvSpPr>
+        <p:spPr>
+          <a:xfrm>
+            <a:off x="8074152" y="1563624"/>
+            <a:ext cx="2825496" cy="201168"/>
+          </a:xfrm>
+          <a:prstGeom prst="rect">
+            <a:avLst/>
+          </a:prstGeom>
+          <a:noFill/>
+          <a:ln/>
+        </p:spPr>
+        <p:txBody>
+          <a:bodyPr wrap="square" lIns="0" tIns="0" rIns="0" bIns="0" rtlCol="0" anchor="ctr"/>
+          <a:lstStyle/>
+          <a:p>
             <a:pPr indent="0" marL="0">
               <a:buNone/>
             </a:pPr>
             <a:r>
-              <a:rPr lang="en-US" sz="1420" dirty="0">
+              <a:rPr lang="en-US" sz="950" b="1" dirty="0">
+                <a:solidFill>
+                  <a:srgbClr val="0068B7"/>
+                </a:solidFill>
+                <a:latin typeface="Aptos" pitchFamily="34" charset="0"/>
+                <a:ea typeface="Aptos" pitchFamily="34" charset="-122"/>
+                <a:cs typeface="Aptos" pitchFamily="34" charset="-120"/>
+              </a:rPr>
+              <a:t>Key idea</a:t>
+            </a:r>
+            <a:endParaRPr lang="en-US" sz="950" dirty="0"/>
+          </a:p>
+        </p:txBody>
+      </p:sp>
+      <p:sp>
+        <p:nvSpPr>
+          <p:cNvPr id="13" name="Text 11"/>
+          <p:cNvSpPr/>
+          <p:nvPr/>
+        </p:nvSpPr>
+        <p:spPr>
+          <a:xfrm>
+            <a:off x="8074152" y="1856232"/>
+            <a:ext cx="2825496" cy="1261872"/>
+          </a:xfrm>
+          <a:prstGeom prst="rect">
+            <a:avLst/>
+          </a:prstGeom>
+          <a:noFill/>
+          <a:ln/>
+        </p:spPr>
+        <p:txBody>
+          <a:bodyPr wrap="square" lIns="0" tIns="0" rIns="0" bIns="0" rtlCol="0" anchor="t">
+            <a:normAutofit/>
+          </a:bodyPr>
+          <a:lstStyle/>
+          <a:p>
+            <a:pPr indent="0" marL="0">
+              <a:buNone/>
+            </a:pPr>
+            <a:r>
+              <a:rPr lang="en-US" sz="1250" dirty="0">
                 <a:solidFill>
                   <a:srgbClr val="17364A"/>
                 </a:solidFill>
@@ -6892,9 +12526,116 @@
                 <a:ea typeface="Aptos" pitchFamily="34" charset="-122"/>
                 <a:cs typeface="Aptos" pitchFamily="34" charset="-120"/>
               </a:rPr>
-              <a:t>Model validation is the process of determining whether an AI tool performs adequately for its intended use, population, setting, data sources, and workflow. Basic validation asks whether the tool works at all. Advanced validation asks whether it works well enough, for whom, under what conditions, with what limitations, and with what monitoring requirements. This module extends foundational validation content by focusing on metrics, subgroup performance, calibration, external validation, workflow validation, error review, drift monitoring, and documentation. Public health agencies need this deeper level of validation when AI outputs may influence investigation, outreach, resource allocation, public communication, or operational prioritization. Learners will develop a validation plan that connects technical performance to public health consequences. The goal is to evaluate not only the model, but the full AI-supported workflow.</a:t>
-            </a:r>
-            <a:endParaRPr lang="en-US" sz="1420" dirty="0"/>
+              <a:t>Describe the purpose of advanced model validation in public health AI.</a:t>
+            </a:r>
+            <a:endParaRPr lang="en-US" sz="1250" dirty="0"/>
+          </a:p>
+        </p:txBody>
+      </p:sp>
+      <p:sp>
+        <p:nvSpPr>
+          <p:cNvPr id="14" name="Shape 12"/>
+          <p:cNvSpPr/>
+          <p:nvPr/>
+        </p:nvSpPr>
+        <p:spPr>
+          <a:xfrm>
+            <a:off x="7909560" y="3520440"/>
+            <a:ext cx="3154680" cy="1737360"/>
+          </a:xfrm>
+          <a:prstGeom prst="roundRect">
+            <a:avLst>
+              <a:gd name="adj" fmla="val 6316"/>
+            </a:avLst>
+          </a:prstGeom>
+          <a:solidFill>
+            <a:srgbClr val="EAF6F8"/>
+          </a:solidFill>
+          <a:ln w="12700">
+            <a:solidFill>
+              <a:srgbClr val="B9D7E6"/>
+            </a:solidFill>
+            <a:prstDash val="solid"/>
+          </a:ln>
+        </p:spPr>
+      </p:sp>
+      <p:sp>
+        <p:nvSpPr>
+          <p:cNvPr id="15" name="Text 13"/>
+          <p:cNvSpPr/>
+          <p:nvPr/>
+        </p:nvSpPr>
+        <p:spPr>
+          <a:xfrm>
+            <a:off x="8074152" y="3666744"/>
+            <a:ext cx="2825496" cy="201168"/>
+          </a:xfrm>
+          <a:prstGeom prst="rect">
+            <a:avLst/>
+          </a:prstGeom>
+          <a:noFill/>
+          <a:ln/>
+        </p:spPr>
+        <p:txBody>
+          <a:bodyPr wrap="square" lIns="0" tIns="0" rIns="0" bIns="0" rtlCol="0" anchor="ctr"/>
+          <a:lstStyle/>
+          <a:p>
+            <a:pPr indent="0" marL="0">
+              <a:buNone/>
+            </a:pPr>
+            <a:r>
+              <a:rPr lang="en-US" sz="950" b="1" dirty="0">
+                <a:solidFill>
+                  <a:srgbClr val="0068B7"/>
+                </a:solidFill>
+                <a:latin typeface="Aptos" pitchFamily="34" charset="0"/>
+                <a:ea typeface="Aptos" pitchFamily="34" charset="-122"/>
+                <a:cs typeface="Aptos" pitchFamily="34" charset="-120"/>
+              </a:rPr>
+              <a:t>Use this for</a:t>
+            </a:r>
+            <a:endParaRPr lang="en-US" sz="950" dirty="0"/>
+          </a:p>
+        </p:txBody>
+      </p:sp>
+      <p:sp>
+        <p:nvSpPr>
+          <p:cNvPr id="16" name="Text 14"/>
+          <p:cNvSpPr/>
+          <p:nvPr/>
+        </p:nvSpPr>
+        <p:spPr>
+          <a:xfrm>
+            <a:off x="8074152" y="3959352"/>
+            <a:ext cx="2825496" cy="1170432"/>
+          </a:xfrm>
+          <a:prstGeom prst="rect">
+            <a:avLst/>
+          </a:prstGeom>
+          <a:noFill/>
+          <a:ln/>
+        </p:spPr>
+        <p:txBody>
+          <a:bodyPr wrap="square" lIns="0" tIns="0" rIns="0" bIns="0" rtlCol="0" anchor="t">
+            <a:normAutofit/>
+          </a:bodyPr>
+          <a:lstStyle/>
+          <a:p>
+            <a:pPr indent="0" marL="0">
+              <a:buNone/>
+            </a:pPr>
+            <a:r>
+              <a:rPr lang="en-US" sz="1250" dirty="0">
+                <a:solidFill>
+                  <a:srgbClr val="17364A"/>
+                </a:solidFill>
+                <a:latin typeface="Aptos" pitchFamily="34" charset="0"/>
+                <a:ea typeface="Aptos" pitchFamily="34" charset="-122"/>
+                <a:cs typeface="Aptos" pitchFamily="34" charset="-120"/>
+              </a:rPr>
+              <a:t>Connect the concept to public health decisions, safeguards, documentation, or implementation work.</a:t>
+            </a:r>
+            <a:endParaRPr lang="en-US" sz="1250" dirty="0"/>
           </a:p>
         </p:txBody>
       </p:sp>
@@ -6957,7 +12698,32 @@
       </p:sp>
       <p:sp>
         <p:nvSpPr>
-          <p:cNvPr id="3" name="Text 1"/>
+          <p:cNvPr id="3" name="Shape 1"/>
+          <p:cNvSpPr/>
+          <p:nvPr/>
+        </p:nvSpPr>
+        <p:spPr>
+          <a:xfrm>
+            <a:off x="0" y="164592"/>
+            <a:ext cx="146304" cy="6693408"/>
+          </a:xfrm>
+          <a:prstGeom prst="rect">
+            <a:avLst/>
+          </a:prstGeom>
+          <a:solidFill>
+            <a:srgbClr val="2F8A28"/>
+          </a:solidFill>
+          <a:ln w="12700">
+            <a:solidFill>
+              <a:srgbClr val="2F8A28"/>
+            </a:solidFill>
+            <a:prstDash val="solid"/>
+          </a:ln>
+        </p:spPr>
+      </p:sp>
+      <p:sp>
+        <p:nvSpPr>
+          <p:cNvPr id="4" name="Text 2"/>
           <p:cNvSpPr/>
           <p:nvPr/>
         </p:nvSpPr>
@@ -6996,7 +12762,7 @@
       </p:sp>
       <p:sp>
         <p:nvSpPr>
-          <p:cNvPr id="4" name="Text 2"/>
+          <p:cNvPr id="5" name="Text 3"/>
           <p:cNvSpPr/>
           <p:nvPr/>
         </p:nvSpPr>
@@ -7035,7 +12801,7 @@
       </p:sp>
       <p:sp>
         <p:nvSpPr>
-          <p:cNvPr id="5" name="Text 3"/>
+          <p:cNvPr id="6" name="Text 4"/>
           <p:cNvSpPr/>
           <p:nvPr/>
         </p:nvSpPr>
@@ -7074,7 +12840,7 @@
       </p:sp>
       <p:sp>
         <p:nvSpPr>
-          <p:cNvPr id="6" name="Text 4"/>
+          <p:cNvPr id="7" name="Text 5"/>
           <p:cNvSpPr/>
           <p:nvPr/>
         </p:nvSpPr>
@@ -7107,7 +12873,7 @@
                 <a:ea typeface="Aptos Display" pitchFamily="34" charset="-122"/>
                 <a:cs typeface="Aptos Display" pitchFamily="34" charset="-120"/>
               </a:rPr>
-              <a:t>Why This Topic Matters for Public Health AI</a:t>
+              <a:t>Learning Objectives Continued</a:t>
             </a:r>
             <a:endParaRPr lang="en-US" sz="2700" dirty="0"/>
           </a:p>
@@ -7115,32 +12881,136 @@
       </p:sp>
       <p:sp>
         <p:nvSpPr>
-          <p:cNvPr id="7" name="Text 5"/>
-          <p:cNvSpPr/>
-          <p:nvPr/>
-        </p:nvSpPr>
-        <p:spPr>
-          <a:xfrm>
-            <a:off x="822960" y="1325880"/>
-            <a:ext cx="10378440" cy="4800600"/>
-          </a:xfrm>
-          <a:prstGeom prst="rect">
-            <a:avLst/>
-          </a:prstGeom>
-          <a:noFill/>
-          <a:ln/>
-        </p:spPr>
-        <p:txBody>
-          <a:bodyPr wrap="square" lIns="1016" tIns="1016" rIns="1016" bIns="1016" rtlCol="0" anchor="t">
+          <p:cNvPr id="8" name="Text 6"/>
+          <p:cNvSpPr/>
+          <p:nvPr/>
+        </p:nvSpPr>
+        <p:spPr>
+          <a:xfrm>
+            <a:off x="868680" y="1417320"/>
+            <a:ext cx="6675120" cy="4434840"/>
+          </a:xfrm>
+          <a:prstGeom prst="rect">
+            <a:avLst/>
+          </a:prstGeom>
+          <a:noFill/>
+          <a:ln/>
+        </p:spPr>
+        <p:txBody>
+          <a:bodyPr wrap="square" lIns="635" tIns="635" rIns="635" bIns="635" rtlCol="0" anchor="t">
             <a:normAutofit/>
           </a:bodyPr>
           <a:lstStyle/>
           <a:p>
+            <a:r>
+              <a:rPr lang="en-US" sz="1700" dirty="0">
+                <a:solidFill>
+                  <a:srgbClr val="17364A"/>
+                </a:solidFill>
+                <a:latin typeface="Aptos" pitchFamily="34" charset="0"/>
+                <a:ea typeface="Aptos" pitchFamily="34" charset="-122"/>
+                <a:cs typeface="Aptos" pitchFamily="34" charset="-120"/>
+              </a:rPr>
+              <a:t>Produce an advanced validation plan for an AI-supported workflow.</a:t>
+            </a:r>
+            <a:endParaRPr lang="en-US" sz="1700" dirty="0"/>
+          </a:p>
+        </p:txBody>
+      </p:sp>
+      <p:sp>
+        <p:nvSpPr>
+          <p:cNvPr id="9" name="Shape 7"/>
+          <p:cNvSpPr/>
+          <p:nvPr/>
+        </p:nvSpPr>
+        <p:spPr>
+          <a:xfrm>
+            <a:off x="7909560" y="1417320"/>
+            <a:ext cx="3154680" cy="1828800"/>
+          </a:xfrm>
+          <a:prstGeom prst="roundRect">
+            <a:avLst>
+              <a:gd name="adj" fmla="val 6000"/>
+            </a:avLst>
+          </a:prstGeom>
+          <a:solidFill>
+            <a:srgbClr val="EEF8ED"/>
+          </a:solidFill>
+          <a:ln w="12700">
+            <a:solidFill>
+              <a:srgbClr val="B9D7E6"/>
+            </a:solidFill>
+            <a:prstDash val="solid"/>
+          </a:ln>
+        </p:spPr>
+      </p:sp>
+      <p:sp>
+        <p:nvSpPr>
+          <p:cNvPr id="10" name="Text 8"/>
+          <p:cNvSpPr/>
+          <p:nvPr/>
+        </p:nvSpPr>
+        <p:spPr>
+          <a:xfrm>
+            <a:off x="8074152" y="1563624"/>
+            <a:ext cx="2825496" cy="201168"/>
+          </a:xfrm>
+          <a:prstGeom prst="rect">
+            <a:avLst/>
+          </a:prstGeom>
+          <a:noFill/>
+          <a:ln/>
+        </p:spPr>
+        <p:txBody>
+          <a:bodyPr wrap="square" lIns="0" tIns="0" rIns="0" bIns="0" rtlCol="0" anchor="ctr"/>
+          <a:lstStyle/>
+          <a:p>
             <a:pPr indent="0" marL="0">
               <a:buNone/>
             </a:pPr>
             <a:r>
-              <a:rPr lang="en-US" sz="1420" dirty="0">
+              <a:rPr lang="en-US" sz="950" b="1" dirty="0">
+                <a:solidFill>
+                  <a:srgbClr val="0068B7"/>
+                </a:solidFill>
+                <a:latin typeface="Aptos" pitchFamily="34" charset="0"/>
+                <a:ea typeface="Aptos" pitchFamily="34" charset="-122"/>
+                <a:cs typeface="Aptos" pitchFamily="34" charset="-120"/>
+              </a:rPr>
+              <a:t>Key idea</a:t>
+            </a:r>
+            <a:endParaRPr lang="en-US" sz="950" dirty="0"/>
+          </a:p>
+        </p:txBody>
+      </p:sp>
+      <p:sp>
+        <p:nvSpPr>
+          <p:cNvPr id="11" name="Text 9"/>
+          <p:cNvSpPr/>
+          <p:nvPr/>
+        </p:nvSpPr>
+        <p:spPr>
+          <a:xfrm>
+            <a:off x="8074152" y="1856232"/>
+            <a:ext cx="2825496" cy="1261872"/>
+          </a:xfrm>
+          <a:prstGeom prst="rect">
+            <a:avLst/>
+          </a:prstGeom>
+          <a:noFill/>
+          <a:ln/>
+        </p:spPr>
+        <p:txBody>
+          <a:bodyPr wrap="square" lIns="0" tIns="0" rIns="0" bIns="0" rtlCol="0" anchor="t">
+            <a:normAutofit/>
+          </a:bodyPr>
+          <a:lstStyle/>
+          <a:p>
+            <a:pPr indent="0" marL="0">
+              <a:buNone/>
+            </a:pPr>
+            <a:r>
+              <a:rPr lang="en-US" sz="1250" dirty="0">
                 <a:solidFill>
                   <a:srgbClr val="17364A"/>
                 </a:solidFill>
@@ -7148,9 +13018,116 @@
                 <a:ea typeface="Aptos" pitchFamily="34" charset="-122"/>
                 <a:cs typeface="Aptos" pitchFamily="34" charset="-120"/>
               </a:rPr>
-              <a:t>Validation matters because public health AI tools can appear credible even when they are not fit for operational use. A polished dashboard, confident generated text, or high overall accuracy score does not prove that the tool is safe, equitable, or useful. Public health staff need to evaluate performance in relation to the specific task and the consequences of error. Model performance is context-dependent. A tool that performs well in one health system or state may fail in another because of different data sources, coding practices, populations, workflows, or reporting laws. A tool that performs well during development may degrade when disease patterns change or new providers begin reporting. Validation must therefore include local or context-specific testing whenever possible. Advanced validation also requires attention to equity. Overall performance can hide poor performance for small populations, language groups, rural communities, people with unstable housing, or communities with limited healthcare access. Public health validation should examine subgroup performance and data representativeness before AI outputs influence priority setting or resource allocation.</a:t>
-            </a:r>
-            <a:endParaRPr lang="en-US" sz="1420" dirty="0"/>
+              <a:t>Produce an advanced validation plan for an AI-supported workflow.</a:t>
+            </a:r>
+            <a:endParaRPr lang="en-US" sz="1250" dirty="0"/>
+          </a:p>
+        </p:txBody>
+      </p:sp>
+      <p:sp>
+        <p:nvSpPr>
+          <p:cNvPr id="12" name="Shape 10"/>
+          <p:cNvSpPr/>
+          <p:nvPr/>
+        </p:nvSpPr>
+        <p:spPr>
+          <a:xfrm>
+            <a:off x="7909560" y="3520440"/>
+            <a:ext cx="3154680" cy="1737360"/>
+          </a:xfrm>
+          <a:prstGeom prst="roundRect">
+            <a:avLst>
+              <a:gd name="adj" fmla="val 6316"/>
+            </a:avLst>
+          </a:prstGeom>
+          <a:solidFill>
+            <a:srgbClr val="EAF6F8"/>
+          </a:solidFill>
+          <a:ln w="12700">
+            <a:solidFill>
+              <a:srgbClr val="B9D7E6"/>
+            </a:solidFill>
+            <a:prstDash val="solid"/>
+          </a:ln>
+        </p:spPr>
+      </p:sp>
+      <p:sp>
+        <p:nvSpPr>
+          <p:cNvPr id="13" name="Text 11"/>
+          <p:cNvSpPr/>
+          <p:nvPr/>
+        </p:nvSpPr>
+        <p:spPr>
+          <a:xfrm>
+            <a:off x="8074152" y="3666744"/>
+            <a:ext cx="2825496" cy="201168"/>
+          </a:xfrm>
+          <a:prstGeom prst="rect">
+            <a:avLst/>
+          </a:prstGeom>
+          <a:noFill/>
+          <a:ln/>
+        </p:spPr>
+        <p:txBody>
+          <a:bodyPr wrap="square" lIns="0" tIns="0" rIns="0" bIns="0" rtlCol="0" anchor="ctr"/>
+          <a:lstStyle/>
+          <a:p>
+            <a:pPr indent="0" marL="0">
+              <a:buNone/>
+            </a:pPr>
+            <a:r>
+              <a:rPr lang="en-US" sz="950" b="1" dirty="0">
+                <a:solidFill>
+                  <a:srgbClr val="0068B7"/>
+                </a:solidFill>
+                <a:latin typeface="Aptos" pitchFamily="34" charset="0"/>
+                <a:ea typeface="Aptos" pitchFamily="34" charset="-122"/>
+                <a:cs typeface="Aptos" pitchFamily="34" charset="-120"/>
+              </a:rPr>
+              <a:t>Use this for</a:t>
+            </a:r>
+            <a:endParaRPr lang="en-US" sz="950" dirty="0"/>
+          </a:p>
+        </p:txBody>
+      </p:sp>
+      <p:sp>
+        <p:nvSpPr>
+          <p:cNvPr id="14" name="Text 12"/>
+          <p:cNvSpPr/>
+          <p:nvPr/>
+        </p:nvSpPr>
+        <p:spPr>
+          <a:xfrm>
+            <a:off x="8074152" y="3959352"/>
+            <a:ext cx="2825496" cy="1170432"/>
+          </a:xfrm>
+          <a:prstGeom prst="rect">
+            <a:avLst/>
+          </a:prstGeom>
+          <a:noFill/>
+          <a:ln/>
+        </p:spPr>
+        <p:txBody>
+          <a:bodyPr wrap="square" lIns="0" tIns="0" rIns="0" bIns="0" rtlCol="0" anchor="t">
+            <a:normAutofit/>
+          </a:bodyPr>
+          <a:lstStyle/>
+          <a:p>
+            <a:pPr indent="0" marL="0">
+              <a:buNone/>
+            </a:pPr>
+            <a:r>
+              <a:rPr lang="en-US" sz="1250" dirty="0">
+                <a:solidFill>
+                  <a:srgbClr val="17364A"/>
+                </a:solidFill>
+                <a:latin typeface="Aptos" pitchFamily="34" charset="0"/>
+                <a:ea typeface="Aptos" pitchFamily="34" charset="-122"/>
+                <a:cs typeface="Aptos" pitchFamily="34" charset="-120"/>
+              </a:rPr>
+              <a:t>Connect the concept to public health decisions, safeguards, documentation, or implementation work.</a:t>
+            </a:r>
+            <a:endParaRPr lang="en-US" sz="1250" dirty="0"/>
           </a:p>
         </p:txBody>
       </p:sp>
@@ -7213,7 +13190,32 @@
       </p:sp>
       <p:sp>
         <p:nvSpPr>
-          <p:cNvPr id="3" name="Text 1"/>
+          <p:cNvPr id="3" name="Shape 1"/>
+          <p:cNvSpPr/>
+          <p:nvPr/>
+        </p:nvSpPr>
+        <p:spPr>
+          <a:xfrm>
+            <a:off x="0" y="164592"/>
+            <a:ext cx="146304" cy="6693408"/>
+          </a:xfrm>
+          <a:prstGeom prst="rect">
+            <a:avLst/>
+          </a:prstGeom>
+          <a:solidFill>
+            <a:srgbClr val="2F8A28"/>
+          </a:solidFill>
+          <a:ln w="12700">
+            <a:solidFill>
+              <a:srgbClr val="2F8A28"/>
+            </a:solidFill>
+            <a:prstDash val="solid"/>
+          </a:ln>
+        </p:spPr>
+      </p:sp>
+      <p:sp>
+        <p:nvSpPr>
+          <p:cNvPr id="4" name="Text 2"/>
           <p:cNvSpPr/>
           <p:nvPr/>
         </p:nvSpPr>
@@ -7252,7 +13254,7 @@
       </p:sp>
       <p:sp>
         <p:nvSpPr>
-          <p:cNvPr id="4" name="Text 2"/>
+          <p:cNvPr id="5" name="Text 3"/>
           <p:cNvSpPr/>
           <p:nvPr/>
         </p:nvSpPr>
@@ -7291,7 +13293,7 @@
       </p:sp>
       <p:sp>
         <p:nvSpPr>
-          <p:cNvPr id="5" name="Text 3"/>
+          <p:cNvPr id="6" name="Text 4"/>
           <p:cNvSpPr/>
           <p:nvPr/>
         </p:nvSpPr>
@@ -7330,13 +13332,77 @@
       </p:sp>
       <p:sp>
         <p:nvSpPr>
-          <p:cNvPr id="6" name="Text 4"/>
+          <p:cNvPr id="7" name="Shape 5"/>
           <p:cNvSpPr/>
           <p:nvPr/>
         </p:nvSpPr>
         <p:spPr>
           <a:xfrm>
             <a:off x="640080" y="658368"/>
+            <a:ext cx="420624" cy="420624"/>
+          </a:xfrm>
+          <a:prstGeom prst="ellipse">
+            <a:avLst/>
+          </a:prstGeom>
+          <a:solidFill>
+            <a:srgbClr val="0068B7"/>
+          </a:solidFill>
+          <a:ln w="12700">
+            <a:solidFill>
+              <a:srgbClr val="0068B7"/>
+            </a:solidFill>
+            <a:prstDash val="solid"/>
+          </a:ln>
+        </p:spPr>
+      </p:sp>
+      <p:sp>
+        <p:nvSpPr>
+          <p:cNvPr id="8" name="Text 6"/>
+          <p:cNvSpPr/>
+          <p:nvPr/>
+        </p:nvSpPr>
+        <p:spPr>
+          <a:xfrm>
+            <a:off x="640080" y="731520"/>
+            <a:ext cx="420624" cy="164592"/>
+          </a:xfrm>
+          <a:prstGeom prst="rect">
+            <a:avLst/>
+          </a:prstGeom>
+          <a:noFill/>
+          <a:ln/>
+        </p:spPr>
+        <p:txBody>
+          <a:bodyPr wrap="square" lIns="0" tIns="0" rIns="0" bIns="0" rtlCol="0" anchor="ctr"/>
+          <a:lstStyle/>
+          <a:p>
+            <a:pPr algn="ctr" indent="0" marL="0">
+              <a:buNone/>
+            </a:pPr>
+            <a:r>
+              <a:rPr lang="en-US" sz="1100" b="1" dirty="0">
+                <a:solidFill>
+                  <a:srgbClr val="FFFFFF"/>
+                </a:solidFill>
+                <a:latin typeface="Aptos" pitchFamily="34" charset="0"/>
+                <a:ea typeface="Aptos" pitchFamily="34" charset="-122"/>
+                <a:cs typeface="Aptos" pitchFamily="34" charset="-120"/>
+              </a:rPr>
+              <a:t>2</a:t>
+            </a:r>
+            <a:endParaRPr lang="en-US" sz="1100" dirty="0"/>
+          </a:p>
+        </p:txBody>
+      </p:sp>
+      <p:sp>
+        <p:nvSpPr>
+          <p:cNvPr id="9" name="Text 7"/>
+          <p:cNvSpPr/>
+          <p:nvPr/>
+        </p:nvSpPr>
+        <p:spPr>
+          <a:xfrm>
+            <a:off x="640080" y="621792"/>
             <a:ext cx="10881360" cy="566928"/>
           </a:xfrm>
           <a:prstGeom prst="rect">
@@ -7363,7 +13429,7 @@
                 <a:ea typeface="Aptos Display" pitchFamily="34" charset="-122"/>
                 <a:cs typeface="Aptos Display" pitchFamily="34" charset="-120"/>
               </a:rPr>
-              <a:t>Public Health Example</a:t>
+              <a:t>Module Overview</a:t>
             </a:r>
             <a:endParaRPr lang="en-US" sz="2700" dirty="0"/>
           </a:p>
@@ -7371,32 +13437,178 @@
       </p:sp>
       <p:sp>
         <p:nvSpPr>
-          <p:cNvPr id="7" name="Text 5"/>
-          <p:cNvSpPr/>
-          <p:nvPr/>
-        </p:nvSpPr>
-        <p:spPr>
-          <a:xfrm>
-            <a:off x="822960" y="1325880"/>
-            <a:ext cx="10378440" cy="4800600"/>
-          </a:xfrm>
-          <a:prstGeom prst="rect">
-            <a:avLst/>
-          </a:prstGeom>
-          <a:noFill/>
-          <a:ln/>
-        </p:spPr>
-        <p:txBody>
-          <a:bodyPr wrap="square" lIns="1016" tIns="1016" rIns="1016" bIns="1016" rtlCol="0" anchor="t">
+          <p:cNvPr id="10" name="Text 8"/>
+          <p:cNvSpPr/>
+          <p:nvPr/>
+        </p:nvSpPr>
+        <p:spPr>
+          <a:xfrm>
+            <a:off x="868680" y="1417320"/>
+            <a:ext cx="6675120" cy="4434840"/>
+          </a:xfrm>
+          <a:prstGeom prst="rect">
+            <a:avLst/>
+          </a:prstGeom>
+          <a:noFill/>
+          <a:ln/>
+        </p:spPr>
+        <p:txBody>
+          <a:bodyPr wrap="square" lIns="635" tIns="635" rIns="635" bIns="635" rtlCol="0" anchor="t">
             <a:normAutofit/>
           </a:bodyPr>
           <a:lstStyle/>
           <a:p>
+            <a:r>
+              <a:rPr lang="en-US" sz="1700" dirty="0">
+                <a:solidFill>
+                  <a:srgbClr val="17364A"/>
+                </a:solidFill>
+                <a:latin typeface="Aptos" pitchFamily="34" charset="0"/>
+                <a:ea typeface="Aptos" pitchFamily="34" charset="-122"/>
+                <a:cs typeface="Aptos" pitchFamily="34" charset="-120"/>
+              </a:rPr>
+              <a:t>Model validation is the process of determining whether an AI tool performs adequately for its intended use, population,.</a:t>
+            </a:r>
+            <a:endParaRPr lang="en-US" sz="1700" dirty="0"/>
+          </a:p>
+          <a:p>
+            <a:r>
+              <a:rPr lang="en-US" sz="1700" dirty="0">
+                <a:solidFill>
+                  <a:srgbClr val="17364A"/>
+                </a:solidFill>
+                <a:latin typeface="Aptos" pitchFamily="34" charset="0"/>
+                <a:ea typeface="Aptos" pitchFamily="34" charset="-122"/>
+                <a:cs typeface="Aptos" pitchFamily="34" charset="-120"/>
+              </a:rPr>
+              <a:t>Basic validation asks whether the tool works at all.</a:t>
+            </a:r>
+            <a:endParaRPr lang="en-US" sz="1700" dirty="0"/>
+          </a:p>
+          <a:p>
+            <a:r>
+              <a:rPr lang="en-US" sz="1700" dirty="0">
+                <a:solidFill>
+                  <a:srgbClr val="17364A"/>
+                </a:solidFill>
+                <a:latin typeface="Aptos" pitchFamily="34" charset="0"/>
+                <a:ea typeface="Aptos" pitchFamily="34" charset="-122"/>
+                <a:cs typeface="Aptos" pitchFamily="34" charset="-120"/>
+              </a:rPr>
+              <a:t>Advanced validation asks whether it works well enough, for whom, under what conditions, with what limitations, and with.</a:t>
+            </a:r>
+            <a:endParaRPr lang="en-US" sz="1700" dirty="0"/>
+          </a:p>
+          <a:p>
+            <a:r>
+              <a:rPr lang="en-US" sz="1700" dirty="0">
+                <a:solidFill>
+                  <a:srgbClr val="17364A"/>
+                </a:solidFill>
+                <a:latin typeface="Aptos" pitchFamily="34" charset="0"/>
+                <a:ea typeface="Aptos" pitchFamily="34" charset="-122"/>
+                <a:cs typeface="Aptos" pitchFamily="34" charset="-120"/>
+              </a:rPr>
+              <a:t>This module extends foundational validation content by focusing on metrics, subgroup performance, calibration, external.</a:t>
+            </a:r>
+            <a:endParaRPr lang="en-US" sz="1700" dirty="0"/>
+          </a:p>
+        </p:txBody>
+      </p:sp>
+      <p:sp>
+        <p:nvSpPr>
+          <p:cNvPr id="11" name="Shape 9"/>
+          <p:cNvSpPr/>
+          <p:nvPr/>
+        </p:nvSpPr>
+        <p:spPr>
+          <a:xfrm>
+            <a:off x="7909560" y="1417320"/>
+            <a:ext cx="3154680" cy="1828800"/>
+          </a:xfrm>
+          <a:prstGeom prst="roundRect">
+            <a:avLst>
+              <a:gd name="adj" fmla="val 6000"/>
+            </a:avLst>
+          </a:prstGeom>
+          <a:solidFill>
+            <a:srgbClr val="EEF8ED"/>
+          </a:solidFill>
+          <a:ln w="12700">
+            <a:solidFill>
+              <a:srgbClr val="B9D7E6"/>
+            </a:solidFill>
+            <a:prstDash val="solid"/>
+          </a:ln>
+        </p:spPr>
+      </p:sp>
+      <p:sp>
+        <p:nvSpPr>
+          <p:cNvPr id="12" name="Text 10"/>
+          <p:cNvSpPr/>
+          <p:nvPr/>
+        </p:nvSpPr>
+        <p:spPr>
+          <a:xfrm>
+            <a:off x="8074152" y="1563624"/>
+            <a:ext cx="2825496" cy="201168"/>
+          </a:xfrm>
+          <a:prstGeom prst="rect">
+            <a:avLst/>
+          </a:prstGeom>
+          <a:noFill/>
+          <a:ln/>
+        </p:spPr>
+        <p:txBody>
+          <a:bodyPr wrap="square" lIns="0" tIns="0" rIns="0" bIns="0" rtlCol="0" anchor="ctr"/>
+          <a:lstStyle/>
+          <a:p>
             <a:pPr indent="0" marL="0">
               <a:buNone/>
             </a:pPr>
             <a:r>
-              <a:rPr lang="en-US" sz="1420" dirty="0">
+              <a:rPr lang="en-US" sz="950" b="1" dirty="0">
+                <a:solidFill>
+                  <a:srgbClr val="0068B7"/>
+                </a:solidFill>
+                <a:latin typeface="Aptos" pitchFamily="34" charset="0"/>
+                <a:ea typeface="Aptos" pitchFamily="34" charset="-122"/>
+                <a:cs typeface="Aptos" pitchFamily="34" charset="-120"/>
+              </a:rPr>
+              <a:t>Key idea</a:t>
+            </a:r>
+            <a:endParaRPr lang="en-US" sz="950" dirty="0"/>
+          </a:p>
+        </p:txBody>
+      </p:sp>
+      <p:sp>
+        <p:nvSpPr>
+          <p:cNvPr id="13" name="Text 11"/>
+          <p:cNvSpPr/>
+          <p:nvPr/>
+        </p:nvSpPr>
+        <p:spPr>
+          <a:xfrm>
+            <a:off x="8074152" y="1856232"/>
+            <a:ext cx="2825496" cy="1261872"/>
+          </a:xfrm>
+          <a:prstGeom prst="rect">
+            <a:avLst/>
+          </a:prstGeom>
+          <a:noFill/>
+          <a:ln/>
+        </p:spPr>
+        <p:txBody>
+          <a:bodyPr wrap="square" lIns="0" tIns="0" rIns="0" bIns="0" rtlCol="0" anchor="t">
+            <a:normAutofit/>
+          </a:bodyPr>
+          <a:lstStyle/>
+          <a:p>
+            <a:pPr indent="0" marL="0">
+              <a:buNone/>
+            </a:pPr>
+            <a:r>
+              <a:rPr lang="en-US" sz="1250" dirty="0">
                 <a:solidFill>
                   <a:srgbClr val="17364A"/>
                 </a:solidFill>
@@ -7404,9 +13616,116 @@
                 <a:ea typeface="Aptos" pitchFamily="34" charset="-122"/>
                 <a:cs typeface="Aptos" pitchFamily="34" charset="-120"/>
               </a:rPr>
-              <a:t>A public health agency may test a model that identifies incoming case reports likely to require expedited review. Overall accuracy may be high, but that number alone is not enough. Staff need to know whether the model misses rare but severe conditions, whether it performs differently across facilities, whether it over-flags reports from certain communities, and whether users understand how to act on the output. The agency should validate the model on recent local data, review errors with epidemiologists, test the workflow with actual users, and monitor override patterns after pilot deployment. If the model performs well technically but creates too many alerts for available staff, the workflow may still fail. Validation must include operational fit.</a:t>
-            </a:r>
-            <a:endParaRPr lang="en-US" sz="1420" dirty="0"/>
+              <a:t>Model validation is the process of determining whether an AI tool performs adequately for its intended use, population,.</a:t>
+            </a:r>
+            <a:endParaRPr lang="en-US" sz="1250" dirty="0"/>
+          </a:p>
+        </p:txBody>
+      </p:sp>
+      <p:sp>
+        <p:nvSpPr>
+          <p:cNvPr id="14" name="Shape 12"/>
+          <p:cNvSpPr/>
+          <p:nvPr/>
+        </p:nvSpPr>
+        <p:spPr>
+          <a:xfrm>
+            <a:off x="7909560" y="3520440"/>
+            <a:ext cx="3154680" cy="1737360"/>
+          </a:xfrm>
+          <a:prstGeom prst="roundRect">
+            <a:avLst>
+              <a:gd name="adj" fmla="val 6316"/>
+            </a:avLst>
+          </a:prstGeom>
+          <a:solidFill>
+            <a:srgbClr val="EAF6F8"/>
+          </a:solidFill>
+          <a:ln w="12700">
+            <a:solidFill>
+              <a:srgbClr val="B9D7E6"/>
+            </a:solidFill>
+            <a:prstDash val="solid"/>
+          </a:ln>
+        </p:spPr>
+      </p:sp>
+      <p:sp>
+        <p:nvSpPr>
+          <p:cNvPr id="15" name="Text 13"/>
+          <p:cNvSpPr/>
+          <p:nvPr/>
+        </p:nvSpPr>
+        <p:spPr>
+          <a:xfrm>
+            <a:off x="8074152" y="3666744"/>
+            <a:ext cx="2825496" cy="201168"/>
+          </a:xfrm>
+          <a:prstGeom prst="rect">
+            <a:avLst/>
+          </a:prstGeom>
+          <a:noFill/>
+          <a:ln/>
+        </p:spPr>
+        <p:txBody>
+          <a:bodyPr wrap="square" lIns="0" tIns="0" rIns="0" bIns="0" rtlCol="0" anchor="ctr"/>
+          <a:lstStyle/>
+          <a:p>
+            <a:pPr indent="0" marL="0">
+              <a:buNone/>
+            </a:pPr>
+            <a:r>
+              <a:rPr lang="en-US" sz="950" b="1" dirty="0">
+                <a:solidFill>
+                  <a:srgbClr val="0068B7"/>
+                </a:solidFill>
+                <a:latin typeface="Aptos" pitchFamily="34" charset="0"/>
+                <a:ea typeface="Aptos" pitchFamily="34" charset="-122"/>
+                <a:cs typeface="Aptos" pitchFamily="34" charset="-120"/>
+              </a:rPr>
+              <a:t>Use this for</a:t>
+            </a:r>
+            <a:endParaRPr lang="en-US" sz="950" dirty="0"/>
+          </a:p>
+        </p:txBody>
+      </p:sp>
+      <p:sp>
+        <p:nvSpPr>
+          <p:cNvPr id="16" name="Text 14"/>
+          <p:cNvSpPr/>
+          <p:nvPr/>
+        </p:nvSpPr>
+        <p:spPr>
+          <a:xfrm>
+            <a:off x="8074152" y="3959352"/>
+            <a:ext cx="2825496" cy="1170432"/>
+          </a:xfrm>
+          <a:prstGeom prst="rect">
+            <a:avLst/>
+          </a:prstGeom>
+          <a:noFill/>
+          <a:ln/>
+        </p:spPr>
+        <p:txBody>
+          <a:bodyPr wrap="square" lIns="0" tIns="0" rIns="0" bIns="0" rtlCol="0" anchor="t">
+            <a:normAutofit/>
+          </a:bodyPr>
+          <a:lstStyle/>
+          <a:p>
+            <a:pPr indent="0" marL="0">
+              <a:buNone/>
+            </a:pPr>
+            <a:r>
+              <a:rPr lang="en-US" sz="1250" dirty="0">
+                <a:solidFill>
+                  <a:srgbClr val="17364A"/>
+                </a:solidFill>
+                <a:latin typeface="Aptos" pitchFamily="34" charset="0"/>
+                <a:ea typeface="Aptos" pitchFamily="34" charset="-122"/>
+                <a:cs typeface="Aptos" pitchFamily="34" charset="-120"/>
+              </a:rPr>
+              <a:t>Connect the concept to public health decisions, safeguards, documentation, or implementation work.</a:t>
+            </a:r>
+            <a:endParaRPr lang="en-US" sz="1250" dirty="0"/>
           </a:p>
         </p:txBody>
       </p:sp>
@@ -7469,7 +13788,32 @@
       </p:sp>
       <p:sp>
         <p:nvSpPr>
-          <p:cNvPr id="3" name="Text 1"/>
+          <p:cNvPr id="3" name="Shape 1"/>
+          <p:cNvSpPr/>
+          <p:nvPr/>
+        </p:nvSpPr>
+        <p:spPr>
+          <a:xfrm>
+            <a:off x="0" y="164592"/>
+            <a:ext cx="146304" cy="6693408"/>
+          </a:xfrm>
+          <a:prstGeom prst="rect">
+            <a:avLst/>
+          </a:prstGeom>
+          <a:solidFill>
+            <a:srgbClr val="2F8A28"/>
+          </a:solidFill>
+          <a:ln w="12700">
+            <a:solidFill>
+              <a:srgbClr val="2F8A28"/>
+            </a:solidFill>
+            <a:prstDash val="solid"/>
+          </a:ln>
+        </p:spPr>
+      </p:sp>
+      <p:sp>
+        <p:nvSpPr>
+          <p:cNvPr id="4" name="Text 2"/>
           <p:cNvSpPr/>
           <p:nvPr/>
         </p:nvSpPr>
@@ -7508,7 +13852,7 @@
       </p:sp>
       <p:sp>
         <p:nvSpPr>
-          <p:cNvPr id="4" name="Text 2"/>
+          <p:cNvPr id="5" name="Text 3"/>
           <p:cNvSpPr/>
           <p:nvPr/>
         </p:nvSpPr>
@@ -7547,7 +13891,7 @@
       </p:sp>
       <p:sp>
         <p:nvSpPr>
-          <p:cNvPr id="5" name="Text 3"/>
+          <p:cNvPr id="6" name="Text 4"/>
           <p:cNvSpPr/>
           <p:nvPr/>
         </p:nvSpPr>
@@ -7586,13 +13930,77 @@
       </p:sp>
       <p:sp>
         <p:nvSpPr>
-          <p:cNvPr id="6" name="Text 4"/>
+          <p:cNvPr id="7" name="Shape 5"/>
           <p:cNvSpPr/>
           <p:nvPr/>
         </p:nvSpPr>
         <p:spPr>
           <a:xfrm>
             <a:off x="640080" y="658368"/>
+            <a:ext cx="420624" cy="420624"/>
+          </a:xfrm>
+          <a:prstGeom prst="ellipse">
+            <a:avLst/>
+          </a:prstGeom>
+          <a:solidFill>
+            <a:srgbClr val="0068B7"/>
+          </a:solidFill>
+          <a:ln w="12700">
+            <a:solidFill>
+              <a:srgbClr val="0068B7"/>
+            </a:solidFill>
+            <a:prstDash val="solid"/>
+          </a:ln>
+        </p:spPr>
+      </p:sp>
+      <p:sp>
+        <p:nvSpPr>
+          <p:cNvPr id="8" name="Text 6"/>
+          <p:cNvSpPr/>
+          <p:nvPr/>
+        </p:nvSpPr>
+        <p:spPr>
+          <a:xfrm>
+            <a:off x="640080" y="731520"/>
+            <a:ext cx="420624" cy="164592"/>
+          </a:xfrm>
+          <a:prstGeom prst="rect">
+            <a:avLst/>
+          </a:prstGeom>
+          <a:noFill/>
+          <a:ln/>
+        </p:spPr>
+        <p:txBody>
+          <a:bodyPr wrap="square" lIns="0" tIns="0" rIns="0" bIns="0" rtlCol="0" anchor="ctr"/>
+          <a:lstStyle/>
+          <a:p>
+            <a:pPr algn="ctr" indent="0" marL="0">
+              <a:buNone/>
+            </a:pPr>
+            <a:r>
+              <a:rPr lang="en-US" sz="1100" b="1" dirty="0">
+                <a:solidFill>
+                  <a:srgbClr val="FFFFFF"/>
+                </a:solidFill>
+                <a:latin typeface="Aptos" pitchFamily="34" charset="0"/>
+                <a:ea typeface="Aptos" pitchFamily="34" charset="-122"/>
+                <a:cs typeface="Aptos" pitchFamily="34" charset="-120"/>
+              </a:rPr>
+              <a:t>3</a:t>
+            </a:r>
+            <a:endParaRPr lang="en-US" sz="1100" dirty="0"/>
+          </a:p>
+        </p:txBody>
+      </p:sp>
+      <p:sp>
+        <p:nvSpPr>
+          <p:cNvPr id="9" name="Text 7"/>
+          <p:cNvSpPr/>
+          <p:nvPr/>
+        </p:nvSpPr>
+        <p:spPr>
+          <a:xfrm>
+            <a:off x="640080" y="621792"/>
             <a:ext cx="10881360" cy="566928"/>
           </a:xfrm>
           <a:prstGeom prst="rect">
@@ -7619,7 +14027,7 @@
                 <a:ea typeface="Aptos Display" pitchFamily="34" charset="-122"/>
                 <a:cs typeface="Aptos Display" pitchFamily="34" charset="-120"/>
               </a:rPr>
-              <a:t>Technical Deep Dive</a:t>
+              <a:t>Why This Topic Matters for Public Health AI</a:t>
             </a:r>
             <a:endParaRPr lang="en-US" sz="2700" dirty="0"/>
           </a:p>
@@ -7627,32 +14035,178 @@
       </p:sp>
       <p:sp>
         <p:nvSpPr>
-          <p:cNvPr id="7" name="Text 5"/>
-          <p:cNvSpPr/>
-          <p:nvPr/>
-        </p:nvSpPr>
-        <p:spPr>
-          <a:xfrm>
-            <a:off x="822960" y="1325880"/>
-            <a:ext cx="10378440" cy="4800600"/>
-          </a:xfrm>
-          <a:prstGeom prst="rect">
-            <a:avLst/>
-          </a:prstGeom>
-          <a:noFill/>
-          <a:ln/>
-        </p:spPr>
-        <p:txBody>
-          <a:bodyPr wrap="square" lIns="1016" tIns="1016" rIns="1016" bIns="1016" rtlCol="0" anchor="t">
+          <p:cNvPr id="10" name="Text 8"/>
+          <p:cNvSpPr/>
+          <p:nvPr/>
+        </p:nvSpPr>
+        <p:spPr>
+          <a:xfrm>
+            <a:off x="868680" y="1417320"/>
+            <a:ext cx="6675120" cy="4434840"/>
+          </a:xfrm>
+          <a:prstGeom prst="rect">
+            <a:avLst/>
+          </a:prstGeom>
+          <a:noFill/>
+          <a:ln/>
+        </p:spPr>
+        <p:txBody>
+          <a:bodyPr wrap="square" lIns="635" tIns="635" rIns="635" bIns="635" rtlCol="0" anchor="t">
             <a:normAutofit/>
           </a:bodyPr>
           <a:lstStyle/>
           <a:p>
+            <a:r>
+              <a:rPr lang="en-US" sz="1700" dirty="0">
+                <a:solidFill>
+                  <a:srgbClr val="17364A"/>
+                </a:solidFill>
+                <a:latin typeface="Aptos" pitchFamily="34" charset="0"/>
+                <a:ea typeface="Aptos" pitchFamily="34" charset="-122"/>
+                <a:cs typeface="Aptos" pitchFamily="34" charset="-120"/>
+              </a:rPr>
+              <a:t>Validation matters because public health AI tools can appear credible even when they are not fit for operational use.</a:t>
+            </a:r>
+            <a:endParaRPr lang="en-US" sz="1700" dirty="0"/>
+          </a:p>
+          <a:p>
+            <a:r>
+              <a:rPr lang="en-US" sz="1700" dirty="0">
+                <a:solidFill>
+                  <a:srgbClr val="17364A"/>
+                </a:solidFill>
+                <a:latin typeface="Aptos" pitchFamily="34" charset="0"/>
+                <a:ea typeface="Aptos" pitchFamily="34" charset="-122"/>
+                <a:cs typeface="Aptos" pitchFamily="34" charset="-120"/>
+              </a:rPr>
+              <a:t>A polished dashboard, confident generated text, or high overall accuracy score does not prove that the tool is safe,.</a:t>
+            </a:r>
+            <a:endParaRPr lang="en-US" sz="1700" dirty="0"/>
+          </a:p>
+          <a:p>
+            <a:r>
+              <a:rPr lang="en-US" sz="1700" dirty="0">
+                <a:solidFill>
+                  <a:srgbClr val="17364A"/>
+                </a:solidFill>
+                <a:latin typeface="Aptos" pitchFamily="34" charset="0"/>
+                <a:ea typeface="Aptos" pitchFamily="34" charset="-122"/>
+                <a:cs typeface="Aptos" pitchFamily="34" charset="-120"/>
+              </a:rPr>
+              <a:t>Public health staff need to evaluate performance in relation to the specific task and the consequences of error.</a:t>
+            </a:r>
+            <a:endParaRPr lang="en-US" sz="1700" dirty="0"/>
+          </a:p>
+          <a:p>
+            <a:r>
+              <a:rPr lang="en-US" sz="1700" dirty="0">
+                <a:solidFill>
+                  <a:srgbClr val="17364A"/>
+                </a:solidFill>
+                <a:latin typeface="Aptos" pitchFamily="34" charset="0"/>
+                <a:ea typeface="Aptos" pitchFamily="34" charset="-122"/>
+                <a:cs typeface="Aptos" pitchFamily="34" charset="-120"/>
+              </a:rPr>
+              <a:t>Model performance is context-dependent.</a:t>
+            </a:r>
+            <a:endParaRPr lang="en-US" sz="1700" dirty="0"/>
+          </a:p>
+        </p:txBody>
+      </p:sp>
+      <p:sp>
+        <p:nvSpPr>
+          <p:cNvPr id="11" name="Shape 9"/>
+          <p:cNvSpPr/>
+          <p:nvPr/>
+        </p:nvSpPr>
+        <p:spPr>
+          <a:xfrm>
+            <a:off x="7909560" y="1417320"/>
+            <a:ext cx="3154680" cy="1828800"/>
+          </a:xfrm>
+          <a:prstGeom prst="roundRect">
+            <a:avLst>
+              <a:gd name="adj" fmla="val 6000"/>
+            </a:avLst>
+          </a:prstGeom>
+          <a:solidFill>
+            <a:srgbClr val="EEF8ED"/>
+          </a:solidFill>
+          <a:ln w="12700">
+            <a:solidFill>
+              <a:srgbClr val="B9D7E6"/>
+            </a:solidFill>
+            <a:prstDash val="solid"/>
+          </a:ln>
+        </p:spPr>
+      </p:sp>
+      <p:sp>
+        <p:nvSpPr>
+          <p:cNvPr id="12" name="Text 10"/>
+          <p:cNvSpPr/>
+          <p:nvPr/>
+        </p:nvSpPr>
+        <p:spPr>
+          <a:xfrm>
+            <a:off x="8074152" y="1563624"/>
+            <a:ext cx="2825496" cy="201168"/>
+          </a:xfrm>
+          <a:prstGeom prst="rect">
+            <a:avLst/>
+          </a:prstGeom>
+          <a:noFill/>
+          <a:ln/>
+        </p:spPr>
+        <p:txBody>
+          <a:bodyPr wrap="square" lIns="0" tIns="0" rIns="0" bIns="0" rtlCol="0" anchor="ctr"/>
+          <a:lstStyle/>
+          <a:p>
             <a:pPr indent="0" marL="0">
               <a:buNone/>
             </a:pPr>
             <a:r>
-              <a:rPr lang="en-US" sz="1420" dirty="0">
+              <a:rPr lang="en-US" sz="950" b="1" dirty="0">
+                <a:solidFill>
+                  <a:srgbClr val="0068B7"/>
+                </a:solidFill>
+                <a:latin typeface="Aptos" pitchFamily="34" charset="0"/>
+                <a:ea typeface="Aptos" pitchFamily="34" charset="-122"/>
+                <a:cs typeface="Aptos" pitchFamily="34" charset="-120"/>
+              </a:rPr>
+              <a:t>Key idea</a:t>
+            </a:r>
+            <a:endParaRPr lang="en-US" sz="950" dirty="0"/>
+          </a:p>
+        </p:txBody>
+      </p:sp>
+      <p:sp>
+        <p:nvSpPr>
+          <p:cNvPr id="13" name="Text 11"/>
+          <p:cNvSpPr/>
+          <p:nvPr/>
+        </p:nvSpPr>
+        <p:spPr>
+          <a:xfrm>
+            <a:off x="8074152" y="1856232"/>
+            <a:ext cx="2825496" cy="1261872"/>
+          </a:xfrm>
+          <a:prstGeom prst="rect">
+            <a:avLst/>
+          </a:prstGeom>
+          <a:noFill/>
+          <a:ln/>
+        </p:spPr>
+        <p:txBody>
+          <a:bodyPr wrap="square" lIns="0" tIns="0" rIns="0" bIns="0" rtlCol="0" anchor="t">
+            <a:normAutofit/>
+          </a:bodyPr>
+          <a:lstStyle/>
+          <a:p>
+            <a:pPr indent="0" marL="0">
+              <a:buNone/>
+            </a:pPr>
+            <a:r>
+              <a:rPr lang="en-US" sz="1250" dirty="0">
                 <a:solidFill>
                   <a:srgbClr val="17364A"/>
                 </a:solidFill>
@@ -7660,9 +14214,116 @@
                 <a:ea typeface="Aptos" pitchFamily="34" charset="-122"/>
                 <a:cs typeface="Aptos" pitchFamily="34" charset="-120"/>
               </a:rPr>
-              <a:t>Metric selection should start with the public health consequence. Sensitivity may be prioritized when missing a true event is dangerous. Specificity may be prioritized when false positives create substantial burden or unnecessary intervention. Precision and positive predictive value matter when staff act on positive flags. Calibration matters when scores are interpreted as probabilities. Confusion matrices are useful because they show true positives, false positives, true negatives, and false negatives. Public health teams should translate each cell into operational meaning. A false negative may mean a delayed investigation. A false positive may mean staff time diverted from other work. A true positive may mean earlier action. A true negative may mean confidence to continue routine processing. External validation is essential when a model will be used outside its development context. Testing on a new jurisdiction, time period, data source, or population can reveal performance problems that internal validation missed. When external validation is not possible before pilot testing, agencies should begin with limited deployment, close monitoring, and conservative use.</a:t>
-            </a:r>
-            <a:endParaRPr lang="en-US" sz="1420" dirty="0"/>
+              <a:t>Validation matters because public health AI tools can appear credible even when they are not fit for operational use.</a:t>
+            </a:r>
+            <a:endParaRPr lang="en-US" sz="1250" dirty="0"/>
+          </a:p>
+        </p:txBody>
+      </p:sp>
+      <p:sp>
+        <p:nvSpPr>
+          <p:cNvPr id="14" name="Shape 12"/>
+          <p:cNvSpPr/>
+          <p:nvPr/>
+        </p:nvSpPr>
+        <p:spPr>
+          <a:xfrm>
+            <a:off x="7909560" y="3520440"/>
+            <a:ext cx="3154680" cy="1737360"/>
+          </a:xfrm>
+          <a:prstGeom prst="roundRect">
+            <a:avLst>
+              <a:gd name="adj" fmla="val 6316"/>
+            </a:avLst>
+          </a:prstGeom>
+          <a:solidFill>
+            <a:srgbClr val="EAF6F8"/>
+          </a:solidFill>
+          <a:ln w="12700">
+            <a:solidFill>
+              <a:srgbClr val="B9D7E6"/>
+            </a:solidFill>
+            <a:prstDash val="solid"/>
+          </a:ln>
+        </p:spPr>
+      </p:sp>
+      <p:sp>
+        <p:nvSpPr>
+          <p:cNvPr id="15" name="Text 13"/>
+          <p:cNvSpPr/>
+          <p:nvPr/>
+        </p:nvSpPr>
+        <p:spPr>
+          <a:xfrm>
+            <a:off x="8074152" y="3666744"/>
+            <a:ext cx="2825496" cy="201168"/>
+          </a:xfrm>
+          <a:prstGeom prst="rect">
+            <a:avLst/>
+          </a:prstGeom>
+          <a:noFill/>
+          <a:ln/>
+        </p:spPr>
+        <p:txBody>
+          <a:bodyPr wrap="square" lIns="0" tIns="0" rIns="0" bIns="0" rtlCol="0" anchor="ctr"/>
+          <a:lstStyle/>
+          <a:p>
+            <a:pPr indent="0" marL="0">
+              <a:buNone/>
+            </a:pPr>
+            <a:r>
+              <a:rPr lang="en-US" sz="950" b="1" dirty="0">
+                <a:solidFill>
+                  <a:srgbClr val="0068B7"/>
+                </a:solidFill>
+                <a:latin typeface="Aptos" pitchFamily="34" charset="0"/>
+                <a:ea typeface="Aptos" pitchFamily="34" charset="-122"/>
+                <a:cs typeface="Aptos" pitchFamily="34" charset="-120"/>
+              </a:rPr>
+              <a:t>Use this for</a:t>
+            </a:r>
+            <a:endParaRPr lang="en-US" sz="950" dirty="0"/>
+          </a:p>
+        </p:txBody>
+      </p:sp>
+      <p:sp>
+        <p:nvSpPr>
+          <p:cNvPr id="16" name="Text 14"/>
+          <p:cNvSpPr/>
+          <p:nvPr/>
+        </p:nvSpPr>
+        <p:spPr>
+          <a:xfrm>
+            <a:off x="8074152" y="3959352"/>
+            <a:ext cx="2825496" cy="1170432"/>
+          </a:xfrm>
+          <a:prstGeom prst="rect">
+            <a:avLst/>
+          </a:prstGeom>
+          <a:noFill/>
+          <a:ln/>
+        </p:spPr>
+        <p:txBody>
+          <a:bodyPr wrap="square" lIns="0" tIns="0" rIns="0" bIns="0" rtlCol="0" anchor="t">
+            <a:normAutofit/>
+          </a:bodyPr>
+          <a:lstStyle/>
+          <a:p>
+            <a:pPr indent="0" marL="0">
+              <a:buNone/>
+            </a:pPr>
+            <a:r>
+              <a:rPr lang="en-US" sz="1250" dirty="0">
+                <a:solidFill>
+                  <a:srgbClr val="17364A"/>
+                </a:solidFill>
+                <a:latin typeface="Aptos" pitchFamily="34" charset="0"/>
+                <a:ea typeface="Aptos" pitchFamily="34" charset="-122"/>
+                <a:cs typeface="Aptos" pitchFamily="34" charset="-120"/>
+              </a:rPr>
+              <a:t>Connect the concept to public health decisions, safeguards, documentation, or implementation work.</a:t>
+            </a:r>
+            <a:endParaRPr lang="en-US" sz="1250" dirty="0"/>
           </a:p>
         </p:txBody>
       </p:sp>
@@ -7725,7 +14386,32 @@
       </p:sp>
       <p:sp>
         <p:nvSpPr>
-          <p:cNvPr id="3" name="Text 1"/>
+          <p:cNvPr id="3" name="Shape 1"/>
+          <p:cNvSpPr/>
+          <p:nvPr/>
+        </p:nvSpPr>
+        <p:spPr>
+          <a:xfrm>
+            <a:off x="0" y="164592"/>
+            <a:ext cx="146304" cy="6693408"/>
+          </a:xfrm>
+          <a:prstGeom prst="rect">
+            <a:avLst/>
+          </a:prstGeom>
+          <a:solidFill>
+            <a:srgbClr val="2F8A28"/>
+          </a:solidFill>
+          <a:ln w="12700">
+            <a:solidFill>
+              <a:srgbClr val="2F8A28"/>
+            </a:solidFill>
+            <a:prstDash val="solid"/>
+          </a:ln>
+        </p:spPr>
+      </p:sp>
+      <p:sp>
+        <p:nvSpPr>
+          <p:cNvPr id="4" name="Text 2"/>
           <p:cNvSpPr/>
           <p:nvPr/>
         </p:nvSpPr>
@@ -7764,7 +14450,7 @@
       </p:sp>
       <p:sp>
         <p:nvSpPr>
-          <p:cNvPr id="4" name="Text 2"/>
+          <p:cNvPr id="5" name="Text 3"/>
           <p:cNvSpPr/>
           <p:nvPr/>
         </p:nvSpPr>
@@ -7803,7 +14489,7 @@
       </p:sp>
       <p:sp>
         <p:nvSpPr>
-          <p:cNvPr id="5" name="Text 3"/>
+          <p:cNvPr id="6" name="Text 4"/>
           <p:cNvSpPr/>
           <p:nvPr/>
         </p:nvSpPr>
@@ -7842,13 +14528,77 @@
       </p:sp>
       <p:sp>
         <p:nvSpPr>
-          <p:cNvPr id="6" name="Text 4"/>
+          <p:cNvPr id="7" name="Shape 5"/>
           <p:cNvSpPr/>
           <p:nvPr/>
         </p:nvSpPr>
         <p:spPr>
           <a:xfrm>
             <a:off x="640080" y="658368"/>
+            <a:ext cx="420624" cy="420624"/>
+          </a:xfrm>
+          <a:prstGeom prst="ellipse">
+            <a:avLst/>
+          </a:prstGeom>
+          <a:solidFill>
+            <a:srgbClr val="0068B7"/>
+          </a:solidFill>
+          <a:ln w="12700">
+            <a:solidFill>
+              <a:srgbClr val="0068B7"/>
+            </a:solidFill>
+            <a:prstDash val="solid"/>
+          </a:ln>
+        </p:spPr>
+      </p:sp>
+      <p:sp>
+        <p:nvSpPr>
+          <p:cNvPr id="8" name="Text 6"/>
+          <p:cNvSpPr/>
+          <p:nvPr/>
+        </p:nvSpPr>
+        <p:spPr>
+          <a:xfrm>
+            <a:off x="640080" y="731520"/>
+            <a:ext cx="420624" cy="164592"/>
+          </a:xfrm>
+          <a:prstGeom prst="rect">
+            <a:avLst/>
+          </a:prstGeom>
+          <a:noFill/>
+          <a:ln/>
+        </p:spPr>
+        <p:txBody>
+          <a:bodyPr wrap="square" lIns="0" tIns="0" rIns="0" bIns="0" rtlCol="0" anchor="ctr"/>
+          <a:lstStyle/>
+          <a:p>
+            <a:pPr algn="ctr" indent="0" marL="0">
+              <a:buNone/>
+            </a:pPr>
+            <a:r>
+              <a:rPr lang="en-US" sz="1100" b="1" dirty="0">
+                <a:solidFill>
+                  <a:srgbClr val="FFFFFF"/>
+                </a:solidFill>
+                <a:latin typeface="Aptos" pitchFamily="34" charset="0"/>
+                <a:ea typeface="Aptos" pitchFamily="34" charset="-122"/>
+                <a:cs typeface="Aptos" pitchFamily="34" charset="-120"/>
+              </a:rPr>
+              <a:t>4</a:t>
+            </a:r>
+            <a:endParaRPr lang="en-US" sz="1100" dirty="0"/>
+          </a:p>
+        </p:txBody>
+      </p:sp>
+      <p:sp>
+        <p:nvSpPr>
+          <p:cNvPr id="9" name="Text 7"/>
+          <p:cNvSpPr/>
+          <p:nvPr/>
+        </p:nvSpPr>
+        <p:spPr>
+          <a:xfrm>
+            <a:off x="640080" y="621792"/>
             <a:ext cx="10881360" cy="566928"/>
           </a:xfrm>
           <a:prstGeom prst="rect">
@@ -7875,7 +14625,7 @@
                 <a:ea typeface="Aptos Display" pitchFamily="34" charset="-122"/>
                 <a:cs typeface="Aptos Display" pitchFamily="34" charset="-120"/>
               </a:rPr>
-              <a:t>Technical Deep Dive Continued</a:t>
+              <a:t>Public Health Example</a:t>
             </a:r>
             <a:endParaRPr lang="en-US" sz="2700" dirty="0"/>
           </a:p>
@@ -7883,32 +14633,178 @@
       </p:sp>
       <p:sp>
         <p:nvSpPr>
-          <p:cNvPr id="7" name="Text 5"/>
-          <p:cNvSpPr/>
-          <p:nvPr/>
-        </p:nvSpPr>
-        <p:spPr>
-          <a:xfrm>
-            <a:off x="822960" y="1325880"/>
-            <a:ext cx="10378440" cy="4800600"/>
-          </a:xfrm>
-          <a:prstGeom prst="rect">
-            <a:avLst/>
-          </a:prstGeom>
-          <a:noFill/>
-          <a:ln/>
-        </p:spPr>
-        <p:txBody>
-          <a:bodyPr wrap="square" lIns="1016" tIns="1016" rIns="1016" bIns="1016" rtlCol="0" anchor="t">
+          <p:cNvPr id="10" name="Text 8"/>
+          <p:cNvSpPr/>
+          <p:nvPr/>
+        </p:nvSpPr>
+        <p:spPr>
+          <a:xfrm>
+            <a:off x="868680" y="1417320"/>
+            <a:ext cx="6675120" cy="4434840"/>
+          </a:xfrm>
+          <a:prstGeom prst="rect">
+            <a:avLst/>
+          </a:prstGeom>
+          <a:noFill/>
+          <a:ln/>
+        </p:spPr>
+        <p:txBody>
+          <a:bodyPr wrap="square" lIns="635" tIns="635" rIns="635" bIns="635" rtlCol="0" anchor="t">
             <a:normAutofit/>
           </a:bodyPr>
           <a:lstStyle/>
           <a:p>
+            <a:r>
+              <a:rPr lang="en-US" sz="1700" dirty="0">
+                <a:solidFill>
+                  <a:srgbClr val="17364A"/>
+                </a:solidFill>
+                <a:latin typeface="Aptos" pitchFamily="34" charset="0"/>
+                <a:ea typeface="Aptos" pitchFamily="34" charset="-122"/>
+                <a:cs typeface="Aptos" pitchFamily="34" charset="-120"/>
+              </a:rPr>
+              <a:t>A public health agency may test a model that identifies incoming case reports likely to require expedited review.</a:t>
+            </a:r>
+            <a:endParaRPr lang="en-US" sz="1700" dirty="0"/>
+          </a:p>
+          <a:p>
+            <a:r>
+              <a:rPr lang="en-US" sz="1700" dirty="0">
+                <a:solidFill>
+                  <a:srgbClr val="17364A"/>
+                </a:solidFill>
+                <a:latin typeface="Aptos" pitchFamily="34" charset="0"/>
+                <a:ea typeface="Aptos" pitchFamily="34" charset="-122"/>
+                <a:cs typeface="Aptos" pitchFamily="34" charset="-120"/>
+              </a:rPr>
+              <a:t>Overall accuracy may be high, but that number alone is not enough.</a:t>
+            </a:r>
+            <a:endParaRPr lang="en-US" sz="1700" dirty="0"/>
+          </a:p>
+          <a:p>
+            <a:r>
+              <a:rPr lang="en-US" sz="1700" dirty="0">
+                <a:solidFill>
+                  <a:srgbClr val="17364A"/>
+                </a:solidFill>
+                <a:latin typeface="Aptos" pitchFamily="34" charset="0"/>
+                <a:ea typeface="Aptos" pitchFamily="34" charset="-122"/>
+                <a:cs typeface="Aptos" pitchFamily="34" charset="-120"/>
+              </a:rPr>
+              <a:t>Staff need to know whether the model misses rare but severe conditions, whether it performs differently across facilities,.</a:t>
+            </a:r>
+            <a:endParaRPr lang="en-US" sz="1700" dirty="0"/>
+          </a:p>
+          <a:p>
+            <a:r>
+              <a:rPr lang="en-US" sz="1700" dirty="0">
+                <a:solidFill>
+                  <a:srgbClr val="17364A"/>
+                </a:solidFill>
+                <a:latin typeface="Aptos" pitchFamily="34" charset="0"/>
+                <a:ea typeface="Aptos" pitchFamily="34" charset="-122"/>
+                <a:cs typeface="Aptos" pitchFamily="34" charset="-120"/>
+              </a:rPr>
+              <a:t>The agency should validate the model on recent local data, review errors with epidemiologists, test the workflow with.</a:t>
+            </a:r>
+            <a:endParaRPr lang="en-US" sz="1700" dirty="0"/>
+          </a:p>
+        </p:txBody>
+      </p:sp>
+      <p:sp>
+        <p:nvSpPr>
+          <p:cNvPr id="11" name="Shape 9"/>
+          <p:cNvSpPr/>
+          <p:nvPr/>
+        </p:nvSpPr>
+        <p:spPr>
+          <a:xfrm>
+            <a:off x="7909560" y="1417320"/>
+            <a:ext cx="3154680" cy="1828800"/>
+          </a:xfrm>
+          <a:prstGeom prst="roundRect">
+            <a:avLst>
+              <a:gd name="adj" fmla="val 6000"/>
+            </a:avLst>
+          </a:prstGeom>
+          <a:solidFill>
+            <a:srgbClr val="EEF8ED"/>
+          </a:solidFill>
+          <a:ln w="12700">
+            <a:solidFill>
+              <a:srgbClr val="B9D7E6"/>
+            </a:solidFill>
+            <a:prstDash val="solid"/>
+          </a:ln>
+        </p:spPr>
+      </p:sp>
+      <p:sp>
+        <p:nvSpPr>
+          <p:cNvPr id="12" name="Text 10"/>
+          <p:cNvSpPr/>
+          <p:nvPr/>
+        </p:nvSpPr>
+        <p:spPr>
+          <a:xfrm>
+            <a:off x="8074152" y="1563624"/>
+            <a:ext cx="2825496" cy="201168"/>
+          </a:xfrm>
+          <a:prstGeom prst="rect">
+            <a:avLst/>
+          </a:prstGeom>
+          <a:noFill/>
+          <a:ln/>
+        </p:spPr>
+        <p:txBody>
+          <a:bodyPr wrap="square" lIns="0" tIns="0" rIns="0" bIns="0" rtlCol="0" anchor="ctr"/>
+          <a:lstStyle/>
+          <a:p>
             <a:pPr indent="0" marL="0">
               <a:buNone/>
             </a:pPr>
             <a:r>
-              <a:rPr lang="en-US" sz="1420" dirty="0">
+              <a:rPr lang="en-US" sz="950" b="1" dirty="0">
+                <a:solidFill>
+                  <a:srgbClr val="0068B7"/>
+                </a:solidFill>
+                <a:latin typeface="Aptos" pitchFamily="34" charset="0"/>
+                <a:ea typeface="Aptos" pitchFamily="34" charset="-122"/>
+                <a:cs typeface="Aptos" pitchFamily="34" charset="-120"/>
+              </a:rPr>
+              <a:t>Key idea</a:t>
+            </a:r>
+            <a:endParaRPr lang="en-US" sz="950" dirty="0"/>
+          </a:p>
+        </p:txBody>
+      </p:sp>
+      <p:sp>
+        <p:nvSpPr>
+          <p:cNvPr id="13" name="Text 11"/>
+          <p:cNvSpPr/>
+          <p:nvPr/>
+        </p:nvSpPr>
+        <p:spPr>
+          <a:xfrm>
+            <a:off x="8074152" y="1856232"/>
+            <a:ext cx="2825496" cy="1261872"/>
+          </a:xfrm>
+          <a:prstGeom prst="rect">
+            <a:avLst/>
+          </a:prstGeom>
+          <a:noFill/>
+          <a:ln/>
+        </p:spPr>
+        <p:txBody>
+          <a:bodyPr wrap="square" lIns="0" tIns="0" rIns="0" bIns="0" rtlCol="0" anchor="t">
+            <a:normAutofit/>
+          </a:bodyPr>
+          <a:lstStyle/>
+          <a:p>
+            <a:pPr indent="0" marL="0">
+              <a:buNone/>
+            </a:pPr>
+            <a:r>
+              <a:rPr lang="en-US" sz="1250" dirty="0">
                 <a:solidFill>
                   <a:srgbClr val="17364A"/>
                 </a:solidFill>
@@ -7916,9 +14812,116 @@
                 <a:ea typeface="Aptos" pitchFamily="34" charset="-122"/>
                 <a:cs typeface="Aptos" pitchFamily="34" charset="-120"/>
               </a:rPr>
-              <a:t>Workflow validation examines whether the AI output is understandable, accessible, timely, actionable, and used as intended. A model can be statistically strong but operationally weak if staff do not trust it, cannot see supporting data, cannot override it, or receive alerts too late. Workflow validation should include usability testing, training, documentation, and feedback loops. Post-deployment validation should be planned before launch. Agencies should define monitoring indicators, review frequency, escalation triggers, and authority to pause use. Monitoring should include performance drift, subgroup changes, user override rates, incident reports, data feed changes, and public health outcomes where appropriate.</a:t>
-            </a:r>
-            <a:endParaRPr lang="en-US" sz="1420" dirty="0"/>
+              <a:t>A public health agency may test a model that identifies incoming case reports likely to require expedited review.</a:t>
+            </a:r>
+            <a:endParaRPr lang="en-US" sz="1250" dirty="0"/>
+          </a:p>
+        </p:txBody>
+      </p:sp>
+      <p:sp>
+        <p:nvSpPr>
+          <p:cNvPr id="14" name="Shape 12"/>
+          <p:cNvSpPr/>
+          <p:nvPr/>
+        </p:nvSpPr>
+        <p:spPr>
+          <a:xfrm>
+            <a:off x="7909560" y="3520440"/>
+            <a:ext cx="3154680" cy="1737360"/>
+          </a:xfrm>
+          <a:prstGeom prst="roundRect">
+            <a:avLst>
+              <a:gd name="adj" fmla="val 6316"/>
+            </a:avLst>
+          </a:prstGeom>
+          <a:solidFill>
+            <a:srgbClr val="EAF6F8"/>
+          </a:solidFill>
+          <a:ln w="12700">
+            <a:solidFill>
+              <a:srgbClr val="B9D7E6"/>
+            </a:solidFill>
+            <a:prstDash val="solid"/>
+          </a:ln>
+        </p:spPr>
+      </p:sp>
+      <p:sp>
+        <p:nvSpPr>
+          <p:cNvPr id="15" name="Text 13"/>
+          <p:cNvSpPr/>
+          <p:nvPr/>
+        </p:nvSpPr>
+        <p:spPr>
+          <a:xfrm>
+            <a:off x="8074152" y="3666744"/>
+            <a:ext cx="2825496" cy="201168"/>
+          </a:xfrm>
+          <a:prstGeom prst="rect">
+            <a:avLst/>
+          </a:prstGeom>
+          <a:noFill/>
+          <a:ln/>
+        </p:spPr>
+        <p:txBody>
+          <a:bodyPr wrap="square" lIns="0" tIns="0" rIns="0" bIns="0" rtlCol="0" anchor="ctr"/>
+          <a:lstStyle/>
+          <a:p>
+            <a:pPr indent="0" marL="0">
+              <a:buNone/>
+            </a:pPr>
+            <a:r>
+              <a:rPr lang="en-US" sz="950" b="1" dirty="0">
+                <a:solidFill>
+                  <a:srgbClr val="0068B7"/>
+                </a:solidFill>
+                <a:latin typeface="Aptos" pitchFamily="34" charset="0"/>
+                <a:ea typeface="Aptos" pitchFamily="34" charset="-122"/>
+                <a:cs typeface="Aptos" pitchFamily="34" charset="-120"/>
+              </a:rPr>
+              <a:t>Use this for</a:t>
+            </a:r>
+            <a:endParaRPr lang="en-US" sz="950" dirty="0"/>
+          </a:p>
+        </p:txBody>
+      </p:sp>
+      <p:sp>
+        <p:nvSpPr>
+          <p:cNvPr id="16" name="Text 14"/>
+          <p:cNvSpPr/>
+          <p:nvPr/>
+        </p:nvSpPr>
+        <p:spPr>
+          <a:xfrm>
+            <a:off x="8074152" y="3959352"/>
+            <a:ext cx="2825496" cy="1170432"/>
+          </a:xfrm>
+          <a:prstGeom prst="rect">
+            <a:avLst/>
+          </a:prstGeom>
+          <a:noFill/>
+          <a:ln/>
+        </p:spPr>
+        <p:txBody>
+          <a:bodyPr wrap="square" lIns="0" tIns="0" rIns="0" bIns="0" rtlCol="0" anchor="t">
+            <a:normAutofit/>
+          </a:bodyPr>
+          <a:lstStyle/>
+          <a:p>
+            <a:pPr indent="0" marL="0">
+              <a:buNone/>
+            </a:pPr>
+            <a:r>
+              <a:rPr lang="en-US" sz="1250" dirty="0">
+                <a:solidFill>
+                  <a:srgbClr val="17364A"/>
+                </a:solidFill>
+                <a:latin typeface="Aptos" pitchFamily="34" charset="0"/>
+                <a:ea typeface="Aptos" pitchFamily="34" charset="-122"/>
+                <a:cs typeface="Aptos" pitchFamily="34" charset="-120"/>
+              </a:rPr>
+              <a:t>Connect the concept to public health decisions, safeguards, documentation, or implementation work.</a:t>
+            </a:r>
+            <a:endParaRPr lang="en-US" sz="1250" dirty="0"/>
           </a:p>
         </p:txBody>
       </p:sp>

--- a/downloads/presentations/modules/lesson-07-advanced-model-validation-and-evaluation-for-public-health-ai.pptx
+++ b/downloads/presentations/modules/lesson-07-advanced-model-validation-and-evaluation-for-public-health-ai.pptx
@@ -2999,6 +2999,45 @@
           </a:p>
         </p:txBody>
       </p:sp>
+      <p:sp>
+        <p:nvSpPr>
+          <p:cNvPr id="8" name="Text 5"/>
+          <p:cNvSpPr/>
+          <p:nvPr/>
+        </p:nvSpPr>
+        <p:spPr>
+          <a:xfrm>
+            <a:off x="11137392" y="6510528"/>
+            <a:ext cx="411480" cy="201168"/>
+          </a:xfrm>
+          <a:prstGeom prst="rect">
+            <a:avLst/>
+          </a:prstGeom>
+          <a:noFill/>
+          <a:ln/>
+        </p:spPr>
+        <p:txBody>
+          <a:bodyPr wrap="square" lIns="0" tIns="0" rIns="0" bIns="0" rtlCol="0" anchor="ctr"/>
+          <a:lstStyle/>
+          <a:p>
+            <a:pPr algn="r" indent="0" marL="0">
+              <a:buNone/>
+            </a:pPr>
+            <a:r>
+              <a:rPr lang="en-US" sz="900" dirty="0">
+                <a:solidFill>
+                  <a:srgbClr val="5F7181"/>
+                </a:solidFill>
+                <a:latin typeface="Aptos" pitchFamily="34" charset="0"/>
+                <a:ea typeface="Aptos" pitchFamily="34" charset="-122"/>
+                <a:cs typeface="Aptos" pitchFamily="34" charset="-120"/>
+              </a:rPr>
+              <a:t>1</a:t>
+            </a:r>
+            <a:endParaRPr lang="en-US" sz="900" dirty="0"/>
+          </a:p>
+        </p:txBody>
+      </p:sp>
     </p:spTree>
   </p:cSld>
   <p:clrMapOvr>
@@ -3192,7 +3231,7 @@
                 <a:ea typeface="Aptos" pitchFamily="34" charset="-122"/>
                 <a:cs typeface="Aptos" pitchFamily="34" charset="-120"/>
               </a:rPr>
-              <a:t>© Paula Soper</a:t>
+              <a:t>Â© Paula Soper</a:t>
             </a:r>
             <a:endParaRPr lang="en-US" sz="800" dirty="0"/>
           </a:p>
@@ -3200,7 +3239,46 @@
       </p:sp>
       <p:sp>
         <p:nvSpPr>
-          <p:cNvPr id="7" name="Shape 5"/>
+          <p:cNvPr id="7" name="Text 5"/>
+          <p:cNvSpPr/>
+          <p:nvPr/>
+        </p:nvSpPr>
+        <p:spPr>
+          <a:xfrm>
+            <a:off x="11137392" y="6510528"/>
+            <a:ext cx="411480" cy="201168"/>
+          </a:xfrm>
+          <a:prstGeom prst="rect">
+            <a:avLst/>
+          </a:prstGeom>
+          <a:noFill/>
+          <a:ln/>
+        </p:spPr>
+        <p:txBody>
+          <a:bodyPr wrap="square" lIns="0" tIns="0" rIns="0" bIns="0" rtlCol="0" anchor="ctr"/>
+          <a:lstStyle/>
+          <a:p>
+            <a:pPr algn="r" indent="0" marL="0">
+              <a:buNone/>
+            </a:pPr>
+            <a:r>
+              <a:rPr lang="en-US" sz="900" dirty="0">
+                <a:solidFill>
+                  <a:srgbClr val="5F7181"/>
+                </a:solidFill>
+                <a:latin typeface="Aptos" pitchFamily="34" charset="0"/>
+                <a:ea typeface="Aptos" pitchFamily="34" charset="-122"/>
+                <a:cs typeface="Aptos" pitchFamily="34" charset="-120"/>
+              </a:rPr>
+              <a:t>10</a:t>
+            </a:r>
+            <a:endParaRPr lang="en-US" sz="900" dirty="0"/>
+          </a:p>
+        </p:txBody>
+      </p:sp>
+      <p:sp>
+        <p:nvSpPr>
+          <p:cNvPr id="8" name="Shape 6"/>
           <p:cNvSpPr/>
           <p:nvPr/>
         </p:nvSpPr>
@@ -3225,7 +3303,7 @@
       </p:sp>
       <p:sp>
         <p:nvSpPr>
-          <p:cNvPr id="8" name="Text 6"/>
+          <p:cNvPr id="9" name="Text 7"/>
           <p:cNvSpPr/>
           <p:nvPr/>
         </p:nvSpPr>
@@ -3264,14 +3342,14 @@
       </p:sp>
       <p:sp>
         <p:nvSpPr>
-          <p:cNvPr id="9" name="Text 7"/>
+          <p:cNvPr id="10" name="Text 8"/>
           <p:cNvSpPr/>
           <p:nvPr/>
         </p:nvSpPr>
         <p:spPr>
           <a:xfrm>
             <a:off x="640080" y="621792"/>
-            <a:ext cx="10881360" cy="566928"/>
+            <a:ext cx="10881360" cy="713232"/>
           </a:xfrm>
           <a:prstGeom prst="rect">
             <a:avLst/>
@@ -3289,7 +3367,7 @@
               <a:buNone/>
             </a:pPr>
             <a:r>
-              <a:rPr lang="en-US" sz="2700" b="1" dirty="0">
+              <a:rPr lang="en-US" sz="3400" b="1" dirty="0">
                 <a:solidFill>
                   <a:srgbClr val="003A63"/>
                 </a:solidFill>
@@ -3299,20 +3377,20 @@
               </a:rPr>
               <a:t>Technical Deep Dive</a:t>
             </a:r>
-            <a:endParaRPr lang="en-US" sz="2700" dirty="0"/>
-          </a:p>
-        </p:txBody>
-      </p:sp>
-      <p:sp>
-        <p:nvSpPr>
-          <p:cNvPr id="10" name="Text 8"/>
-          <p:cNvSpPr/>
-          <p:nvPr/>
-        </p:nvSpPr>
-        <p:spPr>
-          <a:xfrm>
-            <a:off x="868680" y="1417320"/>
-            <a:ext cx="6675120" cy="4434840"/>
+            <a:endParaRPr lang="en-US" sz="3400" dirty="0"/>
+          </a:p>
+        </p:txBody>
+      </p:sp>
+      <p:sp>
+        <p:nvSpPr>
+          <p:cNvPr id="11" name="Text 9"/>
+          <p:cNvSpPr/>
+          <p:nvPr/>
+        </p:nvSpPr>
+        <p:spPr>
+          <a:xfrm>
+            <a:off x="868680" y="1508760"/>
+            <a:ext cx="6537960" cy="4160520"/>
           </a:xfrm>
           <a:prstGeom prst="rect">
             <a:avLst/>
@@ -3327,7 +3405,7 @@
           <a:lstStyle/>
           <a:p>
             <a:r>
-              <a:rPr lang="en-US" sz="1700" dirty="0">
+              <a:rPr lang="en-US" sz="2100" dirty="0">
                 <a:solidFill>
                   <a:srgbClr val="17364A"/>
                 </a:solidFill>
@@ -3337,11 +3415,11 @@
               </a:rPr>
               <a:t>Metric selection should start with the public health consequence.</a:t>
             </a:r>
-            <a:endParaRPr lang="en-US" sz="1700" dirty="0"/>
-          </a:p>
-          <a:p>
-            <a:r>
-              <a:rPr lang="en-US" sz="1700" dirty="0">
+            <a:endParaRPr lang="en-US" sz="2100" dirty="0"/>
+          </a:p>
+          <a:p>
+            <a:r>
+              <a:rPr lang="en-US" sz="2100" dirty="0">
                 <a:solidFill>
                   <a:srgbClr val="17364A"/>
                 </a:solidFill>
@@ -3351,11 +3429,11 @@
               </a:rPr>
               <a:t>Sensitivity may be prioritized when missing a true event is dangerous.</a:t>
             </a:r>
-            <a:endParaRPr lang="en-US" sz="1700" dirty="0"/>
-          </a:p>
-          <a:p>
-            <a:r>
-              <a:rPr lang="en-US" sz="1700" dirty="0">
+            <a:endParaRPr lang="en-US" sz="2100" dirty="0"/>
+          </a:p>
+          <a:p>
+            <a:r>
+              <a:rPr lang="en-US" sz="2100" dirty="0">
                 <a:solidFill>
                   <a:srgbClr val="17364A"/>
                 </a:solidFill>
@@ -3363,29 +3441,15 @@
                 <a:ea typeface="Aptos" pitchFamily="34" charset="-122"/>
                 <a:cs typeface="Aptos" pitchFamily="34" charset="-120"/>
               </a:rPr>
-              <a:t>Specificity may be prioritized when false positives create substantial burden or unnecessary intervention.</a:t>
-            </a:r>
-            <a:endParaRPr lang="en-US" sz="1700" dirty="0"/>
-          </a:p>
-          <a:p>
-            <a:r>
-              <a:rPr lang="en-US" sz="1700" dirty="0">
-                <a:solidFill>
-                  <a:srgbClr val="17364A"/>
-                </a:solidFill>
-                <a:latin typeface="Aptos" pitchFamily="34" charset="0"/>
-                <a:ea typeface="Aptos" pitchFamily="34" charset="-122"/>
-                <a:cs typeface="Aptos" pitchFamily="34" charset="-120"/>
-              </a:rPr>
-              <a:t>Precision and positive predictive value matter when staff act on positive flags.</a:t>
-            </a:r>
-            <a:endParaRPr lang="en-US" sz="1700" dirty="0"/>
-          </a:p>
-        </p:txBody>
-      </p:sp>
-      <p:sp>
-        <p:nvSpPr>
-          <p:cNvPr id="11" name="Shape 9"/>
+              <a:t>Specificity may be prioritized when false positives create substantial burden or unnecessary.</a:t>
+            </a:r>
+            <a:endParaRPr lang="en-US" sz="2100" dirty="0"/>
+          </a:p>
+        </p:txBody>
+      </p:sp>
+      <p:sp>
+        <p:nvSpPr>
+          <p:cNvPr id="12" name="Shape 10"/>
           <p:cNvSpPr/>
           <p:nvPr/>
         </p:nvSpPr>
@@ -3412,14 +3476,14 @@
       </p:sp>
       <p:sp>
         <p:nvSpPr>
-          <p:cNvPr id="12" name="Text 10"/>
+          <p:cNvPr id="13" name="Text 11"/>
           <p:cNvSpPr/>
           <p:nvPr/>
         </p:nvSpPr>
         <p:spPr>
           <a:xfrm>
             <a:off x="8074152" y="1563624"/>
-            <a:ext cx="2825496" cy="201168"/>
+            <a:ext cx="2825496" cy="256032"/>
           </a:xfrm>
           <a:prstGeom prst="rect">
             <a:avLst/>
@@ -3435,7 +3499,7 @@
               <a:buNone/>
             </a:pPr>
             <a:r>
-              <a:rPr lang="en-US" sz="950" b="1" dirty="0">
+              <a:rPr lang="en-US" sz="1300" b="1" dirty="0">
                 <a:solidFill>
                   <a:srgbClr val="0068B7"/>
                 </a:solidFill>
@@ -3445,20 +3509,20 @@
               </a:rPr>
               <a:t>Key idea</a:t>
             </a:r>
-            <a:endParaRPr lang="en-US" sz="950" dirty="0"/>
-          </a:p>
-        </p:txBody>
-      </p:sp>
-      <p:sp>
-        <p:nvSpPr>
-          <p:cNvPr id="13" name="Text 11"/>
-          <p:cNvSpPr/>
-          <p:nvPr/>
-        </p:nvSpPr>
-        <p:spPr>
-          <a:xfrm>
-            <a:off x="8074152" y="1856232"/>
-            <a:ext cx="2825496" cy="1261872"/>
+            <a:endParaRPr lang="en-US" sz="1300" dirty="0"/>
+          </a:p>
+        </p:txBody>
+      </p:sp>
+      <p:sp>
+        <p:nvSpPr>
+          <p:cNvPr id="14" name="Text 12"/>
+          <p:cNvSpPr/>
+          <p:nvPr/>
+        </p:nvSpPr>
+        <p:spPr>
+          <a:xfrm>
+            <a:off x="8074152" y="1920240"/>
+            <a:ext cx="2825496" cy="1188720"/>
           </a:xfrm>
           <a:prstGeom prst="rect">
             <a:avLst/>
@@ -3476,7 +3540,7 @@
               <a:buNone/>
             </a:pPr>
             <a:r>
-              <a:rPr lang="en-US" sz="1250" dirty="0">
+              <a:rPr lang="en-US" sz="1550" dirty="0">
                 <a:solidFill>
                   <a:srgbClr val="17364A"/>
                 </a:solidFill>
@@ -3486,13 +3550,13 @@
               </a:rPr>
               <a:t>Metric selection should start with the public health consequence.</a:t>
             </a:r>
-            <a:endParaRPr lang="en-US" sz="1250" dirty="0"/>
-          </a:p>
-        </p:txBody>
-      </p:sp>
-      <p:sp>
-        <p:nvSpPr>
-          <p:cNvPr id="14" name="Shape 12"/>
+            <a:endParaRPr lang="en-US" sz="1550" dirty="0"/>
+          </a:p>
+        </p:txBody>
+      </p:sp>
+      <p:sp>
+        <p:nvSpPr>
+          <p:cNvPr id="15" name="Shape 13"/>
           <p:cNvSpPr/>
           <p:nvPr/>
         </p:nvSpPr>
@@ -3519,14 +3583,14 @@
       </p:sp>
       <p:sp>
         <p:nvSpPr>
-          <p:cNvPr id="15" name="Text 13"/>
+          <p:cNvPr id="16" name="Text 14"/>
           <p:cNvSpPr/>
           <p:nvPr/>
         </p:nvSpPr>
         <p:spPr>
           <a:xfrm>
             <a:off x="8074152" y="3666744"/>
-            <a:ext cx="2825496" cy="201168"/>
+            <a:ext cx="2825496" cy="256032"/>
           </a:xfrm>
           <a:prstGeom prst="rect">
             <a:avLst/>
@@ -3542,7 +3606,7 @@
               <a:buNone/>
             </a:pPr>
             <a:r>
-              <a:rPr lang="en-US" sz="950" b="1" dirty="0">
+              <a:rPr lang="en-US" sz="1300" b="1" dirty="0">
                 <a:solidFill>
                   <a:srgbClr val="0068B7"/>
                 </a:solidFill>
@@ -3552,20 +3616,20 @@
               </a:rPr>
               <a:t>Use this for</a:t>
             </a:r>
-            <a:endParaRPr lang="en-US" sz="950" dirty="0"/>
-          </a:p>
-        </p:txBody>
-      </p:sp>
-      <p:sp>
-        <p:nvSpPr>
-          <p:cNvPr id="16" name="Text 14"/>
-          <p:cNvSpPr/>
-          <p:nvPr/>
-        </p:nvSpPr>
-        <p:spPr>
-          <a:xfrm>
-            <a:off x="8074152" y="3959352"/>
-            <a:ext cx="2825496" cy="1170432"/>
+            <a:endParaRPr lang="en-US" sz="1300" dirty="0"/>
+          </a:p>
+        </p:txBody>
+      </p:sp>
+      <p:sp>
+        <p:nvSpPr>
+          <p:cNvPr id="17" name="Text 15"/>
+          <p:cNvSpPr/>
+          <p:nvPr/>
+        </p:nvSpPr>
+        <p:spPr>
+          <a:xfrm>
+            <a:off x="8074152" y="4023360"/>
+            <a:ext cx="2825496" cy="1097280"/>
           </a:xfrm>
           <a:prstGeom prst="rect">
             <a:avLst/>
@@ -3583,7 +3647,7 @@
               <a:buNone/>
             </a:pPr>
             <a:r>
-              <a:rPr lang="en-US" sz="1250" dirty="0">
+              <a:rPr lang="en-US" sz="1550" dirty="0">
                 <a:solidFill>
                   <a:srgbClr val="17364A"/>
                 </a:solidFill>
@@ -3593,7 +3657,7 @@
               </a:rPr>
               <a:t>Connect the concept to public health decisions, safeguards, documentation, or implementation work.</a:t>
             </a:r>
-            <a:endParaRPr lang="en-US" sz="1250" dirty="0"/>
+            <a:endParaRPr lang="en-US" sz="1550" dirty="0"/>
           </a:p>
         </p:txBody>
       </p:sp>
@@ -3790,7 +3854,7 @@
                 <a:ea typeface="Aptos" pitchFamily="34" charset="-122"/>
                 <a:cs typeface="Aptos" pitchFamily="34" charset="-120"/>
               </a:rPr>
-              <a:t>© Paula Soper</a:t>
+              <a:t>Â© Paula Soper</a:t>
             </a:r>
             <a:endParaRPr lang="en-US" sz="800" dirty="0"/>
           </a:p>
@@ -3804,8 +3868,47 @@
         </p:nvSpPr>
         <p:spPr>
           <a:xfrm>
+            <a:off x="11137392" y="6510528"/>
+            <a:ext cx="411480" cy="201168"/>
+          </a:xfrm>
+          <a:prstGeom prst="rect">
+            <a:avLst/>
+          </a:prstGeom>
+          <a:noFill/>
+          <a:ln/>
+        </p:spPr>
+        <p:txBody>
+          <a:bodyPr wrap="square" lIns="0" tIns="0" rIns="0" bIns="0" rtlCol="0" anchor="ctr"/>
+          <a:lstStyle/>
+          <a:p>
+            <a:pPr algn="r" indent="0" marL="0">
+              <a:buNone/>
+            </a:pPr>
+            <a:r>
+              <a:rPr lang="en-US" sz="900" dirty="0">
+                <a:solidFill>
+                  <a:srgbClr val="5F7181"/>
+                </a:solidFill>
+                <a:latin typeface="Aptos" pitchFamily="34" charset="0"/>
+                <a:ea typeface="Aptos" pitchFamily="34" charset="-122"/>
+                <a:cs typeface="Aptos" pitchFamily="34" charset="-120"/>
+              </a:rPr>
+              <a:t>11</a:t>
+            </a:r>
+            <a:endParaRPr lang="en-US" sz="900" dirty="0"/>
+          </a:p>
+        </p:txBody>
+      </p:sp>
+      <p:sp>
+        <p:nvSpPr>
+          <p:cNvPr id="8" name="Text 6"/>
+          <p:cNvSpPr/>
+          <p:nvPr/>
+        </p:nvSpPr>
+        <p:spPr>
+          <a:xfrm>
             <a:off x="640080" y="658368"/>
-            <a:ext cx="10881360" cy="566928"/>
+            <a:ext cx="10881360" cy="713232"/>
           </a:xfrm>
           <a:prstGeom prst="rect">
             <a:avLst/>
@@ -3823,7 +3926,7 @@
               <a:buNone/>
             </a:pPr>
             <a:r>
-              <a:rPr lang="en-US" sz="2700" b="1" dirty="0">
+              <a:rPr lang="en-US" sz="3400" b="1" dirty="0">
                 <a:solidFill>
                   <a:srgbClr val="003A63"/>
                 </a:solidFill>
@@ -3833,20 +3936,20 @@
               </a:rPr>
               <a:t>Technical Deep Dive Continued</a:t>
             </a:r>
-            <a:endParaRPr lang="en-US" sz="2700" dirty="0"/>
-          </a:p>
-        </p:txBody>
-      </p:sp>
-      <p:sp>
-        <p:nvSpPr>
-          <p:cNvPr id="8" name="Text 6"/>
-          <p:cNvSpPr/>
-          <p:nvPr/>
-        </p:nvSpPr>
-        <p:spPr>
-          <a:xfrm>
-            <a:off x="868680" y="1417320"/>
-            <a:ext cx="6675120" cy="4434840"/>
+            <a:endParaRPr lang="en-US" sz="3400" dirty="0"/>
+          </a:p>
+        </p:txBody>
+      </p:sp>
+      <p:sp>
+        <p:nvSpPr>
+          <p:cNvPr id="9" name="Text 7"/>
+          <p:cNvSpPr/>
+          <p:nvPr/>
+        </p:nvSpPr>
+        <p:spPr>
+          <a:xfrm>
+            <a:off x="868680" y="1508760"/>
+            <a:ext cx="6537960" cy="4160520"/>
           </a:xfrm>
           <a:prstGeom prst="rect">
             <a:avLst/>
@@ -3861,7 +3964,7 @@
           <a:lstStyle/>
           <a:p>
             <a:r>
-              <a:rPr lang="en-US" sz="1700" dirty="0">
+              <a:rPr lang="en-US" sz="2100" dirty="0">
                 <a:solidFill>
                   <a:srgbClr val="17364A"/>
                 </a:solidFill>
@@ -3869,13 +3972,13 @@
                 <a:ea typeface="Aptos" pitchFamily="34" charset="-122"/>
                 <a:cs typeface="Aptos" pitchFamily="34" charset="-120"/>
               </a:rPr>
-              <a:t>Workflow validation examines whether the AI output is understandable, accessible, timely, actionable, and used as intended.</a:t>
-            </a:r>
-            <a:endParaRPr lang="en-US" sz="1700" dirty="0"/>
-          </a:p>
-          <a:p>
-            <a:r>
-              <a:rPr lang="en-US" sz="1700" dirty="0">
+              <a:t>Workflow validation examines whether the AI output is understandable, accessible, timely, actionable,.</a:t>
+            </a:r>
+            <a:endParaRPr lang="en-US" sz="2100" dirty="0"/>
+          </a:p>
+          <a:p>
+            <a:r>
+              <a:rPr lang="en-US" sz="2100" dirty="0">
                 <a:solidFill>
                   <a:srgbClr val="17364A"/>
                 </a:solidFill>
@@ -3883,13 +3986,13 @@
                 <a:ea typeface="Aptos" pitchFamily="34" charset="-122"/>
                 <a:cs typeface="Aptos" pitchFamily="34" charset="-120"/>
               </a:rPr>
-              <a:t>A model can be statistically strong but operationally weak if staff do not trust it, cannot see supporting data, cannot.</a:t>
-            </a:r>
-            <a:endParaRPr lang="en-US" sz="1700" dirty="0"/>
-          </a:p>
-          <a:p>
-            <a:r>
-              <a:rPr lang="en-US" sz="1700" dirty="0">
+              <a:t>A model can be statistically strong but operationally weak if staff do not trust it, cannot see.</a:t>
+            </a:r>
+            <a:endParaRPr lang="en-US" sz="2100" dirty="0"/>
+          </a:p>
+          <a:p>
+            <a:r>
+              <a:rPr lang="en-US" sz="2100" dirty="0">
                 <a:solidFill>
                   <a:srgbClr val="17364A"/>
                 </a:solidFill>
@@ -3899,27 +4002,13 @@
               </a:rPr>
               <a:t>Workflow validation should include usability testing, training, documentation, and feedback loops.</a:t>
             </a:r>
-            <a:endParaRPr lang="en-US" sz="1700" dirty="0"/>
-          </a:p>
-          <a:p>
-            <a:r>
-              <a:rPr lang="en-US" sz="1700" dirty="0">
-                <a:solidFill>
-                  <a:srgbClr val="17364A"/>
-                </a:solidFill>
-                <a:latin typeface="Aptos" pitchFamily="34" charset="0"/>
-                <a:ea typeface="Aptos" pitchFamily="34" charset="-122"/>
-                <a:cs typeface="Aptos" pitchFamily="34" charset="-120"/>
-              </a:rPr>
-              <a:t>Post-deployment validation should be planned before launch.</a:t>
-            </a:r>
-            <a:endParaRPr lang="en-US" sz="1700" dirty="0"/>
-          </a:p>
-        </p:txBody>
-      </p:sp>
-      <p:sp>
-        <p:nvSpPr>
-          <p:cNvPr id="9" name="Shape 7"/>
+            <a:endParaRPr lang="en-US" sz="2100" dirty="0"/>
+          </a:p>
+        </p:txBody>
+      </p:sp>
+      <p:sp>
+        <p:nvSpPr>
+          <p:cNvPr id="10" name="Shape 8"/>
           <p:cNvSpPr/>
           <p:nvPr/>
         </p:nvSpPr>
@@ -3946,14 +4035,14 @@
       </p:sp>
       <p:sp>
         <p:nvSpPr>
-          <p:cNvPr id="10" name="Text 8"/>
+          <p:cNvPr id="11" name="Text 9"/>
           <p:cNvSpPr/>
           <p:nvPr/>
         </p:nvSpPr>
         <p:spPr>
           <a:xfrm>
             <a:off x="8074152" y="1563624"/>
-            <a:ext cx="2825496" cy="201168"/>
+            <a:ext cx="2825496" cy="256032"/>
           </a:xfrm>
           <a:prstGeom prst="rect">
             <a:avLst/>
@@ -3969,7 +4058,7 @@
               <a:buNone/>
             </a:pPr>
             <a:r>
-              <a:rPr lang="en-US" sz="950" b="1" dirty="0">
+              <a:rPr lang="en-US" sz="1300" b="1" dirty="0">
                 <a:solidFill>
                   <a:srgbClr val="0068B7"/>
                 </a:solidFill>
@@ -3979,20 +4068,20 @@
               </a:rPr>
               <a:t>Key idea</a:t>
             </a:r>
-            <a:endParaRPr lang="en-US" sz="950" dirty="0"/>
-          </a:p>
-        </p:txBody>
-      </p:sp>
-      <p:sp>
-        <p:nvSpPr>
-          <p:cNvPr id="11" name="Text 9"/>
-          <p:cNvSpPr/>
-          <p:nvPr/>
-        </p:nvSpPr>
-        <p:spPr>
-          <a:xfrm>
-            <a:off x="8074152" y="1856232"/>
-            <a:ext cx="2825496" cy="1261872"/>
+            <a:endParaRPr lang="en-US" sz="1300" dirty="0"/>
+          </a:p>
+        </p:txBody>
+      </p:sp>
+      <p:sp>
+        <p:nvSpPr>
+          <p:cNvPr id="12" name="Text 10"/>
+          <p:cNvSpPr/>
+          <p:nvPr/>
+        </p:nvSpPr>
+        <p:spPr>
+          <a:xfrm>
+            <a:off x="8074152" y="1920240"/>
+            <a:ext cx="2825496" cy="1188720"/>
           </a:xfrm>
           <a:prstGeom prst="rect">
             <a:avLst/>
@@ -4010,7 +4099,7 @@
               <a:buNone/>
             </a:pPr>
             <a:r>
-              <a:rPr lang="en-US" sz="1250" dirty="0">
+              <a:rPr lang="en-US" sz="1550" dirty="0">
                 <a:solidFill>
                   <a:srgbClr val="17364A"/>
                 </a:solidFill>
@@ -4018,15 +4107,15 @@
                 <a:ea typeface="Aptos" pitchFamily="34" charset="-122"/>
                 <a:cs typeface="Aptos" pitchFamily="34" charset="-120"/>
               </a:rPr>
-              <a:t>Workflow validation examines whether the AI output is understandable, accessible, timely, actionable, and used as intended.</a:t>
-            </a:r>
-            <a:endParaRPr lang="en-US" sz="1250" dirty="0"/>
-          </a:p>
-        </p:txBody>
-      </p:sp>
-      <p:sp>
-        <p:nvSpPr>
-          <p:cNvPr id="12" name="Shape 10"/>
+              <a:t>Workflow validation examines whether the AI output is understandable, accessible, timely, actionable,.</a:t>
+            </a:r>
+            <a:endParaRPr lang="en-US" sz="1550" dirty="0"/>
+          </a:p>
+        </p:txBody>
+      </p:sp>
+      <p:sp>
+        <p:nvSpPr>
+          <p:cNvPr id="13" name="Shape 11"/>
           <p:cNvSpPr/>
           <p:nvPr/>
         </p:nvSpPr>
@@ -4053,14 +4142,14 @@
       </p:sp>
       <p:sp>
         <p:nvSpPr>
-          <p:cNvPr id="13" name="Text 11"/>
+          <p:cNvPr id="14" name="Text 12"/>
           <p:cNvSpPr/>
           <p:nvPr/>
         </p:nvSpPr>
         <p:spPr>
           <a:xfrm>
             <a:off x="8074152" y="3666744"/>
-            <a:ext cx="2825496" cy="201168"/>
+            <a:ext cx="2825496" cy="256032"/>
           </a:xfrm>
           <a:prstGeom prst="rect">
             <a:avLst/>
@@ -4076,7 +4165,7 @@
               <a:buNone/>
             </a:pPr>
             <a:r>
-              <a:rPr lang="en-US" sz="950" b="1" dirty="0">
+              <a:rPr lang="en-US" sz="1300" b="1" dirty="0">
                 <a:solidFill>
                   <a:srgbClr val="0068B7"/>
                 </a:solidFill>
@@ -4086,20 +4175,20 @@
               </a:rPr>
               <a:t>Use this for</a:t>
             </a:r>
-            <a:endParaRPr lang="en-US" sz="950" dirty="0"/>
-          </a:p>
-        </p:txBody>
-      </p:sp>
-      <p:sp>
-        <p:nvSpPr>
-          <p:cNvPr id="14" name="Text 12"/>
-          <p:cNvSpPr/>
-          <p:nvPr/>
-        </p:nvSpPr>
-        <p:spPr>
-          <a:xfrm>
-            <a:off x="8074152" y="3959352"/>
-            <a:ext cx="2825496" cy="1170432"/>
+            <a:endParaRPr lang="en-US" sz="1300" dirty="0"/>
+          </a:p>
+        </p:txBody>
+      </p:sp>
+      <p:sp>
+        <p:nvSpPr>
+          <p:cNvPr id="15" name="Text 13"/>
+          <p:cNvSpPr/>
+          <p:nvPr/>
+        </p:nvSpPr>
+        <p:spPr>
+          <a:xfrm>
+            <a:off x="8074152" y="4023360"/>
+            <a:ext cx="2825496" cy="1097280"/>
           </a:xfrm>
           <a:prstGeom prst="rect">
             <a:avLst/>
@@ -4117,7 +4206,7 @@
               <a:buNone/>
             </a:pPr>
             <a:r>
-              <a:rPr lang="en-US" sz="1250" dirty="0">
+              <a:rPr lang="en-US" sz="1550" dirty="0">
                 <a:solidFill>
                   <a:srgbClr val="17364A"/>
                 </a:solidFill>
@@ -4127,7 +4216,7 @@
               </a:rPr>
               <a:t>Connect the concept to public health decisions, safeguards, documentation, or implementation work.</a:t>
             </a:r>
-            <a:endParaRPr lang="en-US" sz="1250" dirty="0"/>
+            <a:endParaRPr lang="en-US" sz="1550" dirty="0"/>
           </a:p>
         </p:txBody>
       </p:sp>
@@ -4324,7 +4413,7 @@
                 <a:ea typeface="Aptos" pitchFamily="34" charset="-122"/>
                 <a:cs typeface="Aptos" pitchFamily="34" charset="-120"/>
               </a:rPr>
-              <a:t>© Paula Soper</a:t>
+              <a:t>Â© Paula Soper</a:t>
             </a:r>
             <a:endParaRPr lang="en-US" sz="800" dirty="0"/>
           </a:p>
@@ -4332,7 +4421,46 @@
       </p:sp>
       <p:sp>
         <p:nvSpPr>
-          <p:cNvPr id="7" name="Shape 5"/>
+          <p:cNvPr id="7" name="Text 5"/>
+          <p:cNvSpPr/>
+          <p:nvPr/>
+        </p:nvSpPr>
+        <p:spPr>
+          <a:xfrm>
+            <a:off x="11137392" y="6510528"/>
+            <a:ext cx="411480" cy="201168"/>
+          </a:xfrm>
+          <a:prstGeom prst="rect">
+            <a:avLst/>
+          </a:prstGeom>
+          <a:noFill/>
+          <a:ln/>
+        </p:spPr>
+        <p:txBody>
+          <a:bodyPr wrap="square" lIns="0" tIns="0" rIns="0" bIns="0" rtlCol="0" anchor="ctr"/>
+          <a:lstStyle/>
+          <a:p>
+            <a:pPr algn="r" indent="0" marL="0">
+              <a:buNone/>
+            </a:pPr>
+            <a:r>
+              <a:rPr lang="en-US" sz="900" dirty="0">
+                <a:solidFill>
+                  <a:srgbClr val="5F7181"/>
+                </a:solidFill>
+                <a:latin typeface="Aptos" pitchFamily="34" charset="0"/>
+                <a:ea typeface="Aptos" pitchFamily="34" charset="-122"/>
+                <a:cs typeface="Aptos" pitchFamily="34" charset="-120"/>
+              </a:rPr>
+              <a:t>12</a:t>
+            </a:r>
+            <a:endParaRPr lang="en-US" sz="900" dirty="0"/>
+          </a:p>
+        </p:txBody>
+      </p:sp>
+      <p:sp>
+        <p:nvSpPr>
+          <p:cNvPr id="8" name="Shape 6"/>
           <p:cNvSpPr/>
           <p:nvPr/>
         </p:nvSpPr>
@@ -4357,7 +4485,7 @@
       </p:sp>
       <p:sp>
         <p:nvSpPr>
-          <p:cNvPr id="8" name="Text 6"/>
+          <p:cNvPr id="9" name="Text 7"/>
           <p:cNvSpPr/>
           <p:nvPr/>
         </p:nvSpPr>
@@ -4396,14 +4524,14 @@
       </p:sp>
       <p:sp>
         <p:nvSpPr>
-          <p:cNvPr id="9" name="Text 7"/>
+          <p:cNvPr id="10" name="Text 8"/>
           <p:cNvSpPr/>
           <p:nvPr/>
         </p:nvSpPr>
         <p:spPr>
           <a:xfrm>
             <a:off x="640080" y="621792"/>
-            <a:ext cx="10881360" cy="566928"/>
+            <a:ext cx="10881360" cy="713232"/>
           </a:xfrm>
           <a:prstGeom prst="rect">
             <a:avLst/>
@@ -4421,7 +4549,7 @@
               <a:buNone/>
             </a:pPr>
             <a:r>
-              <a:rPr lang="en-US" sz="2700" b="1" dirty="0">
+              <a:rPr lang="en-US" sz="3400" b="1" dirty="0">
                 <a:solidFill>
                   <a:srgbClr val="003A63"/>
                 </a:solidFill>
@@ -4431,20 +4559,20 @@
               </a:rPr>
               <a:t>Risks, Failure Modes, and Guardrails</a:t>
             </a:r>
-            <a:endParaRPr lang="en-US" sz="2700" dirty="0"/>
-          </a:p>
-        </p:txBody>
-      </p:sp>
-      <p:sp>
-        <p:nvSpPr>
-          <p:cNvPr id="10" name="Text 8"/>
-          <p:cNvSpPr/>
-          <p:nvPr/>
-        </p:nvSpPr>
-        <p:spPr>
-          <a:xfrm>
-            <a:off x="868680" y="1417320"/>
-            <a:ext cx="6675120" cy="4434840"/>
+            <a:endParaRPr lang="en-US" sz="3400" dirty="0"/>
+          </a:p>
+        </p:txBody>
+      </p:sp>
+      <p:sp>
+        <p:nvSpPr>
+          <p:cNvPr id="11" name="Text 9"/>
+          <p:cNvSpPr/>
+          <p:nvPr/>
+        </p:nvSpPr>
+        <p:spPr>
+          <a:xfrm>
+            <a:off x="868680" y="1508760"/>
+            <a:ext cx="6537960" cy="4160520"/>
           </a:xfrm>
           <a:prstGeom prst="rect">
             <a:avLst/>
@@ -4459,7 +4587,7 @@
           <a:lstStyle/>
           <a:p>
             <a:r>
-              <a:rPr lang="en-US" sz="1700" dirty="0">
+              <a:rPr lang="en-US" sz="2100" dirty="0">
                 <a:solidFill>
                   <a:srgbClr val="17364A"/>
                 </a:solidFill>
@@ -4469,11 +4597,11 @@
               </a:rPr>
               <a:t>Misleading aggregate performance.</a:t>
             </a:r>
-            <a:endParaRPr lang="en-US" sz="1700" dirty="0"/>
-          </a:p>
-          <a:p>
-            <a:r>
-              <a:rPr lang="en-US" sz="1700" dirty="0">
+            <a:endParaRPr lang="en-US" sz="2100" dirty="0"/>
+          </a:p>
+          <a:p>
+            <a:r>
+              <a:rPr lang="en-US" sz="2100" dirty="0">
                 <a:solidFill>
                   <a:srgbClr val="17364A"/>
                 </a:solidFill>
@@ -4483,11 +4611,11 @@
               </a:rPr>
               <a:t>Overall metrics may hide poor subgroup performance.</a:t>
             </a:r>
-            <a:endParaRPr lang="en-US" sz="1700" dirty="0"/>
-          </a:p>
-          <a:p>
-            <a:r>
-              <a:rPr lang="en-US" sz="1700" dirty="0">
+            <a:endParaRPr lang="en-US" sz="2100" dirty="0"/>
+          </a:p>
+          <a:p>
+            <a:r>
+              <a:rPr lang="en-US" sz="2100" dirty="0">
                 <a:solidFill>
                   <a:srgbClr val="17364A"/>
                 </a:solidFill>
@@ -4497,27 +4625,13 @@
               </a:rPr>
               <a:t>Guardrails include subgroup testing and equity review.</a:t>
             </a:r>
-            <a:endParaRPr lang="en-US" sz="1700" dirty="0"/>
-          </a:p>
-          <a:p>
-            <a:r>
-              <a:rPr lang="en-US" sz="1700" dirty="0">
-                <a:solidFill>
-                  <a:srgbClr val="17364A"/>
-                </a:solidFill>
-                <a:latin typeface="Aptos" pitchFamily="34" charset="0"/>
-                <a:ea typeface="Aptos" pitchFamily="34" charset="-122"/>
-                <a:cs typeface="Aptos" pitchFamily="34" charset="-120"/>
-              </a:rPr>
-              <a:t>Metric mismatch.</a:t>
-            </a:r>
-            <a:endParaRPr lang="en-US" sz="1700" dirty="0"/>
-          </a:p>
-        </p:txBody>
-      </p:sp>
-      <p:sp>
-        <p:nvSpPr>
-          <p:cNvPr id="11" name="Shape 9"/>
+            <a:endParaRPr lang="en-US" sz="2100" dirty="0"/>
+          </a:p>
+        </p:txBody>
+      </p:sp>
+      <p:sp>
+        <p:nvSpPr>
+          <p:cNvPr id="12" name="Shape 10"/>
           <p:cNvSpPr/>
           <p:nvPr/>
         </p:nvSpPr>
@@ -4544,14 +4658,14 @@
       </p:sp>
       <p:sp>
         <p:nvSpPr>
-          <p:cNvPr id="12" name="Text 10"/>
+          <p:cNvPr id="13" name="Text 11"/>
           <p:cNvSpPr/>
           <p:nvPr/>
         </p:nvSpPr>
         <p:spPr>
           <a:xfrm>
             <a:off x="8074152" y="1563624"/>
-            <a:ext cx="2825496" cy="201168"/>
+            <a:ext cx="2825496" cy="256032"/>
           </a:xfrm>
           <a:prstGeom prst="rect">
             <a:avLst/>
@@ -4567,7 +4681,7 @@
               <a:buNone/>
             </a:pPr>
             <a:r>
-              <a:rPr lang="en-US" sz="950" b="1" dirty="0">
+              <a:rPr lang="en-US" sz="1300" b="1" dirty="0">
                 <a:solidFill>
                   <a:srgbClr val="0068B7"/>
                 </a:solidFill>
@@ -4577,20 +4691,20 @@
               </a:rPr>
               <a:t>Key idea</a:t>
             </a:r>
-            <a:endParaRPr lang="en-US" sz="950" dirty="0"/>
-          </a:p>
-        </p:txBody>
-      </p:sp>
-      <p:sp>
-        <p:nvSpPr>
-          <p:cNvPr id="13" name="Text 11"/>
-          <p:cNvSpPr/>
-          <p:nvPr/>
-        </p:nvSpPr>
-        <p:spPr>
-          <a:xfrm>
-            <a:off x="8074152" y="1856232"/>
-            <a:ext cx="2825496" cy="1261872"/>
+            <a:endParaRPr lang="en-US" sz="1300" dirty="0"/>
+          </a:p>
+        </p:txBody>
+      </p:sp>
+      <p:sp>
+        <p:nvSpPr>
+          <p:cNvPr id="14" name="Text 12"/>
+          <p:cNvSpPr/>
+          <p:nvPr/>
+        </p:nvSpPr>
+        <p:spPr>
+          <a:xfrm>
+            <a:off x="8074152" y="1920240"/>
+            <a:ext cx="2825496" cy="1188720"/>
           </a:xfrm>
           <a:prstGeom prst="rect">
             <a:avLst/>
@@ -4608,7 +4722,7 @@
               <a:buNone/>
             </a:pPr>
             <a:r>
-              <a:rPr lang="en-US" sz="1250" dirty="0">
+              <a:rPr lang="en-US" sz="1550" dirty="0">
                 <a:solidFill>
                   <a:srgbClr val="17364A"/>
                 </a:solidFill>
@@ -4618,13 +4732,13 @@
               </a:rPr>
               <a:t>Misleading aggregate performance.</a:t>
             </a:r>
-            <a:endParaRPr lang="en-US" sz="1250" dirty="0"/>
-          </a:p>
-        </p:txBody>
-      </p:sp>
-      <p:sp>
-        <p:nvSpPr>
-          <p:cNvPr id="14" name="Shape 12"/>
+            <a:endParaRPr lang="en-US" sz="1550" dirty="0"/>
+          </a:p>
+        </p:txBody>
+      </p:sp>
+      <p:sp>
+        <p:nvSpPr>
+          <p:cNvPr id="15" name="Shape 13"/>
           <p:cNvSpPr/>
           <p:nvPr/>
         </p:nvSpPr>
@@ -4651,14 +4765,14 @@
       </p:sp>
       <p:sp>
         <p:nvSpPr>
-          <p:cNvPr id="15" name="Text 13"/>
+          <p:cNvPr id="16" name="Text 14"/>
           <p:cNvSpPr/>
           <p:nvPr/>
         </p:nvSpPr>
         <p:spPr>
           <a:xfrm>
             <a:off x="8074152" y="3666744"/>
-            <a:ext cx="2825496" cy="201168"/>
+            <a:ext cx="2825496" cy="256032"/>
           </a:xfrm>
           <a:prstGeom prst="rect">
             <a:avLst/>
@@ -4674,7 +4788,7 @@
               <a:buNone/>
             </a:pPr>
             <a:r>
-              <a:rPr lang="en-US" sz="950" b="1" dirty="0">
+              <a:rPr lang="en-US" sz="1300" b="1" dirty="0">
                 <a:solidFill>
                   <a:srgbClr val="0068B7"/>
                 </a:solidFill>
@@ -4684,20 +4798,20 @@
               </a:rPr>
               <a:t>Use this for</a:t>
             </a:r>
-            <a:endParaRPr lang="en-US" sz="950" dirty="0"/>
-          </a:p>
-        </p:txBody>
-      </p:sp>
-      <p:sp>
-        <p:nvSpPr>
-          <p:cNvPr id="16" name="Text 14"/>
-          <p:cNvSpPr/>
-          <p:nvPr/>
-        </p:nvSpPr>
-        <p:spPr>
-          <a:xfrm>
-            <a:off x="8074152" y="3959352"/>
-            <a:ext cx="2825496" cy="1170432"/>
+            <a:endParaRPr lang="en-US" sz="1300" dirty="0"/>
+          </a:p>
+        </p:txBody>
+      </p:sp>
+      <p:sp>
+        <p:nvSpPr>
+          <p:cNvPr id="17" name="Text 15"/>
+          <p:cNvSpPr/>
+          <p:nvPr/>
+        </p:nvSpPr>
+        <p:spPr>
+          <a:xfrm>
+            <a:off x="8074152" y="4023360"/>
+            <a:ext cx="2825496" cy="1097280"/>
           </a:xfrm>
           <a:prstGeom prst="rect">
             <a:avLst/>
@@ -4715,7 +4829,7 @@
               <a:buNone/>
             </a:pPr>
             <a:r>
-              <a:rPr lang="en-US" sz="1250" dirty="0">
+              <a:rPr lang="en-US" sz="1550" dirty="0">
                 <a:solidFill>
                   <a:srgbClr val="17364A"/>
                 </a:solidFill>
@@ -4725,7 +4839,7 @@
               </a:rPr>
               <a:t>Connect the concept to public health decisions, safeguards, documentation, or implementation work.</a:t>
             </a:r>
-            <a:endParaRPr lang="en-US" sz="1250" dirty="0"/>
+            <a:endParaRPr lang="en-US" sz="1550" dirty="0"/>
           </a:p>
         </p:txBody>
       </p:sp>
@@ -4922,7 +5036,7 @@
                 <a:ea typeface="Aptos" pitchFamily="34" charset="-122"/>
                 <a:cs typeface="Aptos" pitchFamily="34" charset="-120"/>
               </a:rPr>
-              <a:t>© Paula Soper</a:t>
+              <a:t>Â© Paula Soper</a:t>
             </a:r>
             <a:endParaRPr lang="en-US" sz="800" dirty="0"/>
           </a:p>
@@ -4936,8 +5050,47 @@
         </p:nvSpPr>
         <p:spPr>
           <a:xfrm>
+            <a:off x="11137392" y="6510528"/>
+            <a:ext cx="411480" cy="201168"/>
+          </a:xfrm>
+          <a:prstGeom prst="rect">
+            <a:avLst/>
+          </a:prstGeom>
+          <a:noFill/>
+          <a:ln/>
+        </p:spPr>
+        <p:txBody>
+          <a:bodyPr wrap="square" lIns="0" tIns="0" rIns="0" bIns="0" rtlCol="0" anchor="ctr"/>
+          <a:lstStyle/>
+          <a:p>
+            <a:pPr algn="r" indent="0" marL="0">
+              <a:buNone/>
+            </a:pPr>
+            <a:r>
+              <a:rPr lang="en-US" sz="900" dirty="0">
+                <a:solidFill>
+                  <a:srgbClr val="5F7181"/>
+                </a:solidFill>
+                <a:latin typeface="Aptos" pitchFamily="34" charset="0"/>
+                <a:ea typeface="Aptos" pitchFamily="34" charset="-122"/>
+                <a:cs typeface="Aptos" pitchFamily="34" charset="-120"/>
+              </a:rPr>
+              <a:t>13</a:t>
+            </a:r>
+            <a:endParaRPr lang="en-US" sz="900" dirty="0"/>
+          </a:p>
+        </p:txBody>
+      </p:sp>
+      <p:sp>
+        <p:nvSpPr>
+          <p:cNvPr id="8" name="Text 6"/>
+          <p:cNvSpPr/>
+          <p:nvPr/>
+        </p:nvSpPr>
+        <p:spPr>
+          <a:xfrm>
             <a:off x="640080" y="658368"/>
-            <a:ext cx="10881360" cy="566928"/>
+            <a:ext cx="10881360" cy="713232"/>
           </a:xfrm>
           <a:prstGeom prst="rect">
             <a:avLst/>
@@ -4955,7 +5108,7 @@
               <a:buNone/>
             </a:pPr>
             <a:r>
-              <a:rPr lang="en-US" sz="2700" b="1" dirty="0">
+              <a:rPr lang="en-US" sz="3400" b="1" dirty="0">
                 <a:solidFill>
                   <a:srgbClr val="003A63"/>
                 </a:solidFill>
@@ -4965,20 +5118,20 @@
               </a:rPr>
               <a:t>Risks, Failure Modes, and Guardrails Continued</a:t>
             </a:r>
-            <a:endParaRPr lang="en-US" sz="2700" dirty="0"/>
-          </a:p>
-        </p:txBody>
-      </p:sp>
-      <p:sp>
-        <p:nvSpPr>
-          <p:cNvPr id="8" name="Text 6"/>
-          <p:cNvSpPr/>
-          <p:nvPr/>
-        </p:nvSpPr>
-        <p:spPr>
-          <a:xfrm>
-            <a:off x="868680" y="1417320"/>
-            <a:ext cx="6675120" cy="4434840"/>
+            <a:endParaRPr lang="en-US" sz="3400" dirty="0"/>
+          </a:p>
+        </p:txBody>
+      </p:sp>
+      <p:sp>
+        <p:nvSpPr>
+          <p:cNvPr id="9" name="Text 7"/>
+          <p:cNvSpPr/>
+          <p:nvPr/>
+        </p:nvSpPr>
+        <p:spPr>
+          <a:xfrm>
+            <a:off x="868680" y="1508760"/>
+            <a:ext cx="6537960" cy="4160520"/>
           </a:xfrm>
           <a:prstGeom prst="rect">
             <a:avLst/>
@@ -4993,7 +5146,7 @@
           <a:lstStyle/>
           <a:p>
             <a:r>
-              <a:rPr lang="en-US" sz="1700" dirty="0">
+              <a:rPr lang="en-US" sz="2100" dirty="0">
                 <a:solidFill>
                   <a:srgbClr val="17364A"/>
                 </a:solidFill>
@@ -5003,11 +5156,11 @@
               </a:rPr>
               <a:t>Workflow failure.</a:t>
             </a:r>
-            <a:endParaRPr lang="en-US" sz="1700" dirty="0"/>
-          </a:p>
-          <a:p>
-            <a:r>
-              <a:rPr lang="en-US" sz="1700" dirty="0">
+            <a:endParaRPr lang="en-US" sz="2100" dirty="0"/>
+          </a:p>
+          <a:p>
+            <a:r>
+              <a:rPr lang="en-US" sz="2100" dirty="0">
                 <a:solidFill>
                   <a:srgbClr val="17364A"/>
                 </a:solidFill>
@@ -5017,11 +5170,11 @@
               </a:rPr>
               <a:t>A technically accurate model may be unusable or misused.</a:t>
             </a:r>
-            <a:endParaRPr lang="en-US" sz="1700" dirty="0"/>
-          </a:p>
-          <a:p>
-            <a:r>
-              <a:rPr lang="en-US" sz="1700" dirty="0">
+            <a:endParaRPr lang="en-US" sz="2100" dirty="0"/>
+          </a:p>
+          <a:p>
+            <a:r>
+              <a:rPr lang="en-US" sz="2100" dirty="0">
                 <a:solidFill>
                   <a:srgbClr val="17364A"/>
                 </a:solidFill>
@@ -5031,13 +5184,13 @@
               </a:rPr>
               <a:t>Guardrails include usability testing, training, source visibility, and override documentation.</a:t>
             </a:r>
-            <a:endParaRPr lang="en-US" sz="1700" dirty="0"/>
-          </a:p>
-        </p:txBody>
-      </p:sp>
-      <p:sp>
-        <p:nvSpPr>
-          <p:cNvPr id="9" name="Shape 7"/>
+            <a:endParaRPr lang="en-US" sz="2100" dirty="0"/>
+          </a:p>
+        </p:txBody>
+      </p:sp>
+      <p:sp>
+        <p:nvSpPr>
+          <p:cNvPr id="10" name="Shape 8"/>
           <p:cNvSpPr/>
           <p:nvPr/>
         </p:nvSpPr>
@@ -5064,14 +5217,14 @@
       </p:sp>
       <p:sp>
         <p:nvSpPr>
-          <p:cNvPr id="10" name="Text 8"/>
+          <p:cNvPr id="11" name="Text 9"/>
           <p:cNvSpPr/>
           <p:nvPr/>
         </p:nvSpPr>
         <p:spPr>
           <a:xfrm>
             <a:off x="8074152" y="1563624"/>
-            <a:ext cx="2825496" cy="201168"/>
+            <a:ext cx="2825496" cy="256032"/>
           </a:xfrm>
           <a:prstGeom prst="rect">
             <a:avLst/>
@@ -5087,7 +5240,7 @@
               <a:buNone/>
             </a:pPr>
             <a:r>
-              <a:rPr lang="en-US" sz="950" b="1" dirty="0">
+              <a:rPr lang="en-US" sz="1300" b="1" dirty="0">
                 <a:solidFill>
                   <a:srgbClr val="0068B7"/>
                 </a:solidFill>
@@ -5097,20 +5250,20 @@
               </a:rPr>
               <a:t>Key idea</a:t>
             </a:r>
-            <a:endParaRPr lang="en-US" sz="950" dirty="0"/>
-          </a:p>
-        </p:txBody>
-      </p:sp>
-      <p:sp>
-        <p:nvSpPr>
-          <p:cNvPr id="11" name="Text 9"/>
-          <p:cNvSpPr/>
-          <p:nvPr/>
-        </p:nvSpPr>
-        <p:spPr>
-          <a:xfrm>
-            <a:off x="8074152" y="1856232"/>
-            <a:ext cx="2825496" cy="1261872"/>
+            <a:endParaRPr lang="en-US" sz="1300" dirty="0"/>
+          </a:p>
+        </p:txBody>
+      </p:sp>
+      <p:sp>
+        <p:nvSpPr>
+          <p:cNvPr id="12" name="Text 10"/>
+          <p:cNvSpPr/>
+          <p:nvPr/>
+        </p:nvSpPr>
+        <p:spPr>
+          <a:xfrm>
+            <a:off x="8074152" y="1920240"/>
+            <a:ext cx="2825496" cy="1188720"/>
           </a:xfrm>
           <a:prstGeom prst="rect">
             <a:avLst/>
@@ -5128,7 +5281,7 @@
               <a:buNone/>
             </a:pPr>
             <a:r>
-              <a:rPr lang="en-US" sz="1250" dirty="0">
+              <a:rPr lang="en-US" sz="1550" dirty="0">
                 <a:solidFill>
                   <a:srgbClr val="17364A"/>
                 </a:solidFill>
@@ -5138,13 +5291,13 @@
               </a:rPr>
               <a:t>Workflow failure.</a:t>
             </a:r>
-            <a:endParaRPr lang="en-US" sz="1250" dirty="0"/>
-          </a:p>
-        </p:txBody>
-      </p:sp>
-      <p:sp>
-        <p:nvSpPr>
-          <p:cNvPr id="12" name="Shape 10"/>
+            <a:endParaRPr lang="en-US" sz="1550" dirty="0"/>
+          </a:p>
+        </p:txBody>
+      </p:sp>
+      <p:sp>
+        <p:nvSpPr>
+          <p:cNvPr id="13" name="Shape 11"/>
           <p:cNvSpPr/>
           <p:nvPr/>
         </p:nvSpPr>
@@ -5171,14 +5324,14 @@
       </p:sp>
       <p:sp>
         <p:nvSpPr>
-          <p:cNvPr id="13" name="Text 11"/>
+          <p:cNvPr id="14" name="Text 12"/>
           <p:cNvSpPr/>
           <p:nvPr/>
         </p:nvSpPr>
         <p:spPr>
           <a:xfrm>
             <a:off x="8074152" y="3666744"/>
-            <a:ext cx="2825496" cy="201168"/>
+            <a:ext cx="2825496" cy="256032"/>
           </a:xfrm>
           <a:prstGeom prst="rect">
             <a:avLst/>
@@ -5194,7 +5347,7 @@
               <a:buNone/>
             </a:pPr>
             <a:r>
-              <a:rPr lang="en-US" sz="950" b="1" dirty="0">
+              <a:rPr lang="en-US" sz="1300" b="1" dirty="0">
                 <a:solidFill>
                   <a:srgbClr val="0068B7"/>
                 </a:solidFill>
@@ -5204,20 +5357,20 @@
               </a:rPr>
               <a:t>Use this for</a:t>
             </a:r>
-            <a:endParaRPr lang="en-US" sz="950" dirty="0"/>
-          </a:p>
-        </p:txBody>
-      </p:sp>
-      <p:sp>
-        <p:nvSpPr>
-          <p:cNvPr id="14" name="Text 12"/>
-          <p:cNvSpPr/>
-          <p:nvPr/>
-        </p:nvSpPr>
-        <p:spPr>
-          <a:xfrm>
-            <a:off x="8074152" y="3959352"/>
-            <a:ext cx="2825496" cy="1170432"/>
+            <a:endParaRPr lang="en-US" sz="1300" dirty="0"/>
+          </a:p>
+        </p:txBody>
+      </p:sp>
+      <p:sp>
+        <p:nvSpPr>
+          <p:cNvPr id="15" name="Text 13"/>
+          <p:cNvSpPr/>
+          <p:nvPr/>
+        </p:nvSpPr>
+        <p:spPr>
+          <a:xfrm>
+            <a:off x="8074152" y="4023360"/>
+            <a:ext cx="2825496" cy="1097280"/>
           </a:xfrm>
           <a:prstGeom prst="rect">
             <a:avLst/>
@@ -5235,7 +5388,7 @@
               <a:buNone/>
             </a:pPr>
             <a:r>
-              <a:rPr lang="en-US" sz="1250" dirty="0">
+              <a:rPr lang="en-US" sz="1550" dirty="0">
                 <a:solidFill>
                   <a:srgbClr val="17364A"/>
                 </a:solidFill>
@@ -5245,7 +5398,7 @@
               </a:rPr>
               <a:t>Connect the concept to public health decisions, safeguards, documentation, or implementation work.</a:t>
             </a:r>
-            <a:endParaRPr lang="en-US" sz="1250" dirty="0"/>
+            <a:endParaRPr lang="en-US" sz="1550" dirty="0"/>
           </a:p>
         </p:txBody>
       </p:sp>
@@ -5442,7 +5595,7 @@
                 <a:ea typeface="Aptos" pitchFamily="34" charset="-122"/>
                 <a:cs typeface="Aptos" pitchFamily="34" charset="-120"/>
               </a:rPr>
-              <a:t>© Paula Soper</a:t>
+              <a:t>Â© Paula Soper</a:t>
             </a:r>
             <a:endParaRPr lang="en-US" sz="800" dirty="0"/>
           </a:p>
@@ -5450,7 +5603,46 @@
       </p:sp>
       <p:sp>
         <p:nvSpPr>
-          <p:cNvPr id="7" name="Shape 5"/>
+          <p:cNvPr id="7" name="Text 5"/>
+          <p:cNvSpPr/>
+          <p:nvPr/>
+        </p:nvSpPr>
+        <p:spPr>
+          <a:xfrm>
+            <a:off x="11137392" y="6510528"/>
+            <a:ext cx="411480" cy="201168"/>
+          </a:xfrm>
+          <a:prstGeom prst="rect">
+            <a:avLst/>
+          </a:prstGeom>
+          <a:noFill/>
+          <a:ln/>
+        </p:spPr>
+        <p:txBody>
+          <a:bodyPr wrap="square" lIns="0" tIns="0" rIns="0" bIns="0" rtlCol="0" anchor="ctr"/>
+          <a:lstStyle/>
+          <a:p>
+            <a:pPr algn="r" indent="0" marL="0">
+              <a:buNone/>
+            </a:pPr>
+            <a:r>
+              <a:rPr lang="en-US" sz="900" dirty="0">
+                <a:solidFill>
+                  <a:srgbClr val="5F7181"/>
+                </a:solidFill>
+                <a:latin typeface="Aptos" pitchFamily="34" charset="0"/>
+                <a:ea typeface="Aptos" pitchFamily="34" charset="-122"/>
+                <a:cs typeface="Aptos" pitchFamily="34" charset="-120"/>
+              </a:rPr>
+              <a:t>14</a:t>
+            </a:r>
+            <a:endParaRPr lang="en-US" sz="900" dirty="0"/>
+          </a:p>
+        </p:txBody>
+      </p:sp>
+      <p:sp>
+        <p:nvSpPr>
+          <p:cNvPr id="8" name="Shape 6"/>
           <p:cNvSpPr/>
           <p:nvPr/>
         </p:nvSpPr>
@@ -5475,7 +5667,7 @@
       </p:sp>
       <p:sp>
         <p:nvSpPr>
-          <p:cNvPr id="8" name="Text 6"/>
+          <p:cNvPr id="9" name="Text 7"/>
           <p:cNvSpPr/>
           <p:nvPr/>
         </p:nvSpPr>
@@ -5514,14 +5706,14 @@
       </p:sp>
       <p:sp>
         <p:nvSpPr>
-          <p:cNvPr id="9" name="Text 7"/>
+          <p:cNvPr id="10" name="Text 8"/>
           <p:cNvSpPr/>
           <p:nvPr/>
         </p:nvSpPr>
         <p:spPr>
           <a:xfrm>
             <a:off x="640080" y="621792"/>
-            <a:ext cx="10881360" cy="566928"/>
+            <a:ext cx="10881360" cy="713232"/>
           </a:xfrm>
           <a:prstGeom prst="rect">
             <a:avLst/>
@@ -5539,7 +5731,7 @@
               <a:buNone/>
             </a:pPr>
             <a:r>
-              <a:rPr lang="en-US" sz="2700" b="1" dirty="0">
+              <a:rPr lang="en-US" sz="3400" b="1" dirty="0">
                 <a:solidFill>
                   <a:srgbClr val="003A63"/>
                 </a:solidFill>
@@ -5549,20 +5741,20 @@
               </a:rPr>
               <a:t>Application to AI-Supported Workflows</a:t>
             </a:r>
-            <a:endParaRPr lang="en-US" sz="2700" dirty="0"/>
-          </a:p>
-        </p:txBody>
-      </p:sp>
-      <p:sp>
-        <p:nvSpPr>
-          <p:cNvPr id="10" name="Text 8"/>
-          <p:cNvSpPr/>
-          <p:nvPr/>
-        </p:nvSpPr>
-        <p:spPr>
-          <a:xfrm>
-            <a:off x="868680" y="1417320"/>
-            <a:ext cx="6675120" cy="4434840"/>
+            <a:endParaRPr lang="en-US" sz="3400" dirty="0"/>
+          </a:p>
+        </p:txBody>
+      </p:sp>
+      <p:sp>
+        <p:nvSpPr>
+          <p:cNvPr id="11" name="Text 9"/>
+          <p:cNvSpPr/>
+          <p:nvPr/>
+        </p:nvSpPr>
+        <p:spPr>
+          <a:xfrm>
+            <a:off x="868680" y="1508760"/>
+            <a:ext cx="6537960" cy="4160520"/>
           </a:xfrm>
           <a:prstGeom prst="rect">
             <a:avLst/>
@@ -5577,7 +5769,7 @@
           <a:lstStyle/>
           <a:p>
             <a:r>
-              <a:rPr lang="en-US" sz="1700" dirty="0">
+              <a:rPr lang="en-US" sz="2100" dirty="0">
                 <a:solidFill>
                   <a:srgbClr val="17364A"/>
                 </a:solidFill>
@@ -5585,13 +5777,13 @@
                 <a:ea typeface="Aptos" pitchFamily="34" charset="-122"/>
                 <a:cs typeface="Aptos" pitchFamily="34" charset="-120"/>
               </a:rPr>
-              <a:t>Advanced validation applies to predictive models, NLP tools, generative summaries, RAG outputs, and agentic workflows.</a:t>
-            </a:r>
-            <a:endParaRPr lang="en-US" sz="1700" dirty="0"/>
-          </a:p>
-          <a:p>
-            <a:r>
-              <a:rPr lang="en-US" sz="1700" dirty="0">
+              <a:t>Advanced validation applies to predictive models, NLP tools, generative summaries, RAG outputs, and.</a:t>
+            </a:r>
+            <a:endParaRPr lang="en-US" sz="2100" dirty="0"/>
+          </a:p>
+          <a:p>
+            <a:r>
+              <a:rPr lang="en-US" sz="2100" dirty="0">
                 <a:solidFill>
                   <a:srgbClr val="17364A"/>
                 </a:solidFill>
@@ -5599,13 +5791,13 @@
                 <a:ea typeface="Aptos" pitchFamily="34" charset="-122"/>
                 <a:cs typeface="Aptos" pitchFamily="34" charset="-120"/>
               </a:rPr>
-              <a:t>For generative AI, validation may include factuality, completeness, source grounding, omissions, and harmful output review.</a:t>
-            </a:r>
-            <a:endParaRPr lang="en-US" sz="1700" dirty="0"/>
-          </a:p>
-          <a:p>
-            <a:r>
-              <a:rPr lang="en-US" sz="1700" dirty="0">
+              <a:t>For generative AI, validation may include factuality, completeness, source grounding, omissions, and.</a:t>
+            </a:r>
+            <a:endParaRPr lang="en-US" sz="2100" dirty="0"/>
+          </a:p>
+          <a:p>
+            <a:r>
+              <a:rPr lang="en-US" sz="2100" dirty="0">
                 <a:solidFill>
                   <a:srgbClr val="17364A"/>
                 </a:solidFill>
@@ -5615,27 +5807,13 @@
               </a:rPr>
               <a:t>For RAG, validation should test retrieval quality and citation accuracy.</a:t>
             </a:r>
-            <a:endParaRPr lang="en-US" sz="1700" dirty="0"/>
-          </a:p>
-          <a:p>
-            <a:r>
-              <a:rPr lang="en-US" sz="1700" dirty="0">
-                <a:solidFill>
-                  <a:srgbClr val="17364A"/>
-                </a:solidFill>
-                <a:latin typeface="Aptos" pitchFamily="34" charset="0"/>
-                <a:ea typeface="Aptos" pitchFamily="34" charset="-122"/>
-                <a:cs typeface="Aptos" pitchFamily="34" charset="-120"/>
-              </a:rPr>
-              <a:t>For agentic workflows, validation should include action safety, permission boundaries, and rollback procedures.</a:t>
-            </a:r>
-            <a:endParaRPr lang="en-US" sz="1700" dirty="0"/>
-          </a:p>
-        </p:txBody>
-      </p:sp>
-      <p:sp>
-        <p:nvSpPr>
-          <p:cNvPr id="11" name="Shape 9"/>
+            <a:endParaRPr lang="en-US" sz="2100" dirty="0"/>
+          </a:p>
+        </p:txBody>
+      </p:sp>
+      <p:sp>
+        <p:nvSpPr>
+          <p:cNvPr id="12" name="Shape 10"/>
           <p:cNvSpPr/>
           <p:nvPr/>
         </p:nvSpPr>
@@ -5662,14 +5840,14 @@
       </p:sp>
       <p:sp>
         <p:nvSpPr>
-          <p:cNvPr id="12" name="Text 10"/>
+          <p:cNvPr id="13" name="Text 11"/>
           <p:cNvSpPr/>
           <p:nvPr/>
         </p:nvSpPr>
         <p:spPr>
           <a:xfrm>
             <a:off x="8074152" y="1563624"/>
-            <a:ext cx="2825496" cy="201168"/>
+            <a:ext cx="2825496" cy="256032"/>
           </a:xfrm>
           <a:prstGeom prst="rect">
             <a:avLst/>
@@ -5685,7 +5863,7 @@
               <a:buNone/>
             </a:pPr>
             <a:r>
-              <a:rPr lang="en-US" sz="950" b="1" dirty="0">
+              <a:rPr lang="en-US" sz="1300" b="1" dirty="0">
                 <a:solidFill>
                   <a:srgbClr val="0068B7"/>
                 </a:solidFill>
@@ -5695,20 +5873,20 @@
               </a:rPr>
               <a:t>Key idea</a:t>
             </a:r>
-            <a:endParaRPr lang="en-US" sz="950" dirty="0"/>
-          </a:p>
-        </p:txBody>
-      </p:sp>
-      <p:sp>
-        <p:nvSpPr>
-          <p:cNvPr id="13" name="Text 11"/>
-          <p:cNvSpPr/>
-          <p:nvPr/>
-        </p:nvSpPr>
-        <p:spPr>
-          <a:xfrm>
-            <a:off x="8074152" y="1856232"/>
-            <a:ext cx="2825496" cy="1261872"/>
+            <a:endParaRPr lang="en-US" sz="1300" dirty="0"/>
+          </a:p>
+        </p:txBody>
+      </p:sp>
+      <p:sp>
+        <p:nvSpPr>
+          <p:cNvPr id="14" name="Text 12"/>
+          <p:cNvSpPr/>
+          <p:nvPr/>
+        </p:nvSpPr>
+        <p:spPr>
+          <a:xfrm>
+            <a:off x="8074152" y="1920240"/>
+            <a:ext cx="2825496" cy="1188720"/>
           </a:xfrm>
           <a:prstGeom prst="rect">
             <a:avLst/>
@@ -5726,7 +5904,7 @@
               <a:buNone/>
             </a:pPr>
             <a:r>
-              <a:rPr lang="en-US" sz="1250" dirty="0">
+              <a:rPr lang="en-US" sz="1550" dirty="0">
                 <a:solidFill>
                   <a:srgbClr val="17364A"/>
                 </a:solidFill>
@@ -5734,15 +5912,15 @@
                 <a:ea typeface="Aptos" pitchFamily="34" charset="-122"/>
                 <a:cs typeface="Aptos" pitchFamily="34" charset="-120"/>
               </a:rPr>
-              <a:t>Advanced validation applies to predictive models, NLP tools, generative summaries, RAG outputs, and agentic workflows.</a:t>
-            </a:r>
-            <a:endParaRPr lang="en-US" sz="1250" dirty="0"/>
-          </a:p>
-        </p:txBody>
-      </p:sp>
-      <p:sp>
-        <p:nvSpPr>
-          <p:cNvPr id="14" name="Shape 12"/>
+              <a:t>Advanced validation applies to predictive models, NLP tools, generative summaries, RAG outputs, and.</a:t>
+            </a:r>
+            <a:endParaRPr lang="en-US" sz="1550" dirty="0"/>
+          </a:p>
+        </p:txBody>
+      </p:sp>
+      <p:sp>
+        <p:nvSpPr>
+          <p:cNvPr id="15" name="Shape 13"/>
           <p:cNvSpPr/>
           <p:nvPr/>
         </p:nvSpPr>
@@ -5769,14 +5947,14 @@
       </p:sp>
       <p:sp>
         <p:nvSpPr>
-          <p:cNvPr id="15" name="Text 13"/>
+          <p:cNvPr id="16" name="Text 14"/>
           <p:cNvSpPr/>
           <p:nvPr/>
         </p:nvSpPr>
         <p:spPr>
           <a:xfrm>
             <a:off x="8074152" y="3666744"/>
-            <a:ext cx="2825496" cy="201168"/>
+            <a:ext cx="2825496" cy="256032"/>
           </a:xfrm>
           <a:prstGeom prst="rect">
             <a:avLst/>
@@ -5792,7 +5970,7 @@
               <a:buNone/>
             </a:pPr>
             <a:r>
-              <a:rPr lang="en-US" sz="950" b="1" dirty="0">
+              <a:rPr lang="en-US" sz="1300" b="1" dirty="0">
                 <a:solidFill>
                   <a:srgbClr val="0068B7"/>
                 </a:solidFill>
@@ -5802,20 +5980,20 @@
               </a:rPr>
               <a:t>Use this for</a:t>
             </a:r>
-            <a:endParaRPr lang="en-US" sz="950" dirty="0"/>
-          </a:p>
-        </p:txBody>
-      </p:sp>
-      <p:sp>
-        <p:nvSpPr>
-          <p:cNvPr id="16" name="Text 14"/>
-          <p:cNvSpPr/>
-          <p:nvPr/>
-        </p:nvSpPr>
-        <p:spPr>
-          <a:xfrm>
-            <a:off x="8074152" y="3959352"/>
-            <a:ext cx="2825496" cy="1170432"/>
+            <a:endParaRPr lang="en-US" sz="1300" dirty="0"/>
+          </a:p>
+        </p:txBody>
+      </p:sp>
+      <p:sp>
+        <p:nvSpPr>
+          <p:cNvPr id="17" name="Text 15"/>
+          <p:cNvSpPr/>
+          <p:nvPr/>
+        </p:nvSpPr>
+        <p:spPr>
+          <a:xfrm>
+            <a:off x="8074152" y="4023360"/>
+            <a:ext cx="2825496" cy="1097280"/>
           </a:xfrm>
           <a:prstGeom prst="rect">
             <a:avLst/>
@@ -5833,7 +6011,7 @@
               <a:buNone/>
             </a:pPr>
             <a:r>
-              <a:rPr lang="en-US" sz="1250" dirty="0">
+              <a:rPr lang="en-US" sz="1550" dirty="0">
                 <a:solidFill>
                   <a:srgbClr val="17364A"/>
                 </a:solidFill>
@@ -5843,7 +6021,7 @@
               </a:rPr>
               <a:t>Connect the concept to public health decisions, safeguards, documentation, or implementation work.</a:t>
             </a:r>
-            <a:endParaRPr lang="en-US" sz="1250" dirty="0"/>
+            <a:endParaRPr lang="en-US" sz="1550" dirty="0"/>
           </a:p>
         </p:txBody>
       </p:sp>
@@ -6040,7 +6218,7 @@
                 <a:ea typeface="Aptos" pitchFamily="34" charset="-122"/>
                 <a:cs typeface="Aptos" pitchFamily="34" charset="-120"/>
               </a:rPr>
-              <a:t>© Paula Soper</a:t>
+              <a:t>Â© Paula Soper</a:t>
             </a:r>
             <a:endParaRPr lang="en-US" sz="800" dirty="0"/>
           </a:p>
@@ -6048,7 +6226,46 @@
       </p:sp>
       <p:sp>
         <p:nvSpPr>
-          <p:cNvPr id="7" name="Shape 5"/>
+          <p:cNvPr id="7" name="Text 5"/>
+          <p:cNvSpPr/>
+          <p:nvPr/>
+        </p:nvSpPr>
+        <p:spPr>
+          <a:xfrm>
+            <a:off x="11137392" y="6510528"/>
+            <a:ext cx="411480" cy="201168"/>
+          </a:xfrm>
+          <a:prstGeom prst="rect">
+            <a:avLst/>
+          </a:prstGeom>
+          <a:noFill/>
+          <a:ln/>
+        </p:spPr>
+        <p:txBody>
+          <a:bodyPr wrap="square" lIns="0" tIns="0" rIns="0" bIns="0" rtlCol="0" anchor="ctr"/>
+          <a:lstStyle/>
+          <a:p>
+            <a:pPr algn="r" indent="0" marL="0">
+              <a:buNone/>
+            </a:pPr>
+            <a:r>
+              <a:rPr lang="en-US" sz="900" dirty="0">
+                <a:solidFill>
+                  <a:srgbClr val="5F7181"/>
+                </a:solidFill>
+                <a:latin typeface="Aptos" pitchFamily="34" charset="0"/>
+                <a:ea typeface="Aptos" pitchFamily="34" charset="-122"/>
+                <a:cs typeface="Aptos" pitchFamily="34" charset="-120"/>
+              </a:rPr>
+              <a:t>15</a:t>
+            </a:r>
+            <a:endParaRPr lang="en-US" sz="900" dirty="0"/>
+          </a:p>
+        </p:txBody>
+      </p:sp>
+      <p:sp>
+        <p:nvSpPr>
+          <p:cNvPr id="8" name="Shape 6"/>
           <p:cNvSpPr/>
           <p:nvPr/>
         </p:nvSpPr>
@@ -6073,7 +6290,7 @@
       </p:sp>
       <p:sp>
         <p:nvSpPr>
-          <p:cNvPr id="8" name="Text 6"/>
+          <p:cNvPr id="9" name="Text 7"/>
           <p:cNvSpPr/>
           <p:nvPr/>
         </p:nvSpPr>
@@ -6112,14 +6329,14 @@
       </p:sp>
       <p:sp>
         <p:nvSpPr>
-          <p:cNvPr id="9" name="Text 7"/>
+          <p:cNvPr id="10" name="Text 8"/>
           <p:cNvSpPr/>
           <p:nvPr/>
         </p:nvSpPr>
         <p:spPr>
           <a:xfrm>
             <a:off x="640080" y="621792"/>
-            <a:ext cx="10881360" cy="566928"/>
+            <a:ext cx="10881360" cy="713232"/>
           </a:xfrm>
           <a:prstGeom prst="rect">
             <a:avLst/>
@@ -6137,7 +6354,7 @@
               <a:buNone/>
             </a:pPr>
             <a:r>
-              <a:rPr lang="en-US" sz="2700" b="1" dirty="0">
+              <a:rPr lang="en-US" sz="3400" b="1" dirty="0">
                 <a:solidFill>
                   <a:srgbClr val="003A63"/>
                 </a:solidFill>
@@ -6147,20 +6364,20 @@
               </a:rPr>
               <a:t>Reflection Questions</a:t>
             </a:r>
-            <a:endParaRPr lang="en-US" sz="2700" dirty="0"/>
-          </a:p>
-        </p:txBody>
-      </p:sp>
-      <p:sp>
-        <p:nvSpPr>
-          <p:cNvPr id="10" name="Text 8"/>
-          <p:cNvSpPr/>
-          <p:nvPr/>
-        </p:nvSpPr>
-        <p:spPr>
-          <a:xfrm>
-            <a:off x="868680" y="1417320"/>
-            <a:ext cx="6675120" cy="4434840"/>
+            <a:endParaRPr lang="en-US" sz="3400" dirty="0"/>
+          </a:p>
+        </p:txBody>
+      </p:sp>
+      <p:sp>
+        <p:nvSpPr>
+          <p:cNvPr id="11" name="Text 9"/>
+          <p:cNvSpPr/>
+          <p:nvPr/>
+        </p:nvSpPr>
+        <p:spPr>
+          <a:xfrm>
+            <a:off x="868680" y="1508760"/>
+            <a:ext cx="6537960" cy="4160520"/>
           </a:xfrm>
           <a:prstGeom prst="rect">
             <a:avLst/>
@@ -6175,7 +6392,7 @@
           <a:lstStyle/>
           <a:p>
             <a:r>
-              <a:rPr lang="en-US" sz="1700" dirty="0">
+              <a:rPr lang="en-US" sz="2100" dirty="0">
                 <a:solidFill>
                   <a:srgbClr val="17364A"/>
                 </a:solidFill>
@@ -6185,11 +6402,11 @@
               </a:rPr>
               <a:t>What decision or action will the AI output support?</a:t>
             </a:r>
-            <a:endParaRPr lang="en-US" sz="1700" dirty="0"/>
-          </a:p>
-          <a:p>
-            <a:r>
-              <a:rPr lang="en-US" sz="1700" dirty="0">
+            <a:endParaRPr lang="en-US" sz="2100" dirty="0"/>
+          </a:p>
+          <a:p>
+            <a:r>
+              <a:rPr lang="en-US" sz="2100" dirty="0">
                 <a:solidFill>
                   <a:srgbClr val="17364A"/>
                 </a:solidFill>
@@ -6199,11 +6416,11 @@
               </a:rPr>
               <a:t>Which performance metrics match the consequences of error?</a:t>
             </a:r>
-            <a:endParaRPr lang="en-US" sz="1700" dirty="0"/>
-          </a:p>
-          <a:p>
-            <a:r>
-              <a:rPr lang="en-US" sz="1700" dirty="0">
+            <a:endParaRPr lang="en-US" sz="2100" dirty="0"/>
+          </a:p>
+          <a:p>
+            <a:r>
+              <a:rPr lang="en-US" sz="2100" dirty="0">
                 <a:solidFill>
                   <a:srgbClr val="17364A"/>
                 </a:solidFill>
@@ -6213,13 +6430,13 @@
               </a:rPr>
               <a:t>Which subgroups, data sources, or settings require separate review?</a:t>
             </a:r>
-            <a:endParaRPr lang="en-US" sz="1700" dirty="0"/>
-          </a:p>
-        </p:txBody>
-      </p:sp>
-      <p:sp>
-        <p:nvSpPr>
-          <p:cNvPr id="11" name="Shape 9"/>
+            <a:endParaRPr lang="en-US" sz="2100" dirty="0"/>
+          </a:p>
+        </p:txBody>
+      </p:sp>
+      <p:sp>
+        <p:nvSpPr>
+          <p:cNvPr id="12" name="Shape 10"/>
           <p:cNvSpPr/>
           <p:nvPr/>
         </p:nvSpPr>
@@ -6246,14 +6463,14 @@
       </p:sp>
       <p:sp>
         <p:nvSpPr>
-          <p:cNvPr id="12" name="Text 10"/>
+          <p:cNvPr id="13" name="Text 11"/>
           <p:cNvSpPr/>
           <p:nvPr/>
         </p:nvSpPr>
         <p:spPr>
           <a:xfrm>
             <a:off x="8074152" y="1563624"/>
-            <a:ext cx="2825496" cy="201168"/>
+            <a:ext cx="2825496" cy="256032"/>
           </a:xfrm>
           <a:prstGeom prst="rect">
             <a:avLst/>
@@ -6269,7 +6486,7 @@
               <a:buNone/>
             </a:pPr>
             <a:r>
-              <a:rPr lang="en-US" sz="950" b="1" dirty="0">
+              <a:rPr lang="en-US" sz="1300" b="1" dirty="0">
                 <a:solidFill>
                   <a:srgbClr val="0068B7"/>
                 </a:solidFill>
@@ -6279,20 +6496,20 @@
               </a:rPr>
               <a:t>Key idea</a:t>
             </a:r>
-            <a:endParaRPr lang="en-US" sz="950" dirty="0"/>
-          </a:p>
-        </p:txBody>
-      </p:sp>
-      <p:sp>
-        <p:nvSpPr>
-          <p:cNvPr id="13" name="Text 11"/>
-          <p:cNvSpPr/>
-          <p:nvPr/>
-        </p:nvSpPr>
-        <p:spPr>
-          <a:xfrm>
-            <a:off x="8074152" y="1856232"/>
-            <a:ext cx="2825496" cy="1261872"/>
+            <a:endParaRPr lang="en-US" sz="1300" dirty="0"/>
+          </a:p>
+        </p:txBody>
+      </p:sp>
+      <p:sp>
+        <p:nvSpPr>
+          <p:cNvPr id="14" name="Text 12"/>
+          <p:cNvSpPr/>
+          <p:nvPr/>
+        </p:nvSpPr>
+        <p:spPr>
+          <a:xfrm>
+            <a:off x="8074152" y="1920240"/>
+            <a:ext cx="2825496" cy="1188720"/>
           </a:xfrm>
           <a:prstGeom prst="rect">
             <a:avLst/>
@@ -6310,7 +6527,7 @@
               <a:buNone/>
             </a:pPr>
             <a:r>
-              <a:rPr lang="en-US" sz="1250" dirty="0">
+              <a:rPr lang="en-US" sz="1550" dirty="0">
                 <a:solidFill>
                   <a:srgbClr val="17364A"/>
                 </a:solidFill>
@@ -6320,13 +6537,13 @@
               </a:rPr>
               <a:t>What decision or action will the AI output support?</a:t>
             </a:r>
-            <a:endParaRPr lang="en-US" sz="1250" dirty="0"/>
-          </a:p>
-        </p:txBody>
-      </p:sp>
-      <p:sp>
-        <p:nvSpPr>
-          <p:cNvPr id="14" name="Shape 12"/>
+            <a:endParaRPr lang="en-US" sz="1550" dirty="0"/>
+          </a:p>
+        </p:txBody>
+      </p:sp>
+      <p:sp>
+        <p:nvSpPr>
+          <p:cNvPr id="15" name="Shape 13"/>
           <p:cNvSpPr/>
           <p:nvPr/>
         </p:nvSpPr>
@@ -6353,14 +6570,14 @@
       </p:sp>
       <p:sp>
         <p:nvSpPr>
-          <p:cNvPr id="15" name="Text 13"/>
+          <p:cNvPr id="16" name="Text 14"/>
           <p:cNvSpPr/>
           <p:nvPr/>
         </p:nvSpPr>
         <p:spPr>
           <a:xfrm>
             <a:off x="8074152" y="3666744"/>
-            <a:ext cx="2825496" cy="201168"/>
+            <a:ext cx="2825496" cy="256032"/>
           </a:xfrm>
           <a:prstGeom prst="rect">
             <a:avLst/>
@@ -6376,7 +6593,7 @@
               <a:buNone/>
             </a:pPr>
             <a:r>
-              <a:rPr lang="en-US" sz="950" b="1" dirty="0">
+              <a:rPr lang="en-US" sz="1300" b="1" dirty="0">
                 <a:solidFill>
                   <a:srgbClr val="0068B7"/>
                 </a:solidFill>
@@ -6386,20 +6603,20 @@
               </a:rPr>
               <a:t>Use this for</a:t>
             </a:r>
-            <a:endParaRPr lang="en-US" sz="950" dirty="0"/>
-          </a:p>
-        </p:txBody>
-      </p:sp>
-      <p:sp>
-        <p:nvSpPr>
-          <p:cNvPr id="16" name="Text 14"/>
-          <p:cNvSpPr/>
-          <p:nvPr/>
-        </p:nvSpPr>
-        <p:spPr>
-          <a:xfrm>
-            <a:off x="8074152" y="3959352"/>
-            <a:ext cx="2825496" cy="1170432"/>
+            <a:endParaRPr lang="en-US" sz="1300" dirty="0"/>
+          </a:p>
+        </p:txBody>
+      </p:sp>
+      <p:sp>
+        <p:nvSpPr>
+          <p:cNvPr id="17" name="Text 15"/>
+          <p:cNvSpPr/>
+          <p:nvPr/>
+        </p:nvSpPr>
+        <p:spPr>
+          <a:xfrm>
+            <a:off x="8074152" y="4023360"/>
+            <a:ext cx="2825496" cy="1097280"/>
           </a:xfrm>
           <a:prstGeom prst="rect">
             <a:avLst/>
@@ -6417,7 +6634,7 @@
               <a:buNone/>
             </a:pPr>
             <a:r>
-              <a:rPr lang="en-US" sz="1250" dirty="0">
+              <a:rPr lang="en-US" sz="1550" dirty="0">
                 <a:solidFill>
                   <a:srgbClr val="17364A"/>
                 </a:solidFill>
@@ -6427,7 +6644,7 @@
               </a:rPr>
               <a:t>Connect the concept to public health decisions, safeguards, documentation, or implementation work.</a:t>
             </a:r>
-            <a:endParaRPr lang="en-US" sz="1250" dirty="0"/>
+            <a:endParaRPr lang="en-US" sz="1550" dirty="0"/>
           </a:p>
         </p:txBody>
       </p:sp>
@@ -6624,7 +6841,7 @@
                 <a:ea typeface="Aptos" pitchFamily="34" charset="-122"/>
                 <a:cs typeface="Aptos" pitchFamily="34" charset="-120"/>
               </a:rPr>
-              <a:t>© Paula Soper</a:t>
+              <a:t>Â© Paula Soper</a:t>
             </a:r>
             <a:endParaRPr lang="en-US" sz="800" dirty="0"/>
           </a:p>
@@ -6638,8 +6855,47 @@
         </p:nvSpPr>
         <p:spPr>
           <a:xfrm>
+            <a:off x="11137392" y="6510528"/>
+            <a:ext cx="411480" cy="201168"/>
+          </a:xfrm>
+          <a:prstGeom prst="rect">
+            <a:avLst/>
+          </a:prstGeom>
+          <a:noFill/>
+          <a:ln/>
+        </p:spPr>
+        <p:txBody>
+          <a:bodyPr wrap="square" lIns="0" tIns="0" rIns="0" bIns="0" rtlCol="0" anchor="ctr"/>
+          <a:lstStyle/>
+          <a:p>
+            <a:pPr algn="r" indent="0" marL="0">
+              <a:buNone/>
+            </a:pPr>
+            <a:r>
+              <a:rPr lang="en-US" sz="900" dirty="0">
+                <a:solidFill>
+                  <a:srgbClr val="5F7181"/>
+                </a:solidFill>
+                <a:latin typeface="Aptos" pitchFamily="34" charset="0"/>
+                <a:ea typeface="Aptos" pitchFamily="34" charset="-122"/>
+                <a:cs typeface="Aptos" pitchFamily="34" charset="-120"/>
+              </a:rPr>
+              <a:t>16</a:t>
+            </a:r>
+            <a:endParaRPr lang="en-US" sz="900" dirty="0"/>
+          </a:p>
+        </p:txBody>
+      </p:sp>
+      <p:sp>
+        <p:nvSpPr>
+          <p:cNvPr id="8" name="Text 6"/>
+          <p:cNvSpPr/>
+          <p:nvPr/>
+        </p:nvSpPr>
+        <p:spPr>
+          <a:xfrm>
             <a:off x="640080" y="658368"/>
-            <a:ext cx="10881360" cy="566928"/>
+            <a:ext cx="10881360" cy="713232"/>
           </a:xfrm>
           <a:prstGeom prst="rect">
             <a:avLst/>
@@ -6657,7 +6913,7 @@
               <a:buNone/>
             </a:pPr>
             <a:r>
-              <a:rPr lang="en-US" sz="2700" b="1" dirty="0">
+              <a:rPr lang="en-US" sz="3400" b="1" dirty="0">
                 <a:solidFill>
                   <a:srgbClr val="003A63"/>
                 </a:solidFill>
@@ -6667,20 +6923,20 @@
               </a:rPr>
               <a:t>Reflection Questions Continued</a:t>
             </a:r>
-            <a:endParaRPr lang="en-US" sz="2700" dirty="0"/>
-          </a:p>
-        </p:txBody>
-      </p:sp>
-      <p:sp>
-        <p:nvSpPr>
-          <p:cNvPr id="8" name="Text 6"/>
-          <p:cNvSpPr/>
-          <p:nvPr/>
-        </p:nvSpPr>
-        <p:spPr>
-          <a:xfrm>
-            <a:off x="868680" y="1417320"/>
-            <a:ext cx="6675120" cy="4434840"/>
+            <a:endParaRPr lang="en-US" sz="3400" dirty="0"/>
+          </a:p>
+        </p:txBody>
+      </p:sp>
+      <p:sp>
+        <p:nvSpPr>
+          <p:cNvPr id="9" name="Text 7"/>
+          <p:cNvSpPr/>
+          <p:nvPr/>
+        </p:nvSpPr>
+        <p:spPr>
+          <a:xfrm>
+            <a:off x="868680" y="1508760"/>
+            <a:ext cx="6537960" cy="4160520"/>
           </a:xfrm>
           <a:prstGeom prst="rect">
             <a:avLst/>
@@ -6695,7 +6951,7 @@
           <a:lstStyle/>
           <a:p>
             <a:r>
-              <a:rPr lang="en-US" sz="1700" dirty="0">
+              <a:rPr lang="en-US" sz="2100" dirty="0">
                 <a:solidFill>
                   <a:srgbClr val="17364A"/>
                 </a:solidFill>
@@ -6705,11 +6961,11 @@
               </a:rPr>
               <a:t>What would make performance unacceptable for this use case?</a:t>
             </a:r>
-            <a:endParaRPr lang="en-US" sz="1700" dirty="0"/>
-          </a:p>
-          <a:p>
-            <a:r>
-              <a:rPr lang="en-US" sz="1700" dirty="0">
+            <a:endParaRPr lang="en-US" sz="2100" dirty="0"/>
+          </a:p>
+          <a:p>
+            <a:r>
+              <a:rPr lang="en-US" sz="2100" dirty="0">
                 <a:solidFill>
                   <a:srgbClr val="17364A"/>
                 </a:solidFill>
@@ -6719,13 +6975,13 @@
               </a:rPr>
               <a:t>How will the agency monitor performance after deployment?</a:t>
             </a:r>
-            <a:endParaRPr lang="en-US" sz="1700" dirty="0"/>
-          </a:p>
-        </p:txBody>
-      </p:sp>
-      <p:sp>
-        <p:nvSpPr>
-          <p:cNvPr id="9" name="Shape 7"/>
+            <a:endParaRPr lang="en-US" sz="2100" dirty="0"/>
+          </a:p>
+        </p:txBody>
+      </p:sp>
+      <p:sp>
+        <p:nvSpPr>
+          <p:cNvPr id="10" name="Shape 8"/>
           <p:cNvSpPr/>
           <p:nvPr/>
         </p:nvSpPr>
@@ -6752,14 +7008,14 @@
       </p:sp>
       <p:sp>
         <p:nvSpPr>
-          <p:cNvPr id="10" name="Text 8"/>
+          <p:cNvPr id="11" name="Text 9"/>
           <p:cNvSpPr/>
           <p:nvPr/>
         </p:nvSpPr>
         <p:spPr>
           <a:xfrm>
             <a:off x="8074152" y="1563624"/>
-            <a:ext cx="2825496" cy="201168"/>
+            <a:ext cx="2825496" cy="256032"/>
           </a:xfrm>
           <a:prstGeom prst="rect">
             <a:avLst/>
@@ -6775,7 +7031,7 @@
               <a:buNone/>
             </a:pPr>
             <a:r>
-              <a:rPr lang="en-US" sz="950" b="1" dirty="0">
+              <a:rPr lang="en-US" sz="1300" b="1" dirty="0">
                 <a:solidFill>
                   <a:srgbClr val="0068B7"/>
                 </a:solidFill>
@@ -6785,20 +7041,20 @@
               </a:rPr>
               <a:t>Key idea</a:t>
             </a:r>
-            <a:endParaRPr lang="en-US" sz="950" dirty="0"/>
-          </a:p>
-        </p:txBody>
-      </p:sp>
-      <p:sp>
-        <p:nvSpPr>
-          <p:cNvPr id="11" name="Text 9"/>
-          <p:cNvSpPr/>
-          <p:nvPr/>
-        </p:nvSpPr>
-        <p:spPr>
-          <a:xfrm>
-            <a:off x="8074152" y="1856232"/>
-            <a:ext cx="2825496" cy="1261872"/>
+            <a:endParaRPr lang="en-US" sz="1300" dirty="0"/>
+          </a:p>
+        </p:txBody>
+      </p:sp>
+      <p:sp>
+        <p:nvSpPr>
+          <p:cNvPr id="12" name="Text 10"/>
+          <p:cNvSpPr/>
+          <p:nvPr/>
+        </p:nvSpPr>
+        <p:spPr>
+          <a:xfrm>
+            <a:off x="8074152" y="1920240"/>
+            <a:ext cx="2825496" cy="1188720"/>
           </a:xfrm>
           <a:prstGeom prst="rect">
             <a:avLst/>
@@ -6816,7 +7072,7 @@
               <a:buNone/>
             </a:pPr>
             <a:r>
-              <a:rPr lang="en-US" sz="1250" dirty="0">
+              <a:rPr lang="en-US" sz="1550" dirty="0">
                 <a:solidFill>
                   <a:srgbClr val="17364A"/>
                 </a:solidFill>
@@ -6826,13 +7082,13 @@
               </a:rPr>
               <a:t>What would make performance unacceptable for this use case?</a:t>
             </a:r>
-            <a:endParaRPr lang="en-US" sz="1250" dirty="0"/>
-          </a:p>
-        </p:txBody>
-      </p:sp>
-      <p:sp>
-        <p:nvSpPr>
-          <p:cNvPr id="12" name="Shape 10"/>
+            <a:endParaRPr lang="en-US" sz="1550" dirty="0"/>
+          </a:p>
+        </p:txBody>
+      </p:sp>
+      <p:sp>
+        <p:nvSpPr>
+          <p:cNvPr id="13" name="Shape 11"/>
           <p:cNvSpPr/>
           <p:nvPr/>
         </p:nvSpPr>
@@ -6859,14 +7115,14 @@
       </p:sp>
       <p:sp>
         <p:nvSpPr>
-          <p:cNvPr id="13" name="Text 11"/>
+          <p:cNvPr id="14" name="Text 12"/>
           <p:cNvSpPr/>
           <p:nvPr/>
         </p:nvSpPr>
         <p:spPr>
           <a:xfrm>
             <a:off x="8074152" y="3666744"/>
-            <a:ext cx="2825496" cy="201168"/>
+            <a:ext cx="2825496" cy="256032"/>
           </a:xfrm>
           <a:prstGeom prst="rect">
             <a:avLst/>
@@ -6882,7 +7138,7 @@
               <a:buNone/>
             </a:pPr>
             <a:r>
-              <a:rPr lang="en-US" sz="950" b="1" dirty="0">
+              <a:rPr lang="en-US" sz="1300" b="1" dirty="0">
                 <a:solidFill>
                   <a:srgbClr val="0068B7"/>
                 </a:solidFill>
@@ -6892,20 +7148,20 @@
               </a:rPr>
               <a:t>Use this for</a:t>
             </a:r>
-            <a:endParaRPr lang="en-US" sz="950" dirty="0"/>
-          </a:p>
-        </p:txBody>
-      </p:sp>
-      <p:sp>
-        <p:nvSpPr>
-          <p:cNvPr id="14" name="Text 12"/>
-          <p:cNvSpPr/>
-          <p:nvPr/>
-        </p:nvSpPr>
-        <p:spPr>
-          <a:xfrm>
-            <a:off x="8074152" y="3959352"/>
-            <a:ext cx="2825496" cy="1170432"/>
+            <a:endParaRPr lang="en-US" sz="1300" dirty="0"/>
+          </a:p>
+        </p:txBody>
+      </p:sp>
+      <p:sp>
+        <p:nvSpPr>
+          <p:cNvPr id="15" name="Text 13"/>
+          <p:cNvSpPr/>
+          <p:nvPr/>
+        </p:nvSpPr>
+        <p:spPr>
+          <a:xfrm>
+            <a:off x="8074152" y="4023360"/>
+            <a:ext cx="2825496" cy="1097280"/>
           </a:xfrm>
           <a:prstGeom prst="rect">
             <a:avLst/>
@@ -6923,7 +7179,7 @@
               <a:buNone/>
             </a:pPr>
             <a:r>
-              <a:rPr lang="en-US" sz="1250" dirty="0">
+              <a:rPr lang="en-US" sz="1550" dirty="0">
                 <a:solidFill>
                   <a:srgbClr val="17364A"/>
                 </a:solidFill>
@@ -6933,7 +7189,7 @@
               </a:rPr>
               <a:t>Connect the concept to public health decisions, safeguards, documentation, or implementation work.</a:t>
             </a:r>
-            <a:endParaRPr lang="en-US" sz="1250" dirty="0"/>
+            <a:endParaRPr lang="en-US" sz="1550" dirty="0"/>
           </a:p>
         </p:txBody>
       </p:sp>
@@ -7130,7 +7386,7 @@
                 <a:ea typeface="Aptos" pitchFamily="34" charset="-122"/>
                 <a:cs typeface="Aptos" pitchFamily="34" charset="-120"/>
               </a:rPr>
-              <a:t>© Paula Soper</a:t>
+              <a:t>Â© Paula Soper</a:t>
             </a:r>
             <a:endParaRPr lang="en-US" sz="800" dirty="0"/>
           </a:p>
@@ -7138,7 +7394,46 @@
       </p:sp>
       <p:sp>
         <p:nvSpPr>
-          <p:cNvPr id="7" name="Shape 5"/>
+          <p:cNvPr id="7" name="Text 5"/>
+          <p:cNvSpPr/>
+          <p:nvPr/>
+        </p:nvSpPr>
+        <p:spPr>
+          <a:xfrm>
+            <a:off x="11137392" y="6510528"/>
+            <a:ext cx="411480" cy="201168"/>
+          </a:xfrm>
+          <a:prstGeom prst="rect">
+            <a:avLst/>
+          </a:prstGeom>
+          <a:noFill/>
+          <a:ln/>
+        </p:spPr>
+        <p:txBody>
+          <a:bodyPr wrap="square" lIns="0" tIns="0" rIns="0" bIns="0" rtlCol="0" anchor="ctr"/>
+          <a:lstStyle/>
+          <a:p>
+            <a:pPr algn="r" indent="0" marL="0">
+              <a:buNone/>
+            </a:pPr>
+            <a:r>
+              <a:rPr lang="en-US" sz="900" dirty="0">
+                <a:solidFill>
+                  <a:srgbClr val="5F7181"/>
+                </a:solidFill>
+                <a:latin typeface="Aptos" pitchFamily="34" charset="0"/>
+                <a:ea typeface="Aptos" pitchFamily="34" charset="-122"/>
+                <a:cs typeface="Aptos" pitchFamily="34" charset="-120"/>
+              </a:rPr>
+              <a:t>17</a:t>
+            </a:r>
+            <a:endParaRPr lang="en-US" sz="900" dirty="0"/>
+          </a:p>
+        </p:txBody>
+      </p:sp>
+      <p:sp>
+        <p:nvSpPr>
+          <p:cNvPr id="8" name="Shape 6"/>
           <p:cNvSpPr/>
           <p:nvPr/>
         </p:nvSpPr>
@@ -7163,7 +7458,7 @@
       </p:sp>
       <p:sp>
         <p:nvSpPr>
-          <p:cNvPr id="8" name="Text 6"/>
+          <p:cNvPr id="9" name="Text 7"/>
           <p:cNvSpPr/>
           <p:nvPr/>
         </p:nvSpPr>
@@ -7202,14 +7497,14 @@
       </p:sp>
       <p:sp>
         <p:nvSpPr>
-          <p:cNvPr id="9" name="Text 7"/>
+          <p:cNvPr id="10" name="Text 8"/>
           <p:cNvSpPr/>
           <p:nvPr/>
         </p:nvSpPr>
         <p:spPr>
           <a:xfrm>
             <a:off x="640080" y="621792"/>
-            <a:ext cx="10881360" cy="566928"/>
+            <a:ext cx="10881360" cy="713232"/>
           </a:xfrm>
           <a:prstGeom prst="rect">
             <a:avLst/>
@@ -7227,7 +7522,7 @@
               <a:buNone/>
             </a:pPr>
             <a:r>
-              <a:rPr lang="en-US" sz="2700" b="1" dirty="0">
+              <a:rPr lang="en-US" sz="3400" b="1" dirty="0">
                 <a:solidFill>
                   <a:srgbClr val="003A63"/>
                 </a:solidFill>
@@ -7237,20 +7532,20 @@
               </a:rPr>
               <a:t>Practical Exercise</a:t>
             </a:r>
-            <a:endParaRPr lang="en-US" sz="2700" dirty="0"/>
-          </a:p>
-        </p:txBody>
-      </p:sp>
-      <p:sp>
-        <p:nvSpPr>
-          <p:cNvPr id="10" name="Text 8"/>
-          <p:cNvSpPr/>
-          <p:nvPr/>
-        </p:nvSpPr>
-        <p:spPr>
-          <a:xfrm>
-            <a:off x="868680" y="1417320"/>
-            <a:ext cx="6675120" cy="4434840"/>
+            <a:endParaRPr lang="en-US" sz="3400" dirty="0"/>
+          </a:p>
+        </p:txBody>
+      </p:sp>
+      <p:sp>
+        <p:nvSpPr>
+          <p:cNvPr id="11" name="Text 9"/>
+          <p:cNvSpPr/>
+          <p:nvPr/>
+        </p:nvSpPr>
+        <p:spPr>
+          <a:xfrm>
+            <a:off x="868680" y="1508760"/>
+            <a:ext cx="6537960" cy="4160520"/>
           </a:xfrm>
           <a:prstGeom prst="rect">
             <a:avLst/>
@@ -7265,7 +7560,7 @@
           <a:lstStyle/>
           <a:p>
             <a:r>
-              <a:rPr lang="en-US" sz="1700" dirty="0">
+              <a:rPr lang="en-US" sz="2100" dirty="0">
                 <a:solidFill>
                   <a:srgbClr val="17364A"/>
                 </a:solidFill>
@@ -7275,11 +7570,11 @@
               </a:rPr>
               <a:t>Create an advanced validation plan for one AI-supported workflow.</a:t>
             </a:r>
-            <a:endParaRPr lang="en-US" sz="1700" dirty="0"/>
-          </a:p>
-          <a:p>
-            <a:r>
-              <a:rPr lang="en-US" sz="1700" dirty="0">
+            <a:endParaRPr lang="en-US" sz="2100" dirty="0"/>
+          </a:p>
+          <a:p>
+            <a:r>
+              <a:rPr lang="en-US" sz="2100" dirty="0">
                 <a:solidFill>
                   <a:srgbClr val="17364A"/>
                 </a:solidFill>
@@ -7287,13 +7582,13 @@
                 <a:ea typeface="Aptos" pitchFamily="34" charset="-122"/>
                 <a:cs typeface="Aptos" pitchFamily="34" charset="-120"/>
               </a:rPr>
-              <a:t>Include intended use, validation dataset, comparison standard, performance metrics, subgroup analysis, error review,.</a:t>
-            </a:r>
-            <a:endParaRPr lang="en-US" sz="1700" dirty="0"/>
-          </a:p>
-          <a:p>
-            <a:r>
-              <a:rPr lang="en-US" sz="1700" dirty="0">
+              <a:t>Include intended use, validation dataset, comparison standard, performance metrics, subgroup analysis,.</a:t>
+            </a:r>
+            <a:endParaRPr lang="en-US" sz="2100" dirty="0"/>
+          </a:p>
+          <a:p>
+            <a:r>
+              <a:rPr lang="en-US" sz="2100" dirty="0">
                 <a:solidFill>
                   <a:srgbClr val="17364A"/>
                 </a:solidFill>
@@ -7301,15 +7596,15 @@
                 <a:ea typeface="Aptos" pitchFamily="34" charset="-122"/>
                 <a:cs typeface="Aptos" pitchFamily="34" charset="-120"/>
               </a:rPr>
-              <a:t>The plan should clearly explain how validation results will be interpreted and who has authority to approve, limit, pause,.</a:t>
-            </a:r>
-            <a:endParaRPr lang="en-US" sz="1700" dirty="0"/>
-          </a:p>
-        </p:txBody>
-      </p:sp>
-      <p:sp>
-        <p:nvSpPr>
-          <p:cNvPr id="11" name="Shape 9"/>
+              <a:t>The plan should clearly explain how validation results will be interpreted and who has authority to.</a:t>
+            </a:r>
+            <a:endParaRPr lang="en-US" sz="2100" dirty="0"/>
+          </a:p>
+        </p:txBody>
+      </p:sp>
+      <p:sp>
+        <p:nvSpPr>
+          <p:cNvPr id="12" name="Shape 10"/>
           <p:cNvSpPr/>
           <p:nvPr/>
         </p:nvSpPr>
@@ -7336,14 +7631,14 @@
       </p:sp>
       <p:sp>
         <p:nvSpPr>
-          <p:cNvPr id="12" name="Text 10"/>
+          <p:cNvPr id="13" name="Text 11"/>
           <p:cNvSpPr/>
           <p:nvPr/>
         </p:nvSpPr>
         <p:spPr>
           <a:xfrm>
             <a:off x="8074152" y="1563624"/>
-            <a:ext cx="2825496" cy="201168"/>
+            <a:ext cx="2825496" cy="256032"/>
           </a:xfrm>
           <a:prstGeom prst="rect">
             <a:avLst/>
@@ -7359,7 +7654,7 @@
               <a:buNone/>
             </a:pPr>
             <a:r>
-              <a:rPr lang="en-US" sz="950" b="1" dirty="0">
+              <a:rPr lang="en-US" sz="1300" b="1" dirty="0">
                 <a:solidFill>
                   <a:srgbClr val="0068B7"/>
                 </a:solidFill>
@@ -7369,20 +7664,20 @@
               </a:rPr>
               <a:t>Key idea</a:t>
             </a:r>
-            <a:endParaRPr lang="en-US" sz="950" dirty="0"/>
-          </a:p>
-        </p:txBody>
-      </p:sp>
-      <p:sp>
-        <p:nvSpPr>
-          <p:cNvPr id="13" name="Text 11"/>
-          <p:cNvSpPr/>
-          <p:nvPr/>
-        </p:nvSpPr>
-        <p:spPr>
-          <a:xfrm>
-            <a:off x="8074152" y="1856232"/>
-            <a:ext cx="2825496" cy="1261872"/>
+            <a:endParaRPr lang="en-US" sz="1300" dirty="0"/>
+          </a:p>
+        </p:txBody>
+      </p:sp>
+      <p:sp>
+        <p:nvSpPr>
+          <p:cNvPr id="14" name="Text 12"/>
+          <p:cNvSpPr/>
+          <p:nvPr/>
+        </p:nvSpPr>
+        <p:spPr>
+          <a:xfrm>
+            <a:off x="8074152" y="1920240"/>
+            <a:ext cx="2825496" cy="1188720"/>
           </a:xfrm>
           <a:prstGeom prst="rect">
             <a:avLst/>
@@ -7400,7 +7695,7 @@
               <a:buNone/>
             </a:pPr>
             <a:r>
-              <a:rPr lang="en-US" sz="1250" dirty="0">
+              <a:rPr lang="en-US" sz="1550" dirty="0">
                 <a:solidFill>
                   <a:srgbClr val="17364A"/>
                 </a:solidFill>
@@ -7410,13 +7705,13 @@
               </a:rPr>
               <a:t>Create an advanced validation plan for one AI-supported workflow.</a:t>
             </a:r>
-            <a:endParaRPr lang="en-US" sz="1250" dirty="0"/>
-          </a:p>
-        </p:txBody>
-      </p:sp>
-      <p:sp>
-        <p:nvSpPr>
-          <p:cNvPr id="14" name="Shape 12"/>
+            <a:endParaRPr lang="en-US" sz="1550" dirty="0"/>
+          </a:p>
+        </p:txBody>
+      </p:sp>
+      <p:sp>
+        <p:nvSpPr>
+          <p:cNvPr id="15" name="Shape 13"/>
           <p:cNvSpPr/>
           <p:nvPr/>
         </p:nvSpPr>
@@ -7443,14 +7738,14 @@
       </p:sp>
       <p:sp>
         <p:nvSpPr>
-          <p:cNvPr id="15" name="Text 13"/>
+          <p:cNvPr id="16" name="Text 14"/>
           <p:cNvSpPr/>
           <p:nvPr/>
         </p:nvSpPr>
         <p:spPr>
           <a:xfrm>
             <a:off x="8074152" y="3666744"/>
-            <a:ext cx="2825496" cy="201168"/>
+            <a:ext cx="2825496" cy="256032"/>
           </a:xfrm>
           <a:prstGeom prst="rect">
             <a:avLst/>
@@ -7466,7 +7761,7 @@
               <a:buNone/>
             </a:pPr>
             <a:r>
-              <a:rPr lang="en-US" sz="950" b="1" dirty="0">
+              <a:rPr lang="en-US" sz="1300" b="1" dirty="0">
                 <a:solidFill>
                   <a:srgbClr val="0068B7"/>
                 </a:solidFill>
@@ -7476,20 +7771,20 @@
               </a:rPr>
               <a:t>Use this for</a:t>
             </a:r>
-            <a:endParaRPr lang="en-US" sz="950" dirty="0"/>
-          </a:p>
-        </p:txBody>
-      </p:sp>
-      <p:sp>
-        <p:nvSpPr>
-          <p:cNvPr id="16" name="Text 14"/>
-          <p:cNvSpPr/>
-          <p:nvPr/>
-        </p:nvSpPr>
-        <p:spPr>
-          <a:xfrm>
-            <a:off x="8074152" y="3959352"/>
-            <a:ext cx="2825496" cy="1170432"/>
+            <a:endParaRPr lang="en-US" sz="1300" dirty="0"/>
+          </a:p>
+        </p:txBody>
+      </p:sp>
+      <p:sp>
+        <p:nvSpPr>
+          <p:cNvPr id="17" name="Text 15"/>
+          <p:cNvSpPr/>
+          <p:nvPr/>
+        </p:nvSpPr>
+        <p:spPr>
+          <a:xfrm>
+            <a:off x="8074152" y="4023360"/>
+            <a:ext cx="2825496" cy="1097280"/>
           </a:xfrm>
           <a:prstGeom prst="rect">
             <a:avLst/>
@@ -7507,7 +7802,7 @@
               <a:buNone/>
             </a:pPr>
             <a:r>
-              <a:rPr lang="en-US" sz="1250" dirty="0">
+              <a:rPr lang="en-US" sz="1550" dirty="0">
                 <a:solidFill>
                   <a:srgbClr val="17364A"/>
                 </a:solidFill>
@@ -7517,7 +7812,7 @@
               </a:rPr>
               <a:t>Connect the concept to public health decisions, safeguards, documentation, or implementation work.</a:t>
             </a:r>
-            <a:endParaRPr lang="en-US" sz="1250" dirty="0"/>
+            <a:endParaRPr lang="en-US" sz="1550" dirty="0"/>
           </a:p>
         </p:txBody>
       </p:sp>
@@ -7714,7 +8009,7 @@
                 <a:ea typeface="Aptos" pitchFamily="34" charset="-122"/>
                 <a:cs typeface="Aptos" pitchFamily="34" charset="-120"/>
               </a:rPr>
-              <a:t>© Paula Soper</a:t>
+              <a:t>Â© Paula Soper</a:t>
             </a:r>
             <a:endParaRPr lang="en-US" sz="800" dirty="0"/>
           </a:p>
@@ -7722,7 +8017,46 @@
       </p:sp>
       <p:sp>
         <p:nvSpPr>
-          <p:cNvPr id="7" name="Shape 5"/>
+          <p:cNvPr id="7" name="Text 5"/>
+          <p:cNvSpPr/>
+          <p:nvPr/>
+        </p:nvSpPr>
+        <p:spPr>
+          <a:xfrm>
+            <a:off x="11137392" y="6510528"/>
+            <a:ext cx="411480" cy="201168"/>
+          </a:xfrm>
+          <a:prstGeom prst="rect">
+            <a:avLst/>
+          </a:prstGeom>
+          <a:noFill/>
+          <a:ln/>
+        </p:spPr>
+        <p:txBody>
+          <a:bodyPr wrap="square" lIns="0" tIns="0" rIns="0" bIns="0" rtlCol="0" anchor="ctr"/>
+          <a:lstStyle/>
+          <a:p>
+            <a:pPr algn="r" indent="0" marL="0">
+              <a:buNone/>
+            </a:pPr>
+            <a:r>
+              <a:rPr lang="en-US" sz="900" dirty="0">
+                <a:solidFill>
+                  <a:srgbClr val="5F7181"/>
+                </a:solidFill>
+                <a:latin typeface="Aptos" pitchFamily="34" charset="0"/>
+                <a:ea typeface="Aptos" pitchFamily="34" charset="-122"/>
+                <a:cs typeface="Aptos" pitchFamily="34" charset="-120"/>
+              </a:rPr>
+              <a:t>18</a:t>
+            </a:r>
+            <a:endParaRPr lang="en-US" sz="900" dirty="0"/>
+          </a:p>
+        </p:txBody>
+      </p:sp>
+      <p:sp>
+        <p:nvSpPr>
+          <p:cNvPr id="8" name="Shape 6"/>
           <p:cNvSpPr/>
           <p:nvPr/>
         </p:nvSpPr>
@@ -7747,7 +8081,7 @@
       </p:sp>
       <p:sp>
         <p:nvSpPr>
-          <p:cNvPr id="8" name="Text 6"/>
+          <p:cNvPr id="9" name="Text 7"/>
           <p:cNvSpPr/>
           <p:nvPr/>
         </p:nvSpPr>
@@ -7786,14 +8120,14 @@
       </p:sp>
       <p:sp>
         <p:nvSpPr>
-          <p:cNvPr id="9" name="Text 7"/>
+          <p:cNvPr id="10" name="Text 8"/>
           <p:cNvSpPr/>
           <p:nvPr/>
         </p:nvSpPr>
         <p:spPr>
           <a:xfrm>
             <a:off x="640080" y="621792"/>
-            <a:ext cx="10881360" cy="566928"/>
+            <a:ext cx="10881360" cy="713232"/>
           </a:xfrm>
           <a:prstGeom prst="rect">
             <a:avLst/>
@@ -7811,7 +8145,7 @@
               <a:buNone/>
             </a:pPr>
             <a:r>
-              <a:rPr lang="en-US" sz="2700" b="1" dirty="0">
+              <a:rPr lang="en-US" sz="3400" b="1" dirty="0">
                 <a:solidFill>
                   <a:srgbClr val="003A63"/>
                 </a:solidFill>
@@ -7821,20 +8155,20 @@
               </a:rPr>
               <a:t>Expected Artifact or Evidence</a:t>
             </a:r>
-            <a:endParaRPr lang="en-US" sz="2700" dirty="0"/>
-          </a:p>
-        </p:txBody>
-      </p:sp>
-      <p:sp>
-        <p:nvSpPr>
-          <p:cNvPr id="10" name="Text 8"/>
-          <p:cNvSpPr/>
-          <p:nvPr/>
-        </p:nvSpPr>
-        <p:spPr>
-          <a:xfrm>
-            <a:off x="868680" y="1417320"/>
-            <a:ext cx="6675120" cy="4434840"/>
+            <a:endParaRPr lang="en-US" sz="3400" dirty="0"/>
+          </a:p>
+        </p:txBody>
+      </p:sp>
+      <p:sp>
+        <p:nvSpPr>
+          <p:cNvPr id="11" name="Text 9"/>
+          <p:cNvSpPr/>
+          <p:nvPr/>
+        </p:nvSpPr>
+        <p:spPr>
+          <a:xfrm>
+            <a:off x="868680" y="1508760"/>
+            <a:ext cx="6537960" cy="4160520"/>
           </a:xfrm>
           <a:prstGeom prst="rect">
             <a:avLst/>
@@ -7849,7 +8183,7 @@
           <a:lstStyle/>
           <a:p>
             <a:r>
-              <a:rPr lang="en-US" sz="1700" dirty="0">
+              <a:rPr lang="en-US" sz="2100" dirty="0">
                 <a:solidFill>
                   <a:srgbClr val="17364A"/>
                 </a:solidFill>
@@ -7859,11 +8193,11 @@
               </a:rPr>
               <a:t>Advanced validation plan</a:t>
             </a:r>
-            <a:endParaRPr lang="en-US" sz="1700" dirty="0"/>
-          </a:p>
-          <a:p>
-            <a:r>
-              <a:rPr lang="en-US" sz="1700" dirty="0">
+            <a:endParaRPr lang="en-US" sz="2100" dirty="0"/>
+          </a:p>
+          <a:p>
+            <a:r>
+              <a:rPr lang="en-US" sz="2100" dirty="0">
                 <a:solidFill>
                   <a:srgbClr val="17364A"/>
                 </a:solidFill>
@@ -7873,11 +8207,11 @@
               </a:rPr>
               <a:t>Metric and error-consequence table</a:t>
             </a:r>
-            <a:endParaRPr lang="en-US" sz="1700" dirty="0"/>
-          </a:p>
-          <a:p>
-            <a:r>
-              <a:rPr lang="en-US" sz="1700" dirty="0">
+            <a:endParaRPr lang="en-US" sz="2100" dirty="0"/>
+          </a:p>
+          <a:p>
+            <a:r>
+              <a:rPr lang="en-US" sz="2100" dirty="0">
                 <a:solidFill>
                   <a:srgbClr val="17364A"/>
                 </a:solidFill>
@@ -7887,13 +8221,13 @@
               </a:rPr>
               <a:t>Subgroup performance review plan</a:t>
             </a:r>
-            <a:endParaRPr lang="en-US" sz="1700" dirty="0"/>
-          </a:p>
-        </p:txBody>
-      </p:sp>
-      <p:sp>
-        <p:nvSpPr>
-          <p:cNvPr id="11" name="Shape 9"/>
+            <a:endParaRPr lang="en-US" sz="2100" dirty="0"/>
+          </a:p>
+        </p:txBody>
+      </p:sp>
+      <p:sp>
+        <p:nvSpPr>
+          <p:cNvPr id="12" name="Shape 10"/>
           <p:cNvSpPr/>
           <p:nvPr/>
         </p:nvSpPr>
@@ -7920,14 +8254,14 @@
       </p:sp>
       <p:sp>
         <p:nvSpPr>
-          <p:cNvPr id="12" name="Text 10"/>
+          <p:cNvPr id="13" name="Text 11"/>
           <p:cNvSpPr/>
           <p:nvPr/>
         </p:nvSpPr>
         <p:spPr>
           <a:xfrm>
             <a:off x="8074152" y="1563624"/>
-            <a:ext cx="2825496" cy="201168"/>
+            <a:ext cx="2825496" cy="256032"/>
           </a:xfrm>
           <a:prstGeom prst="rect">
             <a:avLst/>
@@ -7943,7 +8277,7 @@
               <a:buNone/>
             </a:pPr>
             <a:r>
-              <a:rPr lang="en-US" sz="950" b="1" dirty="0">
+              <a:rPr lang="en-US" sz="1300" b="1" dirty="0">
                 <a:solidFill>
                   <a:srgbClr val="0068B7"/>
                 </a:solidFill>
@@ -7953,20 +8287,20 @@
               </a:rPr>
               <a:t>Key idea</a:t>
             </a:r>
-            <a:endParaRPr lang="en-US" sz="950" dirty="0"/>
-          </a:p>
-        </p:txBody>
-      </p:sp>
-      <p:sp>
-        <p:nvSpPr>
-          <p:cNvPr id="13" name="Text 11"/>
-          <p:cNvSpPr/>
-          <p:nvPr/>
-        </p:nvSpPr>
-        <p:spPr>
-          <a:xfrm>
-            <a:off x="8074152" y="1856232"/>
-            <a:ext cx="2825496" cy="1261872"/>
+            <a:endParaRPr lang="en-US" sz="1300" dirty="0"/>
+          </a:p>
+        </p:txBody>
+      </p:sp>
+      <p:sp>
+        <p:nvSpPr>
+          <p:cNvPr id="14" name="Text 12"/>
+          <p:cNvSpPr/>
+          <p:nvPr/>
+        </p:nvSpPr>
+        <p:spPr>
+          <a:xfrm>
+            <a:off x="8074152" y="1920240"/>
+            <a:ext cx="2825496" cy="1188720"/>
           </a:xfrm>
           <a:prstGeom prst="rect">
             <a:avLst/>
@@ -7984,7 +8318,7 @@
               <a:buNone/>
             </a:pPr>
             <a:r>
-              <a:rPr lang="en-US" sz="1250" dirty="0">
+              <a:rPr lang="en-US" sz="1550" dirty="0">
                 <a:solidFill>
                   <a:srgbClr val="17364A"/>
                 </a:solidFill>
@@ -7994,13 +8328,13 @@
               </a:rPr>
               <a:t>Advanced validation plan</a:t>
             </a:r>
-            <a:endParaRPr lang="en-US" sz="1250" dirty="0"/>
-          </a:p>
-        </p:txBody>
-      </p:sp>
-      <p:sp>
-        <p:nvSpPr>
-          <p:cNvPr id="14" name="Shape 12"/>
+            <a:endParaRPr lang="en-US" sz="1550" dirty="0"/>
+          </a:p>
+        </p:txBody>
+      </p:sp>
+      <p:sp>
+        <p:nvSpPr>
+          <p:cNvPr id="15" name="Shape 13"/>
           <p:cNvSpPr/>
           <p:nvPr/>
         </p:nvSpPr>
@@ -8027,14 +8361,14 @@
       </p:sp>
       <p:sp>
         <p:nvSpPr>
-          <p:cNvPr id="15" name="Text 13"/>
+          <p:cNvPr id="16" name="Text 14"/>
           <p:cNvSpPr/>
           <p:nvPr/>
         </p:nvSpPr>
         <p:spPr>
           <a:xfrm>
             <a:off x="8074152" y="3666744"/>
-            <a:ext cx="2825496" cy="201168"/>
+            <a:ext cx="2825496" cy="256032"/>
           </a:xfrm>
           <a:prstGeom prst="rect">
             <a:avLst/>
@@ -8050,7 +8384,7 @@
               <a:buNone/>
             </a:pPr>
             <a:r>
-              <a:rPr lang="en-US" sz="950" b="1" dirty="0">
+              <a:rPr lang="en-US" sz="1300" b="1" dirty="0">
                 <a:solidFill>
                   <a:srgbClr val="0068B7"/>
                 </a:solidFill>
@@ -8060,20 +8394,20 @@
               </a:rPr>
               <a:t>Use this for</a:t>
             </a:r>
-            <a:endParaRPr lang="en-US" sz="950" dirty="0"/>
-          </a:p>
-        </p:txBody>
-      </p:sp>
-      <p:sp>
-        <p:nvSpPr>
-          <p:cNvPr id="16" name="Text 14"/>
-          <p:cNvSpPr/>
-          <p:nvPr/>
-        </p:nvSpPr>
-        <p:spPr>
-          <a:xfrm>
-            <a:off x="8074152" y="3959352"/>
-            <a:ext cx="2825496" cy="1170432"/>
+            <a:endParaRPr lang="en-US" sz="1300" dirty="0"/>
+          </a:p>
+        </p:txBody>
+      </p:sp>
+      <p:sp>
+        <p:nvSpPr>
+          <p:cNvPr id="17" name="Text 15"/>
+          <p:cNvSpPr/>
+          <p:nvPr/>
+        </p:nvSpPr>
+        <p:spPr>
+          <a:xfrm>
+            <a:off x="8074152" y="4023360"/>
+            <a:ext cx="2825496" cy="1097280"/>
           </a:xfrm>
           <a:prstGeom prst="rect">
             <a:avLst/>
@@ -8091,7 +8425,7 @@
               <a:buNone/>
             </a:pPr>
             <a:r>
-              <a:rPr lang="en-US" sz="1250" dirty="0">
+              <a:rPr lang="en-US" sz="1550" dirty="0">
                 <a:solidFill>
                   <a:srgbClr val="17364A"/>
                 </a:solidFill>
@@ -8101,7 +8435,7 @@
               </a:rPr>
               <a:t>Connect the concept to public health decisions, safeguards, documentation, or implementation work.</a:t>
             </a:r>
-            <a:endParaRPr lang="en-US" sz="1250" dirty="0"/>
+            <a:endParaRPr lang="en-US" sz="1550" dirty="0"/>
           </a:p>
         </p:txBody>
       </p:sp>
@@ -8298,7 +8632,7 @@
                 <a:ea typeface="Aptos" pitchFamily="34" charset="-122"/>
                 <a:cs typeface="Aptos" pitchFamily="34" charset="-120"/>
               </a:rPr>
-              <a:t>© Paula Soper</a:t>
+              <a:t>Â© Paula Soper</a:t>
             </a:r>
             <a:endParaRPr lang="en-US" sz="800" dirty="0"/>
           </a:p>
@@ -8312,8 +8646,47 @@
         </p:nvSpPr>
         <p:spPr>
           <a:xfrm>
+            <a:off x="11137392" y="6510528"/>
+            <a:ext cx="411480" cy="201168"/>
+          </a:xfrm>
+          <a:prstGeom prst="rect">
+            <a:avLst/>
+          </a:prstGeom>
+          <a:noFill/>
+          <a:ln/>
+        </p:spPr>
+        <p:txBody>
+          <a:bodyPr wrap="square" lIns="0" tIns="0" rIns="0" bIns="0" rtlCol="0" anchor="ctr"/>
+          <a:lstStyle/>
+          <a:p>
+            <a:pPr algn="r" indent="0" marL="0">
+              <a:buNone/>
+            </a:pPr>
+            <a:r>
+              <a:rPr lang="en-US" sz="900" dirty="0">
+                <a:solidFill>
+                  <a:srgbClr val="5F7181"/>
+                </a:solidFill>
+                <a:latin typeface="Aptos" pitchFamily="34" charset="0"/>
+                <a:ea typeface="Aptos" pitchFamily="34" charset="-122"/>
+                <a:cs typeface="Aptos" pitchFamily="34" charset="-120"/>
+              </a:rPr>
+              <a:t>19</a:t>
+            </a:r>
+            <a:endParaRPr lang="en-US" sz="900" dirty="0"/>
+          </a:p>
+        </p:txBody>
+      </p:sp>
+      <p:sp>
+        <p:nvSpPr>
+          <p:cNvPr id="8" name="Text 6"/>
+          <p:cNvSpPr/>
+          <p:nvPr/>
+        </p:nvSpPr>
+        <p:spPr>
+          <a:xfrm>
             <a:off x="640080" y="658368"/>
-            <a:ext cx="10881360" cy="566928"/>
+            <a:ext cx="10881360" cy="713232"/>
           </a:xfrm>
           <a:prstGeom prst="rect">
             <a:avLst/>
@@ -8331,7 +8704,7 @@
               <a:buNone/>
             </a:pPr>
             <a:r>
-              <a:rPr lang="en-US" sz="2700" b="1" dirty="0">
+              <a:rPr lang="en-US" sz="3400" b="1" dirty="0">
                 <a:solidFill>
                   <a:srgbClr val="003A63"/>
                 </a:solidFill>
@@ -8341,20 +8714,20 @@
               </a:rPr>
               <a:t>Expected Artifact or Evidence Continued</a:t>
             </a:r>
-            <a:endParaRPr lang="en-US" sz="2700" dirty="0"/>
-          </a:p>
-        </p:txBody>
-      </p:sp>
-      <p:sp>
-        <p:nvSpPr>
-          <p:cNvPr id="8" name="Text 6"/>
-          <p:cNvSpPr/>
-          <p:nvPr/>
-        </p:nvSpPr>
-        <p:spPr>
-          <a:xfrm>
-            <a:off x="868680" y="1417320"/>
-            <a:ext cx="6675120" cy="4434840"/>
+            <a:endParaRPr lang="en-US" sz="3400" dirty="0"/>
+          </a:p>
+        </p:txBody>
+      </p:sp>
+      <p:sp>
+        <p:nvSpPr>
+          <p:cNvPr id="9" name="Text 7"/>
+          <p:cNvSpPr/>
+          <p:nvPr/>
+        </p:nvSpPr>
+        <p:spPr>
+          <a:xfrm>
+            <a:off x="868680" y="1508760"/>
+            <a:ext cx="6537960" cy="4160520"/>
           </a:xfrm>
           <a:prstGeom prst="rect">
             <a:avLst/>
@@ -8369,7 +8742,7 @@
           <a:lstStyle/>
           <a:p>
             <a:r>
-              <a:rPr lang="en-US" sz="1700" dirty="0">
+              <a:rPr lang="en-US" sz="2100" dirty="0">
                 <a:solidFill>
                   <a:srgbClr val="17364A"/>
                 </a:solidFill>
@@ -8379,13 +8752,13 @@
               </a:rPr>
               <a:t>Post-deployment monitoring schedule</a:t>
             </a:r>
-            <a:endParaRPr lang="en-US" sz="1700" dirty="0"/>
-          </a:p>
-        </p:txBody>
-      </p:sp>
-      <p:sp>
-        <p:nvSpPr>
-          <p:cNvPr id="9" name="Shape 7"/>
+            <a:endParaRPr lang="en-US" sz="2100" dirty="0"/>
+          </a:p>
+        </p:txBody>
+      </p:sp>
+      <p:sp>
+        <p:nvSpPr>
+          <p:cNvPr id="10" name="Shape 8"/>
           <p:cNvSpPr/>
           <p:nvPr/>
         </p:nvSpPr>
@@ -8412,14 +8785,14 @@
       </p:sp>
       <p:sp>
         <p:nvSpPr>
-          <p:cNvPr id="10" name="Text 8"/>
+          <p:cNvPr id="11" name="Text 9"/>
           <p:cNvSpPr/>
           <p:nvPr/>
         </p:nvSpPr>
         <p:spPr>
           <a:xfrm>
             <a:off x="8074152" y="1563624"/>
-            <a:ext cx="2825496" cy="201168"/>
+            <a:ext cx="2825496" cy="256032"/>
           </a:xfrm>
           <a:prstGeom prst="rect">
             <a:avLst/>
@@ -8435,7 +8808,7 @@
               <a:buNone/>
             </a:pPr>
             <a:r>
-              <a:rPr lang="en-US" sz="950" b="1" dirty="0">
+              <a:rPr lang="en-US" sz="1300" b="1" dirty="0">
                 <a:solidFill>
                   <a:srgbClr val="0068B7"/>
                 </a:solidFill>
@@ -8445,20 +8818,20 @@
               </a:rPr>
               <a:t>Key idea</a:t>
             </a:r>
-            <a:endParaRPr lang="en-US" sz="950" dirty="0"/>
-          </a:p>
-        </p:txBody>
-      </p:sp>
-      <p:sp>
-        <p:nvSpPr>
-          <p:cNvPr id="11" name="Text 9"/>
-          <p:cNvSpPr/>
-          <p:nvPr/>
-        </p:nvSpPr>
-        <p:spPr>
-          <a:xfrm>
-            <a:off x="8074152" y="1856232"/>
-            <a:ext cx="2825496" cy="1261872"/>
+            <a:endParaRPr lang="en-US" sz="1300" dirty="0"/>
+          </a:p>
+        </p:txBody>
+      </p:sp>
+      <p:sp>
+        <p:nvSpPr>
+          <p:cNvPr id="12" name="Text 10"/>
+          <p:cNvSpPr/>
+          <p:nvPr/>
+        </p:nvSpPr>
+        <p:spPr>
+          <a:xfrm>
+            <a:off x="8074152" y="1920240"/>
+            <a:ext cx="2825496" cy="1188720"/>
           </a:xfrm>
           <a:prstGeom prst="rect">
             <a:avLst/>
@@ -8476,7 +8849,7 @@
               <a:buNone/>
             </a:pPr>
             <a:r>
-              <a:rPr lang="en-US" sz="1250" dirty="0">
+              <a:rPr lang="en-US" sz="1550" dirty="0">
                 <a:solidFill>
                   <a:srgbClr val="17364A"/>
                 </a:solidFill>
@@ -8486,13 +8859,13 @@
               </a:rPr>
               <a:t>Post-deployment monitoring schedule</a:t>
             </a:r>
-            <a:endParaRPr lang="en-US" sz="1250" dirty="0"/>
-          </a:p>
-        </p:txBody>
-      </p:sp>
-      <p:sp>
-        <p:nvSpPr>
-          <p:cNvPr id="12" name="Shape 10"/>
+            <a:endParaRPr lang="en-US" sz="1550" dirty="0"/>
+          </a:p>
+        </p:txBody>
+      </p:sp>
+      <p:sp>
+        <p:nvSpPr>
+          <p:cNvPr id="13" name="Shape 11"/>
           <p:cNvSpPr/>
           <p:nvPr/>
         </p:nvSpPr>
@@ -8519,14 +8892,14 @@
       </p:sp>
       <p:sp>
         <p:nvSpPr>
-          <p:cNvPr id="13" name="Text 11"/>
+          <p:cNvPr id="14" name="Text 12"/>
           <p:cNvSpPr/>
           <p:nvPr/>
         </p:nvSpPr>
         <p:spPr>
           <a:xfrm>
             <a:off x="8074152" y="3666744"/>
-            <a:ext cx="2825496" cy="201168"/>
+            <a:ext cx="2825496" cy="256032"/>
           </a:xfrm>
           <a:prstGeom prst="rect">
             <a:avLst/>
@@ -8542,7 +8915,7 @@
               <a:buNone/>
             </a:pPr>
             <a:r>
-              <a:rPr lang="en-US" sz="950" b="1" dirty="0">
+              <a:rPr lang="en-US" sz="1300" b="1" dirty="0">
                 <a:solidFill>
                   <a:srgbClr val="0068B7"/>
                 </a:solidFill>
@@ -8552,20 +8925,20 @@
               </a:rPr>
               <a:t>Use this for</a:t>
             </a:r>
-            <a:endParaRPr lang="en-US" sz="950" dirty="0"/>
-          </a:p>
-        </p:txBody>
-      </p:sp>
-      <p:sp>
-        <p:nvSpPr>
-          <p:cNvPr id="14" name="Text 12"/>
-          <p:cNvSpPr/>
-          <p:nvPr/>
-        </p:nvSpPr>
-        <p:spPr>
-          <a:xfrm>
-            <a:off x="8074152" y="3959352"/>
-            <a:ext cx="2825496" cy="1170432"/>
+            <a:endParaRPr lang="en-US" sz="1300" dirty="0"/>
+          </a:p>
+        </p:txBody>
+      </p:sp>
+      <p:sp>
+        <p:nvSpPr>
+          <p:cNvPr id="15" name="Text 13"/>
+          <p:cNvSpPr/>
+          <p:nvPr/>
+        </p:nvSpPr>
+        <p:spPr>
+          <a:xfrm>
+            <a:off x="8074152" y="4023360"/>
+            <a:ext cx="2825496" cy="1097280"/>
           </a:xfrm>
           <a:prstGeom prst="rect">
             <a:avLst/>
@@ -8583,7 +8956,7 @@
               <a:buNone/>
             </a:pPr>
             <a:r>
-              <a:rPr lang="en-US" sz="1250" dirty="0">
+              <a:rPr lang="en-US" sz="1550" dirty="0">
                 <a:solidFill>
                   <a:srgbClr val="17364A"/>
                 </a:solidFill>
@@ -8593,7 +8966,7 @@
               </a:rPr>
               <a:t>Connect the concept to public health decisions, safeguards, documentation, or implementation work.</a:t>
             </a:r>
-            <a:endParaRPr lang="en-US" sz="1250" dirty="0"/>
+            <a:endParaRPr lang="en-US" sz="1550" dirty="0"/>
           </a:p>
         </p:txBody>
       </p:sp>
@@ -8790,7 +9163,7 @@
                 <a:ea typeface="Aptos" pitchFamily="34" charset="-122"/>
                 <a:cs typeface="Aptos" pitchFamily="34" charset="-120"/>
               </a:rPr>
-              <a:t>© Paula Soper</a:t>
+              <a:t>Â© Paula Soper</a:t>
             </a:r>
             <a:endParaRPr lang="en-US" sz="800" dirty="0"/>
           </a:p>
@@ -8804,8 +9177,47 @@
         </p:nvSpPr>
         <p:spPr>
           <a:xfrm>
+            <a:off x="11137392" y="6510528"/>
+            <a:ext cx="411480" cy="201168"/>
+          </a:xfrm>
+          <a:prstGeom prst="rect">
+            <a:avLst/>
+          </a:prstGeom>
+          <a:noFill/>
+          <a:ln/>
+        </p:spPr>
+        <p:txBody>
+          <a:bodyPr wrap="square" lIns="0" tIns="0" rIns="0" bIns="0" rtlCol="0" anchor="ctr"/>
+          <a:lstStyle/>
+          <a:p>
+            <a:pPr algn="r" indent="0" marL="0">
+              <a:buNone/>
+            </a:pPr>
+            <a:r>
+              <a:rPr lang="en-US" sz="900" dirty="0">
+                <a:solidFill>
+                  <a:srgbClr val="5F7181"/>
+                </a:solidFill>
+                <a:latin typeface="Aptos" pitchFamily="34" charset="0"/>
+                <a:ea typeface="Aptos" pitchFamily="34" charset="-122"/>
+                <a:cs typeface="Aptos" pitchFamily="34" charset="-120"/>
+              </a:rPr>
+              <a:t>2</a:t>
+            </a:r>
+            <a:endParaRPr lang="en-US" sz="900" dirty="0"/>
+          </a:p>
+        </p:txBody>
+      </p:sp>
+      <p:sp>
+        <p:nvSpPr>
+          <p:cNvPr id="8" name="Text 6"/>
+          <p:cNvSpPr/>
+          <p:nvPr/>
+        </p:nvSpPr>
+        <p:spPr>
+          <a:xfrm>
             <a:off x="640080" y="658368"/>
-            <a:ext cx="10881360" cy="566928"/>
+            <a:ext cx="10881360" cy="713232"/>
           </a:xfrm>
           <a:prstGeom prst="rect">
             <a:avLst/>
@@ -8823,7 +9235,7 @@
               <a:buNone/>
             </a:pPr>
             <a:r>
-              <a:rPr lang="en-US" sz="2700" b="1" dirty="0">
+              <a:rPr lang="en-US" sz="3400" b="1" dirty="0">
                 <a:solidFill>
                   <a:srgbClr val="003A63"/>
                 </a:solidFill>
@@ -8833,20 +9245,20 @@
               </a:rPr>
               <a:t>What this module helps you do</a:t>
             </a:r>
-            <a:endParaRPr lang="en-US" sz="2700" dirty="0"/>
-          </a:p>
-        </p:txBody>
-      </p:sp>
-      <p:sp>
-        <p:nvSpPr>
-          <p:cNvPr id="8" name="Text 6"/>
-          <p:cNvSpPr/>
-          <p:nvPr/>
-        </p:nvSpPr>
-        <p:spPr>
-          <a:xfrm>
-            <a:off x="868680" y="1417320"/>
-            <a:ext cx="6675120" cy="3291840"/>
+            <a:endParaRPr lang="en-US" sz="3400" dirty="0"/>
+          </a:p>
+        </p:txBody>
+      </p:sp>
+      <p:sp>
+        <p:nvSpPr>
+          <p:cNvPr id="9" name="Text 7"/>
+          <p:cNvSpPr/>
+          <p:nvPr/>
+        </p:nvSpPr>
+        <p:spPr>
+          <a:xfrm>
+            <a:off x="868680" y="1508760"/>
+            <a:ext cx="6446520" cy="2926080"/>
           </a:xfrm>
           <a:prstGeom prst="rect">
             <a:avLst/>
@@ -8861,7 +9273,7 @@
           <a:lstStyle/>
           <a:p>
             <a:r>
-              <a:rPr lang="en-US" sz="1700" dirty="0">
+              <a:rPr lang="en-US" sz="2100" dirty="0">
                 <a:solidFill>
                   <a:srgbClr val="17364A"/>
                 </a:solidFill>
@@ -8869,13 +9281,13 @@
                 <a:ea typeface="Aptos" pitchFamily="34" charset="-122"/>
                 <a:cs typeface="Aptos" pitchFamily="34" charset="-120"/>
               </a:rPr>
-              <a:t>Model validation is the process of determining whether an AI tool performs adequately for its intended use, population, setting, data sources, and.</a:t>
-            </a:r>
-            <a:endParaRPr lang="en-US" sz="1700" dirty="0"/>
-          </a:p>
-          <a:p>
-            <a:r>
-              <a:rPr lang="en-US" sz="1700" dirty="0">
+              <a:t>Model validation is the process of determining whether an AI tool performs adequately for its intended use,.</a:t>
+            </a:r>
+            <a:endParaRPr lang="en-US" sz="2100" dirty="0"/>
+          </a:p>
+          <a:p>
+            <a:r>
+              <a:rPr lang="en-US" sz="2100" dirty="0">
                 <a:solidFill>
                   <a:srgbClr val="17364A"/>
                 </a:solidFill>
@@ -8885,11 +9297,11 @@
               </a:rPr>
               <a:t>Basic validation asks whether the tool works at all.</a:t>
             </a:r>
-            <a:endParaRPr lang="en-US" sz="1700" dirty="0"/>
-          </a:p>
-          <a:p>
-            <a:r>
-              <a:rPr lang="en-US" sz="1700" dirty="0">
+            <a:endParaRPr lang="en-US" sz="2100" dirty="0"/>
+          </a:p>
+          <a:p>
+            <a:r>
+              <a:rPr lang="en-US" sz="2100" dirty="0">
                 <a:solidFill>
                   <a:srgbClr val="17364A"/>
                 </a:solidFill>
@@ -8897,29 +9309,15 @@
                 <a:ea typeface="Aptos" pitchFamily="34" charset="-122"/>
                 <a:cs typeface="Aptos" pitchFamily="34" charset="-120"/>
               </a:rPr>
-              <a:t>Advanced validation asks whether it works well enough, for whom, under what conditions, with what limitations, and with what monitoring requirements.</a:t>
-            </a:r>
-            <a:endParaRPr lang="en-US" sz="1700" dirty="0"/>
-          </a:p>
-          <a:p>
-            <a:r>
-              <a:rPr lang="en-US" sz="1700" dirty="0">
-                <a:solidFill>
-                  <a:srgbClr val="17364A"/>
-                </a:solidFill>
-                <a:latin typeface="Aptos" pitchFamily="34" charset="0"/>
-                <a:ea typeface="Aptos" pitchFamily="34" charset="-122"/>
-                <a:cs typeface="Aptos" pitchFamily="34" charset="-120"/>
-              </a:rPr>
-              <a:t>This module extends foundational validation content by focusing on metrics, subgroup performance, calibration, external validation, workflow.</a:t>
-            </a:r>
-            <a:endParaRPr lang="en-US" sz="1700" dirty="0"/>
-          </a:p>
-        </p:txBody>
-      </p:sp>
-      <p:sp>
-        <p:nvSpPr>
-          <p:cNvPr id="9" name="Shape 7"/>
+              <a:t>Advanced validation asks whether it works well enough, for whom, under what conditions, with what limitations,.</a:t>
+            </a:r>
+            <a:endParaRPr lang="en-US" sz="2100" dirty="0"/>
+          </a:p>
+        </p:txBody>
+      </p:sp>
+      <p:sp>
+        <p:nvSpPr>
+          <p:cNvPr id="10" name="Shape 8"/>
           <p:cNvSpPr/>
           <p:nvPr/>
         </p:nvSpPr>
@@ -8946,14 +9344,14 @@
       </p:sp>
       <p:sp>
         <p:nvSpPr>
-          <p:cNvPr id="10" name="Text 8"/>
+          <p:cNvPr id="11" name="Text 9"/>
           <p:cNvSpPr/>
           <p:nvPr/>
         </p:nvSpPr>
         <p:spPr>
           <a:xfrm>
             <a:off x="8074152" y="1563624"/>
-            <a:ext cx="2825496" cy="201168"/>
+            <a:ext cx="2825496" cy="256032"/>
           </a:xfrm>
           <a:prstGeom prst="rect">
             <a:avLst/>
@@ -8969,7 +9367,7 @@
               <a:buNone/>
             </a:pPr>
             <a:r>
-              <a:rPr lang="en-US" sz="950" b="1" dirty="0">
+              <a:rPr lang="en-US" sz="1300" b="1" dirty="0">
                 <a:solidFill>
                   <a:srgbClr val="0068B7"/>
                 </a:solidFill>
@@ -8979,20 +9377,20 @@
               </a:rPr>
               <a:t>Module details</a:t>
             </a:r>
-            <a:endParaRPr lang="en-US" sz="950" dirty="0"/>
-          </a:p>
-        </p:txBody>
-      </p:sp>
-      <p:sp>
-        <p:nvSpPr>
-          <p:cNvPr id="11" name="Text 9"/>
-          <p:cNvSpPr/>
-          <p:nvPr/>
-        </p:nvSpPr>
-        <p:spPr>
-          <a:xfrm>
-            <a:off x="8074152" y="1856232"/>
-            <a:ext cx="2825496" cy="1353312"/>
+            <a:endParaRPr lang="en-US" sz="1300" dirty="0"/>
+          </a:p>
+        </p:txBody>
+      </p:sp>
+      <p:sp>
+        <p:nvSpPr>
+          <p:cNvPr id="12" name="Text 10"/>
+          <p:cNvSpPr/>
+          <p:nvPr/>
+        </p:nvSpPr>
+        <p:spPr>
+          <a:xfrm>
+            <a:off x="8074152" y="1920240"/>
+            <a:ext cx="2825496" cy="1280160"/>
           </a:xfrm>
           <a:prstGeom prst="rect">
             <a:avLst/>
@@ -9010,7 +9408,7 @@
               <a:buNone/>
             </a:pPr>
             <a:r>
-              <a:rPr lang="en-US" sz="1250" dirty="0">
+              <a:rPr lang="en-US" sz="1550" dirty="0">
                 <a:solidFill>
                   <a:srgbClr val="17364A"/>
                 </a:solidFill>
@@ -9020,14 +9418,14 @@
               </a:rPr>
               <a:t>Level: intermediate/practitioner</a:t>
             </a:r>
-            <a:endParaRPr lang="en-US" sz="1250" dirty="0"/>
+            <a:endParaRPr lang="en-US" sz="1550" dirty="0"/>
           </a:p>
           <a:p>
             <a:pPr indent="0" marL="0">
               <a:buNone/>
             </a:pPr>
             <a:r>
-              <a:rPr lang="en-US" sz="1250" dirty="0">
+              <a:rPr lang="en-US" sz="1550" dirty="0">
                 <a:solidFill>
                   <a:srgbClr val="17364A"/>
                 </a:solidFill>
@@ -9037,14 +9435,14 @@
               </a:rPr>
               <a:t>Primary track: Analytics and Modeling Track</a:t>
             </a:r>
-            <a:endParaRPr lang="en-US" sz="1250" dirty="0"/>
+            <a:endParaRPr lang="en-US" sz="1550" dirty="0"/>
           </a:p>
           <a:p>
             <a:pPr indent="0" marL="0">
               <a:buNone/>
             </a:pPr>
             <a:r>
-              <a:rPr lang="en-US" sz="1250" dirty="0">
+              <a:rPr lang="en-US" sz="1550" dirty="0">
                 <a:solidFill>
                   <a:srgbClr val="17364A"/>
                 </a:solidFill>
@@ -9054,32 +9452,32 @@
               </a:rPr>
               <a:t>Appears in tracks: analytics-modeling</a:t>
             </a:r>
-            <a:endParaRPr lang="en-US" sz="1250" dirty="0"/>
-          </a:p>
-        </p:txBody>
-      </p:sp>
-      <p:sp>
-        <p:nvSpPr>
-          <p:cNvPr id="12" name="Shape 10"/>
-          <p:cNvSpPr/>
-          <p:nvPr/>
-        </p:nvSpPr>
-        <p:spPr>
-          <a:xfrm>
-            <a:off x="7909560" y="3611880"/>
-            <a:ext cx="3154680" cy="1783080"/>
+            <a:endParaRPr lang="en-US" sz="1550" dirty="0"/>
+          </a:p>
+        </p:txBody>
+      </p:sp>
+      <p:sp>
+        <p:nvSpPr>
+          <p:cNvPr id="13" name="Shape 11"/>
+          <p:cNvSpPr/>
+          <p:nvPr/>
+        </p:nvSpPr>
+        <p:spPr>
+          <a:xfrm>
+            <a:off x="7635240" y="3730752"/>
+            <a:ext cx="1033272" cy="749808"/>
           </a:xfrm>
           <a:prstGeom prst="roundRect">
             <a:avLst>
-              <a:gd name="adj" fmla="val 6154"/>
+              <a:gd name="adj" fmla="val 14634"/>
             </a:avLst>
           </a:prstGeom>
           <a:solidFill>
-            <a:srgbClr val="EEF8ED"/>
+            <a:srgbClr val="0068B7"/>
           </a:solidFill>
           <a:ln w="12700">
             <a:solidFill>
-              <a:srgbClr val="B9D7E6"/>
+              <a:srgbClr val="0068B7"/>
             </a:solidFill>
             <a:prstDash val="solid"/>
           </a:ln>
@@ -9087,81 +9485,256 @@
       </p:sp>
       <p:sp>
         <p:nvSpPr>
-          <p:cNvPr id="13" name="Text 11"/>
-          <p:cNvSpPr/>
-          <p:nvPr/>
-        </p:nvSpPr>
-        <p:spPr>
-          <a:xfrm>
-            <a:off x="8074152" y="3758184"/>
-            <a:ext cx="2825496" cy="201168"/>
-          </a:xfrm>
-          <a:prstGeom prst="rect">
-            <a:avLst/>
-          </a:prstGeom>
-          <a:noFill/>
-          <a:ln/>
-        </p:spPr>
-        <p:txBody>
-          <a:bodyPr wrap="square" lIns="0" tIns="0" rIns="0" bIns="0" rtlCol="0" anchor="ctr"/>
-          <a:lstStyle/>
-          <a:p>
-            <a:pPr indent="0" marL="0">
-              <a:buNone/>
-            </a:pPr>
-            <a:r>
-              <a:rPr lang="en-US" sz="950" b="1" dirty="0">
-                <a:solidFill>
-                  <a:srgbClr val="0068B7"/>
-                </a:solidFill>
-                <a:latin typeface="Aptos" pitchFamily="34" charset="0"/>
-                <a:ea typeface="Aptos" pitchFamily="34" charset="-122"/>
-                <a:cs typeface="Aptos" pitchFamily="34" charset="-120"/>
-              </a:rPr>
-              <a:t>Learning approach</a:t>
-            </a:r>
-            <a:endParaRPr lang="en-US" sz="950" dirty="0"/>
-          </a:p>
-        </p:txBody>
-      </p:sp>
-      <p:sp>
-        <p:nvSpPr>
           <p:cNvPr id="14" name="Text 12"/>
           <p:cNvSpPr/>
           <p:nvPr/>
         </p:nvSpPr>
         <p:spPr>
           <a:xfrm>
-            <a:off x="8074152" y="4050792"/>
-            <a:ext cx="2825496" cy="1216152"/>
-          </a:xfrm>
-          <a:prstGeom prst="rect">
-            <a:avLst/>
-          </a:prstGeom>
-          <a:noFill/>
-          <a:ln/>
-        </p:spPr>
-        <p:txBody>
-          <a:bodyPr wrap="square" lIns="0" tIns="0" rIns="0" bIns="0" rtlCol="0" anchor="t">
+            <a:off x="7708392" y="3922776"/>
+            <a:ext cx="886968" cy="310896"/>
+          </a:xfrm>
+          <a:prstGeom prst="rect">
+            <a:avLst/>
+          </a:prstGeom>
+          <a:noFill/>
+          <a:ln/>
+        </p:spPr>
+        <p:txBody>
+          <a:bodyPr wrap="square" lIns="0" tIns="0" rIns="0" bIns="0" rtlCol="0" anchor="ctr">
             <a:normAutofit/>
           </a:bodyPr>
           <a:lstStyle/>
           <a:p>
-            <a:pPr indent="0" marL="0">
-              <a:buNone/>
-            </a:pPr>
-            <a:r>
-              <a:rPr lang="en-US" sz="1250" dirty="0">
-                <a:solidFill>
-                  <a:srgbClr val="17364A"/>
-                </a:solidFill>
-                <a:latin typeface="Aptos" pitchFamily="34" charset="0"/>
-                <a:ea typeface="Aptos" pitchFamily="34" charset="-122"/>
-                <a:cs typeface="Aptos" pitchFamily="34" charset="-120"/>
-              </a:rPr>
-              <a:t>Review the core ideas, complete the practical exercise, check your understanding, and use the related plays and tools to apply the lesson.</a:t>
-            </a:r>
-            <a:endParaRPr lang="en-US" sz="1250" dirty="0"/>
+            <a:pPr algn="ctr" indent="0" marL="0">
+              <a:buNone/>
+            </a:pPr>
+            <a:r>
+              <a:rPr lang="en-US" sz="1500" b="1" dirty="0">
+                <a:solidFill>
+                  <a:srgbClr val="FFFFFF"/>
+                </a:solidFill>
+                <a:latin typeface="Aptos" pitchFamily="34" charset="0"/>
+                <a:ea typeface="Aptos" pitchFamily="34" charset="-122"/>
+                <a:cs typeface="Aptos" pitchFamily="34" charset="-120"/>
+              </a:rPr>
+              <a:t>Learn</a:t>
+            </a:r>
+            <a:endParaRPr lang="en-US" sz="1500" dirty="0"/>
+          </a:p>
+        </p:txBody>
+      </p:sp>
+      <p:sp>
+        <p:nvSpPr>
+          <p:cNvPr id="15" name="Text 13"/>
+          <p:cNvSpPr/>
+          <p:nvPr/>
+        </p:nvSpPr>
+        <p:spPr>
+          <a:xfrm>
+            <a:off x="8695944" y="3941064"/>
+            <a:ext cx="201168" cy="256032"/>
+          </a:xfrm>
+          <a:prstGeom prst="rect">
+            <a:avLst/>
+          </a:prstGeom>
+          <a:noFill/>
+          <a:ln/>
+        </p:spPr>
+        <p:txBody>
+          <a:bodyPr wrap="square" lIns="0" tIns="0" rIns="0" bIns="0" rtlCol="0" anchor="ctr"/>
+          <a:lstStyle/>
+          <a:p>
+            <a:pPr algn="ctr" indent="0" marL="0">
+              <a:buNone/>
+            </a:pPr>
+            <a:r>
+              <a:rPr lang="en-US" sz="1800" b="1" dirty="0">
+                <a:solidFill>
+                  <a:srgbClr val="0068B7"/>
+                </a:solidFill>
+                <a:latin typeface="Aptos" pitchFamily="34" charset="0"/>
+                <a:ea typeface="Aptos" pitchFamily="34" charset="-122"/>
+                <a:cs typeface="Aptos" pitchFamily="34" charset="-120"/>
+              </a:rPr>
+              <a:t>â†’</a:t>
+            </a:r>
+            <a:endParaRPr lang="en-US" sz="1800" dirty="0"/>
+          </a:p>
+        </p:txBody>
+      </p:sp>
+      <p:sp>
+        <p:nvSpPr>
+          <p:cNvPr id="16" name="Shape 14"/>
+          <p:cNvSpPr/>
+          <p:nvPr/>
+        </p:nvSpPr>
+        <p:spPr>
+          <a:xfrm>
+            <a:off x="8924544" y="3730752"/>
+            <a:ext cx="1033272" cy="749808"/>
+          </a:xfrm>
+          <a:prstGeom prst="roundRect">
+            <a:avLst>
+              <a:gd name="adj" fmla="val 14634"/>
+            </a:avLst>
+          </a:prstGeom>
+          <a:solidFill>
+            <a:srgbClr val="2F8A28"/>
+          </a:solidFill>
+          <a:ln w="12700">
+            <a:solidFill>
+              <a:srgbClr val="2F8A28"/>
+            </a:solidFill>
+            <a:prstDash val="solid"/>
+          </a:ln>
+        </p:spPr>
+      </p:sp>
+      <p:sp>
+        <p:nvSpPr>
+          <p:cNvPr id="17" name="Text 15"/>
+          <p:cNvSpPr/>
+          <p:nvPr/>
+        </p:nvSpPr>
+        <p:spPr>
+          <a:xfrm>
+            <a:off x="8997696" y="3922776"/>
+            <a:ext cx="886968" cy="310896"/>
+          </a:xfrm>
+          <a:prstGeom prst="rect">
+            <a:avLst/>
+          </a:prstGeom>
+          <a:noFill/>
+          <a:ln/>
+        </p:spPr>
+        <p:txBody>
+          <a:bodyPr wrap="square" lIns="0" tIns="0" rIns="0" bIns="0" rtlCol="0" anchor="ctr">
+            <a:normAutofit/>
+          </a:bodyPr>
+          <a:lstStyle/>
+          <a:p>
+            <a:pPr algn="ctr" indent="0" marL="0">
+              <a:buNone/>
+            </a:pPr>
+            <a:r>
+              <a:rPr lang="en-US" sz="1500" b="1" dirty="0">
+                <a:solidFill>
+                  <a:srgbClr val="FFFFFF"/>
+                </a:solidFill>
+                <a:latin typeface="Aptos" pitchFamily="34" charset="0"/>
+                <a:ea typeface="Aptos" pitchFamily="34" charset="-122"/>
+                <a:cs typeface="Aptos" pitchFamily="34" charset="-120"/>
+              </a:rPr>
+              <a:t>Apply</a:t>
+            </a:r>
+            <a:endParaRPr lang="en-US" sz="1500" dirty="0"/>
+          </a:p>
+        </p:txBody>
+      </p:sp>
+      <p:sp>
+        <p:nvSpPr>
+          <p:cNvPr id="18" name="Text 16"/>
+          <p:cNvSpPr/>
+          <p:nvPr/>
+        </p:nvSpPr>
+        <p:spPr>
+          <a:xfrm>
+            <a:off x="9985248" y="3941064"/>
+            <a:ext cx="201168" cy="256032"/>
+          </a:xfrm>
+          <a:prstGeom prst="rect">
+            <a:avLst/>
+          </a:prstGeom>
+          <a:noFill/>
+          <a:ln/>
+        </p:spPr>
+        <p:txBody>
+          <a:bodyPr wrap="square" lIns="0" tIns="0" rIns="0" bIns="0" rtlCol="0" anchor="ctr"/>
+          <a:lstStyle/>
+          <a:p>
+            <a:pPr algn="ctr" indent="0" marL="0">
+              <a:buNone/>
+            </a:pPr>
+            <a:r>
+              <a:rPr lang="en-US" sz="1800" b="1" dirty="0">
+                <a:solidFill>
+                  <a:srgbClr val="0068B7"/>
+                </a:solidFill>
+                <a:latin typeface="Aptos" pitchFamily="34" charset="0"/>
+                <a:ea typeface="Aptos" pitchFamily="34" charset="-122"/>
+                <a:cs typeface="Aptos" pitchFamily="34" charset="-120"/>
+              </a:rPr>
+              <a:t>â†’</a:t>
+            </a:r>
+            <a:endParaRPr lang="en-US" sz="1800" dirty="0"/>
+          </a:p>
+        </p:txBody>
+      </p:sp>
+      <p:sp>
+        <p:nvSpPr>
+          <p:cNvPr id="19" name="Shape 17"/>
+          <p:cNvSpPr/>
+          <p:nvPr/>
+        </p:nvSpPr>
+        <p:spPr>
+          <a:xfrm>
+            <a:off x="10213848" y="3730752"/>
+            <a:ext cx="1033272" cy="749808"/>
+          </a:xfrm>
+          <a:prstGeom prst="roundRect">
+            <a:avLst>
+              <a:gd name="adj" fmla="val 14634"/>
+            </a:avLst>
+          </a:prstGeom>
+          <a:solidFill>
+            <a:srgbClr val="6A4CA3"/>
+          </a:solidFill>
+          <a:ln w="12700">
+            <a:solidFill>
+              <a:srgbClr val="6A4CA3"/>
+            </a:solidFill>
+            <a:prstDash val="solid"/>
+          </a:ln>
+        </p:spPr>
+      </p:sp>
+      <p:sp>
+        <p:nvSpPr>
+          <p:cNvPr id="20" name="Text 18"/>
+          <p:cNvSpPr/>
+          <p:nvPr/>
+        </p:nvSpPr>
+        <p:spPr>
+          <a:xfrm>
+            <a:off x="10287000" y="3922776"/>
+            <a:ext cx="886968" cy="310896"/>
+          </a:xfrm>
+          <a:prstGeom prst="rect">
+            <a:avLst/>
+          </a:prstGeom>
+          <a:noFill/>
+          <a:ln/>
+        </p:spPr>
+        <p:txBody>
+          <a:bodyPr wrap="square" lIns="0" tIns="0" rIns="0" bIns="0" rtlCol="0" anchor="ctr">
+            <a:normAutofit/>
+          </a:bodyPr>
+          <a:lstStyle/>
+          <a:p>
+            <a:pPr algn="ctr" indent="0" marL="0">
+              <a:buNone/>
+            </a:pPr>
+            <a:r>
+              <a:rPr lang="en-US" sz="1500" b="1" dirty="0">
+                <a:solidFill>
+                  <a:srgbClr val="FFFFFF"/>
+                </a:solidFill>
+                <a:latin typeface="Aptos" pitchFamily="34" charset="0"/>
+                <a:ea typeface="Aptos" pitchFamily="34" charset="-122"/>
+                <a:cs typeface="Aptos" pitchFamily="34" charset="-120"/>
+              </a:rPr>
+              <a:t>Document</a:t>
+            </a:r>
+            <a:endParaRPr lang="en-US" sz="1500" dirty="0"/>
           </a:p>
         </p:txBody>
       </p:sp>
@@ -9358,7 +9931,7 @@
                 <a:ea typeface="Aptos" pitchFamily="34" charset="-122"/>
                 <a:cs typeface="Aptos" pitchFamily="34" charset="-120"/>
               </a:rPr>
-              <a:t>© Paula Soper</a:t>
+              <a:t>Â© Paula Soper</a:t>
             </a:r>
             <a:endParaRPr lang="en-US" sz="800" dirty="0"/>
           </a:p>
@@ -9366,7 +9939,46 @@
       </p:sp>
       <p:sp>
         <p:nvSpPr>
-          <p:cNvPr id="7" name="Shape 5"/>
+          <p:cNvPr id="7" name="Text 5"/>
+          <p:cNvSpPr/>
+          <p:nvPr/>
+        </p:nvSpPr>
+        <p:spPr>
+          <a:xfrm>
+            <a:off x="11137392" y="6510528"/>
+            <a:ext cx="411480" cy="201168"/>
+          </a:xfrm>
+          <a:prstGeom prst="rect">
+            <a:avLst/>
+          </a:prstGeom>
+          <a:noFill/>
+          <a:ln/>
+        </p:spPr>
+        <p:txBody>
+          <a:bodyPr wrap="square" lIns="0" tIns="0" rIns="0" bIns="0" rtlCol="0" anchor="ctr"/>
+          <a:lstStyle/>
+          <a:p>
+            <a:pPr algn="r" indent="0" marL="0">
+              <a:buNone/>
+            </a:pPr>
+            <a:r>
+              <a:rPr lang="en-US" sz="900" dirty="0">
+                <a:solidFill>
+                  <a:srgbClr val="5F7181"/>
+                </a:solidFill>
+                <a:latin typeface="Aptos" pitchFamily="34" charset="0"/>
+                <a:ea typeface="Aptos" pitchFamily="34" charset="-122"/>
+                <a:cs typeface="Aptos" pitchFamily="34" charset="-120"/>
+              </a:rPr>
+              <a:t>20</a:t>
+            </a:r>
+            <a:endParaRPr lang="en-US" sz="900" dirty="0"/>
+          </a:p>
+        </p:txBody>
+      </p:sp>
+      <p:sp>
+        <p:nvSpPr>
+          <p:cNvPr id="8" name="Shape 6"/>
           <p:cNvSpPr/>
           <p:nvPr/>
         </p:nvSpPr>
@@ -9391,7 +10003,7 @@
       </p:sp>
       <p:sp>
         <p:nvSpPr>
-          <p:cNvPr id="8" name="Text 6"/>
+          <p:cNvPr id="9" name="Text 7"/>
           <p:cNvSpPr/>
           <p:nvPr/>
         </p:nvSpPr>
@@ -9430,14 +10042,14 @@
       </p:sp>
       <p:sp>
         <p:nvSpPr>
-          <p:cNvPr id="9" name="Text 7"/>
+          <p:cNvPr id="10" name="Text 8"/>
           <p:cNvSpPr/>
           <p:nvPr/>
         </p:nvSpPr>
         <p:spPr>
           <a:xfrm>
             <a:off x="640080" y="621792"/>
-            <a:ext cx="10881360" cy="566928"/>
+            <a:ext cx="10881360" cy="713232"/>
           </a:xfrm>
           <a:prstGeom prst="rect">
             <a:avLst/>
@@ -9455,7 +10067,7 @@
               <a:buNone/>
             </a:pPr>
             <a:r>
-              <a:rPr lang="en-US" sz="2700" b="1" dirty="0">
+              <a:rPr lang="en-US" sz="3400" b="1" dirty="0">
                 <a:solidFill>
                   <a:srgbClr val="003A63"/>
                 </a:solidFill>
@@ -9465,20 +10077,20 @@
               </a:rPr>
               <a:t>Expected Assignment</a:t>
             </a:r>
-            <a:endParaRPr lang="en-US" sz="2700" dirty="0"/>
-          </a:p>
-        </p:txBody>
-      </p:sp>
-      <p:sp>
-        <p:nvSpPr>
-          <p:cNvPr id="10" name="Text 8"/>
-          <p:cNvSpPr/>
-          <p:nvPr/>
-        </p:nvSpPr>
-        <p:spPr>
-          <a:xfrm>
-            <a:off x="868680" y="1417320"/>
-            <a:ext cx="6675120" cy="4434840"/>
+            <a:endParaRPr lang="en-US" sz="3400" dirty="0"/>
+          </a:p>
+        </p:txBody>
+      </p:sp>
+      <p:sp>
+        <p:nvSpPr>
+          <p:cNvPr id="11" name="Text 9"/>
+          <p:cNvSpPr/>
+          <p:nvPr/>
+        </p:nvSpPr>
+        <p:spPr>
+          <a:xfrm>
+            <a:off x="868680" y="1508760"/>
+            <a:ext cx="6537960" cy="4160520"/>
           </a:xfrm>
           <a:prstGeom prst="rect">
             <a:avLst/>
@@ -9493,7 +10105,7 @@
           <a:lstStyle/>
           <a:p>
             <a:r>
-              <a:rPr lang="en-US" sz="1700" dirty="0">
+              <a:rPr lang="en-US" sz="2100" dirty="0">
                 <a:solidFill>
                   <a:srgbClr val="17364A"/>
                 </a:solidFill>
@@ -9503,11 +10115,11 @@
               </a:rPr>
               <a:t>Advanced validation plan</a:t>
             </a:r>
-            <a:endParaRPr lang="en-US" sz="1700" dirty="0"/>
-          </a:p>
-          <a:p>
-            <a:r>
-              <a:rPr lang="en-US" sz="1700" dirty="0">
+            <a:endParaRPr lang="en-US" sz="2100" dirty="0"/>
+          </a:p>
+          <a:p>
+            <a:r>
+              <a:rPr lang="en-US" sz="2100" dirty="0">
                 <a:solidFill>
                   <a:srgbClr val="17364A"/>
                 </a:solidFill>
@@ -9517,11 +10129,11 @@
               </a:rPr>
               <a:t>Metric and error-consequence table</a:t>
             </a:r>
-            <a:endParaRPr lang="en-US" sz="1700" dirty="0"/>
-          </a:p>
-          <a:p>
-            <a:r>
-              <a:rPr lang="en-US" sz="1700" dirty="0">
+            <a:endParaRPr lang="en-US" sz="2100" dirty="0"/>
+          </a:p>
+          <a:p>
+            <a:r>
+              <a:rPr lang="en-US" sz="2100" dirty="0">
                 <a:solidFill>
                   <a:srgbClr val="17364A"/>
                 </a:solidFill>
@@ -9531,27 +10143,13 @@
               </a:rPr>
               <a:t>Subgroup performance review plan</a:t>
             </a:r>
-            <a:endParaRPr lang="en-US" sz="1700" dirty="0"/>
-          </a:p>
-          <a:p>
-            <a:r>
-              <a:rPr lang="en-US" sz="1700" dirty="0">
-                <a:solidFill>
-                  <a:srgbClr val="17364A"/>
-                </a:solidFill>
-                <a:latin typeface="Aptos" pitchFamily="34" charset="0"/>
-                <a:ea typeface="Aptos" pitchFamily="34" charset="-122"/>
-                <a:cs typeface="Aptos" pitchFamily="34" charset="-120"/>
-              </a:rPr>
-              <a:t>Post-deployment monitoring schedule</a:t>
-            </a:r>
-            <a:endParaRPr lang="en-US" sz="1700" dirty="0"/>
-          </a:p>
-        </p:txBody>
-      </p:sp>
-      <p:sp>
-        <p:nvSpPr>
-          <p:cNvPr id="11" name="Shape 9"/>
+            <a:endParaRPr lang="en-US" sz="2100" dirty="0"/>
+          </a:p>
+        </p:txBody>
+      </p:sp>
+      <p:sp>
+        <p:nvSpPr>
+          <p:cNvPr id="12" name="Shape 10"/>
           <p:cNvSpPr/>
           <p:nvPr/>
         </p:nvSpPr>
@@ -9578,14 +10176,14 @@
       </p:sp>
       <p:sp>
         <p:nvSpPr>
-          <p:cNvPr id="12" name="Text 10"/>
+          <p:cNvPr id="13" name="Text 11"/>
           <p:cNvSpPr/>
           <p:nvPr/>
         </p:nvSpPr>
         <p:spPr>
           <a:xfrm>
             <a:off x="8074152" y="1563624"/>
-            <a:ext cx="2825496" cy="201168"/>
+            <a:ext cx="2825496" cy="256032"/>
           </a:xfrm>
           <a:prstGeom prst="rect">
             <a:avLst/>
@@ -9601,7 +10199,7 @@
               <a:buNone/>
             </a:pPr>
             <a:r>
-              <a:rPr lang="en-US" sz="950" b="1" dirty="0">
+              <a:rPr lang="en-US" sz="1300" b="1" dirty="0">
                 <a:solidFill>
                   <a:srgbClr val="0068B7"/>
                 </a:solidFill>
@@ -9611,20 +10209,20 @@
               </a:rPr>
               <a:t>Key idea</a:t>
             </a:r>
-            <a:endParaRPr lang="en-US" sz="950" dirty="0"/>
-          </a:p>
-        </p:txBody>
-      </p:sp>
-      <p:sp>
-        <p:nvSpPr>
-          <p:cNvPr id="13" name="Text 11"/>
-          <p:cNvSpPr/>
-          <p:nvPr/>
-        </p:nvSpPr>
-        <p:spPr>
-          <a:xfrm>
-            <a:off x="8074152" y="1856232"/>
-            <a:ext cx="2825496" cy="1261872"/>
+            <a:endParaRPr lang="en-US" sz="1300" dirty="0"/>
+          </a:p>
+        </p:txBody>
+      </p:sp>
+      <p:sp>
+        <p:nvSpPr>
+          <p:cNvPr id="14" name="Text 12"/>
+          <p:cNvSpPr/>
+          <p:nvPr/>
+        </p:nvSpPr>
+        <p:spPr>
+          <a:xfrm>
+            <a:off x="8074152" y="1920240"/>
+            <a:ext cx="2825496" cy="1188720"/>
           </a:xfrm>
           <a:prstGeom prst="rect">
             <a:avLst/>
@@ -9642,7 +10240,7 @@
               <a:buNone/>
             </a:pPr>
             <a:r>
-              <a:rPr lang="en-US" sz="1250" dirty="0">
+              <a:rPr lang="en-US" sz="1550" dirty="0">
                 <a:solidFill>
                   <a:srgbClr val="17364A"/>
                 </a:solidFill>
@@ -9652,13 +10250,13 @@
               </a:rPr>
               <a:t>Advanced validation plan</a:t>
             </a:r>
-            <a:endParaRPr lang="en-US" sz="1250" dirty="0"/>
-          </a:p>
-        </p:txBody>
-      </p:sp>
-      <p:sp>
-        <p:nvSpPr>
-          <p:cNvPr id="14" name="Shape 12"/>
+            <a:endParaRPr lang="en-US" sz="1550" dirty="0"/>
+          </a:p>
+        </p:txBody>
+      </p:sp>
+      <p:sp>
+        <p:nvSpPr>
+          <p:cNvPr id="15" name="Shape 13"/>
           <p:cNvSpPr/>
           <p:nvPr/>
         </p:nvSpPr>
@@ -9685,14 +10283,14 @@
       </p:sp>
       <p:sp>
         <p:nvSpPr>
-          <p:cNvPr id="15" name="Text 13"/>
+          <p:cNvPr id="16" name="Text 14"/>
           <p:cNvSpPr/>
           <p:nvPr/>
         </p:nvSpPr>
         <p:spPr>
           <a:xfrm>
             <a:off x="8074152" y="3666744"/>
-            <a:ext cx="2825496" cy="201168"/>
+            <a:ext cx="2825496" cy="256032"/>
           </a:xfrm>
           <a:prstGeom prst="rect">
             <a:avLst/>
@@ -9708,7 +10306,7 @@
               <a:buNone/>
             </a:pPr>
             <a:r>
-              <a:rPr lang="en-US" sz="950" b="1" dirty="0">
+              <a:rPr lang="en-US" sz="1300" b="1" dirty="0">
                 <a:solidFill>
                   <a:srgbClr val="0068B7"/>
                 </a:solidFill>
@@ -9718,20 +10316,20 @@
               </a:rPr>
               <a:t>Use this for</a:t>
             </a:r>
-            <a:endParaRPr lang="en-US" sz="950" dirty="0"/>
-          </a:p>
-        </p:txBody>
-      </p:sp>
-      <p:sp>
-        <p:nvSpPr>
-          <p:cNvPr id="16" name="Text 14"/>
-          <p:cNvSpPr/>
-          <p:nvPr/>
-        </p:nvSpPr>
-        <p:spPr>
-          <a:xfrm>
-            <a:off x="8074152" y="3959352"/>
-            <a:ext cx="2825496" cy="1170432"/>
+            <a:endParaRPr lang="en-US" sz="1300" dirty="0"/>
+          </a:p>
+        </p:txBody>
+      </p:sp>
+      <p:sp>
+        <p:nvSpPr>
+          <p:cNvPr id="17" name="Text 15"/>
+          <p:cNvSpPr/>
+          <p:nvPr/>
+        </p:nvSpPr>
+        <p:spPr>
+          <a:xfrm>
+            <a:off x="8074152" y="4023360"/>
+            <a:ext cx="2825496" cy="1097280"/>
           </a:xfrm>
           <a:prstGeom prst="rect">
             <a:avLst/>
@@ -9749,7 +10347,7 @@
               <a:buNone/>
             </a:pPr>
             <a:r>
-              <a:rPr lang="en-US" sz="1250" dirty="0">
+              <a:rPr lang="en-US" sz="1550" dirty="0">
                 <a:solidFill>
                   <a:srgbClr val="17364A"/>
                 </a:solidFill>
@@ -9759,7 +10357,7 @@
               </a:rPr>
               <a:t>Connect the concept to public health decisions, safeguards, documentation, or implementation work.</a:t>
             </a:r>
-            <a:endParaRPr lang="en-US" sz="1250" dirty="0"/>
+            <a:endParaRPr lang="en-US" sz="1550" dirty="0"/>
           </a:p>
         </p:txBody>
       </p:sp>
@@ -9956,7 +10554,7 @@
                 <a:ea typeface="Aptos" pitchFamily="34" charset="-122"/>
                 <a:cs typeface="Aptos" pitchFamily="34" charset="-120"/>
               </a:rPr>
-              <a:t>© Paula Soper</a:t>
+              <a:t>Â© Paula Soper</a:t>
             </a:r>
             <a:endParaRPr lang="en-US" sz="800" dirty="0"/>
           </a:p>
@@ -9964,7 +10562,46 @@
       </p:sp>
       <p:sp>
         <p:nvSpPr>
-          <p:cNvPr id="7" name="Shape 5"/>
+          <p:cNvPr id="7" name="Text 5"/>
+          <p:cNvSpPr/>
+          <p:nvPr/>
+        </p:nvSpPr>
+        <p:spPr>
+          <a:xfrm>
+            <a:off x="11137392" y="6510528"/>
+            <a:ext cx="411480" cy="201168"/>
+          </a:xfrm>
+          <a:prstGeom prst="rect">
+            <a:avLst/>
+          </a:prstGeom>
+          <a:noFill/>
+          <a:ln/>
+        </p:spPr>
+        <p:txBody>
+          <a:bodyPr wrap="square" lIns="0" tIns="0" rIns="0" bIns="0" rtlCol="0" anchor="ctr"/>
+          <a:lstStyle/>
+          <a:p>
+            <a:pPr algn="r" indent="0" marL="0">
+              <a:buNone/>
+            </a:pPr>
+            <a:r>
+              <a:rPr lang="en-US" sz="900" dirty="0">
+                <a:solidFill>
+                  <a:srgbClr val="5F7181"/>
+                </a:solidFill>
+                <a:latin typeface="Aptos" pitchFamily="34" charset="0"/>
+                <a:ea typeface="Aptos" pitchFamily="34" charset="-122"/>
+                <a:cs typeface="Aptos" pitchFamily="34" charset="-120"/>
+              </a:rPr>
+              <a:t>21</a:t>
+            </a:r>
+            <a:endParaRPr lang="en-US" sz="900" dirty="0"/>
+          </a:p>
+        </p:txBody>
+      </p:sp>
+      <p:sp>
+        <p:nvSpPr>
+          <p:cNvPr id="8" name="Shape 6"/>
           <p:cNvSpPr/>
           <p:nvPr/>
         </p:nvSpPr>
@@ -9989,7 +10626,7 @@
       </p:sp>
       <p:sp>
         <p:nvSpPr>
-          <p:cNvPr id="8" name="Text 6"/>
+          <p:cNvPr id="9" name="Text 7"/>
           <p:cNvSpPr/>
           <p:nvPr/>
         </p:nvSpPr>
@@ -10028,14 +10665,14 @@
       </p:sp>
       <p:sp>
         <p:nvSpPr>
-          <p:cNvPr id="9" name="Text 7"/>
+          <p:cNvPr id="10" name="Text 8"/>
           <p:cNvSpPr/>
           <p:nvPr/>
         </p:nvSpPr>
         <p:spPr>
           <a:xfrm>
             <a:off x="640080" y="621792"/>
-            <a:ext cx="10881360" cy="566928"/>
+            <a:ext cx="10881360" cy="713232"/>
           </a:xfrm>
           <a:prstGeom prst="rect">
             <a:avLst/>
@@ -10053,7 +10690,7 @@
               <a:buNone/>
             </a:pPr>
             <a:r>
-              <a:rPr lang="en-US" sz="2700" b="1" dirty="0">
+              <a:rPr lang="en-US" sz="3400" b="1" dirty="0">
                 <a:solidFill>
                   <a:srgbClr val="003A63"/>
                 </a:solidFill>
@@ -10063,20 +10700,20 @@
               </a:rPr>
               <a:t>Knowledge Check</a:t>
             </a:r>
-            <a:endParaRPr lang="en-US" sz="2700" dirty="0"/>
-          </a:p>
-        </p:txBody>
-      </p:sp>
-      <p:sp>
-        <p:nvSpPr>
-          <p:cNvPr id="10" name="Text 8"/>
-          <p:cNvSpPr/>
-          <p:nvPr/>
-        </p:nvSpPr>
-        <p:spPr>
-          <a:xfrm>
-            <a:off x="868680" y="1417320"/>
-            <a:ext cx="6675120" cy="4434840"/>
+            <a:endParaRPr lang="en-US" sz="3400" dirty="0"/>
+          </a:p>
+        </p:txBody>
+      </p:sp>
+      <p:sp>
+        <p:nvSpPr>
+          <p:cNvPr id="11" name="Text 9"/>
+          <p:cNvSpPr/>
+          <p:nvPr/>
+        </p:nvSpPr>
+        <p:spPr>
+          <a:xfrm>
+            <a:off x="868680" y="1508760"/>
+            <a:ext cx="6537960" cy="4160520"/>
           </a:xfrm>
           <a:prstGeom prst="rect">
             <a:avLst/>
@@ -10091,7 +10728,7 @@
           <a:lstStyle/>
           <a:p>
             <a:r>
-              <a:rPr lang="en-US" sz="1700" dirty="0">
+              <a:rPr lang="en-US" sz="2100" dirty="0">
                 <a:solidFill>
                   <a:srgbClr val="17364A"/>
                 </a:solidFill>
@@ -10101,11 +10738,11 @@
               </a:rPr>
               <a:t>1. Why can overall accuracy be misleading?</a:t>
             </a:r>
-            <a:endParaRPr lang="en-US" sz="1700" dirty="0"/>
-          </a:p>
-          <a:p>
-            <a:r>
-              <a:rPr lang="en-US" sz="1700" dirty="0">
+            <a:endParaRPr lang="en-US" sz="2100" dirty="0"/>
+          </a:p>
+          <a:p>
+            <a:r>
+              <a:rPr lang="en-US" sz="2100" dirty="0">
                 <a:solidFill>
                   <a:srgbClr val="17364A"/>
                 </a:solidFill>
@@ -10115,11 +10752,11 @@
               </a:rPr>
               <a:t>2. What is workflow validation?</a:t>
             </a:r>
-            <a:endParaRPr lang="en-US" sz="1700" dirty="0"/>
-          </a:p>
-          <a:p>
-            <a:r>
-              <a:rPr lang="en-US" sz="1700" dirty="0">
+            <a:endParaRPr lang="en-US" sz="2100" dirty="0"/>
+          </a:p>
+          <a:p>
+            <a:r>
+              <a:rPr lang="en-US" sz="2100" dirty="0">
                 <a:solidFill>
                   <a:srgbClr val="17364A"/>
                 </a:solidFill>
@@ -10129,27 +10766,13 @@
               </a:rPr>
               <a:t>3. Which metric is especially important when missed true events could cause harm?</a:t>
             </a:r>
-            <a:endParaRPr lang="en-US" sz="1700" dirty="0"/>
-          </a:p>
-          <a:p>
-            <a:r>
-              <a:rPr lang="en-US" sz="1700" dirty="0">
-                <a:solidFill>
-                  <a:srgbClr val="17364A"/>
-                </a:solidFill>
-                <a:latin typeface="Aptos" pitchFamily="34" charset="0"/>
-                <a:ea typeface="Aptos" pitchFamily="34" charset="-122"/>
-                <a:cs typeface="Aptos" pitchFamily="34" charset="-120"/>
-              </a:rPr>
-              <a:t>4. What does external validation test?</a:t>
-            </a:r>
-            <a:endParaRPr lang="en-US" sz="1700" dirty="0"/>
-          </a:p>
-        </p:txBody>
-      </p:sp>
-      <p:sp>
-        <p:nvSpPr>
-          <p:cNvPr id="11" name="Shape 9"/>
+            <a:endParaRPr lang="en-US" sz="2100" dirty="0"/>
+          </a:p>
+        </p:txBody>
+      </p:sp>
+      <p:sp>
+        <p:nvSpPr>
+          <p:cNvPr id="12" name="Shape 10"/>
           <p:cNvSpPr/>
           <p:nvPr/>
         </p:nvSpPr>
@@ -10176,14 +10799,14 @@
       </p:sp>
       <p:sp>
         <p:nvSpPr>
-          <p:cNvPr id="12" name="Text 10"/>
+          <p:cNvPr id="13" name="Text 11"/>
           <p:cNvSpPr/>
           <p:nvPr/>
         </p:nvSpPr>
         <p:spPr>
           <a:xfrm>
             <a:off x="8074152" y="1563624"/>
-            <a:ext cx="2825496" cy="201168"/>
+            <a:ext cx="2825496" cy="256032"/>
           </a:xfrm>
           <a:prstGeom prst="rect">
             <a:avLst/>
@@ -10199,7 +10822,7 @@
               <a:buNone/>
             </a:pPr>
             <a:r>
-              <a:rPr lang="en-US" sz="950" b="1" dirty="0">
+              <a:rPr lang="en-US" sz="1300" b="1" dirty="0">
                 <a:solidFill>
                   <a:srgbClr val="0068B7"/>
                 </a:solidFill>
@@ -10209,20 +10832,20 @@
               </a:rPr>
               <a:t>Key idea</a:t>
             </a:r>
-            <a:endParaRPr lang="en-US" sz="950" dirty="0"/>
-          </a:p>
-        </p:txBody>
-      </p:sp>
-      <p:sp>
-        <p:nvSpPr>
-          <p:cNvPr id="13" name="Text 11"/>
-          <p:cNvSpPr/>
-          <p:nvPr/>
-        </p:nvSpPr>
-        <p:spPr>
-          <a:xfrm>
-            <a:off x="8074152" y="1856232"/>
-            <a:ext cx="2825496" cy="1261872"/>
+            <a:endParaRPr lang="en-US" sz="1300" dirty="0"/>
+          </a:p>
+        </p:txBody>
+      </p:sp>
+      <p:sp>
+        <p:nvSpPr>
+          <p:cNvPr id="14" name="Text 12"/>
+          <p:cNvSpPr/>
+          <p:nvPr/>
+        </p:nvSpPr>
+        <p:spPr>
+          <a:xfrm>
+            <a:off x="8074152" y="1920240"/>
+            <a:ext cx="2825496" cy="1188720"/>
           </a:xfrm>
           <a:prstGeom prst="rect">
             <a:avLst/>
@@ -10240,7 +10863,7 @@
               <a:buNone/>
             </a:pPr>
             <a:r>
-              <a:rPr lang="en-US" sz="1250" dirty="0">
+              <a:rPr lang="en-US" sz="1550" dirty="0">
                 <a:solidFill>
                   <a:srgbClr val="17364A"/>
                 </a:solidFill>
@@ -10250,13 +10873,13 @@
               </a:rPr>
               <a:t>1. Why can overall accuracy be misleading?</a:t>
             </a:r>
-            <a:endParaRPr lang="en-US" sz="1250" dirty="0"/>
-          </a:p>
-        </p:txBody>
-      </p:sp>
-      <p:sp>
-        <p:nvSpPr>
-          <p:cNvPr id="14" name="Shape 12"/>
+            <a:endParaRPr lang="en-US" sz="1550" dirty="0"/>
+          </a:p>
+        </p:txBody>
+      </p:sp>
+      <p:sp>
+        <p:nvSpPr>
+          <p:cNvPr id="15" name="Shape 13"/>
           <p:cNvSpPr/>
           <p:nvPr/>
         </p:nvSpPr>
@@ -10283,14 +10906,14 @@
       </p:sp>
       <p:sp>
         <p:nvSpPr>
-          <p:cNvPr id="15" name="Text 13"/>
+          <p:cNvPr id="16" name="Text 14"/>
           <p:cNvSpPr/>
           <p:nvPr/>
         </p:nvSpPr>
         <p:spPr>
           <a:xfrm>
             <a:off x="8074152" y="3666744"/>
-            <a:ext cx="2825496" cy="201168"/>
+            <a:ext cx="2825496" cy="256032"/>
           </a:xfrm>
           <a:prstGeom prst="rect">
             <a:avLst/>
@@ -10306,7 +10929,7 @@
               <a:buNone/>
             </a:pPr>
             <a:r>
-              <a:rPr lang="en-US" sz="950" b="1" dirty="0">
+              <a:rPr lang="en-US" sz="1300" b="1" dirty="0">
                 <a:solidFill>
                   <a:srgbClr val="0068B7"/>
                 </a:solidFill>
@@ -10316,20 +10939,20 @@
               </a:rPr>
               <a:t>Use this for</a:t>
             </a:r>
-            <a:endParaRPr lang="en-US" sz="950" dirty="0"/>
-          </a:p>
-        </p:txBody>
-      </p:sp>
-      <p:sp>
-        <p:nvSpPr>
-          <p:cNvPr id="16" name="Text 14"/>
-          <p:cNvSpPr/>
-          <p:nvPr/>
-        </p:nvSpPr>
-        <p:spPr>
-          <a:xfrm>
-            <a:off x="8074152" y="3959352"/>
-            <a:ext cx="2825496" cy="1170432"/>
+            <a:endParaRPr lang="en-US" sz="1300" dirty="0"/>
+          </a:p>
+        </p:txBody>
+      </p:sp>
+      <p:sp>
+        <p:nvSpPr>
+          <p:cNvPr id="17" name="Text 15"/>
+          <p:cNvSpPr/>
+          <p:nvPr/>
+        </p:nvSpPr>
+        <p:spPr>
+          <a:xfrm>
+            <a:off x="8074152" y="4023360"/>
+            <a:ext cx="2825496" cy="1097280"/>
           </a:xfrm>
           <a:prstGeom prst="rect">
             <a:avLst/>
@@ -10347,7 +10970,7 @@
               <a:buNone/>
             </a:pPr>
             <a:r>
-              <a:rPr lang="en-US" sz="1250" dirty="0">
+              <a:rPr lang="en-US" sz="1550" dirty="0">
                 <a:solidFill>
                   <a:srgbClr val="17364A"/>
                 </a:solidFill>
@@ -10357,7 +10980,7 @@
               </a:rPr>
               <a:t>Connect the concept to public health decisions, safeguards, documentation, or implementation work.</a:t>
             </a:r>
-            <a:endParaRPr lang="en-US" sz="1250" dirty="0"/>
+            <a:endParaRPr lang="en-US" sz="1550" dirty="0"/>
           </a:p>
         </p:txBody>
       </p:sp>
@@ -10554,7 +11177,7 @@
                 <a:ea typeface="Aptos" pitchFamily="34" charset="-122"/>
                 <a:cs typeface="Aptos" pitchFamily="34" charset="-120"/>
               </a:rPr>
-              <a:t>© Paula Soper</a:t>
+              <a:t>Â© Paula Soper</a:t>
             </a:r>
             <a:endParaRPr lang="en-US" sz="800" dirty="0"/>
           </a:p>
@@ -10562,7 +11185,46 @@
       </p:sp>
       <p:sp>
         <p:nvSpPr>
-          <p:cNvPr id="7" name="Shape 5"/>
+          <p:cNvPr id="7" name="Text 5"/>
+          <p:cNvSpPr/>
+          <p:nvPr/>
+        </p:nvSpPr>
+        <p:spPr>
+          <a:xfrm>
+            <a:off x="11137392" y="6510528"/>
+            <a:ext cx="411480" cy="201168"/>
+          </a:xfrm>
+          <a:prstGeom prst="rect">
+            <a:avLst/>
+          </a:prstGeom>
+          <a:noFill/>
+          <a:ln/>
+        </p:spPr>
+        <p:txBody>
+          <a:bodyPr wrap="square" lIns="0" tIns="0" rIns="0" bIns="0" rtlCol="0" anchor="ctr"/>
+          <a:lstStyle/>
+          <a:p>
+            <a:pPr algn="r" indent="0" marL="0">
+              <a:buNone/>
+            </a:pPr>
+            <a:r>
+              <a:rPr lang="en-US" sz="900" dirty="0">
+                <a:solidFill>
+                  <a:srgbClr val="5F7181"/>
+                </a:solidFill>
+                <a:latin typeface="Aptos" pitchFamily="34" charset="0"/>
+                <a:ea typeface="Aptos" pitchFamily="34" charset="-122"/>
+                <a:cs typeface="Aptos" pitchFamily="34" charset="-120"/>
+              </a:rPr>
+              <a:t>22</a:t>
+            </a:r>
+            <a:endParaRPr lang="en-US" sz="900" dirty="0"/>
+          </a:p>
+        </p:txBody>
+      </p:sp>
+      <p:sp>
+        <p:nvSpPr>
+          <p:cNvPr id="8" name="Shape 6"/>
           <p:cNvSpPr/>
           <p:nvPr/>
         </p:nvSpPr>
@@ -10587,7 +11249,7 @@
       </p:sp>
       <p:sp>
         <p:nvSpPr>
-          <p:cNvPr id="8" name="Text 6"/>
+          <p:cNvPr id="9" name="Text 7"/>
           <p:cNvSpPr/>
           <p:nvPr/>
         </p:nvSpPr>
@@ -10626,14 +11288,14 @@
       </p:sp>
       <p:sp>
         <p:nvSpPr>
-          <p:cNvPr id="9" name="Text 7"/>
+          <p:cNvPr id="10" name="Text 8"/>
           <p:cNvSpPr/>
           <p:nvPr/>
         </p:nvSpPr>
         <p:spPr>
           <a:xfrm>
             <a:off x="640080" y="621792"/>
-            <a:ext cx="10881360" cy="566928"/>
+            <a:ext cx="10881360" cy="713232"/>
           </a:xfrm>
           <a:prstGeom prst="rect">
             <a:avLst/>
@@ -10651,7 +11313,7 @@
               <a:buNone/>
             </a:pPr>
             <a:r>
-              <a:rPr lang="en-US" sz="2700" b="1" dirty="0">
+              <a:rPr lang="en-US" sz="3400" b="1" dirty="0">
                 <a:solidFill>
                   <a:srgbClr val="003A63"/>
                 </a:solidFill>
@@ -10661,20 +11323,20 @@
               </a:rPr>
               <a:t>References and Resources</a:t>
             </a:r>
-            <a:endParaRPr lang="en-US" sz="2700" dirty="0"/>
-          </a:p>
-        </p:txBody>
-      </p:sp>
-      <p:sp>
-        <p:nvSpPr>
-          <p:cNvPr id="10" name="Text 8"/>
-          <p:cNvSpPr/>
-          <p:nvPr/>
-        </p:nvSpPr>
-        <p:spPr>
-          <a:xfrm>
-            <a:off x="868680" y="1417320"/>
-            <a:ext cx="6675120" cy="4434840"/>
+            <a:endParaRPr lang="en-US" sz="3400" dirty="0"/>
+          </a:p>
+        </p:txBody>
+      </p:sp>
+      <p:sp>
+        <p:nvSpPr>
+          <p:cNvPr id="11" name="Text 9"/>
+          <p:cNvSpPr/>
+          <p:nvPr/>
+        </p:nvSpPr>
+        <p:spPr>
+          <a:xfrm>
+            <a:off x="868680" y="1508760"/>
+            <a:ext cx="6537960" cy="4160520"/>
           </a:xfrm>
           <a:prstGeom prst="rect">
             <a:avLst/>
@@ -10689,7 +11351,7 @@
           <a:lstStyle/>
           <a:p>
             <a:r>
-              <a:rPr lang="en-US" sz="1700" dirty="0">
+              <a:rPr lang="en-US" sz="2100" dirty="0">
                 <a:solidFill>
                   <a:srgbClr val="17364A"/>
                 </a:solidFill>
@@ -10697,13 +11359,13 @@
                 <a:ea typeface="Aptos" pitchFamily="34" charset="-122"/>
                 <a:cs typeface="Aptos" pitchFamily="34" charset="-120"/>
               </a:rPr>
-              <a:t>NIST Artificial Intelligence Risk Management Framework: https://www.nist.gov/itl/ai-risk-management-framework</a:t>
-            </a:r>
-            <a:endParaRPr lang="en-US" sz="1700" dirty="0"/>
-          </a:p>
-          <a:p>
-            <a:r>
-              <a:rPr lang="en-US" sz="1700" dirty="0">
+              <a:t>NIST Artificial Intelligence Risk Management Framework:.</a:t>
+            </a:r>
+            <a:endParaRPr lang="en-US" sz="2100" dirty="0"/>
+          </a:p>
+          <a:p>
+            <a:r>
+              <a:rPr lang="en-US" sz="2100" dirty="0">
                 <a:solidFill>
                   <a:srgbClr val="17364A"/>
                 </a:solidFill>
@@ -10713,11 +11375,11 @@
               </a:rPr>
               <a:t>NIST AI RMF Generative AI Profile:.</a:t>
             </a:r>
-            <a:endParaRPr lang="en-US" sz="1700" dirty="0"/>
-          </a:p>
-          <a:p>
-            <a:r>
-              <a:rPr lang="en-US" sz="1700" dirty="0">
+            <a:endParaRPr lang="en-US" sz="2100" dirty="0"/>
+          </a:p>
+          <a:p>
+            <a:r>
+              <a:rPr lang="en-US" sz="2100" dirty="0">
                 <a:solidFill>
                   <a:srgbClr val="17364A"/>
                 </a:solidFill>
@@ -10727,27 +11389,13 @@
               </a:rPr>
               <a:t>CDC Evaluation Framework: https://www.cdc.gov/evaluation/</a:t>
             </a:r>
-            <a:endParaRPr lang="en-US" sz="1700" dirty="0"/>
-          </a:p>
-          <a:p>
-            <a:r>
-              <a:rPr lang="en-US" sz="1700" dirty="0">
-                <a:solidFill>
-                  <a:srgbClr val="17364A"/>
-                </a:solidFill>
-                <a:latin typeface="Aptos" pitchFamily="34" charset="0"/>
-                <a:ea typeface="Aptos" pitchFamily="34" charset="-122"/>
-                <a:cs typeface="Aptos" pitchFamily="34" charset="-120"/>
-              </a:rPr>
-              <a:t>WHO Guidance on Large Multi-Modal Models: https://www.who.int/publications/i/item/9789240084759</a:t>
-            </a:r>
-            <a:endParaRPr lang="en-US" sz="1700" dirty="0"/>
-          </a:p>
-        </p:txBody>
-      </p:sp>
-      <p:sp>
-        <p:nvSpPr>
-          <p:cNvPr id="11" name="Shape 9"/>
+            <a:endParaRPr lang="en-US" sz="2100" dirty="0"/>
+          </a:p>
+        </p:txBody>
+      </p:sp>
+      <p:sp>
+        <p:nvSpPr>
+          <p:cNvPr id="12" name="Shape 10"/>
           <p:cNvSpPr/>
           <p:nvPr/>
         </p:nvSpPr>
@@ -10774,14 +11422,14 @@
       </p:sp>
       <p:sp>
         <p:nvSpPr>
-          <p:cNvPr id="12" name="Text 10"/>
+          <p:cNvPr id="13" name="Text 11"/>
           <p:cNvSpPr/>
           <p:nvPr/>
         </p:nvSpPr>
         <p:spPr>
           <a:xfrm>
             <a:off x="8074152" y="1563624"/>
-            <a:ext cx="2825496" cy="201168"/>
+            <a:ext cx="2825496" cy="256032"/>
           </a:xfrm>
           <a:prstGeom prst="rect">
             <a:avLst/>
@@ -10797,7 +11445,7 @@
               <a:buNone/>
             </a:pPr>
             <a:r>
-              <a:rPr lang="en-US" sz="950" b="1" dirty="0">
+              <a:rPr lang="en-US" sz="1300" b="1" dirty="0">
                 <a:solidFill>
                   <a:srgbClr val="0068B7"/>
                 </a:solidFill>
@@ -10807,20 +11455,20 @@
               </a:rPr>
               <a:t>Key idea</a:t>
             </a:r>
-            <a:endParaRPr lang="en-US" sz="950" dirty="0"/>
-          </a:p>
-        </p:txBody>
-      </p:sp>
-      <p:sp>
-        <p:nvSpPr>
-          <p:cNvPr id="13" name="Text 11"/>
-          <p:cNvSpPr/>
-          <p:nvPr/>
-        </p:nvSpPr>
-        <p:spPr>
-          <a:xfrm>
-            <a:off x="8074152" y="1856232"/>
-            <a:ext cx="2825496" cy="1261872"/>
+            <a:endParaRPr lang="en-US" sz="1300" dirty="0"/>
+          </a:p>
+        </p:txBody>
+      </p:sp>
+      <p:sp>
+        <p:nvSpPr>
+          <p:cNvPr id="14" name="Text 12"/>
+          <p:cNvSpPr/>
+          <p:nvPr/>
+        </p:nvSpPr>
+        <p:spPr>
+          <a:xfrm>
+            <a:off x="8074152" y="1920240"/>
+            <a:ext cx="2825496" cy="1188720"/>
           </a:xfrm>
           <a:prstGeom prst="rect">
             <a:avLst/>
@@ -10838,7 +11486,7 @@
               <a:buNone/>
             </a:pPr>
             <a:r>
-              <a:rPr lang="en-US" sz="1250" dirty="0">
+              <a:rPr lang="en-US" sz="1550" dirty="0">
                 <a:solidFill>
                   <a:srgbClr val="17364A"/>
                 </a:solidFill>
@@ -10846,15 +11494,15 @@
                 <a:ea typeface="Aptos" pitchFamily="34" charset="-122"/>
                 <a:cs typeface="Aptos" pitchFamily="34" charset="-120"/>
               </a:rPr>
-              <a:t>NIST Artificial Intelligence Risk Management Framework: https://www.nist.gov/itl/ai-risk-management-framework</a:t>
-            </a:r>
-            <a:endParaRPr lang="en-US" sz="1250" dirty="0"/>
-          </a:p>
-        </p:txBody>
-      </p:sp>
-      <p:sp>
-        <p:nvSpPr>
-          <p:cNvPr id="14" name="Shape 12"/>
+              <a:t>NIST Artificial Intelligence Risk Management Framework:.</a:t>
+            </a:r>
+            <a:endParaRPr lang="en-US" sz="1550" dirty="0"/>
+          </a:p>
+        </p:txBody>
+      </p:sp>
+      <p:sp>
+        <p:nvSpPr>
+          <p:cNvPr id="15" name="Shape 13"/>
           <p:cNvSpPr/>
           <p:nvPr/>
         </p:nvSpPr>
@@ -10881,14 +11529,14 @@
       </p:sp>
       <p:sp>
         <p:nvSpPr>
-          <p:cNvPr id="15" name="Text 13"/>
+          <p:cNvPr id="16" name="Text 14"/>
           <p:cNvSpPr/>
           <p:nvPr/>
         </p:nvSpPr>
         <p:spPr>
           <a:xfrm>
             <a:off x="8074152" y="3666744"/>
-            <a:ext cx="2825496" cy="201168"/>
+            <a:ext cx="2825496" cy="256032"/>
           </a:xfrm>
           <a:prstGeom prst="rect">
             <a:avLst/>
@@ -10904,7 +11552,7 @@
               <a:buNone/>
             </a:pPr>
             <a:r>
-              <a:rPr lang="en-US" sz="950" b="1" dirty="0">
+              <a:rPr lang="en-US" sz="1300" b="1" dirty="0">
                 <a:solidFill>
                   <a:srgbClr val="0068B7"/>
                 </a:solidFill>
@@ -10914,20 +11562,20 @@
               </a:rPr>
               <a:t>Use this for</a:t>
             </a:r>
-            <a:endParaRPr lang="en-US" sz="950" dirty="0"/>
-          </a:p>
-        </p:txBody>
-      </p:sp>
-      <p:sp>
-        <p:nvSpPr>
-          <p:cNvPr id="16" name="Text 14"/>
-          <p:cNvSpPr/>
-          <p:nvPr/>
-        </p:nvSpPr>
-        <p:spPr>
-          <a:xfrm>
-            <a:off x="8074152" y="3959352"/>
-            <a:ext cx="2825496" cy="1170432"/>
+            <a:endParaRPr lang="en-US" sz="1300" dirty="0"/>
+          </a:p>
+        </p:txBody>
+      </p:sp>
+      <p:sp>
+        <p:nvSpPr>
+          <p:cNvPr id="17" name="Text 15"/>
+          <p:cNvSpPr/>
+          <p:nvPr/>
+        </p:nvSpPr>
+        <p:spPr>
+          <a:xfrm>
+            <a:off x="8074152" y="4023360"/>
+            <a:ext cx="2825496" cy="1097280"/>
           </a:xfrm>
           <a:prstGeom prst="rect">
             <a:avLst/>
@@ -10945,7 +11593,7 @@
               <a:buNone/>
             </a:pPr>
             <a:r>
-              <a:rPr lang="en-US" sz="1250" dirty="0">
+              <a:rPr lang="en-US" sz="1550" dirty="0">
                 <a:solidFill>
                   <a:srgbClr val="17364A"/>
                 </a:solidFill>
@@ -10955,7 +11603,7 @@
               </a:rPr>
               <a:t>Connect the concept to public health decisions, safeguards, documentation, or implementation work.</a:t>
             </a:r>
-            <a:endParaRPr lang="en-US" sz="1250" dirty="0"/>
+            <a:endParaRPr lang="en-US" sz="1550" dirty="0"/>
           </a:p>
         </p:txBody>
       </p:sp>
@@ -11152,7 +11800,7 @@
                 <a:ea typeface="Aptos" pitchFamily="34" charset="-122"/>
                 <a:cs typeface="Aptos" pitchFamily="34" charset="-120"/>
               </a:rPr>
-              <a:t>© Paula Soper</a:t>
+              <a:t>Â© Paula Soper</a:t>
             </a:r>
             <a:endParaRPr lang="en-US" sz="800" dirty="0"/>
           </a:p>
@@ -11166,8 +11814,47 @@
         </p:nvSpPr>
         <p:spPr>
           <a:xfrm>
+            <a:off x="11137392" y="6510528"/>
+            <a:ext cx="411480" cy="201168"/>
+          </a:xfrm>
+          <a:prstGeom prst="rect">
+            <a:avLst/>
+          </a:prstGeom>
+          <a:noFill/>
+          <a:ln/>
+        </p:spPr>
+        <p:txBody>
+          <a:bodyPr wrap="square" lIns="0" tIns="0" rIns="0" bIns="0" rtlCol="0" anchor="ctr"/>
+          <a:lstStyle/>
+          <a:p>
+            <a:pPr algn="r" indent="0" marL="0">
+              <a:buNone/>
+            </a:pPr>
+            <a:r>
+              <a:rPr lang="en-US" sz="900" dirty="0">
+                <a:solidFill>
+                  <a:srgbClr val="5F7181"/>
+                </a:solidFill>
+                <a:latin typeface="Aptos" pitchFamily="34" charset="0"/>
+                <a:ea typeface="Aptos" pitchFamily="34" charset="-122"/>
+                <a:cs typeface="Aptos" pitchFamily="34" charset="-120"/>
+              </a:rPr>
+              <a:t>3</a:t>
+            </a:r>
+            <a:endParaRPr lang="en-US" sz="900" dirty="0"/>
+          </a:p>
+        </p:txBody>
+      </p:sp>
+      <p:sp>
+        <p:nvSpPr>
+          <p:cNvPr id="8" name="Text 6"/>
+          <p:cNvSpPr/>
+          <p:nvPr/>
+        </p:nvSpPr>
+        <p:spPr>
+          <a:xfrm>
             <a:off x="640080" y="658368"/>
-            <a:ext cx="10881360" cy="566928"/>
+            <a:ext cx="10881360" cy="713232"/>
           </a:xfrm>
           <a:prstGeom prst="rect">
             <a:avLst/>
@@ -11185,7 +11872,7 @@
               <a:buNone/>
             </a:pPr>
             <a:r>
-              <a:rPr lang="en-US" sz="2700" b="1" dirty="0">
+              <a:rPr lang="en-US" sz="3400" b="1" dirty="0">
                 <a:solidFill>
                   <a:srgbClr val="003A63"/>
                 </a:solidFill>
@@ -11195,20 +11882,20 @@
               </a:rPr>
               <a:t>How this module connects to the playbook</a:t>
             </a:r>
-            <a:endParaRPr lang="en-US" sz="2700" dirty="0"/>
-          </a:p>
-        </p:txBody>
-      </p:sp>
-      <p:sp>
-        <p:nvSpPr>
-          <p:cNvPr id="8" name="Text 6"/>
-          <p:cNvSpPr/>
-          <p:nvPr/>
-        </p:nvSpPr>
-        <p:spPr>
-          <a:xfrm>
-            <a:off x="868680" y="1417320"/>
-            <a:ext cx="6903720" cy="4480560"/>
+            <a:endParaRPr lang="en-US" sz="3400" dirty="0"/>
+          </a:p>
+        </p:txBody>
+      </p:sp>
+      <p:sp>
+        <p:nvSpPr>
+          <p:cNvPr id="9" name="Text 7"/>
+          <p:cNvSpPr/>
+          <p:nvPr/>
+        </p:nvSpPr>
+        <p:spPr>
+          <a:xfrm>
+            <a:off x="868680" y="1508760"/>
+            <a:ext cx="6812280" cy="3977640"/>
           </a:xfrm>
           <a:prstGeom prst="rect">
             <a:avLst/>
@@ -11223,7 +11910,7 @@
           <a:lstStyle/>
           <a:p>
             <a:r>
-              <a:rPr lang="en-US" sz="1540" dirty="0">
+              <a:rPr lang="en-US" sz="1900" dirty="0">
                 <a:solidFill>
                   <a:srgbClr val="17364A"/>
                 </a:solidFill>
@@ -11231,13 +11918,13 @@
                 <a:ea typeface="Aptos" pitchFamily="34" charset="-122"/>
                 <a:cs typeface="Aptos" pitchFamily="34" charset="-120"/>
               </a:rPr>
-              <a:t>Play 13: Monitor and Evaluate AI Systems - This lesson informs Play 13 by helping learners connect the lesson topic to monitor and.</a:t>
-            </a:r>
-            <a:endParaRPr lang="en-US" sz="1540" dirty="0"/>
-          </a:p>
-          <a:p>
-            <a:r>
-              <a:rPr lang="en-US" sz="1540" dirty="0">
+              <a:t>Play 13: Monitor and Evaluate AI Systems - This lesson informs Play 13 by helping learners connect the.</a:t>
+            </a:r>
+            <a:endParaRPr lang="en-US" sz="1900" dirty="0"/>
+          </a:p>
+          <a:p>
+            <a:r>
+              <a:rPr lang="en-US" sz="1900" dirty="0">
                 <a:solidFill>
                   <a:srgbClr val="17364A"/>
                 </a:solidFill>
@@ -11245,13 +11932,13 @@
                 <a:ea typeface="Aptos" pitchFamily="34" charset="-122"/>
                 <a:cs typeface="Aptos" pitchFamily="34" charset="-120"/>
               </a:rPr>
-              <a:t>Play 12: Execute Governance and Oversight - This lesson informs Play 12 by helping learners connect the lesson topic to execute.</a:t>
-            </a:r>
-            <a:endParaRPr lang="en-US" sz="1540" dirty="0"/>
-          </a:p>
-          <a:p>
-            <a:r>
-              <a:rPr lang="en-US" sz="1540" dirty="0">
+              <a:t>Play 12: Execute Governance and Oversight - This lesson informs Play 12 by helping learners connect the.</a:t>
+            </a:r>
+            <a:endParaRPr lang="en-US" sz="1900" dirty="0"/>
+          </a:p>
+          <a:p>
+            <a:r>
+              <a:rPr lang="en-US" sz="1900" dirty="0">
                 <a:solidFill>
                   <a:srgbClr val="17364A"/>
                 </a:solidFill>
@@ -11259,13 +11946,13 @@
                 <a:ea typeface="Aptos" pitchFamily="34" charset="-122"/>
                 <a:cs typeface="Aptos" pitchFamily="34" charset="-120"/>
               </a:rPr>
-              <a:t>Play 11: Build and Deploy AI Solutions - This lesson informs Play 11 by helping learners connect the lesson topic to build and deploy.</a:t>
-            </a:r>
-            <a:endParaRPr lang="en-US" sz="1540" dirty="0"/>
-          </a:p>
-          <a:p>
-            <a:r>
-              <a:rPr lang="en-US" sz="1540" dirty="0">
+              <a:t>Play 11: Build and Deploy AI Solutions - This lesson informs Play 11 by helping learners connect the lesson.</a:t>
+            </a:r>
+            <a:endParaRPr lang="en-US" sz="1900" dirty="0"/>
+          </a:p>
+          <a:p>
+            <a:r>
+              <a:rPr lang="en-US" sz="1900" dirty="0">
                 <a:solidFill>
                   <a:srgbClr val="17364A"/>
                 </a:solidFill>
@@ -11273,15 +11960,15 @@
                 <a:ea typeface="Aptos" pitchFamily="34" charset="-122"/>
                 <a:cs typeface="Aptos" pitchFamily="34" charset="-120"/>
               </a:rPr>
-              <a:t>Play 3: Establish AI Governance - This lesson informs Play 3 by helping learners connect the lesson topic to establish ai governance.</a:t>
-            </a:r>
-            <a:endParaRPr lang="en-US" sz="1540" dirty="0"/>
-          </a:p>
-        </p:txBody>
-      </p:sp>
-      <p:sp>
-        <p:nvSpPr>
-          <p:cNvPr id="9" name="Shape 7"/>
+              <a:t>Play 3: Establish AI Governance - This lesson informs Play 3 by helping learners connect the lesson topic to.</a:t>
+            </a:r>
+            <a:endParaRPr lang="en-US" sz="1900" dirty="0"/>
+          </a:p>
+        </p:txBody>
+      </p:sp>
+      <p:sp>
+        <p:nvSpPr>
+          <p:cNvPr id="10" name="Shape 8"/>
           <p:cNvSpPr/>
           <p:nvPr/>
         </p:nvSpPr>
@@ -11308,14 +11995,14 @@
       </p:sp>
       <p:sp>
         <p:nvSpPr>
-          <p:cNvPr id="10" name="Text 8"/>
+          <p:cNvPr id="11" name="Text 9"/>
           <p:cNvSpPr/>
           <p:nvPr/>
         </p:nvSpPr>
         <p:spPr>
           <a:xfrm>
             <a:off x="8211312" y="1563624"/>
-            <a:ext cx="2734056" cy="201168"/>
+            <a:ext cx="2734056" cy="256032"/>
           </a:xfrm>
           <a:prstGeom prst="rect">
             <a:avLst/>
@@ -11331,7 +12018,7 @@
               <a:buNone/>
             </a:pPr>
             <a:r>
-              <a:rPr lang="en-US" sz="950" b="1" dirty="0">
+              <a:rPr lang="en-US" sz="1300" b="1" dirty="0">
                 <a:solidFill>
                   <a:srgbClr val="0068B7"/>
                 </a:solidFill>
@@ -11341,20 +12028,20 @@
               </a:rPr>
               <a:t>Apply the lesson</a:t>
             </a:r>
-            <a:endParaRPr lang="en-US" sz="950" dirty="0"/>
-          </a:p>
-        </p:txBody>
-      </p:sp>
-      <p:sp>
-        <p:nvSpPr>
-          <p:cNvPr id="11" name="Text 9"/>
-          <p:cNvSpPr/>
-          <p:nvPr/>
-        </p:nvSpPr>
-        <p:spPr>
-          <a:xfrm>
-            <a:off x="8211312" y="1856232"/>
-            <a:ext cx="2734056" cy="1536192"/>
+            <a:endParaRPr lang="en-US" sz="1300" dirty="0"/>
+          </a:p>
+        </p:txBody>
+      </p:sp>
+      <p:sp>
+        <p:nvSpPr>
+          <p:cNvPr id="12" name="Text 10"/>
+          <p:cNvSpPr/>
+          <p:nvPr/>
+        </p:nvSpPr>
+        <p:spPr>
+          <a:xfrm>
+            <a:off x="8211312" y="1920240"/>
+            <a:ext cx="2734056" cy="1463040"/>
           </a:xfrm>
           <a:prstGeom prst="rect">
             <a:avLst/>
@@ -11372,7 +12059,7 @@
               <a:buNone/>
             </a:pPr>
             <a:r>
-              <a:rPr lang="en-US" sz="1250" dirty="0">
+              <a:rPr lang="en-US" sz="1550" dirty="0">
                 <a:solidFill>
                   <a:srgbClr val="17364A"/>
                 </a:solidFill>
@@ -11382,32 +12069,32 @@
               </a:rPr>
               <a:t>Use the related plays to identify decisions, participants, timing, approvals, and documentation needed for responsible implementation.</a:t>
             </a:r>
-            <a:endParaRPr lang="en-US" sz="1250" dirty="0"/>
-          </a:p>
-        </p:txBody>
-      </p:sp>
-      <p:sp>
-        <p:nvSpPr>
-          <p:cNvPr id="12" name="Shape 10"/>
-          <p:cNvSpPr/>
-          <p:nvPr/>
-        </p:nvSpPr>
-        <p:spPr>
-          <a:xfrm>
-            <a:off x="8046720" y="3794760"/>
-            <a:ext cx="3063240" cy="1508760"/>
+            <a:endParaRPr lang="en-US" sz="1550" dirty="0"/>
+          </a:p>
+        </p:txBody>
+      </p:sp>
+      <p:sp>
+        <p:nvSpPr>
+          <p:cNvPr id="13" name="Shape 11"/>
+          <p:cNvSpPr/>
+          <p:nvPr/>
+        </p:nvSpPr>
+        <p:spPr>
+          <a:xfrm>
+            <a:off x="7818120" y="3977640"/>
+            <a:ext cx="972312" cy="749808"/>
           </a:xfrm>
           <a:prstGeom prst="roundRect">
             <a:avLst>
-              <a:gd name="adj" fmla="val 7273"/>
+              <a:gd name="adj" fmla="val 14634"/>
             </a:avLst>
           </a:prstGeom>
           <a:solidFill>
-            <a:srgbClr val="FFF4D9"/>
+            <a:srgbClr val="0068B7"/>
           </a:solidFill>
           <a:ln w="12700">
             <a:solidFill>
-              <a:srgbClr val="B9D7E6"/>
+              <a:srgbClr val="0068B7"/>
             </a:solidFill>
             <a:prstDash val="solid"/>
           </a:ln>
@@ -11415,81 +12102,256 @@
       </p:sp>
       <p:sp>
         <p:nvSpPr>
-          <p:cNvPr id="13" name="Text 11"/>
-          <p:cNvSpPr/>
-          <p:nvPr/>
-        </p:nvSpPr>
-        <p:spPr>
-          <a:xfrm>
-            <a:off x="8211312" y="3941064"/>
-            <a:ext cx="2734056" cy="201168"/>
-          </a:xfrm>
-          <a:prstGeom prst="rect">
-            <a:avLst/>
-          </a:prstGeom>
-          <a:noFill/>
-          <a:ln/>
-        </p:spPr>
-        <p:txBody>
-          <a:bodyPr wrap="square" lIns="0" tIns="0" rIns="0" bIns="0" rtlCol="0" anchor="ctr"/>
-          <a:lstStyle/>
-          <a:p>
-            <a:pPr indent="0" marL="0">
-              <a:buNone/>
-            </a:pPr>
-            <a:r>
-              <a:rPr lang="en-US" sz="950" b="1" dirty="0">
-                <a:solidFill>
-                  <a:srgbClr val="0068B7"/>
-                </a:solidFill>
-                <a:latin typeface="Aptos" pitchFamily="34" charset="0"/>
-                <a:ea typeface="Aptos" pitchFamily="34" charset="-122"/>
-                <a:cs typeface="Aptos" pitchFamily="34" charset="-120"/>
-              </a:rPr>
-              <a:t>Keep in mind</a:t>
-            </a:r>
-            <a:endParaRPr lang="en-US" sz="950" dirty="0"/>
-          </a:p>
-        </p:txBody>
-      </p:sp>
-      <p:sp>
-        <p:nvSpPr>
           <p:cNvPr id="14" name="Text 12"/>
           <p:cNvSpPr/>
           <p:nvPr/>
         </p:nvSpPr>
         <p:spPr>
           <a:xfrm>
-            <a:off x="8211312" y="4233672"/>
-            <a:ext cx="2734056" cy="941832"/>
-          </a:xfrm>
-          <a:prstGeom prst="rect">
-            <a:avLst/>
-          </a:prstGeom>
-          <a:noFill/>
-          <a:ln/>
-        </p:spPr>
-        <p:txBody>
-          <a:bodyPr wrap="square" lIns="0" tIns="0" rIns="0" bIns="0" rtlCol="0" anchor="t">
+            <a:off x="7891272" y="4169664"/>
+            <a:ext cx="826008" cy="310896"/>
+          </a:xfrm>
+          <a:prstGeom prst="rect">
+            <a:avLst/>
+          </a:prstGeom>
+          <a:noFill/>
+          <a:ln/>
+        </p:spPr>
+        <p:txBody>
+          <a:bodyPr wrap="square" lIns="0" tIns="0" rIns="0" bIns="0" rtlCol="0" anchor="ctr">
             <a:normAutofit/>
           </a:bodyPr>
           <a:lstStyle/>
           <a:p>
-            <a:pPr indent="0" marL="0">
-              <a:buNone/>
-            </a:pPr>
-            <a:r>
-              <a:rPr lang="en-US" sz="1250" dirty="0">
-                <a:solidFill>
-                  <a:srgbClr val="17364A"/>
-                </a:solidFill>
-                <a:latin typeface="Aptos" pitchFamily="34" charset="0"/>
-                <a:ea typeface="Aptos" pitchFamily="34" charset="-122"/>
-                <a:cs typeface="Aptos" pitchFamily="34" charset="-120"/>
-              </a:rPr>
-              <a:t>The playbook connection helps turn training into agency work, not just individual knowledge.</a:t>
-            </a:r>
-            <a:endParaRPr lang="en-US" sz="1250" dirty="0"/>
+            <a:pPr algn="ctr" indent="0" marL="0">
+              <a:buNone/>
+            </a:pPr>
+            <a:r>
+              <a:rPr lang="en-US" sz="1500" b="1" dirty="0">
+                <a:solidFill>
+                  <a:srgbClr val="FFFFFF"/>
+                </a:solidFill>
+                <a:latin typeface="Aptos" pitchFamily="34" charset="0"/>
+                <a:ea typeface="Aptos" pitchFamily="34" charset="-122"/>
+                <a:cs typeface="Aptos" pitchFamily="34" charset="-120"/>
+              </a:rPr>
+              <a:t>Lesson</a:t>
+            </a:r>
+            <a:endParaRPr lang="en-US" sz="1500" dirty="0"/>
+          </a:p>
+        </p:txBody>
+      </p:sp>
+      <p:sp>
+        <p:nvSpPr>
+          <p:cNvPr id="15" name="Text 13"/>
+          <p:cNvSpPr/>
+          <p:nvPr/>
+        </p:nvSpPr>
+        <p:spPr>
+          <a:xfrm>
+            <a:off x="8817864" y="4187952"/>
+            <a:ext cx="201168" cy="256032"/>
+          </a:xfrm>
+          <a:prstGeom prst="rect">
+            <a:avLst/>
+          </a:prstGeom>
+          <a:noFill/>
+          <a:ln/>
+        </p:spPr>
+        <p:txBody>
+          <a:bodyPr wrap="square" lIns="0" tIns="0" rIns="0" bIns="0" rtlCol="0" anchor="ctr"/>
+          <a:lstStyle/>
+          <a:p>
+            <a:pPr algn="ctr" indent="0" marL="0">
+              <a:buNone/>
+            </a:pPr>
+            <a:r>
+              <a:rPr lang="en-US" sz="1800" b="1" dirty="0">
+                <a:solidFill>
+                  <a:srgbClr val="0068B7"/>
+                </a:solidFill>
+                <a:latin typeface="Aptos" pitchFamily="34" charset="0"/>
+                <a:ea typeface="Aptos" pitchFamily="34" charset="-122"/>
+                <a:cs typeface="Aptos" pitchFamily="34" charset="-120"/>
+              </a:rPr>
+              <a:t>â†’</a:t>
+            </a:r>
+            <a:endParaRPr lang="en-US" sz="1800" dirty="0"/>
+          </a:p>
+        </p:txBody>
+      </p:sp>
+      <p:sp>
+        <p:nvSpPr>
+          <p:cNvPr id="16" name="Shape 14"/>
+          <p:cNvSpPr/>
+          <p:nvPr/>
+        </p:nvSpPr>
+        <p:spPr>
+          <a:xfrm>
+            <a:off x="9046464" y="3977640"/>
+            <a:ext cx="972312" cy="749808"/>
+          </a:xfrm>
+          <a:prstGeom prst="roundRect">
+            <a:avLst>
+              <a:gd name="adj" fmla="val 14634"/>
+            </a:avLst>
+          </a:prstGeom>
+          <a:solidFill>
+            <a:srgbClr val="2F8A28"/>
+          </a:solidFill>
+          <a:ln w="12700">
+            <a:solidFill>
+              <a:srgbClr val="2F8A28"/>
+            </a:solidFill>
+            <a:prstDash val="solid"/>
+          </a:ln>
+        </p:spPr>
+      </p:sp>
+      <p:sp>
+        <p:nvSpPr>
+          <p:cNvPr id="17" name="Text 15"/>
+          <p:cNvSpPr/>
+          <p:nvPr/>
+        </p:nvSpPr>
+        <p:spPr>
+          <a:xfrm>
+            <a:off x="9119616" y="4169664"/>
+            <a:ext cx="826008" cy="310896"/>
+          </a:xfrm>
+          <a:prstGeom prst="rect">
+            <a:avLst/>
+          </a:prstGeom>
+          <a:noFill/>
+          <a:ln/>
+        </p:spPr>
+        <p:txBody>
+          <a:bodyPr wrap="square" lIns="0" tIns="0" rIns="0" bIns="0" rtlCol="0" anchor="ctr">
+            <a:normAutofit/>
+          </a:bodyPr>
+          <a:lstStyle/>
+          <a:p>
+            <a:pPr algn="ctr" indent="0" marL="0">
+              <a:buNone/>
+            </a:pPr>
+            <a:r>
+              <a:rPr lang="en-US" sz="1500" b="1" dirty="0">
+                <a:solidFill>
+                  <a:srgbClr val="FFFFFF"/>
+                </a:solidFill>
+                <a:latin typeface="Aptos" pitchFamily="34" charset="0"/>
+                <a:ea typeface="Aptos" pitchFamily="34" charset="-122"/>
+                <a:cs typeface="Aptos" pitchFamily="34" charset="-120"/>
+              </a:rPr>
+              <a:t>Plays</a:t>
+            </a:r>
+            <a:endParaRPr lang="en-US" sz="1500" dirty="0"/>
+          </a:p>
+        </p:txBody>
+      </p:sp>
+      <p:sp>
+        <p:nvSpPr>
+          <p:cNvPr id="18" name="Text 16"/>
+          <p:cNvSpPr/>
+          <p:nvPr/>
+        </p:nvSpPr>
+        <p:spPr>
+          <a:xfrm>
+            <a:off x="10046208" y="4187952"/>
+            <a:ext cx="201168" cy="256032"/>
+          </a:xfrm>
+          <a:prstGeom prst="rect">
+            <a:avLst/>
+          </a:prstGeom>
+          <a:noFill/>
+          <a:ln/>
+        </p:spPr>
+        <p:txBody>
+          <a:bodyPr wrap="square" lIns="0" tIns="0" rIns="0" bIns="0" rtlCol="0" anchor="ctr"/>
+          <a:lstStyle/>
+          <a:p>
+            <a:pPr algn="ctr" indent="0" marL="0">
+              <a:buNone/>
+            </a:pPr>
+            <a:r>
+              <a:rPr lang="en-US" sz="1800" b="1" dirty="0">
+                <a:solidFill>
+                  <a:srgbClr val="0068B7"/>
+                </a:solidFill>
+                <a:latin typeface="Aptos" pitchFamily="34" charset="0"/>
+                <a:ea typeface="Aptos" pitchFamily="34" charset="-122"/>
+                <a:cs typeface="Aptos" pitchFamily="34" charset="-120"/>
+              </a:rPr>
+              <a:t>â†’</a:t>
+            </a:r>
+            <a:endParaRPr lang="en-US" sz="1800" dirty="0"/>
+          </a:p>
+        </p:txBody>
+      </p:sp>
+      <p:sp>
+        <p:nvSpPr>
+          <p:cNvPr id="19" name="Shape 17"/>
+          <p:cNvSpPr/>
+          <p:nvPr/>
+        </p:nvSpPr>
+        <p:spPr>
+          <a:xfrm>
+            <a:off x="10274808" y="3977640"/>
+            <a:ext cx="972312" cy="749808"/>
+          </a:xfrm>
+          <a:prstGeom prst="roundRect">
+            <a:avLst>
+              <a:gd name="adj" fmla="val 14634"/>
+            </a:avLst>
+          </a:prstGeom>
+          <a:solidFill>
+            <a:srgbClr val="6A4CA3"/>
+          </a:solidFill>
+          <a:ln w="12700">
+            <a:solidFill>
+              <a:srgbClr val="6A4CA3"/>
+            </a:solidFill>
+            <a:prstDash val="solid"/>
+          </a:ln>
+        </p:spPr>
+      </p:sp>
+      <p:sp>
+        <p:nvSpPr>
+          <p:cNvPr id="20" name="Text 18"/>
+          <p:cNvSpPr/>
+          <p:nvPr/>
+        </p:nvSpPr>
+        <p:spPr>
+          <a:xfrm>
+            <a:off x="10347960" y="4169664"/>
+            <a:ext cx="826008" cy="310896"/>
+          </a:xfrm>
+          <a:prstGeom prst="rect">
+            <a:avLst/>
+          </a:prstGeom>
+          <a:noFill/>
+          <a:ln/>
+        </p:spPr>
+        <p:txBody>
+          <a:bodyPr wrap="square" lIns="0" tIns="0" rIns="0" bIns="0" rtlCol="0" anchor="ctr">
+            <a:normAutofit/>
+          </a:bodyPr>
+          <a:lstStyle/>
+          <a:p>
+            <a:pPr algn="ctr" indent="0" marL="0">
+              <a:buNone/>
+            </a:pPr>
+            <a:r>
+              <a:rPr lang="en-US" sz="1500" b="1" dirty="0">
+                <a:solidFill>
+                  <a:srgbClr val="FFFFFF"/>
+                </a:solidFill>
+                <a:latin typeface="Aptos" pitchFamily="34" charset="0"/>
+                <a:ea typeface="Aptos" pitchFamily="34" charset="-122"/>
+                <a:cs typeface="Aptos" pitchFamily="34" charset="-120"/>
+              </a:rPr>
+              <a:t>Action</a:t>
+            </a:r>
+            <a:endParaRPr lang="en-US" sz="1500" dirty="0"/>
           </a:p>
         </p:txBody>
       </p:sp>
@@ -11686,7 +12548,7 @@
                 <a:ea typeface="Aptos" pitchFamily="34" charset="-122"/>
                 <a:cs typeface="Aptos" pitchFamily="34" charset="-120"/>
               </a:rPr>
-              <a:t>© Paula Soper</a:t>
+              <a:t>Â© Paula Soper</a:t>
             </a:r>
             <a:endParaRPr lang="en-US" sz="800" dirty="0"/>
           </a:p>
@@ -11700,8 +12562,47 @@
         </p:nvSpPr>
         <p:spPr>
           <a:xfrm>
+            <a:off x="11137392" y="6510528"/>
+            <a:ext cx="411480" cy="201168"/>
+          </a:xfrm>
+          <a:prstGeom prst="rect">
+            <a:avLst/>
+          </a:prstGeom>
+          <a:noFill/>
+          <a:ln/>
+        </p:spPr>
+        <p:txBody>
+          <a:bodyPr wrap="square" lIns="0" tIns="0" rIns="0" bIns="0" rtlCol="0" anchor="ctr"/>
+          <a:lstStyle/>
+          <a:p>
+            <a:pPr algn="r" indent="0" marL="0">
+              <a:buNone/>
+            </a:pPr>
+            <a:r>
+              <a:rPr lang="en-US" sz="900" dirty="0">
+                <a:solidFill>
+                  <a:srgbClr val="5F7181"/>
+                </a:solidFill>
+                <a:latin typeface="Aptos" pitchFamily="34" charset="0"/>
+                <a:ea typeface="Aptos" pitchFamily="34" charset="-122"/>
+                <a:cs typeface="Aptos" pitchFamily="34" charset="-120"/>
+              </a:rPr>
+              <a:t>4</a:t>
+            </a:r>
+            <a:endParaRPr lang="en-US" sz="900" dirty="0"/>
+          </a:p>
+        </p:txBody>
+      </p:sp>
+      <p:sp>
+        <p:nvSpPr>
+          <p:cNvPr id="8" name="Text 6"/>
+          <p:cNvSpPr/>
+          <p:nvPr/>
+        </p:nvSpPr>
+        <p:spPr>
+          <a:xfrm>
             <a:off x="640080" y="658368"/>
-            <a:ext cx="10881360" cy="566928"/>
+            <a:ext cx="10881360" cy="713232"/>
           </a:xfrm>
           <a:prstGeom prst="rect">
             <a:avLst/>
@@ -11719,7 +12620,7 @@
               <a:buNone/>
             </a:pPr>
             <a:r>
-              <a:rPr lang="en-US" sz="2700" b="1" dirty="0">
+              <a:rPr lang="en-US" sz="3400" b="1" dirty="0">
                 <a:solidFill>
                   <a:srgbClr val="003A63"/>
                 </a:solidFill>
@@ -11729,20 +12630,20 @@
               </a:rPr>
               <a:t>Related toolkit resources</a:t>
             </a:r>
-            <a:endParaRPr lang="en-US" sz="2700" dirty="0"/>
-          </a:p>
-        </p:txBody>
-      </p:sp>
-      <p:sp>
-        <p:nvSpPr>
-          <p:cNvPr id="8" name="Text 6"/>
-          <p:cNvSpPr/>
-          <p:nvPr/>
-        </p:nvSpPr>
-        <p:spPr>
-          <a:xfrm>
-            <a:off x="868680" y="1417320"/>
-            <a:ext cx="6903720" cy="4480560"/>
+            <a:endParaRPr lang="en-US" sz="3400" dirty="0"/>
+          </a:p>
+        </p:txBody>
+      </p:sp>
+      <p:sp>
+        <p:nvSpPr>
+          <p:cNvPr id="9" name="Text 7"/>
+          <p:cNvSpPr/>
+          <p:nvPr/>
+        </p:nvSpPr>
+        <p:spPr>
+          <a:xfrm>
+            <a:off x="868680" y="1508760"/>
+            <a:ext cx="6812280" cy="3977640"/>
           </a:xfrm>
           <a:prstGeom prst="rect">
             <a:avLst/>
@@ -11757,7 +12658,7 @@
           <a:lstStyle/>
           <a:p>
             <a:r>
-              <a:rPr lang="en-US" sz="1460" dirty="0">
+              <a:rPr lang="en-US" sz="1850" dirty="0">
                 <a:solidFill>
                   <a:srgbClr val="17364A"/>
                 </a:solidFill>
@@ -11765,13 +12666,13 @@
                 <a:ea typeface="Aptos" pitchFamily="34" charset="-122"/>
                 <a:cs typeface="Aptos" pitchFamily="34" charset="-120"/>
               </a:rPr>
-              <a:t>Tool 44: Performance Monitoring Dashboard (Dashboard) - Use this tool to complete or strengthen the practical exercise for the module.</a:t>
-            </a:r>
-            <a:endParaRPr lang="en-US" sz="1460" dirty="0"/>
-          </a:p>
-          <a:p>
-            <a:r>
-              <a:rPr lang="en-US" sz="1460" dirty="0">
+              <a:t>Tool 44: Performance Monitoring Dashboard (Dashboard) - Use this tool to complete or strengthen the.</a:t>
+            </a:r>
+            <a:endParaRPr lang="en-US" sz="1850" dirty="0"/>
+          </a:p>
+          <a:p>
+            <a:r>
+              <a:rPr lang="en-US" sz="1850" dirty="0">
                 <a:solidFill>
                   <a:srgbClr val="17364A"/>
                 </a:solidFill>
@@ -11779,13 +12680,13 @@
                 <a:ea typeface="Aptos" pitchFamily="34" charset="-122"/>
                 <a:cs typeface="Aptos" pitchFamily="34" charset="-120"/>
               </a:rPr>
-              <a:t>Tool 45: Continuous Improvement Log (Log) - Use Continuous Improvement Log to translate this lesson into a documented public health.</a:t>
-            </a:r>
-            <a:endParaRPr lang="en-US" sz="1460" dirty="0"/>
-          </a:p>
-          <a:p>
-            <a:r>
-              <a:rPr lang="en-US" sz="1460" dirty="0">
+              <a:t>Tool 45: Continuous Improvement Log (Log) - Use Continuous Improvement Log to translate this lesson into a.</a:t>
+            </a:r>
+            <a:endParaRPr lang="en-US" sz="1850" dirty="0"/>
+          </a:p>
+          <a:p>
+            <a:r>
+              <a:rPr lang="en-US" sz="1850" dirty="0">
                 <a:solidFill>
                   <a:srgbClr val="17364A"/>
                 </a:solidFill>
@@ -11793,13 +12694,13 @@
                 <a:ea typeface="Aptos" pitchFamily="34" charset="-122"/>
                 <a:cs typeface="Aptos" pitchFamily="34" charset="-120"/>
               </a:rPr>
-              <a:t>Tool 48: AI Evaluation &amp; Outcomes Reporting (Template) - Use this tool to complete or strengthen the practical exercise for the.</a:t>
-            </a:r>
-            <a:endParaRPr lang="en-US" sz="1460" dirty="0"/>
-          </a:p>
-          <a:p>
-            <a:r>
-              <a:rPr lang="en-US" sz="1460" dirty="0">
+              <a:t>Tool 48: AI Evaluation &amp; Outcomes Reporting (Template) - Use this tool to complete or strengthen the.</a:t>
+            </a:r>
+            <a:endParaRPr lang="en-US" sz="1850" dirty="0"/>
+          </a:p>
+          <a:p>
+            <a:r>
+              <a:rPr lang="en-US" sz="1850" dirty="0">
                 <a:solidFill>
                   <a:srgbClr val="17364A"/>
                 </a:solidFill>
@@ -11807,29 +12708,15 @@
                 <a:ea typeface="Aptos" pitchFamily="34" charset="-122"/>
                 <a:cs typeface="Aptos" pitchFamily="34" charset="-120"/>
               </a:rPr>
-              <a:t>Tool 13: AI Use Case Intake, Risk Review, and System Inventory Template (Template) - Use AI Use Case Intake, Risk Review, and System.</a:t>
-            </a:r>
-            <a:endParaRPr lang="en-US" sz="1460" dirty="0"/>
-          </a:p>
-          <a:p>
-            <a:r>
-              <a:rPr lang="en-US" sz="1460" dirty="0">
-                <a:solidFill>
-                  <a:srgbClr val="17364A"/>
-                </a:solidFill>
-                <a:latin typeface="Aptos" pitchFamily="34" charset="0"/>
-                <a:ea typeface="Aptos" pitchFamily="34" charset="-122"/>
-                <a:cs typeface="Aptos" pitchFamily="34" charset="-120"/>
-              </a:rPr>
-              <a:t>Tool 16: Incident Response Checklist (Checklist) - Use Incident Response Checklist to translate this lesson into a documented public.</a:t>
-            </a:r>
-            <a:endParaRPr lang="en-US" sz="1460" dirty="0"/>
-          </a:p>
-        </p:txBody>
-      </p:sp>
-      <p:sp>
-        <p:nvSpPr>
-          <p:cNvPr id="9" name="Shape 7"/>
+              <a:t>Tool 13: AI Use Case Intake, Risk Review, and System Inventory Template (Template) - Use AI Use Case Intake,.</a:t>
+            </a:r>
+            <a:endParaRPr lang="en-US" sz="1850" dirty="0"/>
+          </a:p>
+        </p:txBody>
+      </p:sp>
+      <p:sp>
+        <p:nvSpPr>
+          <p:cNvPr id="10" name="Shape 8"/>
           <p:cNvSpPr/>
           <p:nvPr/>
         </p:nvSpPr>
@@ -11856,14 +12743,14 @@
       </p:sp>
       <p:sp>
         <p:nvSpPr>
-          <p:cNvPr id="10" name="Text 8"/>
+          <p:cNvPr id="11" name="Text 9"/>
           <p:cNvSpPr/>
           <p:nvPr/>
         </p:nvSpPr>
         <p:spPr>
           <a:xfrm>
             <a:off x="8211312" y="1563624"/>
-            <a:ext cx="2734056" cy="201168"/>
+            <a:ext cx="2734056" cy="256032"/>
           </a:xfrm>
           <a:prstGeom prst="rect">
             <a:avLst/>
@@ -11879,7 +12766,7 @@
               <a:buNone/>
             </a:pPr>
             <a:r>
-              <a:rPr lang="en-US" sz="950" b="1" dirty="0">
+              <a:rPr lang="en-US" sz="1300" b="1" dirty="0">
                 <a:solidFill>
                   <a:srgbClr val="0068B7"/>
                 </a:solidFill>
@@ -11889,20 +12776,20 @@
               </a:rPr>
               <a:t>Use the tools</a:t>
             </a:r>
-            <a:endParaRPr lang="en-US" sz="950" dirty="0"/>
-          </a:p>
-        </p:txBody>
-      </p:sp>
-      <p:sp>
-        <p:nvSpPr>
-          <p:cNvPr id="11" name="Text 9"/>
-          <p:cNvSpPr/>
-          <p:nvPr/>
-        </p:nvSpPr>
-        <p:spPr>
-          <a:xfrm>
-            <a:off x="8211312" y="1856232"/>
-            <a:ext cx="2734056" cy="1536192"/>
+            <a:endParaRPr lang="en-US" sz="1300" dirty="0"/>
+          </a:p>
+        </p:txBody>
+      </p:sp>
+      <p:sp>
+        <p:nvSpPr>
+          <p:cNvPr id="12" name="Text 10"/>
+          <p:cNvSpPr/>
+          <p:nvPr/>
+        </p:nvSpPr>
+        <p:spPr>
+          <a:xfrm>
+            <a:off x="8211312" y="1920240"/>
+            <a:ext cx="2734056" cy="1463040"/>
           </a:xfrm>
           <a:prstGeom prst="rect">
             <a:avLst/>
@@ -11920,7 +12807,7 @@
               <a:buNone/>
             </a:pPr>
             <a:r>
-              <a:rPr lang="en-US" sz="1250" dirty="0">
+              <a:rPr lang="en-US" sz="1550" dirty="0">
                 <a:solidFill>
                   <a:srgbClr val="17364A"/>
                 </a:solidFill>
@@ -11930,32 +12817,32 @@
               </a:rPr>
               <a:t>Use linked tools when your department needs a structured worksheet, template, checklist, review process, or documentation artifact.</a:t>
             </a:r>
-            <a:endParaRPr lang="en-US" sz="1250" dirty="0"/>
-          </a:p>
-        </p:txBody>
-      </p:sp>
-      <p:sp>
-        <p:nvSpPr>
-          <p:cNvPr id="12" name="Shape 10"/>
-          <p:cNvSpPr/>
-          <p:nvPr/>
-        </p:nvSpPr>
-        <p:spPr>
-          <a:xfrm>
-            <a:off x="8046720" y="3794760"/>
-            <a:ext cx="3063240" cy="1508760"/>
+            <a:endParaRPr lang="en-US" sz="1550" dirty="0"/>
+          </a:p>
+        </p:txBody>
+      </p:sp>
+      <p:sp>
+        <p:nvSpPr>
+          <p:cNvPr id="13" name="Shape 11"/>
+          <p:cNvSpPr/>
+          <p:nvPr/>
+        </p:nvSpPr>
+        <p:spPr>
+          <a:xfrm>
+            <a:off x="7818120" y="3977640"/>
+            <a:ext cx="972312" cy="749808"/>
           </a:xfrm>
           <a:prstGeom prst="roundRect">
             <a:avLst>
-              <a:gd name="adj" fmla="val 7273"/>
+              <a:gd name="adj" fmla="val 14634"/>
             </a:avLst>
           </a:prstGeom>
           <a:solidFill>
-            <a:srgbClr val="EEF8ED"/>
+            <a:srgbClr val="0068B7"/>
           </a:solidFill>
           <a:ln w="12700">
             <a:solidFill>
-              <a:srgbClr val="B9D7E6"/>
+              <a:srgbClr val="0068B7"/>
             </a:solidFill>
             <a:prstDash val="solid"/>
           </a:ln>
@@ -11963,81 +12850,256 @@
       </p:sp>
       <p:sp>
         <p:nvSpPr>
-          <p:cNvPr id="13" name="Text 11"/>
-          <p:cNvSpPr/>
-          <p:nvPr/>
-        </p:nvSpPr>
-        <p:spPr>
-          <a:xfrm>
-            <a:off x="8211312" y="3941064"/>
-            <a:ext cx="2734056" cy="201168"/>
-          </a:xfrm>
-          <a:prstGeom prst="rect">
-            <a:avLst/>
-          </a:prstGeom>
-          <a:noFill/>
-          <a:ln/>
-        </p:spPr>
-        <p:txBody>
-          <a:bodyPr wrap="square" lIns="0" tIns="0" rIns="0" bIns="0" rtlCol="0" anchor="ctr"/>
-          <a:lstStyle/>
-          <a:p>
-            <a:pPr indent="0" marL="0">
-              <a:buNone/>
-            </a:pPr>
-            <a:r>
-              <a:rPr lang="en-US" sz="950" b="1" dirty="0">
-                <a:solidFill>
-                  <a:srgbClr val="0068B7"/>
-                </a:solidFill>
-                <a:latin typeface="Aptos" pitchFamily="34" charset="0"/>
-                <a:ea typeface="Aptos" pitchFamily="34" charset="-122"/>
-                <a:cs typeface="Aptos" pitchFamily="34" charset="-120"/>
-              </a:rPr>
-              <a:t>Avoid duplication</a:t>
-            </a:r>
-            <a:endParaRPr lang="en-US" sz="950" dirty="0"/>
-          </a:p>
-        </p:txBody>
-      </p:sp>
-      <p:sp>
-        <p:nvSpPr>
           <p:cNvPr id="14" name="Text 12"/>
           <p:cNvSpPr/>
           <p:nvPr/>
         </p:nvSpPr>
         <p:spPr>
           <a:xfrm>
-            <a:off x="8211312" y="4233672"/>
-            <a:ext cx="2734056" cy="941832"/>
-          </a:xfrm>
-          <a:prstGeom prst="rect">
-            <a:avLst/>
-          </a:prstGeom>
-          <a:noFill/>
-          <a:ln/>
-        </p:spPr>
-        <p:txBody>
-          <a:bodyPr wrap="square" lIns="0" tIns="0" rIns="0" bIns="0" rtlCol="0" anchor="t">
+            <a:off x="7891272" y="4169664"/>
+            <a:ext cx="826008" cy="310896"/>
+          </a:xfrm>
+          <a:prstGeom prst="rect">
+            <a:avLst/>
+          </a:prstGeom>
+          <a:noFill/>
+          <a:ln/>
+        </p:spPr>
+        <p:txBody>
+          <a:bodyPr wrap="square" lIns="0" tIns="0" rIns="0" bIns="0" rtlCol="0" anchor="ctr">
             <a:normAutofit/>
           </a:bodyPr>
           <a:lstStyle/>
           <a:p>
-            <a:pPr indent="0" marL="0">
-              <a:buNone/>
-            </a:pPr>
-            <a:r>
-              <a:rPr lang="en-US" sz="1250" dirty="0">
-                <a:solidFill>
-                  <a:srgbClr val="17364A"/>
-                </a:solidFill>
-                <a:latin typeface="Aptos" pitchFamily="34" charset="0"/>
-                <a:ea typeface="Aptos" pitchFamily="34" charset="-122"/>
-                <a:cs typeface="Aptos" pitchFamily="34" charset="-120"/>
-              </a:rPr>
-              <a:t>If your department already has a strong equivalent tool, adapt or use the existing process instead of recreating it.</a:t>
-            </a:r>
-            <a:endParaRPr lang="en-US" sz="1250" dirty="0"/>
+            <a:pPr algn="ctr" indent="0" marL="0">
+              <a:buNone/>
+            </a:pPr>
+            <a:r>
+              <a:rPr lang="en-US" sz="1500" b="1" dirty="0">
+                <a:solidFill>
+                  <a:srgbClr val="FFFFFF"/>
+                </a:solidFill>
+                <a:latin typeface="Aptos" pitchFamily="34" charset="0"/>
+                <a:ea typeface="Aptos" pitchFamily="34" charset="-122"/>
+                <a:cs typeface="Aptos" pitchFamily="34" charset="-120"/>
+              </a:rPr>
+              <a:t>Concept</a:t>
+            </a:r>
+            <a:endParaRPr lang="en-US" sz="1500" dirty="0"/>
+          </a:p>
+        </p:txBody>
+      </p:sp>
+      <p:sp>
+        <p:nvSpPr>
+          <p:cNvPr id="15" name="Text 13"/>
+          <p:cNvSpPr/>
+          <p:nvPr/>
+        </p:nvSpPr>
+        <p:spPr>
+          <a:xfrm>
+            <a:off x="8817864" y="4187952"/>
+            <a:ext cx="201168" cy="256032"/>
+          </a:xfrm>
+          <a:prstGeom prst="rect">
+            <a:avLst/>
+          </a:prstGeom>
+          <a:noFill/>
+          <a:ln/>
+        </p:spPr>
+        <p:txBody>
+          <a:bodyPr wrap="square" lIns="0" tIns="0" rIns="0" bIns="0" rtlCol="0" anchor="ctr"/>
+          <a:lstStyle/>
+          <a:p>
+            <a:pPr algn="ctr" indent="0" marL="0">
+              <a:buNone/>
+            </a:pPr>
+            <a:r>
+              <a:rPr lang="en-US" sz="1800" b="1" dirty="0">
+                <a:solidFill>
+                  <a:srgbClr val="0068B7"/>
+                </a:solidFill>
+                <a:latin typeface="Aptos" pitchFamily="34" charset="0"/>
+                <a:ea typeface="Aptos" pitchFamily="34" charset="-122"/>
+                <a:cs typeface="Aptos" pitchFamily="34" charset="-120"/>
+              </a:rPr>
+              <a:t>â†’</a:t>
+            </a:r>
+            <a:endParaRPr lang="en-US" sz="1800" dirty="0"/>
+          </a:p>
+        </p:txBody>
+      </p:sp>
+      <p:sp>
+        <p:nvSpPr>
+          <p:cNvPr id="16" name="Shape 14"/>
+          <p:cNvSpPr/>
+          <p:nvPr/>
+        </p:nvSpPr>
+        <p:spPr>
+          <a:xfrm>
+            <a:off x="9046464" y="3977640"/>
+            <a:ext cx="972312" cy="749808"/>
+          </a:xfrm>
+          <a:prstGeom prst="roundRect">
+            <a:avLst>
+              <a:gd name="adj" fmla="val 14634"/>
+            </a:avLst>
+          </a:prstGeom>
+          <a:solidFill>
+            <a:srgbClr val="2F8A28"/>
+          </a:solidFill>
+          <a:ln w="12700">
+            <a:solidFill>
+              <a:srgbClr val="2F8A28"/>
+            </a:solidFill>
+            <a:prstDash val="solid"/>
+          </a:ln>
+        </p:spPr>
+      </p:sp>
+      <p:sp>
+        <p:nvSpPr>
+          <p:cNvPr id="17" name="Text 15"/>
+          <p:cNvSpPr/>
+          <p:nvPr/>
+        </p:nvSpPr>
+        <p:spPr>
+          <a:xfrm>
+            <a:off x="9119616" y="4169664"/>
+            <a:ext cx="826008" cy="310896"/>
+          </a:xfrm>
+          <a:prstGeom prst="rect">
+            <a:avLst/>
+          </a:prstGeom>
+          <a:noFill/>
+          <a:ln/>
+        </p:spPr>
+        <p:txBody>
+          <a:bodyPr wrap="square" lIns="0" tIns="0" rIns="0" bIns="0" rtlCol="0" anchor="ctr">
+            <a:normAutofit/>
+          </a:bodyPr>
+          <a:lstStyle/>
+          <a:p>
+            <a:pPr algn="ctr" indent="0" marL="0">
+              <a:buNone/>
+            </a:pPr>
+            <a:r>
+              <a:rPr lang="en-US" sz="1500" b="1" dirty="0">
+                <a:solidFill>
+                  <a:srgbClr val="FFFFFF"/>
+                </a:solidFill>
+                <a:latin typeface="Aptos" pitchFamily="34" charset="0"/>
+                <a:ea typeface="Aptos" pitchFamily="34" charset="-122"/>
+                <a:cs typeface="Aptos" pitchFamily="34" charset="-120"/>
+              </a:rPr>
+              <a:t>Tool</a:t>
+            </a:r>
+            <a:endParaRPr lang="en-US" sz="1500" dirty="0"/>
+          </a:p>
+        </p:txBody>
+      </p:sp>
+      <p:sp>
+        <p:nvSpPr>
+          <p:cNvPr id="18" name="Text 16"/>
+          <p:cNvSpPr/>
+          <p:nvPr/>
+        </p:nvSpPr>
+        <p:spPr>
+          <a:xfrm>
+            <a:off x="10046208" y="4187952"/>
+            <a:ext cx="201168" cy="256032"/>
+          </a:xfrm>
+          <a:prstGeom prst="rect">
+            <a:avLst/>
+          </a:prstGeom>
+          <a:noFill/>
+          <a:ln/>
+        </p:spPr>
+        <p:txBody>
+          <a:bodyPr wrap="square" lIns="0" tIns="0" rIns="0" bIns="0" rtlCol="0" anchor="ctr"/>
+          <a:lstStyle/>
+          <a:p>
+            <a:pPr algn="ctr" indent="0" marL="0">
+              <a:buNone/>
+            </a:pPr>
+            <a:r>
+              <a:rPr lang="en-US" sz="1800" b="1" dirty="0">
+                <a:solidFill>
+                  <a:srgbClr val="0068B7"/>
+                </a:solidFill>
+                <a:latin typeface="Aptos" pitchFamily="34" charset="0"/>
+                <a:ea typeface="Aptos" pitchFamily="34" charset="-122"/>
+                <a:cs typeface="Aptos" pitchFamily="34" charset="-120"/>
+              </a:rPr>
+              <a:t>â†’</a:t>
+            </a:r>
+            <a:endParaRPr lang="en-US" sz="1800" dirty="0"/>
+          </a:p>
+        </p:txBody>
+      </p:sp>
+      <p:sp>
+        <p:nvSpPr>
+          <p:cNvPr id="19" name="Shape 17"/>
+          <p:cNvSpPr/>
+          <p:nvPr/>
+        </p:nvSpPr>
+        <p:spPr>
+          <a:xfrm>
+            <a:off x="10274808" y="3977640"/>
+            <a:ext cx="972312" cy="749808"/>
+          </a:xfrm>
+          <a:prstGeom prst="roundRect">
+            <a:avLst>
+              <a:gd name="adj" fmla="val 14634"/>
+            </a:avLst>
+          </a:prstGeom>
+          <a:solidFill>
+            <a:srgbClr val="D69A2D"/>
+          </a:solidFill>
+          <a:ln w="12700">
+            <a:solidFill>
+              <a:srgbClr val="D69A2D"/>
+            </a:solidFill>
+            <a:prstDash val="solid"/>
+          </a:ln>
+        </p:spPr>
+      </p:sp>
+      <p:sp>
+        <p:nvSpPr>
+          <p:cNvPr id="20" name="Text 18"/>
+          <p:cNvSpPr/>
+          <p:nvPr/>
+        </p:nvSpPr>
+        <p:spPr>
+          <a:xfrm>
+            <a:off x="10347960" y="4169664"/>
+            <a:ext cx="826008" cy="310896"/>
+          </a:xfrm>
+          <a:prstGeom prst="rect">
+            <a:avLst/>
+          </a:prstGeom>
+          <a:noFill/>
+          <a:ln/>
+        </p:spPr>
+        <p:txBody>
+          <a:bodyPr wrap="square" lIns="0" tIns="0" rIns="0" bIns="0" rtlCol="0" anchor="ctr">
+            <a:normAutofit/>
+          </a:bodyPr>
+          <a:lstStyle/>
+          <a:p>
+            <a:pPr algn="ctr" indent="0" marL="0">
+              <a:buNone/>
+            </a:pPr>
+            <a:r>
+              <a:rPr lang="en-US" sz="1500" b="1" dirty="0">
+                <a:solidFill>
+                  <a:srgbClr val="FFFFFF"/>
+                </a:solidFill>
+                <a:latin typeface="Aptos" pitchFamily="34" charset="0"/>
+                <a:ea typeface="Aptos" pitchFamily="34" charset="-122"/>
+                <a:cs typeface="Aptos" pitchFamily="34" charset="-120"/>
+              </a:rPr>
+              <a:t>Artifact</a:t>
+            </a:r>
+            <a:endParaRPr lang="en-US" sz="1500" dirty="0"/>
           </a:p>
         </p:txBody>
       </p:sp>
@@ -12234,7 +13296,7 @@
                 <a:ea typeface="Aptos" pitchFamily="34" charset="-122"/>
                 <a:cs typeface="Aptos" pitchFamily="34" charset="-120"/>
               </a:rPr>
-              <a:t>© Paula Soper</a:t>
+              <a:t>Â© Paula Soper</a:t>
             </a:r>
             <a:endParaRPr lang="en-US" sz="800" dirty="0"/>
           </a:p>
@@ -12242,7 +13304,46 @@
       </p:sp>
       <p:sp>
         <p:nvSpPr>
-          <p:cNvPr id="7" name="Shape 5"/>
+          <p:cNvPr id="7" name="Text 5"/>
+          <p:cNvSpPr/>
+          <p:nvPr/>
+        </p:nvSpPr>
+        <p:spPr>
+          <a:xfrm>
+            <a:off x="11137392" y="6510528"/>
+            <a:ext cx="411480" cy="201168"/>
+          </a:xfrm>
+          <a:prstGeom prst="rect">
+            <a:avLst/>
+          </a:prstGeom>
+          <a:noFill/>
+          <a:ln/>
+        </p:spPr>
+        <p:txBody>
+          <a:bodyPr wrap="square" lIns="0" tIns="0" rIns="0" bIns="0" rtlCol="0" anchor="ctr"/>
+          <a:lstStyle/>
+          <a:p>
+            <a:pPr algn="r" indent="0" marL="0">
+              <a:buNone/>
+            </a:pPr>
+            <a:r>
+              <a:rPr lang="en-US" sz="900" dirty="0">
+                <a:solidFill>
+                  <a:srgbClr val="5F7181"/>
+                </a:solidFill>
+                <a:latin typeface="Aptos" pitchFamily="34" charset="0"/>
+                <a:ea typeface="Aptos" pitchFamily="34" charset="-122"/>
+                <a:cs typeface="Aptos" pitchFamily="34" charset="-120"/>
+              </a:rPr>
+              <a:t>5</a:t>
+            </a:r>
+            <a:endParaRPr lang="en-US" sz="900" dirty="0"/>
+          </a:p>
+        </p:txBody>
+      </p:sp>
+      <p:sp>
+        <p:nvSpPr>
+          <p:cNvPr id="8" name="Shape 6"/>
           <p:cNvSpPr/>
           <p:nvPr/>
         </p:nvSpPr>
@@ -12267,7 +13368,7 @@
       </p:sp>
       <p:sp>
         <p:nvSpPr>
-          <p:cNvPr id="8" name="Text 6"/>
+          <p:cNvPr id="9" name="Text 7"/>
           <p:cNvSpPr/>
           <p:nvPr/>
         </p:nvSpPr>
@@ -12306,14 +13407,14 @@
       </p:sp>
       <p:sp>
         <p:nvSpPr>
-          <p:cNvPr id="9" name="Text 7"/>
+          <p:cNvPr id="10" name="Text 8"/>
           <p:cNvSpPr/>
           <p:nvPr/>
         </p:nvSpPr>
         <p:spPr>
           <a:xfrm>
             <a:off x="640080" y="621792"/>
-            <a:ext cx="10881360" cy="566928"/>
+            <a:ext cx="10881360" cy="713232"/>
           </a:xfrm>
           <a:prstGeom prst="rect">
             <a:avLst/>
@@ -12331,7 +13432,7 @@
               <a:buNone/>
             </a:pPr>
             <a:r>
-              <a:rPr lang="en-US" sz="2700" b="1" dirty="0">
+              <a:rPr lang="en-US" sz="3400" b="1" dirty="0">
                 <a:solidFill>
                   <a:srgbClr val="003A63"/>
                 </a:solidFill>
@@ -12341,20 +13442,20 @@
               </a:rPr>
               <a:t>Learning Objectives</a:t>
             </a:r>
-            <a:endParaRPr lang="en-US" sz="2700" dirty="0"/>
-          </a:p>
-        </p:txBody>
-      </p:sp>
-      <p:sp>
-        <p:nvSpPr>
-          <p:cNvPr id="10" name="Text 8"/>
-          <p:cNvSpPr/>
-          <p:nvPr/>
-        </p:nvSpPr>
-        <p:spPr>
-          <a:xfrm>
-            <a:off x="868680" y="1417320"/>
-            <a:ext cx="6675120" cy="4434840"/>
+            <a:endParaRPr lang="en-US" sz="3400" dirty="0"/>
+          </a:p>
+        </p:txBody>
+      </p:sp>
+      <p:sp>
+        <p:nvSpPr>
+          <p:cNvPr id="11" name="Text 9"/>
+          <p:cNvSpPr/>
+          <p:nvPr/>
+        </p:nvSpPr>
+        <p:spPr>
+          <a:xfrm>
+            <a:off x="868680" y="1508760"/>
+            <a:ext cx="6537960" cy="4160520"/>
           </a:xfrm>
           <a:prstGeom prst="rect">
             <a:avLst/>
@@ -12369,7 +13470,7 @@
           <a:lstStyle/>
           <a:p>
             <a:r>
-              <a:rPr lang="en-US" sz="1700" dirty="0">
+              <a:rPr lang="en-US" sz="2100" dirty="0">
                 <a:solidFill>
                   <a:srgbClr val="17364A"/>
                 </a:solidFill>
@@ -12379,11 +13480,11 @@
               </a:rPr>
               <a:t>Describe the purpose of advanced model validation in public health AI.</a:t>
             </a:r>
-            <a:endParaRPr lang="en-US" sz="1700" dirty="0"/>
-          </a:p>
-          <a:p>
-            <a:r>
-              <a:rPr lang="en-US" sz="1700" dirty="0">
+            <a:endParaRPr lang="en-US" sz="2100" dirty="0"/>
+          </a:p>
+          <a:p>
+            <a:r>
+              <a:rPr lang="en-US" sz="2100" dirty="0">
                 <a:solidFill>
                   <a:srgbClr val="17364A"/>
                 </a:solidFill>
@@ -12391,13 +13492,13 @@
                 <a:ea typeface="Aptos" pitchFamily="34" charset="-122"/>
                 <a:cs typeface="Aptos" pitchFamily="34" charset="-120"/>
               </a:rPr>
-              <a:t>Interpret sensitivity, specificity, positive predictive value, negative predictive value, precision, recall, F1 score,.</a:t>
-            </a:r>
-            <a:endParaRPr lang="en-US" sz="1700" dirty="0"/>
-          </a:p>
-          <a:p>
-            <a:r>
-              <a:rPr lang="en-US" sz="1700" dirty="0">
+              <a:t>Interpret sensitivity, specificity, positive predictive value, negative predictive value, precision,.</a:t>
+            </a:r>
+            <a:endParaRPr lang="en-US" sz="2100" dirty="0"/>
+          </a:p>
+          <a:p>
+            <a:r>
+              <a:rPr lang="en-US" sz="2100" dirty="0">
                 <a:solidFill>
                   <a:srgbClr val="17364A"/>
                 </a:solidFill>
@@ -12407,27 +13508,13 @@
               </a:rPr>
               <a:t>Distinguish internal validation, external validation, and workflow validation.</a:t>
             </a:r>
-            <a:endParaRPr lang="en-US" sz="1700" dirty="0"/>
-          </a:p>
-          <a:p>
-            <a:r>
-              <a:rPr lang="en-US" sz="1700" dirty="0">
-                <a:solidFill>
-                  <a:srgbClr val="17364A"/>
-                </a:solidFill>
-                <a:latin typeface="Aptos" pitchFamily="34" charset="0"/>
-                <a:ea typeface="Aptos" pitchFamily="34" charset="-122"/>
-                <a:cs typeface="Aptos" pitchFamily="34" charset="-120"/>
-              </a:rPr>
-              <a:t>Identify when model performance is insufficient for the intended use.</a:t>
-            </a:r>
-            <a:endParaRPr lang="en-US" sz="1700" dirty="0"/>
-          </a:p>
-        </p:txBody>
-      </p:sp>
-      <p:sp>
-        <p:nvSpPr>
-          <p:cNvPr id="11" name="Shape 9"/>
+            <a:endParaRPr lang="en-US" sz="2100" dirty="0"/>
+          </a:p>
+        </p:txBody>
+      </p:sp>
+      <p:sp>
+        <p:nvSpPr>
+          <p:cNvPr id="12" name="Shape 10"/>
           <p:cNvSpPr/>
           <p:nvPr/>
         </p:nvSpPr>
@@ -12454,14 +13541,14 @@
       </p:sp>
       <p:sp>
         <p:nvSpPr>
-          <p:cNvPr id="12" name="Text 10"/>
+          <p:cNvPr id="13" name="Text 11"/>
           <p:cNvSpPr/>
           <p:nvPr/>
         </p:nvSpPr>
         <p:spPr>
           <a:xfrm>
             <a:off x="8074152" y="1563624"/>
-            <a:ext cx="2825496" cy="201168"/>
+            <a:ext cx="2825496" cy="256032"/>
           </a:xfrm>
           <a:prstGeom prst="rect">
             <a:avLst/>
@@ -12477,7 +13564,7 @@
               <a:buNone/>
             </a:pPr>
             <a:r>
-              <a:rPr lang="en-US" sz="950" b="1" dirty="0">
+              <a:rPr lang="en-US" sz="1300" b="1" dirty="0">
                 <a:solidFill>
                   <a:srgbClr val="0068B7"/>
                 </a:solidFill>
@@ -12487,20 +13574,20 @@
               </a:rPr>
               <a:t>Key idea</a:t>
             </a:r>
-            <a:endParaRPr lang="en-US" sz="950" dirty="0"/>
-          </a:p>
-        </p:txBody>
-      </p:sp>
-      <p:sp>
-        <p:nvSpPr>
-          <p:cNvPr id="13" name="Text 11"/>
-          <p:cNvSpPr/>
-          <p:nvPr/>
-        </p:nvSpPr>
-        <p:spPr>
-          <a:xfrm>
-            <a:off x="8074152" y="1856232"/>
-            <a:ext cx="2825496" cy="1261872"/>
+            <a:endParaRPr lang="en-US" sz="1300" dirty="0"/>
+          </a:p>
+        </p:txBody>
+      </p:sp>
+      <p:sp>
+        <p:nvSpPr>
+          <p:cNvPr id="14" name="Text 12"/>
+          <p:cNvSpPr/>
+          <p:nvPr/>
+        </p:nvSpPr>
+        <p:spPr>
+          <a:xfrm>
+            <a:off x="8074152" y="1920240"/>
+            <a:ext cx="2825496" cy="1188720"/>
           </a:xfrm>
           <a:prstGeom prst="rect">
             <a:avLst/>
@@ -12518,7 +13605,7 @@
               <a:buNone/>
             </a:pPr>
             <a:r>
-              <a:rPr lang="en-US" sz="1250" dirty="0">
+              <a:rPr lang="en-US" sz="1550" dirty="0">
                 <a:solidFill>
                   <a:srgbClr val="17364A"/>
                 </a:solidFill>
@@ -12528,13 +13615,13 @@
               </a:rPr>
               <a:t>Describe the purpose of advanced model validation in public health AI.</a:t>
             </a:r>
-            <a:endParaRPr lang="en-US" sz="1250" dirty="0"/>
-          </a:p>
-        </p:txBody>
-      </p:sp>
-      <p:sp>
-        <p:nvSpPr>
-          <p:cNvPr id="14" name="Shape 12"/>
+            <a:endParaRPr lang="en-US" sz="1550" dirty="0"/>
+          </a:p>
+        </p:txBody>
+      </p:sp>
+      <p:sp>
+        <p:nvSpPr>
+          <p:cNvPr id="15" name="Shape 13"/>
           <p:cNvSpPr/>
           <p:nvPr/>
         </p:nvSpPr>
@@ -12561,14 +13648,14 @@
       </p:sp>
       <p:sp>
         <p:nvSpPr>
-          <p:cNvPr id="15" name="Text 13"/>
+          <p:cNvPr id="16" name="Text 14"/>
           <p:cNvSpPr/>
           <p:nvPr/>
         </p:nvSpPr>
         <p:spPr>
           <a:xfrm>
             <a:off x="8074152" y="3666744"/>
-            <a:ext cx="2825496" cy="201168"/>
+            <a:ext cx="2825496" cy="256032"/>
           </a:xfrm>
           <a:prstGeom prst="rect">
             <a:avLst/>
@@ -12584,7 +13671,7 @@
               <a:buNone/>
             </a:pPr>
             <a:r>
-              <a:rPr lang="en-US" sz="950" b="1" dirty="0">
+              <a:rPr lang="en-US" sz="1300" b="1" dirty="0">
                 <a:solidFill>
                   <a:srgbClr val="0068B7"/>
                 </a:solidFill>
@@ -12594,20 +13681,20 @@
               </a:rPr>
               <a:t>Use this for</a:t>
             </a:r>
-            <a:endParaRPr lang="en-US" sz="950" dirty="0"/>
-          </a:p>
-        </p:txBody>
-      </p:sp>
-      <p:sp>
-        <p:nvSpPr>
-          <p:cNvPr id="16" name="Text 14"/>
-          <p:cNvSpPr/>
-          <p:nvPr/>
-        </p:nvSpPr>
-        <p:spPr>
-          <a:xfrm>
-            <a:off x="8074152" y="3959352"/>
-            <a:ext cx="2825496" cy="1170432"/>
+            <a:endParaRPr lang="en-US" sz="1300" dirty="0"/>
+          </a:p>
+        </p:txBody>
+      </p:sp>
+      <p:sp>
+        <p:nvSpPr>
+          <p:cNvPr id="17" name="Text 15"/>
+          <p:cNvSpPr/>
+          <p:nvPr/>
+        </p:nvSpPr>
+        <p:spPr>
+          <a:xfrm>
+            <a:off x="8074152" y="4023360"/>
+            <a:ext cx="2825496" cy="1097280"/>
           </a:xfrm>
           <a:prstGeom prst="rect">
             <a:avLst/>
@@ -12625,7 +13712,7 @@
               <a:buNone/>
             </a:pPr>
             <a:r>
-              <a:rPr lang="en-US" sz="1250" dirty="0">
+              <a:rPr lang="en-US" sz="1550" dirty="0">
                 <a:solidFill>
                   <a:srgbClr val="17364A"/>
                 </a:solidFill>
@@ -12635,7 +13722,7 @@
               </a:rPr>
               <a:t>Connect the concept to public health decisions, safeguards, documentation, or implementation work.</a:t>
             </a:r>
-            <a:endParaRPr lang="en-US" sz="1250" dirty="0"/>
+            <a:endParaRPr lang="en-US" sz="1550" dirty="0"/>
           </a:p>
         </p:txBody>
       </p:sp>
@@ -12832,7 +13919,7 @@
                 <a:ea typeface="Aptos" pitchFamily="34" charset="-122"/>
                 <a:cs typeface="Aptos" pitchFamily="34" charset="-120"/>
               </a:rPr>
-              <a:t>© Paula Soper</a:t>
+              <a:t>Â© Paula Soper</a:t>
             </a:r>
             <a:endParaRPr lang="en-US" sz="800" dirty="0"/>
           </a:p>
@@ -12846,8 +13933,47 @@
         </p:nvSpPr>
         <p:spPr>
           <a:xfrm>
+            <a:off x="11137392" y="6510528"/>
+            <a:ext cx="411480" cy="201168"/>
+          </a:xfrm>
+          <a:prstGeom prst="rect">
+            <a:avLst/>
+          </a:prstGeom>
+          <a:noFill/>
+          <a:ln/>
+        </p:spPr>
+        <p:txBody>
+          <a:bodyPr wrap="square" lIns="0" tIns="0" rIns="0" bIns="0" rtlCol="0" anchor="ctr"/>
+          <a:lstStyle/>
+          <a:p>
+            <a:pPr algn="r" indent="0" marL="0">
+              <a:buNone/>
+            </a:pPr>
+            <a:r>
+              <a:rPr lang="en-US" sz="900" dirty="0">
+                <a:solidFill>
+                  <a:srgbClr val="5F7181"/>
+                </a:solidFill>
+                <a:latin typeface="Aptos" pitchFamily="34" charset="0"/>
+                <a:ea typeface="Aptos" pitchFamily="34" charset="-122"/>
+                <a:cs typeface="Aptos" pitchFamily="34" charset="-120"/>
+              </a:rPr>
+              <a:t>6</a:t>
+            </a:r>
+            <a:endParaRPr lang="en-US" sz="900" dirty="0"/>
+          </a:p>
+        </p:txBody>
+      </p:sp>
+      <p:sp>
+        <p:nvSpPr>
+          <p:cNvPr id="8" name="Text 6"/>
+          <p:cNvSpPr/>
+          <p:nvPr/>
+        </p:nvSpPr>
+        <p:spPr>
+          <a:xfrm>
             <a:off x="640080" y="658368"/>
-            <a:ext cx="10881360" cy="566928"/>
+            <a:ext cx="10881360" cy="713232"/>
           </a:xfrm>
           <a:prstGeom prst="rect">
             <a:avLst/>
@@ -12865,7 +13991,7 @@
               <a:buNone/>
             </a:pPr>
             <a:r>
-              <a:rPr lang="en-US" sz="2700" b="1" dirty="0">
+              <a:rPr lang="en-US" sz="3400" b="1" dirty="0">
                 <a:solidFill>
                   <a:srgbClr val="003A63"/>
                 </a:solidFill>
@@ -12875,20 +14001,20 @@
               </a:rPr>
               <a:t>Learning Objectives Continued</a:t>
             </a:r>
-            <a:endParaRPr lang="en-US" sz="2700" dirty="0"/>
-          </a:p>
-        </p:txBody>
-      </p:sp>
-      <p:sp>
-        <p:nvSpPr>
-          <p:cNvPr id="8" name="Text 6"/>
-          <p:cNvSpPr/>
-          <p:nvPr/>
-        </p:nvSpPr>
-        <p:spPr>
-          <a:xfrm>
-            <a:off x="868680" y="1417320"/>
-            <a:ext cx="6675120" cy="4434840"/>
+            <a:endParaRPr lang="en-US" sz="3400" dirty="0"/>
+          </a:p>
+        </p:txBody>
+      </p:sp>
+      <p:sp>
+        <p:nvSpPr>
+          <p:cNvPr id="9" name="Text 7"/>
+          <p:cNvSpPr/>
+          <p:nvPr/>
+        </p:nvSpPr>
+        <p:spPr>
+          <a:xfrm>
+            <a:off x="868680" y="1508760"/>
+            <a:ext cx="6537960" cy="4160520"/>
           </a:xfrm>
           <a:prstGeom prst="rect">
             <a:avLst/>
@@ -12903,7 +14029,7 @@
           <a:lstStyle/>
           <a:p>
             <a:r>
-              <a:rPr lang="en-US" sz="1700" dirty="0">
+              <a:rPr lang="en-US" sz="2100" dirty="0">
                 <a:solidFill>
                   <a:srgbClr val="17364A"/>
                 </a:solidFill>
@@ -12913,13 +14039,13 @@
               </a:rPr>
               <a:t>Produce an advanced validation plan for an AI-supported workflow.</a:t>
             </a:r>
-            <a:endParaRPr lang="en-US" sz="1700" dirty="0"/>
-          </a:p>
-        </p:txBody>
-      </p:sp>
-      <p:sp>
-        <p:nvSpPr>
-          <p:cNvPr id="9" name="Shape 7"/>
+            <a:endParaRPr lang="en-US" sz="2100" dirty="0"/>
+          </a:p>
+        </p:txBody>
+      </p:sp>
+      <p:sp>
+        <p:nvSpPr>
+          <p:cNvPr id="10" name="Shape 8"/>
           <p:cNvSpPr/>
           <p:nvPr/>
         </p:nvSpPr>
@@ -12946,14 +14072,14 @@
       </p:sp>
       <p:sp>
         <p:nvSpPr>
-          <p:cNvPr id="10" name="Text 8"/>
+          <p:cNvPr id="11" name="Text 9"/>
           <p:cNvSpPr/>
           <p:nvPr/>
         </p:nvSpPr>
         <p:spPr>
           <a:xfrm>
             <a:off x="8074152" y="1563624"/>
-            <a:ext cx="2825496" cy="201168"/>
+            <a:ext cx="2825496" cy="256032"/>
           </a:xfrm>
           <a:prstGeom prst="rect">
             <a:avLst/>
@@ -12969,7 +14095,7 @@
               <a:buNone/>
             </a:pPr>
             <a:r>
-              <a:rPr lang="en-US" sz="950" b="1" dirty="0">
+              <a:rPr lang="en-US" sz="1300" b="1" dirty="0">
                 <a:solidFill>
                   <a:srgbClr val="0068B7"/>
                 </a:solidFill>
@@ -12979,20 +14105,20 @@
               </a:rPr>
               <a:t>Key idea</a:t>
             </a:r>
-            <a:endParaRPr lang="en-US" sz="950" dirty="0"/>
-          </a:p>
-        </p:txBody>
-      </p:sp>
-      <p:sp>
-        <p:nvSpPr>
-          <p:cNvPr id="11" name="Text 9"/>
-          <p:cNvSpPr/>
-          <p:nvPr/>
-        </p:nvSpPr>
-        <p:spPr>
-          <a:xfrm>
-            <a:off x="8074152" y="1856232"/>
-            <a:ext cx="2825496" cy="1261872"/>
+            <a:endParaRPr lang="en-US" sz="1300" dirty="0"/>
+          </a:p>
+        </p:txBody>
+      </p:sp>
+      <p:sp>
+        <p:nvSpPr>
+          <p:cNvPr id="12" name="Text 10"/>
+          <p:cNvSpPr/>
+          <p:nvPr/>
+        </p:nvSpPr>
+        <p:spPr>
+          <a:xfrm>
+            <a:off x="8074152" y="1920240"/>
+            <a:ext cx="2825496" cy="1188720"/>
           </a:xfrm>
           <a:prstGeom prst="rect">
             <a:avLst/>
@@ -13010,7 +14136,7 @@
               <a:buNone/>
             </a:pPr>
             <a:r>
-              <a:rPr lang="en-US" sz="1250" dirty="0">
+              <a:rPr lang="en-US" sz="1550" dirty="0">
                 <a:solidFill>
                   <a:srgbClr val="17364A"/>
                 </a:solidFill>
@@ -13020,13 +14146,13 @@
               </a:rPr>
               <a:t>Produce an advanced validation plan for an AI-supported workflow.</a:t>
             </a:r>
-            <a:endParaRPr lang="en-US" sz="1250" dirty="0"/>
-          </a:p>
-        </p:txBody>
-      </p:sp>
-      <p:sp>
-        <p:nvSpPr>
-          <p:cNvPr id="12" name="Shape 10"/>
+            <a:endParaRPr lang="en-US" sz="1550" dirty="0"/>
+          </a:p>
+        </p:txBody>
+      </p:sp>
+      <p:sp>
+        <p:nvSpPr>
+          <p:cNvPr id="13" name="Shape 11"/>
           <p:cNvSpPr/>
           <p:nvPr/>
         </p:nvSpPr>
@@ -13053,14 +14179,14 @@
       </p:sp>
       <p:sp>
         <p:nvSpPr>
-          <p:cNvPr id="13" name="Text 11"/>
+          <p:cNvPr id="14" name="Text 12"/>
           <p:cNvSpPr/>
           <p:nvPr/>
         </p:nvSpPr>
         <p:spPr>
           <a:xfrm>
             <a:off x="8074152" y="3666744"/>
-            <a:ext cx="2825496" cy="201168"/>
+            <a:ext cx="2825496" cy="256032"/>
           </a:xfrm>
           <a:prstGeom prst="rect">
             <a:avLst/>
@@ -13076,7 +14202,7 @@
               <a:buNone/>
             </a:pPr>
             <a:r>
-              <a:rPr lang="en-US" sz="950" b="1" dirty="0">
+              <a:rPr lang="en-US" sz="1300" b="1" dirty="0">
                 <a:solidFill>
                   <a:srgbClr val="0068B7"/>
                 </a:solidFill>
@@ -13086,20 +14212,20 @@
               </a:rPr>
               <a:t>Use this for</a:t>
             </a:r>
-            <a:endParaRPr lang="en-US" sz="950" dirty="0"/>
-          </a:p>
-        </p:txBody>
-      </p:sp>
-      <p:sp>
-        <p:nvSpPr>
-          <p:cNvPr id="14" name="Text 12"/>
-          <p:cNvSpPr/>
-          <p:nvPr/>
-        </p:nvSpPr>
-        <p:spPr>
-          <a:xfrm>
-            <a:off x="8074152" y="3959352"/>
-            <a:ext cx="2825496" cy="1170432"/>
+            <a:endParaRPr lang="en-US" sz="1300" dirty="0"/>
+          </a:p>
+        </p:txBody>
+      </p:sp>
+      <p:sp>
+        <p:nvSpPr>
+          <p:cNvPr id="15" name="Text 13"/>
+          <p:cNvSpPr/>
+          <p:nvPr/>
+        </p:nvSpPr>
+        <p:spPr>
+          <a:xfrm>
+            <a:off x="8074152" y="4023360"/>
+            <a:ext cx="2825496" cy="1097280"/>
           </a:xfrm>
           <a:prstGeom prst="rect">
             <a:avLst/>
@@ -13117,7 +14243,7 @@
               <a:buNone/>
             </a:pPr>
             <a:r>
-              <a:rPr lang="en-US" sz="1250" dirty="0">
+              <a:rPr lang="en-US" sz="1550" dirty="0">
                 <a:solidFill>
                   <a:srgbClr val="17364A"/>
                 </a:solidFill>
@@ -13127,7 +14253,7 @@
               </a:rPr>
               <a:t>Connect the concept to public health decisions, safeguards, documentation, or implementation work.</a:t>
             </a:r>
-            <a:endParaRPr lang="en-US" sz="1250" dirty="0"/>
+            <a:endParaRPr lang="en-US" sz="1550" dirty="0"/>
           </a:p>
         </p:txBody>
       </p:sp>
@@ -13324,7 +14450,7 @@
                 <a:ea typeface="Aptos" pitchFamily="34" charset="-122"/>
                 <a:cs typeface="Aptos" pitchFamily="34" charset="-120"/>
               </a:rPr>
-              <a:t>© Paula Soper</a:t>
+              <a:t>Â© Paula Soper</a:t>
             </a:r>
             <a:endParaRPr lang="en-US" sz="800" dirty="0"/>
           </a:p>
@@ -13332,7 +14458,46 @@
       </p:sp>
       <p:sp>
         <p:nvSpPr>
-          <p:cNvPr id="7" name="Shape 5"/>
+          <p:cNvPr id="7" name="Text 5"/>
+          <p:cNvSpPr/>
+          <p:nvPr/>
+        </p:nvSpPr>
+        <p:spPr>
+          <a:xfrm>
+            <a:off x="11137392" y="6510528"/>
+            <a:ext cx="411480" cy="201168"/>
+          </a:xfrm>
+          <a:prstGeom prst="rect">
+            <a:avLst/>
+          </a:prstGeom>
+          <a:noFill/>
+          <a:ln/>
+        </p:spPr>
+        <p:txBody>
+          <a:bodyPr wrap="square" lIns="0" tIns="0" rIns="0" bIns="0" rtlCol="0" anchor="ctr"/>
+          <a:lstStyle/>
+          <a:p>
+            <a:pPr algn="r" indent="0" marL="0">
+              <a:buNone/>
+            </a:pPr>
+            <a:r>
+              <a:rPr lang="en-US" sz="900" dirty="0">
+                <a:solidFill>
+                  <a:srgbClr val="5F7181"/>
+                </a:solidFill>
+                <a:latin typeface="Aptos" pitchFamily="34" charset="0"/>
+                <a:ea typeface="Aptos" pitchFamily="34" charset="-122"/>
+                <a:cs typeface="Aptos" pitchFamily="34" charset="-120"/>
+              </a:rPr>
+              <a:t>7</a:t>
+            </a:r>
+            <a:endParaRPr lang="en-US" sz="900" dirty="0"/>
+          </a:p>
+        </p:txBody>
+      </p:sp>
+      <p:sp>
+        <p:nvSpPr>
+          <p:cNvPr id="8" name="Shape 6"/>
           <p:cNvSpPr/>
           <p:nvPr/>
         </p:nvSpPr>
@@ -13357,7 +14522,7 @@
       </p:sp>
       <p:sp>
         <p:nvSpPr>
-          <p:cNvPr id="8" name="Text 6"/>
+          <p:cNvPr id="9" name="Text 7"/>
           <p:cNvSpPr/>
           <p:nvPr/>
         </p:nvSpPr>
@@ -13396,14 +14561,14 @@
       </p:sp>
       <p:sp>
         <p:nvSpPr>
-          <p:cNvPr id="9" name="Text 7"/>
+          <p:cNvPr id="10" name="Text 8"/>
           <p:cNvSpPr/>
           <p:nvPr/>
         </p:nvSpPr>
         <p:spPr>
           <a:xfrm>
             <a:off x="640080" y="621792"/>
-            <a:ext cx="10881360" cy="566928"/>
+            <a:ext cx="10881360" cy="713232"/>
           </a:xfrm>
           <a:prstGeom prst="rect">
             <a:avLst/>
@@ -13421,7 +14586,7 @@
               <a:buNone/>
             </a:pPr>
             <a:r>
-              <a:rPr lang="en-US" sz="2700" b="1" dirty="0">
+              <a:rPr lang="en-US" sz="3400" b="1" dirty="0">
                 <a:solidFill>
                   <a:srgbClr val="003A63"/>
                 </a:solidFill>
@@ -13431,20 +14596,20 @@
               </a:rPr>
               <a:t>Module Overview</a:t>
             </a:r>
-            <a:endParaRPr lang="en-US" sz="2700" dirty="0"/>
-          </a:p>
-        </p:txBody>
-      </p:sp>
-      <p:sp>
-        <p:nvSpPr>
-          <p:cNvPr id="10" name="Text 8"/>
-          <p:cNvSpPr/>
-          <p:nvPr/>
-        </p:nvSpPr>
-        <p:spPr>
-          <a:xfrm>
-            <a:off x="868680" y="1417320"/>
-            <a:ext cx="6675120" cy="4434840"/>
+            <a:endParaRPr lang="en-US" sz="3400" dirty="0"/>
+          </a:p>
+        </p:txBody>
+      </p:sp>
+      <p:sp>
+        <p:nvSpPr>
+          <p:cNvPr id="11" name="Text 9"/>
+          <p:cNvSpPr/>
+          <p:nvPr/>
+        </p:nvSpPr>
+        <p:spPr>
+          <a:xfrm>
+            <a:off x="868680" y="1508760"/>
+            <a:ext cx="6537960" cy="4160520"/>
           </a:xfrm>
           <a:prstGeom prst="rect">
             <a:avLst/>
@@ -13459,7 +14624,7 @@
           <a:lstStyle/>
           <a:p>
             <a:r>
-              <a:rPr lang="en-US" sz="1700" dirty="0">
+              <a:rPr lang="en-US" sz="2100" dirty="0">
                 <a:solidFill>
                   <a:srgbClr val="17364A"/>
                 </a:solidFill>
@@ -13467,13 +14632,13 @@
                 <a:ea typeface="Aptos" pitchFamily="34" charset="-122"/>
                 <a:cs typeface="Aptos" pitchFamily="34" charset="-120"/>
               </a:rPr>
-              <a:t>Model validation is the process of determining whether an AI tool performs adequately for its intended use, population,.</a:t>
-            </a:r>
-            <a:endParaRPr lang="en-US" sz="1700" dirty="0"/>
-          </a:p>
-          <a:p>
-            <a:r>
-              <a:rPr lang="en-US" sz="1700" dirty="0">
+              <a:t>Model validation is the process of determining whether an AI tool performs adequately for its intended.</a:t>
+            </a:r>
+            <a:endParaRPr lang="en-US" sz="2100" dirty="0"/>
+          </a:p>
+          <a:p>
+            <a:r>
+              <a:rPr lang="en-US" sz="2100" dirty="0">
                 <a:solidFill>
                   <a:srgbClr val="17364A"/>
                 </a:solidFill>
@@ -13483,11 +14648,11 @@
               </a:rPr>
               <a:t>Basic validation asks whether the tool works at all.</a:t>
             </a:r>
-            <a:endParaRPr lang="en-US" sz="1700" dirty="0"/>
-          </a:p>
-          <a:p>
-            <a:r>
-              <a:rPr lang="en-US" sz="1700" dirty="0">
+            <a:endParaRPr lang="en-US" sz="2100" dirty="0"/>
+          </a:p>
+          <a:p>
+            <a:r>
+              <a:rPr lang="en-US" sz="2100" dirty="0">
                 <a:solidFill>
                   <a:srgbClr val="17364A"/>
                 </a:solidFill>
@@ -13495,29 +14660,15 @@
                 <a:ea typeface="Aptos" pitchFamily="34" charset="-122"/>
                 <a:cs typeface="Aptos" pitchFamily="34" charset="-120"/>
               </a:rPr>
-              <a:t>Advanced validation asks whether it works well enough, for whom, under what conditions, with what limitations, and with.</a:t>
-            </a:r>
-            <a:endParaRPr lang="en-US" sz="1700" dirty="0"/>
-          </a:p>
-          <a:p>
-            <a:r>
-              <a:rPr lang="en-US" sz="1700" dirty="0">
-                <a:solidFill>
-                  <a:srgbClr val="17364A"/>
-                </a:solidFill>
-                <a:latin typeface="Aptos" pitchFamily="34" charset="0"/>
-                <a:ea typeface="Aptos" pitchFamily="34" charset="-122"/>
-                <a:cs typeface="Aptos" pitchFamily="34" charset="-120"/>
-              </a:rPr>
-              <a:t>This module extends foundational validation content by focusing on metrics, subgroup performance, calibration, external.</a:t>
-            </a:r>
-            <a:endParaRPr lang="en-US" sz="1700" dirty="0"/>
-          </a:p>
-        </p:txBody>
-      </p:sp>
-      <p:sp>
-        <p:nvSpPr>
-          <p:cNvPr id="11" name="Shape 9"/>
+              <a:t>Advanced validation asks whether it works well enough, for whom, under what conditions, with what.</a:t>
+            </a:r>
+            <a:endParaRPr lang="en-US" sz="2100" dirty="0"/>
+          </a:p>
+        </p:txBody>
+      </p:sp>
+      <p:sp>
+        <p:nvSpPr>
+          <p:cNvPr id="12" name="Shape 10"/>
           <p:cNvSpPr/>
           <p:nvPr/>
         </p:nvSpPr>
@@ -13544,14 +14695,14 @@
       </p:sp>
       <p:sp>
         <p:nvSpPr>
-          <p:cNvPr id="12" name="Text 10"/>
+          <p:cNvPr id="13" name="Text 11"/>
           <p:cNvSpPr/>
           <p:nvPr/>
         </p:nvSpPr>
         <p:spPr>
           <a:xfrm>
             <a:off x="8074152" y="1563624"/>
-            <a:ext cx="2825496" cy="201168"/>
+            <a:ext cx="2825496" cy="256032"/>
           </a:xfrm>
           <a:prstGeom prst="rect">
             <a:avLst/>
@@ -13567,7 +14718,7 @@
               <a:buNone/>
             </a:pPr>
             <a:r>
-              <a:rPr lang="en-US" sz="950" b="1" dirty="0">
+              <a:rPr lang="en-US" sz="1300" b="1" dirty="0">
                 <a:solidFill>
                   <a:srgbClr val="0068B7"/>
                 </a:solidFill>
@@ -13577,20 +14728,20 @@
               </a:rPr>
               <a:t>Key idea</a:t>
             </a:r>
-            <a:endParaRPr lang="en-US" sz="950" dirty="0"/>
-          </a:p>
-        </p:txBody>
-      </p:sp>
-      <p:sp>
-        <p:nvSpPr>
-          <p:cNvPr id="13" name="Text 11"/>
-          <p:cNvSpPr/>
-          <p:nvPr/>
-        </p:nvSpPr>
-        <p:spPr>
-          <a:xfrm>
-            <a:off x="8074152" y="1856232"/>
-            <a:ext cx="2825496" cy="1261872"/>
+            <a:endParaRPr lang="en-US" sz="1300" dirty="0"/>
+          </a:p>
+        </p:txBody>
+      </p:sp>
+      <p:sp>
+        <p:nvSpPr>
+          <p:cNvPr id="14" name="Text 12"/>
+          <p:cNvSpPr/>
+          <p:nvPr/>
+        </p:nvSpPr>
+        <p:spPr>
+          <a:xfrm>
+            <a:off x="8074152" y="1920240"/>
+            <a:ext cx="2825496" cy="1188720"/>
           </a:xfrm>
           <a:prstGeom prst="rect">
             <a:avLst/>
@@ -13608,7 +14759,7 @@
               <a:buNone/>
             </a:pPr>
             <a:r>
-              <a:rPr lang="en-US" sz="1250" dirty="0">
+              <a:rPr lang="en-US" sz="1550" dirty="0">
                 <a:solidFill>
                   <a:srgbClr val="17364A"/>
                 </a:solidFill>
@@ -13616,15 +14767,15 @@
                 <a:ea typeface="Aptos" pitchFamily="34" charset="-122"/>
                 <a:cs typeface="Aptos" pitchFamily="34" charset="-120"/>
               </a:rPr>
-              <a:t>Model validation is the process of determining whether an AI tool performs adequately for its intended use, population,.</a:t>
-            </a:r>
-            <a:endParaRPr lang="en-US" sz="1250" dirty="0"/>
-          </a:p>
-        </p:txBody>
-      </p:sp>
-      <p:sp>
-        <p:nvSpPr>
-          <p:cNvPr id="14" name="Shape 12"/>
+              <a:t>Model validation is the process of determining whether an AI tool performs adequately for its intended.</a:t>
+            </a:r>
+            <a:endParaRPr lang="en-US" sz="1550" dirty="0"/>
+          </a:p>
+        </p:txBody>
+      </p:sp>
+      <p:sp>
+        <p:nvSpPr>
+          <p:cNvPr id="15" name="Shape 13"/>
           <p:cNvSpPr/>
           <p:nvPr/>
         </p:nvSpPr>
@@ -13651,14 +14802,14 @@
       </p:sp>
       <p:sp>
         <p:nvSpPr>
-          <p:cNvPr id="15" name="Text 13"/>
+          <p:cNvPr id="16" name="Text 14"/>
           <p:cNvSpPr/>
           <p:nvPr/>
         </p:nvSpPr>
         <p:spPr>
           <a:xfrm>
             <a:off x="8074152" y="3666744"/>
-            <a:ext cx="2825496" cy="201168"/>
+            <a:ext cx="2825496" cy="256032"/>
           </a:xfrm>
           <a:prstGeom prst="rect">
             <a:avLst/>
@@ -13674,7 +14825,7 @@
               <a:buNone/>
             </a:pPr>
             <a:r>
-              <a:rPr lang="en-US" sz="950" b="1" dirty="0">
+              <a:rPr lang="en-US" sz="1300" b="1" dirty="0">
                 <a:solidFill>
                   <a:srgbClr val="0068B7"/>
                 </a:solidFill>
@@ -13684,20 +14835,20 @@
               </a:rPr>
               <a:t>Use this for</a:t>
             </a:r>
-            <a:endParaRPr lang="en-US" sz="950" dirty="0"/>
-          </a:p>
-        </p:txBody>
-      </p:sp>
-      <p:sp>
-        <p:nvSpPr>
-          <p:cNvPr id="16" name="Text 14"/>
-          <p:cNvSpPr/>
-          <p:nvPr/>
-        </p:nvSpPr>
-        <p:spPr>
-          <a:xfrm>
-            <a:off x="8074152" y="3959352"/>
-            <a:ext cx="2825496" cy="1170432"/>
+            <a:endParaRPr lang="en-US" sz="1300" dirty="0"/>
+          </a:p>
+        </p:txBody>
+      </p:sp>
+      <p:sp>
+        <p:nvSpPr>
+          <p:cNvPr id="17" name="Text 15"/>
+          <p:cNvSpPr/>
+          <p:nvPr/>
+        </p:nvSpPr>
+        <p:spPr>
+          <a:xfrm>
+            <a:off x="8074152" y="4023360"/>
+            <a:ext cx="2825496" cy="1097280"/>
           </a:xfrm>
           <a:prstGeom prst="rect">
             <a:avLst/>
@@ -13715,7 +14866,7 @@
               <a:buNone/>
             </a:pPr>
             <a:r>
-              <a:rPr lang="en-US" sz="1250" dirty="0">
+              <a:rPr lang="en-US" sz="1550" dirty="0">
                 <a:solidFill>
                   <a:srgbClr val="17364A"/>
                 </a:solidFill>
@@ -13725,7 +14876,7 @@
               </a:rPr>
               <a:t>Connect the concept to public health decisions, safeguards, documentation, or implementation work.</a:t>
             </a:r>
-            <a:endParaRPr lang="en-US" sz="1250" dirty="0"/>
+            <a:endParaRPr lang="en-US" sz="1550" dirty="0"/>
           </a:p>
         </p:txBody>
       </p:sp>
@@ -13922,7 +15073,7 @@
                 <a:ea typeface="Aptos" pitchFamily="34" charset="-122"/>
                 <a:cs typeface="Aptos" pitchFamily="34" charset="-120"/>
               </a:rPr>
-              <a:t>© Paula Soper</a:t>
+              <a:t>Â© Paula Soper</a:t>
             </a:r>
             <a:endParaRPr lang="en-US" sz="800" dirty="0"/>
           </a:p>
@@ -13930,7 +15081,46 @@
       </p:sp>
       <p:sp>
         <p:nvSpPr>
-          <p:cNvPr id="7" name="Shape 5"/>
+          <p:cNvPr id="7" name="Text 5"/>
+          <p:cNvSpPr/>
+          <p:nvPr/>
+        </p:nvSpPr>
+        <p:spPr>
+          <a:xfrm>
+            <a:off x="11137392" y="6510528"/>
+            <a:ext cx="411480" cy="201168"/>
+          </a:xfrm>
+          <a:prstGeom prst="rect">
+            <a:avLst/>
+          </a:prstGeom>
+          <a:noFill/>
+          <a:ln/>
+        </p:spPr>
+        <p:txBody>
+          <a:bodyPr wrap="square" lIns="0" tIns="0" rIns="0" bIns="0" rtlCol="0" anchor="ctr"/>
+          <a:lstStyle/>
+          <a:p>
+            <a:pPr algn="r" indent="0" marL="0">
+              <a:buNone/>
+            </a:pPr>
+            <a:r>
+              <a:rPr lang="en-US" sz="900" dirty="0">
+                <a:solidFill>
+                  <a:srgbClr val="5F7181"/>
+                </a:solidFill>
+                <a:latin typeface="Aptos" pitchFamily="34" charset="0"/>
+                <a:ea typeface="Aptos" pitchFamily="34" charset="-122"/>
+                <a:cs typeface="Aptos" pitchFamily="34" charset="-120"/>
+              </a:rPr>
+              <a:t>8</a:t>
+            </a:r>
+            <a:endParaRPr lang="en-US" sz="900" dirty="0"/>
+          </a:p>
+        </p:txBody>
+      </p:sp>
+      <p:sp>
+        <p:nvSpPr>
+          <p:cNvPr id="8" name="Shape 6"/>
           <p:cNvSpPr/>
           <p:nvPr/>
         </p:nvSpPr>
@@ -13955,7 +15145,7 @@
       </p:sp>
       <p:sp>
         <p:nvSpPr>
-          <p:cNvPr id="8" name="Text 6"/>
+          <p:cNvPr id="9" name="Text 7"/>
           <p:cNvSpPr/>
           <p:nvPr/>
         </p:nvSpPr>
@@ -13994,14 +15184,14 @@
       </p:sp>
       <p:sp>
         <p:nvSpPr>
-          <p:cNvPr id="9" name="Text 7"/>
+          <p:cNvPr id="10" name="Text 8"/>
           <p:cNvSpPr/>
           <p:nvPr/>
         </p:nvSpPr>
         <p:spPr>
           <a:xfrm>
             <a:off x="640080" y="621792"/>
-            <a:ext cx="10881360" cy="566928"/>
+            <a:ext cx="10881360" cy="713232"/>
           </a:xfrm>
           <a:prstGeom prst="rect">
             <a:avLst/>
@@ -14019,7 +15209,7 @@
               <a:buNone/>
             </a:pPr>
             <a:r>
-              <a:rPr lang="en-US" sz="2700" b="1" dirty="0">
+              <a:rPr lang="en-US" sz="3400" b="1" dirty="0">
                 <a:solidFill>
                   <a:srgbClr val="003A63"/>
                 </a:solidFill>
@@ -14029,20 +15219,20 @@
               </a:rPr>
               <a:t>Why This Topic Matters for Public Health AI</a:t>
             </a:r>
-            <a:endParaRPr lang="en-US" sz="2700" dirty="0"/>
-          </a:p>
-        </p:txBody>
-      </p:sp>
-      <p:sp>
-        <p:nvSpPr>
-          <p:cNvPr id="10" name="Text 8"/>
-          <p:cNvSpPr/>
-          <p:nvPr/>
-        </p:nvSpPr>
-        <p:spPr>
-          <a:xfrm>
-            <a:off x="868680" y="1417320"/>
-            <a:ext cx="6675120" cy="4434840"/>
+            <a:endParaRPr lang="en-US" sz="3400" dirty="0"/>
+          </a:p>
+        </p:txBody>
+      </p:sp>
+      <p:sp>
+        <p:nvSpPr>
+          <p:cNvPr id="11" name="Text 9"/>
+          <p:cNvSpPr/>
+          <p:nvPr/>
+        </p:nvSpPr>
+        <p:spPr>
+          <a:xfrm>
+            <a:off x="868680" y="1508760"/>
+            <a:ext cx="6537960" cy="4160520"/>
           </a:xfrm>
           <a:prstGeom prst="rect">
             <a:avLst/>
@@ -14057,7 +15247,7 @@
           <a:lstStyle/>
           <a:p>
             <a:r>
-              <a:rPr lang="en-US" sz="1700" dirty="0">
+              <a:rPr lang="en-US" sz="2100" dirty="0">
                 <a:solidFill>
                   <a:srgbClr val="17364A"/>
                 </a:solidFill>
@@ -14065,13 +15255,13 @@
                 <a:ea typeface="Aptos" pitchFamily="34" charset="-122"/>
                 <a:cs typeface="Aptos" pitchFamily="34" charset="-120"/>
               </a:rPr>
-              <a:t>Validation matters because public health AI tools can appear credible even when they are not fit for operational use.</a:t>
-            </a:r>
-            <a:endParaRPr lang="en-US" sz="1700" dirty="0"/>
-          </a:p>
-          <a:p>
-            <a:r>
-              <a:rPr lang="en-US" sz="1700" dirty="0">
+              <a:t>Validation matters because public health AI tools can appear credible even when they are not fit for.</a:t>
+            </a:r>
+            <a:endParaRPr lang="en-US" sz="2100" dirty="0"/>
+          </a:p>
+          <a:p>
+            <a:r>
+              <a:rPr lang="en-US" sz="2100" dirty="0">
                 <a:solidFill>
                   <a:srgbClr val="17364A"/>
                 </a:solidFill>
@@ -14079,13 +15269,13 @@
                 <a:ea typeface="Aptos" pitchFamily="34" charset="-122"/>
                 <a:cs typeface="Aptos" pitchFamily="34" charset="-120"/>
               </a:rPr>
-              <a:t>A polished dashboard, confident generated text, or high overall accuracy score does not prove that the tool is safe,.</a:t>
-            </a:r>
-            <a:endParaRPr lang="en-US" sz="1700" dirty="0"/>
-          </a:p>
-          <a:p>
-            <a:r>
-              <a:rPr lang="en-US" sz="1700" dirty="0">
+              <a:t>A polished dashboard, confident generated text, or high overall accuracy score does not prove that the.</a:t>
+            </a:r>
+            <a:endParaRPr lang="en-US" sz="2100" dirty="0"/>
+          </a:p>
+          <a:p>
+            <a:r>
+              <a:rPr lang="en-US" sz="2100" dirty="0">
                 <a:solidFill>
                   <a:srgbClr val="17364A"/>
                 </a:solidFill>
@@ -14093,29 +15283,15 @@
                 <a:ea typeface="Aptos" pitchFamily="34" charset="-122"/>
                 <a:cs typeface="Aptos" pitchFamily="34" charset="-120"/>
               </a:rPr>
-              <a:t>Public health staff need to evaluate performance in relation to the specific task and the consequences of error.</a:t>
-            </a:r>
-            <a:endParaRPr lang="en-US" sz="1700" dirty="0"/>
-          </a:p>
-          <a:p>
-            <a:r>
-              <a:rPr lang="en-US" sz="1700" dirty="0">
-                <a:solidFill>
-                  <a:srgbClr val="17364A"/>
-                </a:solidFill>
-                <a:latin typeface="Aptos" pitchFamily="34" charset="0"/>
-                <a:ea typeface="Aptos" pitchFamily="34" charset="-122"/>
-                <a:cs typeface="Aptos" pitchFamily="34" charset="-120"/>
-              </a:rPr>
-              <a:t>Model performance is context-dependent.</a:t>
-            </a:r>
-            <a:endParaRPr lang="en-US" sz="1700" dirty="0"/>
-          </a:p>
-        </p:txBody>
-      </p:sp>
-      <p:sp>
-        <p:nvSpPr>
-          <p:cNvPr id="11" name="Shape 9"/>
+              <a:t>Public health staff need to evaluate performance in relation to the specific task and the consequences.</a:t>
+            </a:r>
+            <a:endParaRPr lang="en-US" sz="2100" dirty="0"/>
+          </a:p>
+        </p:txBody>
+      </p:sp>
+      <p:sp>
+        <p:nvSpPr>
+          <p:cNvPr id="12" name="Shape 10"/>
           <p:cNvSpPr/>
           <p:nvPr/>
         </p:nvSpPr>
@@ -14142,14 +15318,14 @@
       </p:sp>
       <p:sp>
         <p:nvSpPr>
-          <p:cNvPr id="12" name="Text 10"/>
+          <p:cNvPr id="13" name="Text 11"/>
           <p:cNvSpPr/>
           <p:nvPr/>
         </p:nvSpPr>
         <p:spPr>
           <a:xfrm>
             <a:off x="8074152" y="1563624"/>
-            <a:ext cx="2825496" cy="201168"/>
+            <a:ext cx="2825496" cy="256032"/>
           </a:xfrm>
           <a:prstGeom prst="rect">
             <a:avLst/>
@@ -14165,7 +15341,7 @@
               <a:buNone/>
             </a:pPr>
             <a:r>
-              <a:rPr lang="en-US" sz="950" b="1" dirty="0">
+              <a:rPr lang="en-US" sz="1300" b="1" dirty="0">
                 <a:solidFill>
                   <a:srgbClr val="0068B7"/>
                 </a:solidFill>
@@ -14175,20 +15351,20 @@
               </a:rPr>
               <a:t>Key idea</a:t>
             </a:r>
-            <a:endParaRPr lang="en-US" sz="950" dirty="0"/>
-          </a:p>
-        </p:txBody>
-      </p:sp>
-      <p:sp>
-        <p:nvSpPr>
-          <p:cNvPr id="13" name="Text 11"/>
-          <p:cNvSpPr/>
-          <p:nvPr/>
-        </p:nvSpPr>
-        <p:spPr>
-          <a:xfrm>
-            <a:off x="8074152" y="1856232"/>
-            <a:ext cx="2825496" cy="1261872"/>
+            <a:endParaRPr lang="en-US" sz="1300" dirty="0"/>
+          </a:p>
+        </p:txBody>
+      </p:sp>
+      <p:sp>
+        <p:nvSpPr>
+          <p:cNvPr id="14" name="Text 12"/>
+          <p:cNvSpPr/>
+          <p:nvPr/>
+        </p:nvSpPr>
+        <p:spPr>
+          <a:xfrm>
+            <a:off x="8074152" y="1920240"/>
+            <a:ext cx="2825496" cy="1188720"/>
           </a:xfrm>
           <a:prstGeom prst="rect">
             <a:avLst/>
@@ -14206,7 +15382,7 @@
               <a:buNone/>
             </a:pPr>
             <a:r>
-              <a:rPr lang="en-US" sz="1250" dirty="0">
+              <a:rPr lang="en-US" sz="1550" dirty="0">
                 <a:solidFill>
                   <a:srgbClr val="17364A"/>
                 </a:solidFill>
@@ -14214,15 +15390,15 @@
                 <a:ea typeface="Aptos" pitchFamily="34" charset="-122"/>
                 <a:cs typeface="Aptos" pitchFamily="34" charset="-120"/>
               </a:rPr>
-              <a:t>Validation matters because public health AI tools can appear credible even when they are not fit for operational use.</a:t>
-            </a:r>
-            <a:endParaRPr lang="en-US" sz="1250" dirty="0"/>
-          </a:p>
-        </p:txBody>
-      </p:sp>
-      <p:sp>
-        <p:nvSpPr>
-          <p:cNvPr id="14" name="Shape 12"/>
+              <a:t>Validation matters because public health AI tools can appear credible even when they are not fit for.</a:t>
+            </a:r>
+            <a:endParaRPr lang="en-US" sz="1550" dirty="0"/>
+          </a:p>
+        </p:txBody>
+      </p:sp>
+      <p:sp>
+        <p:nvSpPr>
+          <p:cNvPr id="15" name="Shape 13"/>
           <p:cNvSpPr/>
           <p:nvPr/>
         </p:nvSpPr>
@@ -14249,14 +15425,14 @@
       </p:sp>
       <p:sp>
         <p:nvSpPr>
-          <p:cNvPr id="15" name="Text 13"/>
+          <p:cNvPr id="16" name="Text 14"/>
           <p:cNvSpPr/>
           <p:nvPr/>
         </p:nvSpPr>
         <p:spPr>
           <a:xfrm>
             <a:off x="8074152" y="3666744"/>
-            <a:ext cx="2825496" cy="201168"/>
+            <a:ext cx="2825496" cy="256032"/>
           </a:xfrm>
           <a:prstGeom prst="rect">
             <a:avLst/>
@@ -14272,7 +15448,7 @@
               <a:buNone/>
             </a:pPr>
             <a:r>
-              <a:rPr lang="en-US" sz="950" b="1" dirty="0">
+              <a:rPr lang="en-US" sz="1300" b="1" dirty="0">
                 <a:solidFill>
                   <a:srgbClr val="0068B7"/>
                 </a:solidFill>
@@ -14282,20 +15458,20 @@
               </a:rPr>
               <a:t>Use this for</a:t>
             </a:r>
-            <a:endParaRPr lang="en-US" sz="950" dirty="0"/>
-          </a:p>
-        </p:txBody>
-      </p:sp>
-      <p:sp>
-        <p:nvSpPr>
-          <p:cNvPr id="16" name="Text 14"/>
-          <p:cNvSpPr/>
-          <p:nvPr/>
-        </p:nvSpPr>
-        <p:spPr>
-          <a:xfrm>
-            <a:off x="8074152" y="3959352"/>
-            <a:ext cx="2825496" cy="1170432"/>
+            <a:endParaRPr lang="en-US" sz="1300" dirty="0"/>
+          </a:p>
+        </p:txBody>
+      </p:sp>
+      <p:sp>
+        <p:nvSpPr>
+          <p:cNvPr id="17" name="Text 15"/>
+          <p:cNvSpPr/>
+          <p:nvPr/>
+        </p:nvSpPr>
+        <p:spPr>
+          <a:xfrm>
+            <a:off x="8074152" y="4023360"/>
+            <a:ext cx="2825496" cy="1097280"/>
           </a:xfrm>
           <a:prstGeom prst="rect">
             <a:avLst/>
@@ -14313,7 +15489,7 @@
               <a:buNone/>
             </a:pPr>
             <a:r>
-              <a:rPr lang="en-US" sz="1250" dirty="0">
+              <a:rPr lang="en-US" sz="1550" dirty="0">
                 <a:solidFill>
                   <a:srgbClr val="17364A"/>
                 </a:solidFill>
@@ -14323,7 +15499,7 @@
               </a:rPr>
               <a:t>Connect the concept to public health decisions, safeguards, documentation, or implementation work.</a:t>
             </a:r>
-            <a:endParaRPr lang="en-US" sz="1250" dirty="0"/>
+            <a:endParaRPr lang="en-US" sz="1550" dirty="0"/>
           </a:p>
         </p:txBody>
       </p:sp>
@@ -14520,7 +15696,7 @@
                 <a:ea typeface="Aptos" pitchFamily="34" charset="-122"/>
                 <a:cs typeface="Aptos" pitchFamily="34" charset="-120"/>
               </a:rPr>
-              <a:t>© Paula Soper</a:t>
+              <a:t>Â© Paula Soper</a:t>
             </a:r>
             <a:endParaRPr lang="en-US" sz="800" dirty="0"/>
           </a:p>
@@ -14528,7 +15704,46 @@
       </p:sp>
       <p:sp>
         <p:nvSpPr>
-          <p:cNvPr id="7" name="Shape 5"/>
+          <p:cNvPr id="7" name="Text 5"/>
+          <p:cNvSpPr/>
+          <p:nvPr/>
+        </p:nvSpPr>
+        <p:spPr>
+          <a:xfrm>
+            <a:off x="11137392" y="6510528"/>
+            <a:ext cx="411480" cy="201168"/>
+          </a:xfrm>
+          <a:prstGeom prst="rect">
+            <a:avLst/>
+          </a:prstGeom>
+          <a:noFill/>
+          <a:ln/>
+        </p:spPr>
+        <p:txBody>
+          <a:bodyPr wrap="square" lIns="0" tIns="0" rIns="0" bIns="0" rtlCol="0" anchor="ctr"/>
+          <a:lstStyle/>
+          <a:p>
+            <a:pPr algn="r" indent="0" marL="0">
+              <a:buNone/>
+            </a:pPr>
+            <a:r>
+              <a:rPr lang="en-US" sz="900" dirty="0">
+                <a:solidFill>
+                  <a:srgbClr val="5F7181"/>
+                </a:solidFill>
+                <a:latin typeface="Aptos" pitchFamily="34" charset="0"/>
+                <a:ea typeface="Aptos" pitchFamily="34" charset="-122"/>
+                <a:cs typeface="Aptos" pitchFamily="34" charset="-120"/>
+              </a:rPr>
+              <a:t>9</a:t>
+            </a:r>
+            <a:endParaRPr lang="en-US" sz="900" dirty="0"/>
+          </a:p>
+        </p:txBody>
+      </p:sp>
+      <p:sp>
+        <p:nvSpPr>
+          <p:cNvPr id="8" name="Shape 6"/>
           <p:cNvSpPr/>
           <p:nvPr/>
         </p:nvSpPr>
@@ -14553,7 +15768,7 @@
       </p:sp>
       <p:sp>
         <p:nvSpPr>
-          <p:cNvPr id="8" name="Text 6"/>
+          <p:cNvPr id="9" name="Text 7"/>
           <p:cNvSpPr/>
           <p:nvPr/>
         </p:nvSpPr>
@@ -14592,14 +15807,14 @@
       </p:sp>
       <p:sp>
         <p:nvSpPr>
-          <p:cNvPr id="9" name="Text 7"/>
+          <p:cNvPr id="10" name="Text 8"/>
           <p:cNvSpPr/>
           <p:nvPr/>
         </p:nvSpPr>
         <p:spPr>
           <a:xfrm>
             <a:off x="640080" y="621792"/>
-            <a:ext cx="10881360" cy="566928"/>
+            <a:ext cx="10881360" cy="713232"/>
           </a:xfrm>
           <a:prstGeom prst="rect">
             <a:avLst/>
@@ -14617,7 +15832,7 @@
               <a:buNone/>
             </a:pPr>
             <a:r>
-              <a:rPr lang="en-US" sz="2700" b="1" dirty="0">
+              <a:rPr lang="en-US" sz="3400" b="1" dirty="0">
                 <a:solidFill>
                   <a:srgbClr val="003A63"/>
                 </a:solidFill>
@@ -14627,20 +15842,20 @@
               </a:rPr>
               <a:t>Public Health Example</a:t>
             </a:r>
-            <a:endParaRPr lang="en-US" sz="2700" dirty="0"/>
-          </a:p>
-        </p:txBody>
-      </p:sp>
-      <p:sp>
-        <p:nvSpPr>
-          <p:cNvPr id="10" name="Text 8"/>
-          <p:cNvSpPr/>
-          <p:nvPr/>
-        </p:nvSpPr>
-        <p:spPr>
-          <a:xfrm>
-            <a:off x="868680" y="1417320"/>
-            <a:ext cx="6675120" cy="4434840"/>
+            <a:endParaRPr lang="en-US" sz="3400" dirty="0"/>
+          </a:p>
+        </p:txBody>
+      </p:sp>
+      <p:sp>
+        <p:nvSpPr>
+          <p:cNvPr id="11" name="Text 9"/>
+          <p:cNvSpPr/>
+          <p:nvPr/>
+        </p:nvSpPr>
+        <p:spPr>
+          <a:xfrm>
+            <a:off x="868680" y="1508760"/>
+            <a:ext cx="6537960" cy="4160520"/>
           </a:xfrm>
           <a:prstGeom prst="rect">
             <a:avLst/>
@@ -14655,7 +15870,7 @@
           <a:lstStyle/>
           <a:p>
             <a:r>
-              <a:rPr lang="en-US" sz="1700" dirty="0">
+              <a:rPr lang="en-US" sz="2100" dirty="0">
                 <a:solidFill>
                   <a:srgbClr val="17364A"/>
                 </a:solidFill>
@@ -14663,13 +15878,13 @@
                 <a:ea typeface="Aptos" pitchFamily="34" charset="-122"/>
                 <a:cs typeface="Aptos" pitchFamily="34" charset="-120"/>
               </a:rPr>
-              <a:t>A public health agency may test a model that identifies incoming case reports likely to require expedited review.</a:t>
-            </a:r>
-            <a:endParaRPr lang="en-US" sz="1700" dirty="0"/>
-          </a:p>
-          <a:p>
-            <a:r>
-              <a:rPr lang="en-US" sz="1700" dirty="0">
+              <a:t>A public health agency may test a model that identifies incoming case reports likely to require.</a:t>
+            </a:r>
+            <a:endParaRPr lang="en-US" sz="2100" dirty="0"/>
+          </a:p>
+          <a:p>
+            <a:r>
+              <a:rPr lang="en-US" sz="2100" dirty="0">
                 <a:solidFill>
                   <a:srgbClr val="17364A"/>
                 </a:solidFill>
@@ -14679,11 +15894,11 @@
               </a:rPr>
               <a:t>Overall accuracy may be high, but that number alone is not enough.</a:t>
             </a:r>
-            <a:endParaRPr lang="en-US" sz="1700" dirty="0"/>
-          </a:p>
-          <a:p>
-            <a:r>
-              <a:rPr lang="en-US" sz="1700" dirty="0">
+            <a:endParaRPr lang="en-US" sz="2100" dirty="0"/>
+          </a:p>
+          <a:p>
+            <a:r>
+              <a:rPr lang="en-US" sz="2100" dirty="0">
                 <a:solidFill>
                   <a:srgbClr val="17364A"/>
                 </a:solidFill>
@@ -14691,29 +15906,15 @@
                 <a:ea typeface="Aptos" pitchFamily="34" charset="-122"/>
                 <a:cs typeface="Aptos" pitchFamily="34" charset="-120"/>
               </a:rPr>
-              <a:t>Staff need to know whether the model misses rare but severe conditions, whether it performs differently across facilities,.</a:t>
-            </a:r>
-            <a:endParaRPr lang="en-US" sz="1700" dirty="0"/>
-          </a:p>
-          <a:p>
-            <a:r>
-              <a:rPr lang="en-US" sz="1700" dirty="0">
-                <a:solidFill>
-                  <a:srgbClr val="17364A"/>
-                </a:solidFill>
-                <a:latin typeface="Aptos" pitchFamily="34" charset="0"/>
-                <a:ea typeface="Aptos" pitchFamily="34" charset="-122"/>
-                <a:cs typeface="Aptos" pitchFamily="34" charset="-120"/>
-              </a:rPr>
-              <a:t>The agency should validate the model on recent local data, review errors with epidemiologists, test the workflow with.</a:t>
-            </a:r>
-            <a:endParaRPr lang="en-US" sz="1700" dirty="0"/>
-          </a:p>
-        </p:txBody>
-      </p:sp>
-      <p:sp>
-        <p:nvSpPr>
-          <p:cNvPr id="11" name="Shape 9"/>
+              <a:t>Staff need to know whether the model misses rare but severe conditions, whether it performs differently.</a:t>
+            </a:r>
+            <a:endParaRPr lang="en-US" sz="2100" dirty="0"/>
+          </a:p>
+        </p:txBody>
+      </p:sp>
+      <p:sp>
+        <p:nvSpPr>
+          <p:cNvPr id="12" name="Shape 10"/>
           <p:cNvSpPr/>
           <p:nvPr/>
         </p:nvSpPr>
@@ -14740,14 +15941,14 @@
       </p:sp>
       <p:sp>
         <p:nvSpPr>
-          <p:cNvPr id="12" name="Text 10"/>
+          <p:cNvPr id="13" name="Text 11"/>
           <p:cNvSpPr/>
           <p:nvPr/>
         </p:nvSpPr>
         <p:spPr>
           <a:xfrm>
             <a:off x="8074152" y="1563624"/>
-            <a:ext cx="2825496" cy="201168"/>
+            <a:ext cx="2825496" cy="256032"/>
           </a:xfrm>
           <a:prstGeom prst="rect">
             <a:avLst/>
@@ -14763,7 +15964,7 @@
               <a:buNone/>
             </a:pPr>
             <a:r>
-              <a:rPr lang="en-US" sz="950" b="1" dirty="0">
+              <a:rPr lang="en-US" sz="1300" b="1" dirty="0">
                 <a:solidFill>
                   <a:srgbClr val="0068B7"/>
                 </a:solidFill>
@@ -14773,20 +15974,20 @@
               </a:rPr>
               <a:t>Key idea</a:t>
             </a:r>
-            <a:endParaRPr lang="en-US" sz="950" dirty="0"/>
-          </a:p>
-        </p:txBody>
-      </p:sp>
-      <p:sp>
-        <p:nvSpPr>
-          <p:cNvPr id="13" name="Text 11"/>
-          <p:cNvSpPr/>
-          <p:nvPr/>
-        </p:nvSpPr>
-        <p:spPr>
-          <a:xfrm>
-            <a:off x="8074152" y="1856232"/>
-            <a:ext cx="2825496" cy="1261872"/>
+            <a:endParaRPr lang="en-US" sz="1300" dirty="0"/>
+          </a:p>
+        </p:txBody>
+      </p:sp>
+      <p:sp>
+        <p:nvSpPr>
+          <p:cNvPr id="14" name="Text 12"/>
+          <p:cNvSpPr/>
+          <p:nvPr/>
+        </p:nvSpPr>
+        <p:spPr>
+          <a:xfrm>
+            <a:off x="8074152" y="1920240"/>
+            <a:ext cx="2825496" cy="1188720"/>
           </a:xfrm>
           <a:prstGeom prst="rect">
             <a:avLst/>
@@ -14804,7 +16005,7 @@
               <a:buNone/>
             </a:pPr>
             <a:r>
-              <a:rPr lang="en-US" sz="1250" dirty="0">
+              <a:rPr lang="en-US" sz="1550" dirty="0">
                 <a:solidFill>
                   <a:srgbClr val="17364A"/>
                 </a:solidFill>
@@ -14812,15 +16013,15 @@
                 <a:ea typeface="Aptos" pitchFamily="34" charset="-122"/>
                 <a:cs typeface="Aptos" pitchFamily="34" charset="-120"/>
               </a:rPr>
-              <a:t>A public health agency may test a model that identifies incoming case reports likely to require expedited review.</a:t>
-            </a:r>
-            <a:endParaRPr lang="en-US" sz="1250" dirty="0"/>
-          </a:p>
-        </p:txBody>
-      </p:sp>
-      <p:sp>
-        <p:nvSpPr>
-          <p:cNvPr id="14" name="Shape 12"/>
+              <a:t>A public health agency may test a model that identifies incoming case reports likely to require.</a:t>
+            </a:r>
+            <a:endParaRPr lang="en-US" sz="1550" dirty="0"/>
+          </a:p>
+        </p:txBody>
+      </p:sp>
+      <p:sp>
+        <p:nvSpPr>
+          <p:cNvPr id="15" name="Shape 13"/>
           <p:cNvSpPr/>
           <p:nvPr/>
         </p:nvSpPr>
@@ -14847,14 +16048,14 @@
       </p:sp>
       <p:sp>
         <p:nvSpPr>
-          <p:cNvPr id="15" name="Text 13"/>
+          <p:cNvPr id="16" name="Text 14"/>
           <p:cNvSpPr/>
           <p:nvPr/>
         </p:nvSpPr>
         <p:spPr>
           <a:xfrm>
             <a:off x="8074152" y="3666744"/>
-            <a:ext cx="2825496" cy="201168"/>
+            <a:ext cx="2825496" cy="256032"/>
           </a:xfrm>
           <a:prstGeom prst="rect">
             <a:avLst/>
@@ -14870,7 +16071,7 @@
               <a:buNone/>
             </a:pPr>
             <a:r>
-              <a:rPr lang="en-US" sz="950" b="1" dirty="0">
+              <a:rPr lang="en-US" sz="1300" b="1" dirty="0">
                 <a:solidFill>
                   <a:srgbClr val="0068B7"/>
                 </a:solidFill>
@@ -14880,20 +16081,20 @@
               </a:rPr>
               <a:t>Use this for</a:t>
             </a:r>
-            <a:endParaRPr lang="en-US" sz="950" dirty="0"/>
-          </a:p>
-        </p:txBody>
-      </p:sp>
-      <p:sp>
-        <p:nvSpPr>
-          <p:cNvPr id="16" name="Text 14"/>
-          <p:cNvSpPr/>
-          <p:nvPr/>
-        </p:nvSpPr>
-        <p:spPr>
-          <a:xfrm>
-            <a:off x="8074152" y="3959352"/>
-            <a:ext cx="2825496" cy="1170432"/>
+            <a:endParaRPr lang="en-US" sz="1300" dirty="0"/>
+          </a:p>
+        </p:txBody>
+      </p:sp>
+      <p:sp>
+        <p:nvSpPr>
+          <p:cNvPr id="17" name="Text 15"/>
+          <p:cNvSpPr/>
+          <p:nvPr/>
+        </p:nvSpPr>
+        <p:spPr>
+          <a:xfrm>
+            <a:off x="8074152" y="4023360"/>
+            <a:ext cx="2825496" cy="1097280"/>
           </a:xfrm>
           <a:prstGeom prst="rect">
             <a:avLst/>
@@ -14911,7 +16112,7 @@
               <a:buNone/>
             </a:pPr>
             <a:r>
-              <a:rPr lang="en-US" sz="1250" dirty="0">
+              <a:rPr lang="en-US" sz="1550" dirty="0">
                 <a:solidFill>
                   <a:srgbClr val="17364A"/>
                 </a:solidFill>
@@ -14921,7 +16122,7 @@
               </a:rPr>
               <a:t>Connect the concept to public health decisions, safeguards, documentation, or implementation work.</a:t>
             </a:r>
-            <a:endParaRPr lang="en-US" sz="1250" dirty="0"/>
+            <a:endParaRPr lang="en-US" sz="1550" dirty="0"/>
           </a:p>
         </p:txBody>
       </p:sp>
